--- a/apps/keydate/pitch/KeyDate-JCI-Edmonton.pptx
+++ b/apps/keydate/pitch/KeyDate-JCI-Edmonton.pptx
@@ -511,7 +511,9 @@
           <a:p>
             <a:r>
               <a:rPr lang="en-US" dirty="0"/>
-              <a:t>Ask someone in their twenties when they'll own a home. They won't give you a year — they'll give you a feeling.</a:t>
+              <a:t>OPEN COLD. Do not read the slide.
+"Ask someone in their twenties when they'll own a home. They won't give you a year. They'll give you a feeling — probably never."
+Pause. Then move to slide 2.</a:t>
             </a:r>
             <a:endParaRPr lang="en-US" dirty="0"/>
           </a:p>
@@ -599,7 +601,9 @@
           <a:p>
             <a:r>
               <a:rPr lang="en-US" dirty="0"/>
-              <a:t>Memorise these three lines. Never read the close.</a:t>
+              <a:t>MEMORISE THIS. Never read the close.
+"Owning a home isn't impossible. It just doesn't have a date yet. We're giving it one."
+Then stop talking.</a:t>
             </a:r>
             <a:endParaRPr lang="en-US" dirty="0"/>
           </a:p>
@@ -687,7 +691,12 @@
           <a:p>
             <a:r>
               <a:rPr lang="en-US" dirty="0"/>
-              <a:t>SWAP IN YOUR REAL DETAIL HERE — the specific month, the specific spreadsheet, the specific person who gave you bad advice. Name one concrete thing. Specifics are what make a room lean in; generalities are what make them check the time.</a:t>
+              <a:t>THIS IS THE SLIDE THAT NEEDS YOUR REAL DETAIL. Pick ONE and tell it properly:
+· the month you nearly gave up
+· the person who gave you advice that turned out to be wrong
+· the number you were short by
+Talking points: rebuilt the spreadsheet every month · every source said something different · the target moved every time you looked at it.
+One concrete detail beats three general ones.</a:t>
             </a:r>
             <a:endParaRPr lang="en-US" dirty="0"/>
           </a:p>
@@ -775,7 +784,8 @@
           <a:p>
             <a:r>
               <a:rPr lang="en-US" dirty="0"/>
-              <a:t>Slow down. These are the three questions you genuinely could not answer. Say them like you are still annoyed about it.</a:t>
+              <a:t>Say these like you are still annoyed about it. They were YOUR questions.
+Talking point to land after: "Every tool I found answered a different question than the one I was actually asking."</a:t>
             </a:r>
             <a:endParaRPr lang="en-US" dirty="0"/>
           </a:p>
@@ -863,7 +873,9 @@
           <a:p>
             <a:r>
               <a:rPr lang="en-US" dirty="0"/>
-              <a:t>One number beat, then straight back to the story. Do not linger — the numbers are evidence for the feeling, not the point.</a:t>
+              <a:t>Do not linger — this is evidence for a feeling, not the argument.
+Talking points: "If it was that hard for me, what is it for someone starting now?" · "Most of you in this room bought somewhere inside that gap too."
+If challenged: 2006 is CREA's own figure for a record year. No income number is quoted on purpose — the series isn't cleanly comparable that far back.</a:t>
             </a:r>
             <a:endParaRPr lang="en-US" dirty="0"/>
           </a:p>
@@ -951,7 +963,8 @@
           <a:p>
             <a:r>
               <a:rPr lang="en-US" dirty="0"/>
-              <a:t>Hold up the phone here. Have your own plan already on screen — never type live, never rely on venue wifi.</a:t>
+              <a:t>HOLD UP THE PHONE HERE. Have your own plan already on screen — never type live, never rely on venue wifi.
+Talking points: income, savings, monthly · built on the real Canadian rules — FHSA, Home Buyers' Plan, the stress test · every dollar saved builds the house on screen.</a:t>
             </a:r>
             <a:endParaRPr lang="en-US" dirty="0"/>
           </a:p>
@@ -1039,7 +1052,9 @@
           <a:p>
             <a:r>
               <a:rPr lang="en-US" dirty="0"/>
-              <a:t>"I can't make the house cheaper" pre-empts the sharpest question in the room and buys credibility for everything after. Never cut it.</a:t>
+              <a:t>KEY LINE — do not cut for time: "I can't make the house cheaper. I can give people the answer I never got."
+It pre-empts the sharpest question in the room and buys credibility for everything after it.
+Talking point: today the answer is no, so people close the tab and stop saving entirely.</a:t>
             </a:r>
             <a:endParaRPr lang="en-US" dirty="0"/>
           </a:p>
@@ -1127,7 +1142,9 @@
           <a:p>
             <a:r>
               <a:rPr lang="en-US" dirty="0"/>
-              <a:t>Slow down on "The rulebook does." This is one of your two biggest scoring lines — international impact is written into the 35-point criterion.</a:t>
+              <a:t>BIGGEST SCORING SLIDE — impact is 35 of 115 points, and "international" is written into it.
+Talking points: when people can't see a path they stop building wealth at all — renters instead of owners, wealth that never compounds · every one of these countries has the same two problems: a generation priced out, and government programs nobody understands · KeyDate is a rules engine with a Canadian rulebook loaded.
+Slow down on "The rulebook swaps."</a:t>
             </a:r>
             <a:endParaRPr lang="en-US" dirty="0"/>
           </a:p>
@@ -1215,7 +1232,9 @@
           <a:p>
             <a:r>
               <a:rPr lang="en-US" dirty="0"/>
-              <a:t>Second big scoring line. Land "never say that sentence" slowly — this covers both community impact and ethical sustainability, worth 20 points.</a:t>
+              <a:t>SECOND BIGGEST SCORING SLIDE — community + sustainability is 20 points.
+Talking points: the obvious way to monetise this is selling users to mortgage brokers — people who just told you their income, their savings, and exactly when they'll need a mortgage · most valuable lead list in the country · our privacy policy says we never will, in writing, live today · the moment I'm paid to push you toward a house I stop being able to tell you the truth.
+Land the last line slowly.</a:t>
             </a:r>
             <a:endParaRPr lang="en-US" dirty="0"/>
           </a:p>
@@ -1303,7 +1322,8 @@
           <a:p>
             <a:r>
               <a:rPr lang="en-US" dirty="0"/>
-              <a:t>Leadership is 15 points and you are solo — so lead with evidence of execution, not claims about character.</a:t>
+              <a:t>Leadership is 15 points and you are solo — lead with evidence, not adjectives.
+Talking points: live at keydate.ca right now · incorporated · privacy policy, terms and content moderation done before the first user — because I'd rather be trusted than fast · I built and shipped it myself.</a:t>
             </a:r>
             <a:endParaRPr lang="en-US" dirty="0"/>
           </a:p>
@@ -1684,7 +1704,7 @@
         </p:nvSpPr>
         <p:spPr>
           <a:xfrm>
-            <a:off x="685800" y="1481328"/>
+            <a:off x="685800" y="1554480"/>
             <a:ext cx="576072" cy="576072"/>
           </a:xfrm>
           <a:prstGeom prst="ellipse">
@@ -1711,7 +1731,7 @@
         </p:nvSpPr>
         <p:spPr>
           <a:xfrm>
-            <a:off x="1207008" y="1714500"/>
+            <a:off x="1207008" y="1787652"/>
             <a:ext cx="630936" cy="102870"/>
           </a:xfrm>
           <a:prstGeom prst="rect">
@@ -1736,7 +1756,7 @@
         </p:nvSpPr>
         <p:spPr>
           <a:xfrm>
-            <a:off x="1591056" y="1714500"/>
+            <a:off x="1591056" y="1787652"/>
             <a:ext cx="102870" cy="274320"/>
           </a:xfrm>
           <a:prstGeom prst="rect">
@@ -1761,8 +1781,8 @@
         </p:nvSpPr>
         <p:spPr>
           <a:xfrm>
-            <a:off x="685800" y="2148840"/>
-            <a:ext cx="8229600" cy="914400"/>
+            <a:off x="685800" y="2240280"/>
+            <a:ext cx="8229600" cy="1005840"/>
           </a:xfrm>
           <a:prstGeom prst="rect">
             <a:avLst/>
@@ -1778,7 +1798,7 @@
               <a:buNone/>
             </a:pPr>
             <a:r>
-              <a:rPr lang="en-US" sz="6000" b="1" dirty="0">
+              <a:rPr lang="en-US" sz="6600" b="1" dirty="0">
                 <a:solidFill>
                   <a:srgbClr val="FFFFFF"/>
                 </a:solidFill>
@@ -1792,7 +1812,7 @@
               <a:buNone/>
             </a:pPr>
             <a:r>
-              <a:rPr lang="en-US" sz="6000" b="1" dirty="0">
+              <a:rPr lang="en-US" sz="6600" b="1" dirty="0">
                 <a:solidFill>
                   <a:srgbClr val="3FA672"/>
                 </a:solidFill>
@@ -1802,7 +1822,7 @@
               </a:rPr>
               <a:t>Date</a:t>
             </a:r>
-            <a:endParaRPr lang="en-US" sz="6000" dirty="0"/>
+            <a:endParaRPr lang="en-US" sz="6600" dirty="0"/>
           </a:p>
         </p:txBody>
       </p:sp>
@@ -1814,8 +1834,8 @@
         </p:nvSpPr>
         <p:spPr>
           <a:xfrm>
-            <a:off x="685800" y="3127248"/>
-            <a:ext cx="8412480" cy="1371600"/>
+            <a:off x="685800" y="3337560"/>
+            <a:ext cx="9144000" cy="1463040"/>
           </a:xfrm>
           <a:prstGeom prst="rect">
             <a:avLst/>
@@ -1829,12 +1849,12 @@
           <a:p>
             <a:pPr indent="0" marL="0">
               <a:lnSpc>
-                <a:spcPts val="3800"/>
+                <a:spcPts val="4200"/>
               </a:lnSpc>
               <a:buNone/>
             </a:pPr>
             <a:r>
-              <a:rPr lang="en-US" sz="3000" dirty="0">
+              <a:rPr lang="en-US" sz="3200" dirty="0">
                 <a:solidFill>
                   <a:srgbClr val="E3F2E9"/>
                 </a:solidFill>
@@ -1844,17 +1864,17 @@
               </a:rPr>
               <a:t>Owning a home isn’t impossible.</a:t>
             </a:r>
-            <a:endParaRPr lang="en-US" sz="3000" dirty="0"/>
+            <a:endParaRPr lang="en-US" sz="3200" dirty="0"/>
           </a:p>
           <a:p>
             <a:pPr indent="0" marL="0">
               <a:lnSpc>
-                <a:spcPts val="3800"/>
+                <a:spcPts val="4200"/>
               </a:lnSpc>
               <a:buNone/>
             </a:pPr>
             <a:r>
-              <a:rPr lang="en-US" sz="3000" dirty="0">
+              <a:rPr lang="en-US" sz="3200" dirty="0">
                 <a:solidFill>
                   <a:srgbClr val="E3F2E9"/>
                 </a:solidFill>
@@ -1864,7 +1884,7 @@
               </a:rPr>
               <a:t>It has a date.</a:t>
             </a:r>
-            <a:endParaRPr lang="en-US" sz="3000" dirty="0"/>
+            <a:endParaRPr lang="en-US" sz="3200" dirty="0"/>
           </a:p>
         </p:txBody>
       </p:sp>
@@ -1876,7 +1896,7 @@
         </p:nvSpPr>
         <p:spPr>
           <a:xfrm>
-            <a:off x="685800" y="5715000"/>
+            <a:off x="685800" y="5760720"/>
             <a:ext cx="7315200" cy="320040"/>
           </a:xfrm>
           <a:prstGeom prst="rect">
@@ -1915,7 +1935,7 @@
         </p:nvSpPr>
         <p:spPr>
           <a:xfrm>
-            <a:off x="8759952" y="5715000"/>
+            <a:off x="8759952" y="5760720"/>
             <a:ext cx="2743200" cy="320040"/>
           </a:xfrm>
           <a:prstGeom prst="rect">
@@ -1932,9 +1952,9 @@
               <a:buNone/>
             </a:pPr>
             <a:r>
-              <a:rPr lang="en-US" sz="1400" dirty="0">
-                <a:solidFill>
-                  <a:srgbClr val="E3F2E9"/>
+              <a:rPr lang="en-US" sz="1400" b="1" dirty="0">
+                <a:solidFill>
+                  <a:srgbClr val="E8B84B"/>
                 </a:solidFill>
                 <a:latin typeface="Calibri" pitchFamily="34" charset="0"/>
                 <a:ea typeface="Calibri" pitchFamily="34" charset="-122"/>
@@ -1986,7 +2006,7 @@
         </p:nvSpPr>
         <p:spPr>
           <a:xfrm>
-            <a:off x="685800" y="1371600"/>
+            <a:off x="685800" y="1463040"/>
             <a:ext cx="576072" cy="576072"/>
           </a:xfrm>
           <a:prstGeom prst="ellipse">
@@ -2013,7 +2033,7 @@
         </p:nvSpPr>
         <p:spPr>
           <a:xfrm>
-            <a:off x="1207008" y="1604772"/>
+            <a:off x="1207008" y="1696212"/>
             <a:ext cx="630936" cy="102870"/>
           </a:xfrm>
           <a:prstGeom prst="rect">
@@ -2038,7 +2058,7 @@
         </p:nvSpPr>
         <p:spPr>
           <a:xfrm>
-            <a:off x="1591056" y="1604772"/>
+            <a:off x="1591056" y="1696212"/>
             <a:ext cx="102870" cy="274320"/>
           </a:xfrm>
           <a:prstGeom prst="rect">
@@ -2063,8 +2083,8 @@
         </p:nvSpPr>
         <p:spPr>
           <a:xfrm>
-            <a:off x="685800" y="2331720"/>
-            <a:ext cx="10607040" cy="731520"/>
+            <a:off x="685800" y="2377440"/>
+            <a:ext cx="10607040" cy="1645920"/>
           </a:xfrm>
           <a:prstGeom prst="rect">
             <a:avLst/>
@@ -2077,10 +2097,13 @@
           <a:lstStyle/>
           <a:p>
             <a:pPr indent="0" marL="0">
-              <a:buNone/>
-            </a:pPr>
-            <a:r>
-              <a:rPr lang="en-US" sz="3800" dirty="0">
+              <a:lnSpc>
+                <a:spcPts val="5400"/>
+              </a:lnSpc>
+              <a:buNone/>
+            </a:pPr>
+            <a:r>
+              <a:rPr lang="en-US" sz="4000" dirty="0">
                 <a:solidFill>
                   <a:srgbClr val="E3F2E9"/>
                 </a:solidFill>
@@ -2088,38 +2111,19 @@
                 <a:ea typeface="Cambria" pitchFamily="34" charset="-122"/>
                 <a:cs typeface="Cambria" pitchFamily="34" charset="-120"/>
               </a:rPr>
-              <a:t>Owning a home isn’t impossible.</a:t>
-            </a:r>
-            <a:endParaRPr lang="en-US" sz="3800" dirty="0"/>
-          </a:p>
-        </p:txBody>
-      </p:sp>
-      <p:sp>
-        <p:nvSpPr>
-          <p:cNvPr id="6" name="Text 4"/>
-          <p:cNvSpPr/>
-          <p:nvPr/>
-        </p:nvSpPr>
-        <p:spPr>
-          <a:xfrm>
-            <a:off x="685800" y="3063240"/>
-            <a:ext cx="10607040" cy="731520"/>
-          </a:xfrm>
-          <a:prstGeom prst="rect">
-            <a:avLst/>
-          </a:prstGeom>
-          <a:noFill/>
-          <a:ln/>
-        </p:spPr>
-        <p:txBody>
-          <a:bodyPr wrap="square" lIns="0" tIns="0" rIns="0" bIns="0" rtlCol="0" anchor="ctr"/>
-          <a:lstStyle/>
+              <a:t>It just doesn’t have</a:t>
+            </a:r>
+            <a:endParaRPr lang="en-US" sz="4000" dirty="0"/>
+          </a:p>
           <a:p>
             <a:pPr indent="0" marL="0">
-              <a:buNone/>
-            </a:pPr>
-            <a:r>
-              <a:rPr lang="en-US" sz="3800" dirty="0">
+              <a:lnSpc>
+                <a:spcPts val="5400"/>
+              </a:lnSpc>
+              <a:buNone/>
+            </a:pPr>
+            <a:r>
+              <a:rPr lang="en-US" sz="4000" dirty="0">
                 <a:solidFill>
                   <a:srgbClr val="E3F2E9"/>
                 </a:solidFill>
@@ -2127,22 +2131,22 @@
                 <a:ea typeface="Cambria" pitchFamily="34" charset="-122"/>
                 <a:cs typeface="Cambria" pitchFamily="34" charset="-120"/>
               </a:rPr>
-              <a:t>It just doesn’t have a date yet.</a:t>
-            </a:r>
-            <a:endParaRPr lang="en-US" sz="3800" dirty="0"/>
-          </a:p>
-        </p:txBody>
-      </p:sp>
-      <p:sp>
-        <p:nvSpPr>
-          <p:cNvPr id="7" name="Text 5"/>
-          <p:cNvSpPr/>
-          <p:nvPr/>
-        </p:nvSpPr>
-        <p:spPr>
-          <a:xfrm>
-            <a:off x="685800" y="3931920"/>
-            <a:ext cx="10607040" cy="914400"/>
+              <a:t>a date yet.</a:t>
+            </a:r>
+            <a:endParaRPr lang="en-US" sz="4000" dirty="0"/>
+          </a:p>
+        </p:txBody>
+      </p:sp>
+      <p:sp>
+        <p:nvSpPr>
+          <p:cNvPr id="6" name="Text 4"/>
+          <p:cNvSpPr/>
+          <p:nvPr/>
+        </p:nvSpPr>
+        <p:spPr>
+          <a:xfrm>
+            <a:off x="685800" y="4206240"/>
+            <a:ext cx="10607040" cy="1005840"/>
           </a:xfrm>
           <a:prstGeom prst="rect">
             <a:avLst/>
@@ -2158,7 +2162,7 @@
               <a:buNone/>
             </a:pPr>
             <a:r>
-              <a:rPr lang="en-US" sz="5000" b="1" dirty="0">
+              <a:rPr lang="en-US" sz="5400" b="1" dirty="0">
                 <a:solidFill>
                   <a:srgbClr val="E8B84B"/>
                 </a:solidFill>
@@ -2168,19 +2172,19 @@
               </a:rPr>
               <a:t>We’re giving it one.</a:t>
             </a:r>
-            <a:endParaRPr lang="en-US" sz="5000" dirty="0"/>
-          </a:p>
-        </p:txBody>
-      </p:sp>
-      <p:sp>
-        <p:nvSpPr>
-          <p:cNvPr id="8" name="Text 6"/>
-          <p:cNvSpPr/>
-          <p:nvPr/>
-        </p:nvSpPr>
-        <p:spPr>
-          <a:xfrm>
-            <a:off x="685800" y="5669280"/>
+            <a:endParaRPr lang="en-US" sz="5400" dirty="0"/>
+          </a:p>
+        </p:txBody>
+      </p:sp>
+      <p:sp>
+        <p:nvSpPr>
+          <p:cNvPr id="7" name="Text 5"/>
+          <p:cNvSpPr/>
+          <p:nvPr/>
+        </p:nvSpPr>
+        <p:spPr>
+          <a:xfrm>
+            <a:off x="685800" y="5760720"/>
             <a:ext cx="5486400" cy="365760"/>
           </a:xfrm>
           <a:prstGeom prst="rect">
@@ -2213,13 +2217,13 @@
       </p:sp>
       <p:sp>
         <p:nvSpPr>
-          <p:cNvPr id="9" name="Text 7"/>
-          <p:cNvSpPr/>
-          <p:nvPr/>
-        </p:nvSpPr>
-        <p:spPr>
-          <a:xfrm>
-            <a:off x="6931152" y="5669280"/>
+          <p:cNvPr id="8" name="Text 6"/>
+          <p:cNvSpPr/>
+          <p:nvPr/>
+        </p:nvSpPr>
+        <p:spPr>
+          <a:xfrm>
+            <a:off x="6931152" y="5760720"/>
             <a:ext cx="4572000" cy="365760"/>
           </a:xfrm>
           <a:prstGeom prst="rect">
@@ -2290,8 +2294,8 @@
         </p:nvSpPr>
         <p:spPr>
           <a:xfrm>
-            <a:off x="685800" y="475488"/>
-            <a:ext cx="7315200" cy="274320"/>
+            <a:off x="685800" y="502920"/>
+            <a:ext cx="9144000" cy="274320"/>
           </a:xfrm>
           <a:prstGeom prst="rect">
             <a:avLst/>
@@ -2329,8 +2333,8 @@
         </p:nvSpPr>
         <p:spPr>
           <a:xfrm>
-            <a:off x="685800" y="1417320"/>
-            <a:ext cx="10607040" cy="914400"/>
+            <a:off x="685800" y="1691640"/>
+            <a:ext cx="10607040" cy="1005840"/>
           </a:xfrm>
           <a:prstGeom prst="rect">
             <a:avLst/>
@@ -2346,7 +2350,7 @@
               <a:buNone/>
             </a:pPr>
             <a:r>
-              <a:rPr lang="en-US" sz="4600" b="1" dirty="0">
+              <a:rPr lang="en-US" sz="5000" b="1" dirty="0">
                 <a:solidFill>
                   <a:srgbClr val="17302A"/>
                 </a:solidFill>
@@ -2356,7 +2360,7 @@
               </a:rPr>
               <a:t>I bought my first place.</a:t>
             </a:r>
-            <a:endParaRPr lang="en-US" sz="4600" dirty="0"/>
+            <a:endParaRPr lang="en-US" sz="5000" dirty="0"/>
           </a:p>
         </p:txBody>
       </p:sp>
@@ -2368,8 +2372,8 @@
         </p:nvSpPr>
         <p:spPr>
           <a:xfrm>
-            <a:off x="685800" y="2514600"/>
-            <a:ext cx="10607040" cy="640080"/>
+            <a:off x="685800" y="2788920"/>
+            <a:ext cx="10607040" cy="914400"/>
           </a:xfrm>
           <a:prstGeom prst="rect">
             <a:avLst/>
@@ -2385,73 +2389,34 @@
               <a:buNone/>
             </a:pPr>
             <a:r>
-              <a:rPr lang="en-US" sz="3200" dirty="0">
-                <a:solidFill>
-                  <a:srgbClr val="5C6F66"/>
+              <a:rPr lang="en-US" sz="4200" b="1" dirty="0">
+                <a:solidFill>
+                  <a:srgbClr val="1E4D3B"/>
                 </a:solidFill>
                 <a:latin typeface="Cambria" pitchFamily="34" charset="0"/>
                 <a:ea typeface="Cambria" pitchFamily="34" charset="-122"/>
                 <a:cs typeface="Cambria" pitchFamily="34" charset="-120"/>
               </a:rPr>
-              <a:t>I got there.</a:t>
-            </a:r>
-            <a:endParaRPr lang="en-US" sz="3200" dirty="0"/>
-          </a:p>
-        </p:txBody>
-      </p:sp>
-      <p:sp>
-        <p:nvSpPr>
-          <p:cNvPr id="5" name="Text 3"/>
-          <p:cNvSpPr/>
-          <p:nvPr/>
-        </p:nvSpPr>
-        <p:spPr>
-          <a:xfrm>
-            <a:off x="685800" y="3200400"/>
-            <a:ext cx="10607040" cy="822960"/>
-          </a:xfrm>
-          <a:prstGeom prst="rect">
-            <a:avLst/>
-          </a:prstGeom>
-          <a:noFill/>
-          <a:ln/>
-        </p:spPr>
-        <p:txBody>
-          <a:bodyPr wrap="square" lIns="0" tIns="0" rIns="0" bIns="0" rtlCol="0" anchor="ctr"/>
-          <a:lstStyle/>
-          <a:p>
-            <a:pPr indent="0" marL="0">
-              <a:buNone/>
-            </a:pPr>
-            <a:r>
-              <a:rPr lang="en-US" sz="3800" b="1" dirty="0">
-                <a:solidFill>
-                  <a:srgbClr val="1E4D3B"/>
-                </a:solidFill>
-                <a:latin typeface="Cambria" pitchFamily="34" charset="0"/>
-                <a:ea typeface="Cambria" pitchFamily="34" charset="-122"/>
-                <a:cs typeface="Cambria" pitchFamily="34" charset="-120"/>
-              </a:rPr>
-              <a:t>I was guessing the entire way.</a:t>
-            </a:r>
-            <a:endParaRPr lang="en-US" sz="3800" dirty="0"/>
-          </a:p>
-        </p:txBody>
-      </p:sp>
-      <p:sp>
-        <p:nvSpPr>
-          <p:cNvPr id="6" name="Shape 4"/>
-          <p:cNvSpPr/>
-          <p:nvPr/>
-        </p:nvSpPr>
-        <p:spPr>
-          <a:xfrm>
-            <a:off x="685800" y="4434840"/>
-            <a:ext cx="10607040" cy="1234440"/>
+              <a:t>I was guessing the whole way.</a:t>
+            </a:r>
+            <a:endParaRPr lang="en-US" sz="4200" dirty="0"/>
+          </a:p>
+        </p:txBody>
+      </p:sp>
+      <p:sp>
+        <p:nvSpPr>
+          <p:cNvPr id="5" name="Shape 3"/>
+          <p:cNvSpPr/>
+          <p:nvPr/>
+        </p:nvSpPr>
+        <p:spPr>
+          <a:xfrm>
+            <a:off x="685800" y="4297680"/>
+            <a:ext cx="3364992" cy="777240"/>
           </a:xfrm>
           <a:prstGeom prst="roundRect">
             <a:avLst>
-              <a:gd name="adj" fmla="val 11852"/>
+              <a:gd name="adj" fmla="val 16471"/>
             </a:avLst>
           </a:prstGeom>
           <a:solidFill>
@@ -2467,43 +2432,172 @@
       </p:sp>
       <p:sp>
         <p:nvSpPr>
-          <p:cNvPr id="7" name="Text 5"/>
-          <p:cNvSpPr/>
-          <p:nvPr/>
-        </p:nvSpPr>
-        <p:spPr>
-          <a:xfrm>
-            <a:off x="1143000" y="4434840"/>
-            <a:ext cx="9692640" cy="1234440"/>
-          </a:xfrm>
-          <a:prstGeom prst="rect">
-            <a:avLst/>
-          </a:prstGeom>
-          <a:noFill/>
-          <a:ln/>
-        </p:spPr>
-        <p:txBody>
-          <a:bodyPr wrap="square" lIns="0" tIns="0" rIns="0" bIns="0" rtlCol="0" anchor="ctr"/>
-          <a:lstStyle/>
-          <a:p>
-            <a:pPr indent="0" marL="0">
-              <a:lnSpc>
-                <a:spcPts val="2500"/>
-              </a:lnSpc>
-              <a:buNone/>
-            </a:pPr>
-            <a:r>
-              <a:rPr lang="en-US" sz="1700" dirty="0">
-                <a:solidFill>
-                  <a:srgbClr val="17302A"/>
+          <p:cNvPr id="6" name="Text 4"/>
+          <p:cNvSpPr/>
+          <p:nvPr/>
+        </p:nvSpPr>
+        <p:spPr>
+          <a:xfrm>
+            <a:off x="685800" y="4297680"/>
+            <a:ext cx="3364992" cy="777240"/>
+          </a:xfrm>
+          <a:prstGeom prst="rect">
+            <a:avLst/>
+          </a:prstGeom>
+          <a:noFill/>
+          <a:ln/>
+        </p:spPr>
+        <p:txBody>
+          <a:bodyPr wrap="square" lIns="0" tIns="0" rIns="0" bIns="0" rtlCol="0" anchor="ctr"/>
+          <a:lstStyle/>
+          <a:p>
+            <a:pPr algn="ctr" indent="0" marL="0">
+              <a:buNone/>
+            </a:pPr>
+            <a:r>
+              <a:rPr lang="en-US" sz="1600" b="1" dirty="0">
+                <a:solidFill>
+                  <a:srgbClr val="1E4D3B"/>
                 </a:solidFill>
                 <a:latin typeface="Calibri" pitchFamily="34" charset="0"/>
                 <a:ea typeface="Calibri" pitchFamily="34" charset="-122"/>
                 <a:cs typeface="Calibri" pitchFamily="34" charset="-120"/>
               </a:rPr>
-              <a:t>Spreadsheets I rebuilt every month. Advice that contradicted itself. A goal that moved every time I looked at it.</a:t>
-            </a:r>
-            <a:endParaRPr lang="en-US" sz="1700" dirty="0"/>
+              <a:t>Spreadsheets</a:t>
+            </a:r>
+            <a:endParaRPr lang="en-US" sz="1600" dirty="0"/>
+          </a:p>
+        </p:txBody>
+      </p:sp>
+      <p:sp>
+        <p:nvSpPr>
+          <p:cNvPr id="7" name="Shape 5"/>
+          <p:cNvSpPr/>
+          <p:nvPr/>
+        </p:nvSpPr>
+        <p:spPr>
+          <a:xfrm>
+            <a:off x="4306824" y="4297680"/>
+            <a:ext cx="3364992" cy="777240"/>
+          </a:xfrm>
+          <a:prstGeom prst="roundRect">
+            <a:avLst>
+              <a:gd name="adj" fmla="val 16471"/>
+            </a:avLst>
+          </a:prstGeom>
+          <a:solidFill>
+            <a:srgbClr val="E3F2E9"/>
+          </a:solidFill>
+          <a:ln w="12700">
+            <a:solidFill>
+              <a:srgbClr val="3FA672"/>
+            </a:solidFill>
+            <a:prstDash val="solid"/>
+          </a:ln>
+        </p:spPr>
+      </p:sp>
+      <p:sp>
+        <p:nvSpPr>
+          <p:cNvPr id="8" name="Text 6"/>
+          <p:cNvSpPr/>
+          <p:nvPr/>
+        </p:nvSpPr>
+        <p:spPr>
+          <a:xfrm>
+            <a:off x="4306824" y="4297680"/>
+            <a:ext cx="3364992" cy="777240"/>
+          </a:xfrm>
+          <a:prstGeom prst="rect">
+            <a:avLst/>
+          </a:prstGeom>
+          <a:noFill/>
+          <a:ln/>
+        </p:spPr>
+        <p:txBody>
+          <a:bodyPr wrap="square" lIns="0" tIns="0" rIns="0" bIns="0" rtlCol="0" anchor="ctr"/>
+          <a:lstStyle/>
+          <a:p>
+            <a:pPr algn="ctr" indent="0" marL="0">
+              <a:buNone/>
+            </a:pPr>
+            <a:r>
+              <a:rPr lang="en-US" sz="1600" b="1" dirty="0">
+                <a:solidFill>
+                  <a:srgbClr val="1E4D3B"/>
+                </a:solidFill>
+                <a:latin typeface="Calibri" pitchFamily="34" charset="0"/>
+                <a:ea typeface="Calibri" pitchFamily="34" charset="-122"/>
+                <a:cs typeface="Calibri" pitchFamily="34" charset="-120"/>
+              </a:rPr>
+              <a:t>Contradictory advice</a:t>
+            </a:r>
+            <a:endParaRPr lang="en-US" sz="1600" dirty="0"/>
+          </a:p>
+        </p:txBody>
+      </p:sp>
+      <p:sp>
+        <p:nvSpPr>
+          <p:cNvPr id="9" name="Shape 7"/>
+          <p:cNvSpPr/>
+          <p:nvPr/>
+        </p:nvSpPr>
+        <p:spPr>
+          <a:xfrm>
+            <a:off x="7927848" y="4297680"/>
+            <a:ext cx="3364992" cy="777240"/>
+          </a:xfrm>
+          <a:prstGeom prst="roundRect">
+            <a:avLst>
+              <a:gd name="adj" fmla="val 16471"/>
+            </a:avLst>
+          </a:prstGeom>
+          <a:solidFill>
+            <a:srgbClr val="E3F2E9"/>
+          </a:solidFill>
+          <a:ln w="12700">
+            <a:solidFill>
+              <a:srgbClr val="3FA672"/>
+            </a:solidFill>
+            <a:prstDash val="solid"/>
+          </a:ln>
+        </p:spPr>
+      </p:sp>
+      <p:sp>
+        <p:nvSpPr>
+          <p:cNvPr id="10" name="Text 8"/>
+          <p:cNvSpPr/>
+          <p:nvPr/>
+        </p:nvSpPr>
+        <p:spPr>
+          <a:xfrm>
+            <a:off x="7927848" y="4297680"/>
+            <a:ext cx="3364992" cy="777240"/>
+          </a:xfrm>
+          <a:prstGeom prst="rect">
+            <a:avLst/>
+          </a:prstGeom>
+          <a:noFill/>
+          <a:ln/>
+        </p:spPr>
+        <p:txBody>
+          <a:bodyPr wrap="square" lIns="0" tIns="0" rIns="0" bIns="0" rtlCol="0" anchor="ctr"/>
+          <a:lstStyle/>
+          <a:p>
+            <a:pPr algn="ctr" indent="0" marL="0">
+              <a:buNone/>
+            </a:pPr>
+            <a:r>
+              <a:rPr lang="en-US" sz="1600" b="1" dirty="0">
+                <a:solidFill>
+                  <a:srgbClr val="1E4D3B"/>
+                </a:solidFill>
+                <a:latin typeface="Calibri" pitchFamily="34" charset="0"/>
+                <a:ea typeface="Calibri" pitchFamily="34" charset="-122"/>
+                <a:cs typeface="Calibri" pitchFamily="34" charset="-120"/>
+              </a:rPr>
+              <a:t>A goal that kept moving</a:t>
+            </a:r>
+            <a:endParaRPr lang="en-US" sz="1600" dirty="0"/>
           </a:p>
         </p:txBody>
       </p:sp>
@@ -2547,7 +2641,7 @@
         </p:nvSpPr>
         <p:spPr>
           <a:xfrm>
-            <a:off x="685800" y="1143000"/>
+            <a:off x="685800" y="1188720"/>
             <a:ext cx="384048" cy="384048"/>
           </a:xfrm>
           <a:prstGeom prst="ellipse">
@@ -2574,7 +2668,7 @@
         </p:nvSpPr>
         <p:spPr>
           <a:xfrm>
-            <a:off x="1033272" y="1298448"/>
+            <a:off x="1033272" y="1344168"/>
             <a:ext cx="420624" cy="68580"/>
           </a:xfrm>
           <a:prstGeom prst="rect">
@@ -2599,7 +2693,7 @@
         </p:nvSpPr>
         <p:spPr>
           <a:xfrm>
-            <a:off x="1289304" y="1298448"/>
+            <a:off x="1289304" y="1344168"/>
             <a:ext cx="68580" cy="182880"/>
           </a:xfrm>
           <a:prstGeom prst="rect">
@@ -2624,8 +2718,8 @@
         </p:nvSpPr>
         <p:spPr>
           <a:xfrm>
-            <a:off x="685800" y="1874520"/>
-            <a:ext cx="10607040" cy="1005840"/>
+            <a:off x="685800" y="1965960"/>
+            <a:ext cx="10607040" cy="1097280"/>
           </a:xfrm>
           <a:prstGeom prst="rect">
             <a:avLst/>
@@ -2641,7 +2735,7 @@
               <a:buNone/>
             </a:pPr>
             <a:r>
-              <a:rPr lang="en-US" sz="4600" b="1" dirty="0">
+              <a:rPr lang="en-US" sz="5000" b="1" dirty="0">
                 <a:solidFill>
                   <a:srgbClr val="E8B84B"/>
                 </a:solidFill>
@@ -2651,7 +2745,7 @@
               </a:rPr>
               <a:t>Nobody could tell me when.</a:t>
             </a:r>
-            <a:endParaRPr lang="en-US" sz="4600" dirty="0"/>
+            <a:endParaRPr lang="en-US" sz="5000" dirty="0"/>
           </a:p>
         </p:txBody>
       </p:sp>
@@ -2663,8 +2757,8 @@
         </p:nvSpPr>
         <p:spPr>
           <a:xfrm>
-            <a:off x="731520" y="3255264"/>
-            <a:ext cx="146304" cy="146304"/>
+            <a:off x="731520" y="3557016"/>
+            <a:ext cx="164592" cy="164592"/>
           </a:xfrm>
           <a:prstGeom prst="ellipse">
             <a:avLst/>
@@ -2688,8 +2782,8 @@
         </p:nvSpPr>
         <p:spPr>
           <a:xfrm>
-            <a:off x="1143000" y="3154680"/>
-            <a:ext cx="9875520" cy="457200"/>
+            <a:off x="1188720" y="3429000"/>
+            <a:ext cx="9875520" cy="502920"/>
           </a:xfrm>
           <a:prstGeom prst="rect">
             <a:avLst/>
@@ -2705,7 +2799,7 @@
               <a:buNone/>
             </a:pPr>
             <a:r>
-              <a:rPr lang="en-US" sz="2500" dirty="0">
+              <a:rPr lang="en-US" sz="2800" dirty="0">
                 <a:solidFill>
                   <a:srgbClr val="E3F2E9"/>
                 </a:solidFill>
@@ -2715,7 +2809,7 @@
               </a:rPr>
               <a:t>How much do I actually need?</a:t>
             </a:r>
-            <a:endParaRPr lang="en-US" sz="2500" dirty="0"/>
+            <a:endParaRPr lang="en-US" sz="2800" dirty="0"/>
           </a:p>
         </p:txBody>
       </p:sp>
@@ -2727,8 +2821,8 @@
         </p:nvSpPr>
         <p:spPr>
           <a:xfrm>
-            <a:off x="731520" y="3913632"/>
-            <a:ext cx="146304" cy="146304"/>
+            <a:off x="731520" y="4306824"/>
+            <a:ext cx="164592" cy="164592"/>
           </a:xfrm>
           <a:prstGeom prst="ellipse">
             <a:avLst/>
@@ -2752,8 +2846,8 @@
         </p:nvSpPr>
         <p:spPr>
           <a:xfrm>
-            <a:off x="1143000" y="3813048"/>
-            <a:ext cx="9875520" cy="457200"/>
+            <a:off x="1188720" y="4178808"/>
+            <a:ext cx="9875520" cy="502920"/>
           </a:xfrm>
           <a:prstGeom prst="rect">
             <a:avLst/>
@@ -2769,7 +2863,7 @@
               <a:buNone/>
             </a:pPr>
             <a:r>
-              <a:rPr lang="en-US" sz="2500" dirty="0">
+              <a:rPr lang="en-US" sz="2800" dirty="0">
                 <a:solidFill>
                   <a:srgbClr val="E3F2E9"/>
                 </a:solidFill>
@@ -2779,7 +2873,7 @@
               </a:rPr>
               <a:t>Am I even close?</a:t>
             </a:r>
-            <a:endParaRPr lang="en-US" sz="2500" dirty="0"/>
+            <a:endParaRPr lang="en-US" sz="2800" dirty="0"/>
           </a:p>
         </p:txBody>
       </p:sp>
@@ -2791,8 +2885,8 @@
         </p:nvSpPr>
         <p:spPr>
           <a:xfrm>
-            <a:off x="731520" y="4572000"/>
-            <a:ext cx="146304" cy="146304"/>
+            <a:off x="731520" y="5056632"/>
+            <a:ext cx="164592" cy="164592"/>
           </a:xfrm>
           <a:prstGeom prst="ellipse">
             <a:avLst/>
@@ -2816,8 +2910,8 @@
         </p:nvSpPr>
         <p:spPr>
           <a:xfrm>
-            <a:off x="1143000" y="4471416"/>
-            <a:ext cx="9875520" cy="457200"/>
+            <a:off x="1188720" y="4928616"/>
+            <a:ext cx="9875520" cy="502920"/>
           </a:xfrm>
           <a:prstGeom prst="rect">
             <a:avLst/>
@@ -2833,7 +2927,7 @@
               <a:buNone/>
             </a:pPr>
             <a:r>
-              <a:rPr lang="en-US" sz="2500" dirty="0">
+              <a:rPr lang="en-US" sz="2800" dirty="0">
                 <a:solidFill>
                   <a:srgbClr val="E3F2E9"/>
                 </a:solidFill>
@@ -2841,48 +2935,9 @@
                 <a:ea typeface="Cambria" pitchFamily="34" charset="-122"/>
                 <a:cs typeface="Cambria" pitchFamily="34" charset="-120"/>
               </a:rPr>
-              <a:t>Is this the year — or is it five years away?</a:t>
-            </a:r>
-            <a:endParaRPr lang="en-US" sz="2500" dirty="0"/>
-          </a:p>
-        </p:txBody>
-      </p:sp>
-      <p:sp>
-        <p:nvSpPr>
-          <p:cNvPr id="12" name="Text 10"/>
-          <p:cNvSpPr/>
-          <p:nvPr/>
-        </p:nvSpPr>
-        <p:spPr>
-          <a:xfrm>
-            <a:off x="685800" y="5440680"/>
-            <a:ext cx="10607040" cy="548640"/>
-          </a:xfrm>
-          <a:prstGeom prst="rect">
-            <a:avLst/>
-          </a:prstGeom>
-          <a:noFill/>
-          <a:ln/>
-        </p:spPr>
-        <p:txBody>
-          <a:bodyPr wrap="square" lIns="0" tIns="0" rIns="0" bIns="0" rtlCol="0" anchor="ctr"/>
-          <a:lstStyle/>
-          <a:p>
-            <a:pPr indent="0" marL="0">
-              <a:buNone/>
-            </a:pPr>
-            <a:r>
-              <a:rPr lang="en-US" sz="1700" i="1" dirty="0">
-                <a:solidFill>
-                  <a:srgbClr val="E3F2E9"/>
-                </a:solidFill>
-                <a:latin typeface="Calibri" pitchFamily="34" charset="0"/>
-                <a:ea typeface="Calibri" pitchFamily="34" charset="-122"/>
-                <a:cs typeface="Calibri" pitchFamily="34" charset="-120"/>
-              </a:rPr>
-              <a:t>Every tool I found answered a different question than the one I was actually asking.</a:t>
-            </a:r>
-            <a:endParaRPr lang="en-US" sz="1700" dirty="0"/>
+              <a:t>Is this the year, or five years away?</a:t>
+            </a:r>
+            <a:endParaRPr lang="en-US" sz="2800" dirty="0"/>
           </a:p>
         </p:txBody>
       </p:sp>
@@ -2926,8 +2981,8 @@
         </p:nvSpPr>
         <p:spPr>
           <a:xfrm>
-            <a:off x="685800" y="475488"/>
-            <a:ext cx="7315200" cy="274320"/>
+            <a:off x="685800" y="502920"/>
+            <a:ext cx="9144000" cy="274320"/>
           </a:xfrm>
           <a:prstGeom prst="rect">
             <a:avLst/>
@@ -2965,8 +3020,8 @@
         </p:nvSpPr>
         <p:spPr>
           <a:xfrm>
-            <a:off x="685800" y="804672"/>
-            <a:ext cx="10817352" cy="868680"/>
+            <a:off x="685800" y="914400"/>
+            <a:ext cx="10607040" cy="822960"/>
           </a:xfrm>
           <a:prstGeom prst="rect">
             <a:avLst/>
@@ -2990,7 +3045,7 @@
                 <a:ea typeface="Cambria" pitchFamily="34" charset="-122"/>
                 <a:cs typeface="Cambria" pitchFamily="34" charset="-120"/>
               </a:rPr>
-              <a:t>The same house, one generation apart</a:t>
+              <a:t>One generation apart</a:t>
             </a:r>
             <a:endParaRPr lang="en-US" sz="4000" dirty="0"/>
           </a:p>
@@ -3004,12 +3059,12 @@
         </p:nvSpPr>
         <p:spPr>
           <a:xfrm>
-            <a:off x="685800" y="2103120"/>
-            <a:ext cx="4951476" cy="2011680"/>
+            <a:off x="685800" y="2240280"/>
+            <a:ext cx="4951476" cy="2148840"/>
           </a:xfrm>
           <a:prstGeom prst="roundRect">
             <a:avLst>
-              <a:gd name="adj" fmla="val 6364"/>
+              <a:gd name="adj" fmla="val 5957"/>
             </a:avLst>
           </a:prstGeom>
           <a:solidFill>
@@ -3031,8 +3086,8 @@
         </p:nvSpPr>
         <p:spPr>
           <a:xfrm>
-            <a:off x="1097280" y="2359152"/>
-            <a:ext cx="2743200" cy="320040"/>
+            <a:off x="1097280" y="2532888"/>
+            <a:ext cx="2743200" cy="347472"/>
           </a:xfrm>
           <a:prstGeom prst="rect">
             <a:avLst/>
@@ -3048,7 +3103,7 @@
               <a:buNone/>
             </a:pPr>
             <a:r>
-              <a:rPr lang="en-US" sz="1500" b="1" dirty="0">
+              <a:rPr lang="en-US" sz="1600" b="1" dirty="0">
                 <a:solidFill>
                   <a:srgbClr val="5C6F66"/>
                 </a:solidFill>
@@ -3058,7 +3113,7 @@
               </a:rPr>
               <a:t>2006</a:t>
             </a:r>
-            <a:endParaRPr lang="en-US" sz="1500" dirty="0"/>
+            <a:endParaRPr lang="en-US" sz="1600" dirty="0"/>
           </a:p>
         </p:txBody>
       </p:sp>
@@ -3070,8 +3125,8 @@
         </p:nvSpPr>
         <p:spPr>
           <a:xfrm>
-            <a:off x="1097280" y="2761488"/>
-            <a:ext cx="4023360" cy="822960"/>
+            <a:off x="1097280" y="3017520"/>
+            <a:ext cx="4114800" cy="914400"/>
           </a:xfrm>
           <a:prstGeom prst="rect">
             <a:avLst/>
@@ -3087,7 +3142,7 @@
               <a:buNone/>
             </a:pPr>
             <a:r>
-              <a:rPr lang="en-US" sz="4400" b="1" dirty="0">
+              <a:rPr lang="en-US" sz="4800" b="1" dirty="0">
                 <a:solidFill>
                   <a:srgbClr val="17302A"/>
                 </a:solidFill>
@@ -3097,63 +3152,24 @@
               </a:rPr>
               <a:t>$276,974</a:t>
             </a:r>
-            <a:endParaRPr lang="en-US" sz="4400" dirty="0"/>
-          </a:p>
-        </p:txBody>
-      </p:sp>
-      <p:sp>
-        <p:nvSpPr>
-          <p:cNvPr id="7" name="Text 5"/>
-          <p:cNvSpPr/>
-          <p:nvPr/>
-        </p:nvSpPr>
-        <p:spPr>
-          <a:xfrm>
-            <a:off x="1097280" y="3566160"/>
-            <a:ext cx="4023360" cy="320040"/>
-          </a:xfrm>
-          <a:prstGeom prst="rect">
-            <a:avLst/>
-          </a:prstGeom>
-          <a:noFill/>
-          <a:ln/>
-        </p:spPr>
-        <p:txBody>
-          <a:bodyPr wrap="square" lIns="0" tIns="0" rIns="0" bIns="0" rtlCol="0" anchor="ctr"/>
-          <a:lstStyle/>
-          <a:p>
-            <a:pPr indent="0" marL="0">
-              <a:buNone/>
-            </a:pPr>
-            <a:r>
-              <a:rPr lang="en-US" sz="1300" dirty="0">
-                <a:solidFill>
-                  <a:srgbClr val="5C6F66"/>
-                </a:solidFill>
-                <a:latin typeface="Calibri" pitchFamily="34" charset="0"/>
-                <a:ea typeface="Calibri" pitchFamily="34" charset="-122"/>
-                <a:cs typeface="Calibri" pitchFamily="34" charset="-120"/>
-              </a:rPr>
-              <a:t>average Canadian home</a:t>
-            </a:r>
-            <a:endParaRPr lang="en-US" sz="1300" dirty="0"/>
-          </a:p>
-        </p:txBody>
-      </p:sp>
-      <p:sp>
-        <p:nvSpPr>
-          <p:cNvPr id="8" name="Shape 6"/>
-          <p:cNvSpPr/>
-          <p:nvPr/>
-        </p:nvSpPr>
-        <p:spPr>
-          <a:xfrm>
-            <a:off x="6551676" y="2103120"/>
-            <a:ext cx="4951476" cy="2011680"/>
+            <a:endParaRPr lang="en-US" sz="4800" dirty="0"/>
+          </a:p>
+        </p:txBody>
+      </p:sp>
+      <p:sp>
+        <p:nvSpPr>
+          <p:cNvPr id="7" name="Shape 5"/>
+          <p:cNvSpPr/>
+          <p:nvPr/>
+        </p:nvSpPr>
+        <p:spPr>
+          <a:xfrm>
+            <a:off x="6551676" y="2240280"/>
+            <a:ext cx="4951476" cy="2148840"/>
           </a:xfrm>
           <a:prstGeom prst="roundRect">
             <a:avLst>
-              <a:gd name="adj" fmla="val 6364"/>
+              <a:gd name="adj" fmla="val 5957"/>
             </a:avLst>
           </a:prstGeom>
           <a:solidFill>
@@ -3169,14 +3185,14 @@
       </p:sp>
       <p:sp>
         <p:nvSpPr>
-          <p:cNvPr id="9" name="Text 7"/>
-          <p:cNvSpPr/>
-          <p:nvPr/>
-        </p:nvSpPr>
-        <p:spPr>
-          <a:xfrm>
-            <a:off x="6963156" y="2359152"/>
-            <a:ext cx="2743200" cy="320040"/>
+          <p:cNvPr id="8" name="Text 6"/>
+          <p:cNvSpPr/>
+          <p:nvPr/>
+        </p:nvSpPr>
+        <p:spPr>
+          <a:xfrm>
+            <a:off x="6963156" y="2532888"/>
+            <a:ext cx="2743200" cy="347472"/>
           </a:xfrm>
           <a:prstGeom prst="rect">
             <a:avLst/>
@@ -3192,7 +3208,7 @@
               <a:buNone/>
             </a:pPr>
             <a:r>
-              <a:rPr lang="en-US" sz="1500" b="1" dirty="0">
+              <a:rPr lang="en-US" sz="1600" b="1" dirty="0">
                 <a:solidFill>
                   <a:srgbClr val="E8B84B"/>
                 </a:solidFill>
@@ -3202,20 +3218,20 @@
               </a:rPr>
               <a:t>TODAY</a:t>
             </a:r>
-            <a:endParaRPr lang="en-US" sz="1500" dirty="0"/>
-          </a:p>
-        </p:txBody>
-      </p:sp>
-      <p:sp>
-        <p:nvSpPr>
-          <p:cNvPr id="10" name="Text 8"/>
-          <p:cNvSpPr/>
-          <p:nvPr/>
-        </p:nvSpPr>
-        <p:spPr>
-          <a:xfrm>
-            <a:off x="6963156" y="2761488"/>
-            <a:ext cx="4023360" cy="822960"/>
+            <a:endParaRPr lang="en-US" sz="1600" dirty="0"/>
+          </a:p>
+        </p:txBody>
+      </p:sp>
+      <p:sp>
+        <p:nvSpPr>
+          <p:cNvPr id="9" name="Text 7"/>
+          <p:cNvSpPr/>
+          <p:nvPr/>
+        </p:nvSpPr>
+        <p:spPr>
+          <a:xfrm>
+            <a:off x="6963156" y="3017520"/>
+            <a:ext cx="4114800" cy="914400"/>
           </a:xfrm>
           <a:prstGeom prst="rect">
             <a:avLst/>
@@ -3231,7 +3247,7 @@
               <a:buNone/>
             </a:pPr>
             <a:r>
-              <a:rPr lang="en-US" sz="4400" b="1" dirty="0">
+              <a:rPr lang="en-US" sz="4800" b="1" dirty="0">
                 <a:solidFill>
                   <a:srgbClr val="FFFFFF"/>
                 </a:solidFill>
@@ -3241,7 +3257,46 @@
               </a:rPr>
               <a:t>$696,078</a:t>
             </a:r>
-            <a:endParaRPr lang="en-US" sz="4400" dirty="0"/>
+            <a:endParaRPr lang="en-US" sz="4800" dirty="0"/>
+          </a:p>
+        </p:txBody>
+      </p:sp>
+      <p:sp>
+        <p:nvSpPr>
+          <p:cNvPr id="10" name="Text 8"/>
+          <p:cNvSpPr/>
+          <p:nvPr/>
+        </p:nvSpPr>
+        <p:spPr>
+          <a:xfrm>
+            <a:off x="5637276" y="3108960"/>
+            <a:ext cx="914400" cy="548640"/>
+          </a:xfrm>
+          <a:prstGeom prst="rect">
+            <a:avLst/>
+          </a:prstGeom>
+          <a:noFill/>
+          <a:ln/>
+        </p:spPr>
+        <p:txBody>
+          <a:bodyPr wrap="square" lIns="0" tIns="0" rIns="0" bIns="0" rtlCol="0" anchor="ctr"/>
+          <a:lstStyle/>
+          <a:p>
+            <a:pPr algn="ctr" indent="0" marL="0">
+              <a:buNone/>
+            </a:pPr>
+            <a:r>
+              <a:rPr lang="en-US" sz="2600" b="1" dirty="0">
+                <a:solidFill>
+                  <a:srgbClr val="3FA672"/>
+                </a:solidFill>
+                <a:latin typeface="Cambria" pitchFamily="34" charset="0"/>
+                <a:ea typeface="Cambria" pitchFamily="34" charset="-122"/>
+                <a:cs typeface="Cambria" pitchFamily="34" charset="-120"/>
+              </a:rPr>
+              <a:t>2.5×</a:t>
+            </a:r>
+            <a:endParaRPr lang="en-US" sz="2600" dirty="0"/>
           </a:p>
         </p:txBody>
       </p:sp>
@@ -3253,8 +3308,8 @@
         </p:nvSpPr>
         <p:spPr>
           <a:xfrm>
-            <a:off x="6963156" y="3566160"/>
-            <a:ext cx="4023360" cy="320040"/>
+            <a:off x="685800" y="4709160"/>
+            <a:ext cx="10607040" cy="365760"/>
           </a:xfrm>
           <a:prstGeom prst="rect">
             <a:avLst/>
@@ -3270,140 +3325,23 @@
               <a:buNone/>
             </a:pPr>
             <a:r>
-              <a:rPr lang="en-US" sz="1300" dirty="0">
-                <a:solidFill>
-                  <a:srgbClr val="E3F2E9"/>
+              <a:rPr lang="en-US" sz="1500" dirty="0">
+                <a:solidFill>
+                  <a:srgbClr val="5C6F66"/>
                 </a:solidFill>
                 <a:latin typeface="Calibri" pitchFamily="34" charset="0"/>
                 <a:ea typeface="Calibri" pitchFamily="34" charset="-122"/>
                 <a:cs typeface="Calibri" pitchFamily="34" charset="-120"/>
               </a:rPr>
-              <a:t>average Canadian home</a:t>
-            </a:r>
-            <a:endParaRPr lang="en-US" sz="1300" dirty="0"/>
+              <a:t>Average Canadian home</a:t>
+            </a:r>
+            <a:endParaRPr lang="en-US" sz="1500" dirty="0"/>
           </a:p>
         </p:txBody>
       </p:sp>
       <p:sp>
         <p:nvSpPr>
           <p:cNvPr id="12" name="Text 10"/>
-          <p:cNvSpPr/>
-          <p:nvPr/>
-        </p:nvSpPr>
-        <p:spPr>
-          <a:xfrm>
-            <a:off x="5637276" y="2834640"/>
-            <a:ext cx="914400" cy="548640"/>
-          </a:xfrm>
-          <a:prstGeom prst="rect">
-            <a:avLst/>
-          </a:prstGeom>
-          <a:noFill/>
-          <a:ln/>
-        </p:spPr>
-        <p:txBody>
-          <a:bodyPr wrap="square" lIns="0" tIns="0" rIns="0" bIns="0" rtlCol="0" anchor="ctr"/>
-          <a:lstStyle/>
-          <a:p>
-            <a:pPr algn="ctr" indent="0" marL="0">
-              <a:buNone/>
-            </a:pPr>
-            <a:r>
-              <a:rPr lang="en-US" sz="2400" b="1" dirty="0">
-                <a:solidFill>
-                  <a:srgbClr val="3FA672"/>
-                </a:solidFill>
-                <a:latin typeface="Cambria" pitchFamily="34" charset="0"/>
-                <a:ea typeface="Cambria" pitchFamily="34" charset="-122"/>
-                <a:cs typeface="Cambria" pitchFamily="34" charset="-120"/>
-              </a:rPr>
-              <a:t>2.5×</a:t>
-            </a:r>
-            <a:endParaRPr lang="en-US" sz="2400" dirty="0"/>
-          </a:p>
-        </p:txBody>
-      </p:sp>
-      <p:sp>
-        <p:nvSpPr>
-          <p:cNvPr id="13" name="Text 11"/>
-          <p:cNvSpPr/>
-          <p:nvPr/>
-        </p:nvSpPr>
-        <p:spPr>
-          <a:xfrm>
-            <a:off x="685800" y="4663440"/>
-            <a:ext cx="10607040" cy="548640"/>
-          </a:xfrm>
-          <a:prstGeom prst="rect">
-            <a:avLst/>
-          </a:prstGeom>
-          <a:noFill/>
-          <a:ln/>
-        </p:spPr>
-        <p:txBody>
-          <a:bodyPr wrap="square" lIns="0" tIns="0" rIns="0" bIns="0" rtlCol="0" anchor="ctr"/>
-          <a:lstStyle/>
-          <a:p>
-            <a:pPr indent="0" marL="0">
-              <a:buNone/>
-            </a:pPr>
-            <a:r>
-              <a:rPr lang="en-US" sz="2400" i="1" dirty="0">
-                <a:solidFill>
-                  <a:srgbClr val="1E4D3B"/>
-                </a:solidFill>
-                <a:latin typeface="Cambria" pitchFamily="34" charset="0"/>
-                <a:ea typeface="Cambria" pitchFamily="34" charset="-122"/>
-                <a:cs typeface="Cambria" pitchFamily="34" charset="-120"/>
-              </a:rPr>
-              <a:t>If it was that hard for me — what is it for someone starting now?</a:t>
-            </a:r>
-            <a:endParaRPr lang="en-US" sz="2400" dirty="0"/>
-          </a:p>
-        </p:txBody>
-      </p:sp>
-      <p:sp>
-        <p:nvSpPr>
-          <p:cNvPr id="14" name="Text 12"/>
-          <p:cNvSpPr/>
-          <p:nvPr/>
-        </p:nvSpPr>
-        <p:spPr>
-          <a:xfrm>
-            <a:off x="685800" y="5303520"/>
-            <a:ext cx="10607040" cy="457200"/>
-          </a:xfrm>
-          <a:prstGeom prst="rect">
-            <a:avLst/>
-          </a:prstGeom>
-          <a:noFill/>
-          <a:ln/>
-        </p:spPr>
-        <p:txBody>
-          <a:bodyPr wrap="square" lIns="0" tIns="0" rIns="0" bIns="0" rtlCol="0" anchor="ctr"/>
-          <a:lstStyle/>
-          <a:p>
-            <a:pPr indent="0" marL="0">
-              <a:buNone/>
-            </a:pPr>
-            <a:r>
-              <a:rPr lang="en-US" sz="1600" dirty="0">
-                <a:solidFill>
-                  <a:srgbClr val="5C6F66"/>
-                </a:solidFill>
-                <a:latin typeface="Calibri" pitchFamily="34" charset="0"/>
-                <a:ea typeface="Calibri" pitchFamily="34" charset="-122"/>
-                <a:cs typeface="Calibri" pitchFamily="34" charset="-120"/>
-              </a:rPr>
-              <a:t>Most of you in this room bought somewhere inside that gap too.</a:t>
-            </a:r>
-            <a:endParaRPr lang="en-US" sz="1600" dirty="0"/>
-          </a:p>
-        </p:txBody>
-      </p:sp>
-      <p:sp>
-        <p:nvSpPr>
-          <p:cNvPr id="15" name="Text 13"/>
           <p:cNvSpPr/>
           <p:nvPr/>
         </p:nvSpPr>
@@ -3480,8 +3418,8 @@
         </p:nvSpPr>
         <p:spPr>
           <a:xfrm>
-            <a:off x="685800" y="475488"/>
-            <a:ext cx="7315200" cy="274320"/>
+            <a:off x="685800" y="502920"/>
+            <a:ext cx="9144000" cy="274320"/>
           </a:xfrm>
           <a:prstGeom prst="rect">
             <a:avLst/>
@@ -3519,8 +3457,8 @@
         </p:nvSpPr>
         <p:spPr>
           <a:xfrm>
-            <a:off x="685800" y="804672"/>
-            <a:ext cx="10817352" cy="868680"/>
+            <a:off x="685800" y="914400"/>
+            <a:ext cx="10607040" cy="822960"/>
           </a:xfrm>
           <a:prstGeom prst="rect">
             <a:avLst/>
@@ -3558,8 +3496,8 @@
         </p:nvSpPr>
         <p:spPr>
           <a:xfrm>
-            <a:off x="685800" y="2011680"/>
-            <a:ext cx="566928" cy="566928"/>
+            <a:off x="685800" y="2331720"/>
+            <a:ext cx="640080" cy="640080"/>
           </a:xfrm>
           <a:prstGeom prst="ellipse">
             <a:avLst/>
@@ -3583,8 +3521,8 @@
         </p:nvSpPr>
         <p:spPr>
           <a:xfrm>
-            <a:off x="685800" y="2011680"/>
-            <a:ext cx="566928" cy="566928"/>
+            <a:off x="685800" y="2331720"/>
+            <a:ext cx="640080" cy="640080"/>
           </a:xfrm>
           <a:prstGeom prst="rect">
             <a:avLst/>
@@ -3600,7 +3538,7 @@
               <a:buNone/>
             </a:pPr>
             <a:r>
-              <a:rPr lang="en-US" sz="2200" b="1" dirty="0">
+              <a:rPr lang="en-US" sz="2400" b="1" dirty="0">
                 <a:solidFill>
                   <a:srgbClr val="E8B84B"/>
                 </a:solidFill>
@@ -3610,7 +3548,7 @@
               </a:rPr>
               <a:t>1</a:t>
             </a:r>
-            <a:endParaRPr lang="en-US" sz="2200" dirty="0"/>
+            <a:endParaRPr lang="en-US" sz="2400" dirty="0"/>
           </a:p>
         </p:txBody>
       </p:sp>
@@ -3622,8 +3560,8 @@
         </p:nvSpPr>
         <p:spPr>
           <a:xfrm>
-            <a:off x="1554480" y="1965960"/>
-            <a:ext cx="3657600" cy="411480"/>
+            <a:off x="1645920" y="2377440"/>
+            <a:ext cx="5852160" cy="548640"/>
           </a:xfrm>
           <a:prstGeom prst="rect">
             <a:avLst/>
@@ -3639,7 +3577,7 @@
               <a:buNone/>
             </a:pPr>
             <a:r>
-              <a:rPr lang="en-US" sz="2100" b="1" dirty="0">
+              <a:rPr lang="en-US" sz="2800" b="1" dirty="0">
                 <a:solidFill>
                   <a:srgbClr val="17302A"/>
                 </a:solidFill>
@@ -3647,64 +3585,22 @@
                 <a:ea typeface="Cambria" pitchFamily="34" charset="-122"/>
                 <a:cs typeface="Cambria" pitchFamily="34" charset="-120"/>
               </a:rPr>
-              <a:t>Tell it three things</a:t>
-            </a:r>
-            <a:endParaRPr lang="en-US" sz="2100" dirty="0"/>
-          </a:p>
-        </p:txBody>
-      </p:sp>
-      <p:sp>
-        <p:nvSpPr>
-          <p:cNvPr id="7" name="Text 5"/>
-          <p:cNvSpPr/>
-          <p:nvPr/>
-        </p:nvSpPr>
-        <p:spPr>
-          <a:xfrm>
-            <a:off x="1554480" y="2423160"/>
-            <a:ext cx="6309360" cy="731520"/>
-          </a:xfrm>
-          <a:prstGeom prst="rect">
-            <a:avLst/>
-          </a:prstGeom>
-          <a:noFill/>
-          <a:ln/>
-        </p:spPr>
-        <p:txBody>
-          <a:bodyPr wrap="square" lIns="0" tIns="0" rIns="0" bIns="0" rtlCol="0" anchor="ctr"/>
-          <a:lstStyle/>
-          <a:p>
-            <a:pPr indent="0" marL="0">
-              <a:lnSpc>
-                <a:spcPts val="2000"/>
-              </a:lnSpc>
-              <a:buNone/>
-            </a:pPr>
-            <a:r>
-              <a:rPr lang="en-US" sz="1450" dirty="0">
-                <a:solidFill>
-                  <a:srgbClr val="5C6F66"/>
-                </a:solidFill>
-                <a:latin typeface="Calibri" pitchFamily="34" charset="0"/>
-                <a:ea typeface="Calibri" pitchFamily="34" charset="-122"/>
-                <a:cs typeface="Calibri" pitchFamily="34" charset="-120"/>
-              </a:rPr>
-              <a:t>Your income, what you’ve saved, and what you can put away each month.</a:t>
-            </a:r>
-            <a:endParaRPr lang="en-US" sz="1450" dirty="0"/>
-          </a:p>
-        </p:txBody>
-      </p:sp>
-      <p:sp>
-        <p:nvSpPr>
-          <p:cNvPr id="8" name="Shape 6"/>
-          <p:cNvSpPr/>
-          <p:nvPr/>
-        </p:nvSpPr>
-        <p:spPr>
-          <a:xfrm>
-            <a:off x="685800" y="3383280"/>
-            <a:ext cx="566928" cy="566928"/>
+              <a:t>Three questions</a:t>
+            </a:r>
+            <a:endParaRPr lang="en-US" sz="2800" dirty="0"/>
+          </a:p>
+        </p:txBody>
+      </p:sp>
+      <p:sp>
+        <p:nvSpPr>
+          <p:cNvPr id="7" name="Shape 5"/>
+          <p:cNvSpPr/>
+          <p:nvPr/>
+        </p:nvSpPr>
+        <p:spPr>
+          <a:xfrm>
+            <a:off x="685800" y="3429000"/>
+            <a:ext cx="640080" cy="640080"/>
           </a:xfrm>
           <a:prstGeom prst="ellipse">
             <a:avLst/>
@@ -3722,14 +3618,14 @@
       </p:sp>
       <p:sp>
         <p:nvSpPr>
-          <p:cNvPr id="9" name="Text 7"/>
-          <p:cNvSpPr/>
-          <p:nvPr/>
-        </p:nvSpPr>
-        <p:spPr>
-          <a:xfrm>
-            <a:off x="685800" y="3383280"/>
-            <a:ext cx="566928" cy="566928"/>
+          <p:cNvPr id="8" name="Text 6"/>
+          <p:cNvSpPr/>
+          <p:nvPr/>
+        </p:nvSpPr>
+        <p:spPr>
+          <a:xfrm>
+            <a:off x="685800" y="3429000"/>
+            <a:ext cx="640080" cy="640080"/>
           </a:xfrm>
           <a:prstGeom prst="rect">
             <a:avLst/>
@@ -3745,7 +3641,7 @@
               <a:buNone/>
             </a:pPr>
             <a:r>
-              <a:rPr lang="en-US" sz="2200" b="1" dirty="0">
+              <a:rPr lang="en-US" sz="2400" b="1" dirty="0">
                 <a:solidFill>
                   <a:srgbClr val="E8B84B"/>
                 </a:solidFill>
@@ -3755,20 +3651,20 @@
               </a:rPr>
               <a:t>2</a:t>
             </a:r>
-            <a:endParaRPr lang="en-US" sz="2200" dirty="0"/>
-          </a:p>
-        </p:txBody>
-      </p:sp>
-      <p:sp>
-        <p:nvSpPr>
-          <p:cNvPr id="10" name="Text 8"/>
-          <p:cNvSpPr/>
-          <p:nvPr/>
-        </p:nvSpPr>
-        <p:spPr>
-          <a:xfrm>
-            <a:off x="1554480" y="3337560"/>
-            <a:ext cx="3657600" cy="411480"/>
+            <a:endParaRPr lang="en-US" sz="2400" dirty="0"/>
+          </a:p>
+        </p:txBody>
+      </p:sp>
+      <p:sp>
+        <p:nvSpPr>
+          <p:cNvPr id="9" name="Text 7"/>
+          <p:cNvSpPr/>
+          <p:nvPr/>
+        </p:nvSpPr>
+        <p:spPr>
+          <a:xfrm>
+            <a:off x="1645920" y="3474720"/>
+            <a:ext cx="5852160" cy="548640"/>
           </a:xfrm>
           <a:prstGeom prst="rect">
             <a:avLst/>
@@ -3784,7 +3680,7 @@
               <a:buNone/>
             </a:pPr>
             <a:r>
-              <a:rPr lang="en-US" sz="2100" b="1" dirty="0">
+              <a:rPr lang="en-US" sz="2800" b="1" dirty="0">
                 <a:solidFill>
                   <a:srgbClr val="17302A"/>
                 </a:solidFill>
@@ -3792,64 +3688,22 @@
                 <a:ea typeface="Cambria" pitchFamily="34" charset="-122"/>
                 <a:cs typeface="Cambria" pitchFamily="34" charset="-120"/>
               </a:rPr>
-              <a:t>Get a date</a:t>
-            </a:r>
-            <a:endParaRPr lang="en-US" sz="2100" dirty="0"/>
-          </a:p>
-        </p:txBody>
-      </p:sp>
-      <p:sp>
-        <p:nvSpPr>
-          <p:cNvPr id="11" name="Text 9"/>
-          <p:cNvSpPr/>
-          <p:nvPr/>
-        </p:nvSpPr>
-        <p:spPr>
-          <a:xfrm>
-            <a:off x="1554480" y="3794760"/>
-            <a:ext cx="6309360" cy="731520"/>
-          </a:xfrm>
-          <a:prstGeom prst="rect">
-            <a:avLst/>
-          </a:prstGeom>
-          <a:noFill/>
-          <a:ln/>
-        </p:spPr>
-        <p:txBody>
-          <a:bodyPr wrap="square" lIns="0" tIns="0" rIns="0" bIns="0" rtlCol="0" anchor="ctr"/>
-          <a:lstStyle/>
-          <a:p>
-            <a:pPr indent="0" marL="0">
-              <a:lnSpc>
-                <a:spcPts val="2000"/>
-              </a:lnSpc>
-              <a:buNone/>
-            </a:pPr>
-            <a:r>
-              <a:rPr lang="en-US" sz="1450" dirty="0">
-                <a:solidFill>
-                  <a:srgbClr val="5C6F66"/>
-                </a:solidFill>
-                <a:latin typeface="Calibri" pitchFamily="34" charset="0"/>
-                <a:ea typeface="Calibri" pitchFamily="34" charset="-122"/>
-                <a:cs typeface="Calibri" pitchFamily="34" charset="-120"/>
-              </a:rPr>
-              <a:t>Not a maybe — a month. Built on the actual Canadian rules: FHSA, Home Buyers’ Plan, the stress test.</a:t>
-            </a:r>
-            <a:endParaRPr lang="en-US" sz="1450" dirty="0"/>
-          </a:p>
-        </p:txBody>
-      </p:sp>
-      <p:sp>
-        <p:nvSpPr>
-          <p:cNvPr id="12" name="Shape 10"/>
-          <p:cNvSpPr/>
-          <p:nvPr/>
-        </p:nvSpPr>
-        <p:spPr>
-          <a:xfrm>
-            <a:off x="685800" y="4754880"/>
-            <a:ext cx="566928" cy="566928"/>
+              <a:t>A real month</a:t>
+            </a:r>
+            <a:endParaRPr lang="en-US" sz="2800" dirty="0"/>
+          </a:p>
+        </p:txBody>
+      </p:sp>
+      <p:sp>
+        <p:nvSpPr>
+          <p:cNvPr id="10" name="Shape 8"/>
+          <p:cNvSpPr/>
+          <p:nvPr/>
+        </p:nvSpPr>
+        <p:spPr>
+          <a:xfrm>
+            <a:off x="685800" y="4526280"/>
+            <a:ext cx="640080" cy="640080"/>
           </a:xfrm>
           <a:prstGeom prst="ellipse">
             <a:avLst/>
@@ -3867,14 +3721,14 @@
       </p:sp>
       <p:sp>
         <p:nvSpPr>
-          <p:cNvPr id="13" name="Text 11"/>
-          <p:cNvSpPr/>
-          <p:nvPr/>
-        </p:nvSpPr>
-        <p:spPr>
-          <a:xfrm>
-            <a:off x="685800" y="4754880"/>
-            <a:ext cx="566928" cy="566928"/>
+          <p:cNvPr id="11" name="Text 9"/>
+          <p:cNvSpPr/>
+          <p:nvPr/>
+        </p:nvSpPr>
+        <p:spPr>
+          <a:xfrm>
+            <a:off x="685800" y="4526280"/>
+            <a:ext cx="640080" cy="640080"/>
           </a:xfrm>
           <a:prstGeom prst="rect">
             <a:avLst/>
@@ -3890,7 +3744,7 @@
               <a:buNone/>
             </a:pPr>
             <a:r>
-              <a:rPr lang="en-US" sz="2200" b="1" dirty="0">
+              <a:rPr lang="en-US" sz="2400" b="1" dirty="0">
                 <a:solidFill>
                   <a:srgbClr val="E8B84B"/>
                 </a:solidFill>
@@ -3900,20 +3754,20 @@
               </a:rPr>
               <a:t>3</a:t>
             </a:r>
-            <a:endParaRPr lang="en-US" sz="2200" dirty="0"/>
-          </a:p>
-        </p:txBody>
-      </p:sp>
-      <p:sp>
-        <p:nvSpPr>
-          <p:cNvPr id="14" name="Text 12"/>
-          <p:cNvSpPr/>
-          <p:nvPr/>
-        </p:nvSpPr>
-        <p:spPr>
-          <a:xfrm>
-            <a:off x="1554480" y="4709160"/>
-            <a:ext cx="3657600" cy="411480"/>
+            <a:endParaRPr lang="en-US" sz="2400" dirty="0"/>
+          </a:p>
+        </p:txBody>
+      </p:sp>
+      <p:sp>
+        <p:nvSpPr>
+          <p:cNvPr id="12" name="Text 10"/>
+          <p:cNvSpPr/>
+          <p:nvPr/>
+        </p:nvSpPr>
+        <p:spPr>
+          <a:xfrm>
+            <a:off x="1645920" y="4572000"/>
+            <a:ext cx="5852160" cy="548640"/>
           </a:xfrm>
           <a:prstGeom prst="rect">
             <a:avLst/>
@@ -3929,7 +3783,7 @@
               <a:buNone/>
             </a:pPr>
             <a:r>
-              <a:rPr lang="en-US" sz="2100" b="1" dirty="0">
+              <a:rPr lang="en-US" sz="2800" b="1" dirty="0">
                 <a:solidFill>
                   <a:srgbClr val="17302A"/>
                 </a:solidFill>
@@ -3939,66 +3793,24 @@
               </a:rPr>
               <a:t>Watch it get closer</a:t>
             </a:r>
-            <a:endParaRPr lang="en-US" sz="2100" dirty="0"/>
-          </a:p>
-        </p:txBody>
-      </p:sp>
-      <p:sp>
-        <p:nvSpPr>
-          <p:cNvPr id="15" name="Text 13"/>
-          <p:cNvSpPr/>
-          <p:nvPr/>
-        </p:nvSpPr>
-        <p:spPr>
-          <a:xfrm>
-            <a:off x="1554480" y="5166360"/>
-            <a:ext cx="6309360" cy="731520"/>
-          </a:xfrm>
-          <a:prstGeom prst="rect">
-            <a:avLst/>
-          </a:prstGeom>
-          <a:noFill/>
-          <a:ln/>
-        </p:spPr>
-        <p:txBody>
-          <a:bodyPr wrap="square" lIns="0" tIns="0" rIns="0" bIns="0" rtlCol="0" anchor="ctr"/>
-          <a:lstStyle/>
-          <a:p>
-            <a:pPr indent="0" marL="0">
-              <a:lnSpc>
-                <a:spcPts val="2000"/>
-              </a:lnSpc>
-              <a:buNone/>
-            </a:pPr>
-            <a:r>
-              <a:rPr lang="en-US" sz="1450" dirty="0">
-                <a:solidFill>
-                  <a:srgbClr val="5C6F66"/>
-                </a:solidFill>
-                <a:latin typeface="Calibri" pitchFamily="34" charset="0"/>
-                <a:ea typeface="Calibri" pitchFamily="34" charset="-122"/>
-                <a:cs typeface="Calibri" pitchFamily="34" charset="-120"/>
-              </a:rPr>
-              <a:t>Every dollar you save builds your house on screen, piece by piece.</a:t>
-            </a:r>
-            <a:endParaRPr lang="en-US" sz="1450" dirty="0"/>
-          </a:p>
-        </p:txBody>
-      </p:sp>
-      <p:sp>
-        <p:nvSpPr>
-          <p:cNvPr id="16" name="Shape 14"/>
-          <p:cNvSpPr/>
-          <p:nvPr/>
-        </p:nvSpPr>
-        <p:spPr>
-          <a:xfrm>
-            <a:off x="8138160" y="1965960"/>
-            <a:ext cx="3364992" cy="3657600"/>
+            <a:endParaRPr lang="en-US" sz="2800" dirty="0"/>
+          </a:p>
+        </p:txBody>
+      </p:sp>
+      <p:sp>
+        <p:nvSpPr>
+          <p:cNvPr id="13" name="Shape 11"/>
+          <p:cNvSpPr/>
+          <p:nvPr/>
+        </p:nvSpPr>
+        <p:spPr>
+          <a:xfrm>
+            <a:off x="8138160" y="2148840"/>
+            <a:ext cx="3364992" cy="3246120"/>
           </a:xfrm>
           <a:prstGeom prst="roundRect">
             <a:avLst>
-              <a:gd name="adj" fmla="val 4891"/>
+              <a:gd name="adj" fmla="val 5070"/>
             </a:avLst>
           </a:prstGeom>
           <a:solidFill>
@@ -4014,13 +3826,13 @@
       </p:sp>
       <p:sp>
         <p:nvSpPr>
-          <p:cNvPr id="17" name="Text 15"/>
-          <p:cNvSpPr/>
-          <p:nvPr/>
-        </p:nvSpPr>
-        <p:spPr>
-          <a:xfrm>
-            <a:off x="8458200" y="2395728"/>
+          <p:cNvPr id="14" name="Text 12"/>
+          <p:cNvSpPr/>
+          <p:nvPr/>
+        </p:nvSpPr>
+        <p:spPr>
+          <a:xfrm>
+            <a:off x="8458200" y="2560320"/>
             <a:ext cx="2743200" cy="274320"/>
           </a:xfrm>
           <a:prstGeom prst="rect">
@@ -4053,14 +3865,14 @@
       </p:sp>
       <p:sp>
         <p:nvSpPr>
-          <p:cNvPr id="18" name="Text 16"/>
-          <p:cNvSpPr/>
-          <p:nvPr/>
-        </p:nvSpPr>
-        <p:spPr>
-          <a:xfrm>
-            <a:off x="8458200" y="2761488"/>
-            <a:ext cx="2743200" cy="777240"/>
+          <p:cNvPr id="15" name="Text 13"/>
+          <p:cNvSpPr/>
+          <p:nvPr/>
+        </p:nvSpPr>
+        <p:spPr>
+          <a:xfrm>
+            <a:off x="8458200" y="2926080"/>
+            <a:ext cx="2834640" cy="822960"/>
           </a:xfrm>
           <a:prstGeom prst="rect">
             <a:avLst/>
@@ -4076,7 +3888,7 @@
               <a:buNone/>
             </a:pPr>
             <a:r>
-              <a:rPr lang="en-US" sz="3600" b="1" dirty="0">
+              <a:rPr lang="en-US" sz="3800" b="1" dirty="0">
                 <a:solidFill>
                   <a:srgbClr val="FFFFFF"/>
                 </a:solidFill>
@@ -4086,58 +3898,19 @@
               </a:rPr>
               <a:t>June 2029</a:t>
             </a:r>
-            <a:endParaRPr lang="en-US" sz="3600" dirty="0"/>
-          </a:p>
-        </p:txBody>
-      </p:sp>
-      <p:sp>
-        <p:nvSpPr>
-          <p:cNvPr id="19" name="Text 17"/>
-          <p:cNvSpPr/>
-          <p:nvPr/>
-        </p:nvSpPr>
-        <p:spPr>
-          <a:xfrm>
-            <a:off x="8458200" y="3584448"/>
-            <a:ext cx="2834640" cy="320040"/>
-          </a:xfrm>
-          <a:prstGeom prst="rect">
-            <a:avLst/>
-          </a:prstGeom>
-          <a:noFill/>
-          <a:ln/>
-        </p:spPr>
-        <p:txBody>
-          <a:bodyPr wrap="square" lIns="0" tIns="0" rIns="0" bIns="0" rtlCol="0" anchor="ctr"/>
-          <a:lstStyle/>
-          <a:p>
-            <a:pPr indent="0" marL="0">
-              <a:buNone/>
-            </a:pPr>
-            <a:r>
-              <a:rPr lang="en-US" sz="1200" dirty="0">
-                <a:solidFill>
-                  <a:srgbClr val="E3F2E9"/>
-                </a:solidFill>
-                <a:latin typeface="Calibri" pitchFamily="34" charset="0"/>
-                <a:ea typeface="Calibri" pitchFamily="34" charset="-122"/>
-                <a:cs typeface="Calibri" pitchFamily="34" charset="-120"/>
-              </a:rPr>
-              <a:t>likely window · Apr – Sep 2029</a:t>
-            </a:r>
-            <a:endParaRPr lang="en-US" sz="1200" dirty="0"/>
-          </a:p>
-        </p:txBody>
-      </p:sp>
-      <p:sp>
-        <p:nvSpPr>
-          <p:cNvPr id="20" name="Shape 18"/>
-          <p:cNvSpPr/>
-          <p:nvPr/>
-        </p:nvSpPr>
-        <p:spPr>
-          <a:xfrm>
-            <a:off x="8458200" y="4160520"/>
+            <a:endParaRPr lang="en-US" sz="3800" dirty="0"/>
+          </a:p>
+        </p:txBody>
+      </p:sp>
+      <p:sp>
+        <p:nvSpPr>
+          <p:cNvPr id="16" name="Shape 14"/>
+          <p:cNvSpPr/>
+          <p:nvPr/>
+        </p:nvSpPr>
+        <p:spPr>
+          <a:xfrm>
+            <a:off x="8458200" y="3977640"/>
             <a:ext cx="2743200" cy="256032"/>
           </a:xfrm>
           <a:prstGeom prst="roundRect">
@@ -4158,13 +3931,13 @@
       </p:sp>
       <p:sp>
         <p:nvSpPr>
-          <p:cNvPr id="21" name="Shape 19"/>
-          <p:cNvSpPr/>
-          <p:nvPr/>
-        </p:nvSpPr>
-        <p:spPr>
-          <a:xfrm>
-            <a:off x="8458200" y="4160520"/>
+          <p:cNvPr id="17" name="Shape 15"/>
+          <p:cNvSpPr/>
+          <p:nvPr/>
+        </p:nvSpPr>
+        <p:spPr>
+          <a:xfrm>
+            <a:off x="8458200" y="3977640"/>
             <a:ext cx="1591056" cy="256032"/>
           </a:xfrm>
           <a:prstGeom prst="roundRect">
@@ -4185,13 +3958,13 @@
       </p:sp>
       <p:sp>
         <p:nvSpPr>
-          <p:cNvPr id="22" name="Text 20"/>
-          <p:cNvSpPr/>
-          <p:nvPr/>
-        </p:nvSpPr>
-        <p:spPr>
-          <a:xfrm>
-            <a:off x="8458200" y="4526280"/>
+          <p:cNvPr id="18" name="Text 16"/>
+          <p:cNvSpPr/>
+          <p:nvPr/>
+        </p:nvSpPr>
+        <p:spPr>
+          <a:xfrm>
+            <a:off x="8458200" y="4370832"/>
             <a:ext cx="2834640" cy="320040"/>
           </a:xfrm>
           <a:prstGeom prst="rect">
@@ -4208,7 +3981,7 @@
               <a:buNone/>
             </a:pPr>
             <a:r>
-              <a:rPr lang="en-US" sz="1200" dirty="0">
+              <a:rPr lang="en-US" sz="1300" dirty="0">
                 <a:solidFill>
                   <a:srgbClr val="E3F2E9"/>
                 </a:solidFill>
@@ -4216,9 +3989,9 @@
                 <a:ea typeface="Calibri" pitchFamily="34" charset="-122"/>
                 <a:cs typeface="Calibri" pitchFamily="34" charset="-120"/>
               </a:rPr>
-              <a:t>$41K saved  ·  58% of the way there</a:t>
-            </a:r>
-            <a:endParaRPr lang="en-US" sz="1200" dirty="0"/>
+              <a:t>58% of the way there</a:t>
+            </a:r>
+            <a:endParaRPr lang="en-US" sz="1300" dirty="0"/>
           </a:p>
         </p:txBody>
       </p:sp>
@@ -4262,8 +4035,8 @@
         </p:nvSpPr>
         <p:spPr>
           <a:xfrm>
-            <a:off x="685800" y="475488"/>
-            <a:ext cx="7315200" cy="274320"/>
+            <a:off x="685800" y="502920"/>
+            <a:ext cx="9144000" cy="274320"/>
           </a:xfrm>
           <a:prstGeom prst="rect">
             <a:avLst/>
@@ -4301,8 +4074,8 @@
         </p:nvSpPr>
         <p:spPr>
           <a:xfrm>
-            <a:off x="685800" y="804672"/>
-            <a:ext cx="10817352" cy="868680"/>
+            <a:off x="685800" y="914400"/>
+            <a:ext cx="10607040" cy="822960"/>
           </a:xfrm>
           <a:prstGeom prst="rect">
             <a:avLst/>
@@ -4340,12 +4113,12 @@
         </p:nvSpPr>
         <p:spPr>
           <a:xfrm>
-            <a:off x="685800" y="2057400"/>
-            <a:ext cx="5074920" cy="2880360"/>
+            <a:off x="685800" y="2286000"/>
+            <a:ext cx="5074920" cy="2743200"/>
           </a:xfrm>
           <a:prstGeom prst="roundRect">
             <a:avLst>
-              <a:gd name="adj" fmla="val 5079"/>
+              <a:gd name="adj" fmla="val 5333"/>
             </a:avLst>
           </a:prstGeom>
           <a:solidFill>
@@ -4367,7 +4140,7 @@
         </p:nvSpPr>
         <p:spPr>
           <a:xfrm>
-            <a:off x="1097280" y="2377440"/>
+            <a:off x="1143000" y="2651760"/>
             <a:ext cx="4206240" cy="274320"/>
           </a:xfrm>
           <a:prstGeom prst="rect">
@@ -4406,8 +4179,8 @@
         </p:nvSpPr>
         <p:spPr>
           <a:xfrm>
-            <a:off x="1097280" y="2743200"/>
-            <a:ext cx="4297680" cy="1097280"/>
+            <a:off x="1143000" y="3063240"/>
+            <a:ext cx="4297680" cy="640080"/>
           </a:xfrm>
           <a:prstGeom prst="rect">
             <a:avLst/>
@@ -4420,13 +4193,10 @@
           <a:lstStyle/>
           <a:p>
             <a:pPr indent="0" marL="0">
-              <a:lnSpc>
-                <a:spcPts val="3400"/>
-              </a:lnSpc>
-              <a:buNone/>
-            </a:pPr>
-            <a:r>
-              <a:rPr lang="en-US" sz="2700" b="1" dirty="0">
+              <a:buNone/>
+            </a:pPr>
+            <a:r>
+              <a:rPr lang="en-US" sz="2800" b="1" dirty="0">
                 <a:solidFill>
                   <a:srgbClr val="5C6F66"/>
                 </a:solidFill>
@@ -4434,124 +4204,65 @@
                 <a:ea typeface="Cambria" pitchFamily="34" charset="-122"/>
                 <a:cs typeface="Cambria" pitchFamily="34" charset="-120"/>
               </a:rPr>
-              <a:t>“Can you afford it</a:t>
-            </a:r>
-            <a:endParaRPr lang="en-US" sz="2700" dirty="0"/>
-          </a:p>
+              <a:t>“Afford it today?”</a:t>
+            </a:r>
+            <a:endParaRPr lang="en-US" sz="2800" dirty="0"/>
+          </a:p>
+        </p:txBody>
+      </p:sp>
+      <p:sp>
+        <p:nvSpPr>
+          <p:cNvPr id="7" name="Text 5"/>
+          <p:cNvSpPr/>
+          <p:nvPr/>
+        </p:nvSpPr>
+        <p:spPr>
+          <a:xfrm>
+            <a:off x="1143000" y="3977640"/>
+            <a:ext cx="4206240" cy="640080"/>
+          </a:xfrm>
+          <a:prstGeom prst="rect">
+            <a:avLst/>
+          </a:prstGeom>
+          <a:noFill/>
+          <a:ln/>
+        </p:spPr>
+        <p:txBody>
+          <a:bodyPr wrap="square" lIns="0" tIns="0" rIns="0" bIns="0" rtlCol="0" anchor="ctr"/>
+          <a:lstStyle/>
           <a:p>
             <a:pPr indent="0" marL="0">
-              <a:lnSpc>
-                <a:spcPts val="3400"/>
-              </a:lnSpc>
-              <a:buNone/>
-            </a:pPr>
-            <a:r>
-              <a:rPr lang="en-US" sz="2700" b="1" dirty="0">
-                <a:solidFill>
-                  <a:srgbClr val="5C6F66"/>
+              <a:buNone/>
+            </a:pPr>
+            <a:r>
+              <a:rPr lang="en-US" sz="4000" b="1" dirty="0">
+                <a:solidFill>
+                  <a:srgbClr val="B4452F"/>
                 </a:solidFill>
                 <a:latin typeface="Cambria" pitchFamily="34" charset="0"/>
                 <a:ea typeface="Cambria" pitchFamily="34" charset="-122"/>
                 <a:cs typeface="Cambria" pitchFamily="34" charset="-120"/>
               </a:rPr>
-              <a:t>today?”</a:t>
-            </a:r>
-            <a:endParaRPr lang="en-US" sz="2700" dirty="0"/>
-          </a:p>
-        </p:txBody>
-      </p:sp>
-      <p:sp>
-        <p:nvSpPr>
-          <p:cNvPr id="7" name="Text 5"/>
-          <p:cNvSpPr/>
-          <p:nvPr/>
-        </p:nvSpPr>
-        <p:spPr>
-          <a:xfrm>
-            <a:off x="1097280" y="3913632"/>
-            <a:ext cx="4206240" cy="548640"/>
-          </a:xfrm>
-          <a:prstGeom prst="rect">
-            <a:avLst/>
-          </a:prstGeom>
-          <a:noFill/>
-          <a:ln/>
-        </p:spPr>
-        <p:txBody>
-          <a:bodyPr wrap="square" lIns="0" tIns="0" rIns="0" bIns="0" rtlCol="0" anchor="ctr"/>
-          <a:lstStyle/>
-          <a:p>
-            <a:pPr indent="0" marL="0">
-              <a:buNone/>
-            </a:pPr>
-            <a:r>
-              <a:rPr lang="en-US" sz="3200" b="1" dirty="0">
-                <a:solidFill>
-                  <a:srgbClr val="B4452F"/>
-                </a:solidFill>
-                <a:latin typeface="Cambria" pitchFamily="34" charset="0"/>
-                <a:ea typeface="Cambria" pitchFamily="34" charset="-122"/>
-                <a:cs typeface="Cambria" pitchFamily="34" charset="-120"/>
-              </a:rPr>
               <a:t>No.</a:t>
             </a:r>
-            <a:endParaRPr lang="en-US" sz="3200" dirty="0"/>
-          </a:p>
-        </p:txBody>
-      </p:sp>
-      <p:sp>
-        <p:nvSpPr>
-          <p:cNvPr id="8" name="Text 6"/>
-          <p:cNvSpPr/>
-          <p:nvPr/>
-        </p:nvSpPr>
-        <p:spPr>
-          <a:xfrm>
-            <a:off x="1097280" y="4498848"/>
-            <a:ext cx="4297680" cy="320040"/>
-          </a:xfrm>
-          <a:prstGeom prst="rect">
-            <a:avLst/>
-          </a:prstGeom>
-          <a:noFill/>
-          <a:ln/>
-        </p:spPr>
-        <p:txBody>
-          <a:bodyPr wrap="square" lIns="0" tIns="0" rIns="0" bIns="0" rtlCol="0" anchor="ctr"/>
-          <a:lstStyle/>
-          <a:p>
-            <a:pPr indent="0" marL="0">
-              <a:buNone/>
-            </a:pPr>
-            <a:r>
-              <a:rPr lang="en-US" sz="1300" dirty="0">
-                <a:solidFill>
-                  <a:srgbClr val="5C6F66"/>
-                </a:solidFill>
-                <a:latin typeface="Calibri" pitchFamily="34" charset="0"/>
-                <a:ea typeface="Calibri" pitchFamily="34" charset="-122"/>
-                <a:cs typeface="Calibri" pitchFamily="34" charset="-120"/>
-              </a:rPr>
-              <a:t>So they close the tab, and stop saving.</a:t>
-            </a:r>
-            <a:endParaRPr lang="en-US" sz="1300" dirty="0"/>
-          </a:p>
-        </p:txBody>
-      </p:sp>
-      <p:sp>
-        <p:nvSpPr>
-          <p:cNvPr id="9" name="Shape 7"/>
-          <p:cNvSpPr/>
-          <p:nvPr/>
-        </p:nvSpPr>
-        <p:spPr>
-          <a:xfrm>
-            <a:off x="6217920" y="2057400"/>
-            <a:ext cx="5074920" cy="2880360"/>
+            <a:endParaRPr lang="en-US" sz="4000" dirty="0"/>
+          </a:p>
+        </p:txBody>
+      </p:sp>
+      <p:sp>
+        <p:nvSpPr>
+          <p:cNvPr id="8" name="Shape 6"/>
+          <p:cNvSpPr/>
+          <p:nvPr/>
+        </p:nvSpPr>
+        <p:spPr>
+          <a:xfrm>
+            <a:off x="6217920" y="2286000"/>
+            <a:ext cx="5074920" cy="2743200"/>
           </a:xfrm>
           <a:prstGeom prst="roundRect">
             <a:avLst>
-              <a:gd name="adj" fmla="val 5079"/>
+              <a:gd name="adj" fmla="val 5333"/>
             </a:avLst>
           </a:prstGeom>
           <a:solidFill>
@@ -4567,13 +4278,13 @@
       </p:sp>
       <p:sp>
         <p:nvSpPr>
-          <p:cNvPr id="10" name="Text 8"/>
-          <p:cNvSpPr/>
-          <p:nvPr/>
-        </p:nvSpPr>
-        <p:spPr>
-          <a:xfrm>
-            <a:off x="6629400" y="2377440"/>
+          <p:cNvPr id="9" name="Text 7"/>
+          <p:cNvSpPr/>
+          <p:nvPr/>
+        </p:nvSpPr>
+        <p:spPr>
+          <a:xfrm>
+            <a:off x="6675120" y="2651760"/>
             <a:ext cx="4206240" cy="274320"/>
           </a:xfrm>
           <a:prstGeom prst="rect">
@@ -4606,14 +4317,14 @@
       </p:sp>
       <p:sp>
         <p:nvSpPr>
-          <p:cNvPr id="11" name="Text 9"/>
-          <p:cNvSpPr/>
-          <p:nvPr/>
-        </p:nvSpPr>
-        <p:spPr>
-          <a:xfrm>
-            <a:off x="6629400" y="2743200"/>
-            <a:ext cx="4297680" cy="1097280"/>
+          <p:cNvPr id="10" name="Text 8"/>
+          <p:cNvSpPr/>
+          <p:nvPr/>
+        </p:nvSpPr>
+        <p:spPr>
+          <a:xfrm>
+            <a:off x="6675120" y="3063240"/>
+            <a:ext cx="4297680" cy="640080"/>
           </a:xfrm>
           <a:prstGeom prst="rect">
             <a:avLst/>
@@ -4626,13 +4337,10 @@
           <a:lstStyle/>
           <a:p>
             <a:pPr indent="0" marL="0">
-              <a:lnSpc>
-                <a:spcPts val="3400"/>
-              </a:lnSpc>
-              <a:buNone/>
-            </a:pPr>
-            <a:r>
-              <a:rPr lang="en-US" sz="2700" b="1" dirty="0">
+              <a:buNone/>
+            </a:pPr>
+            <a:r>
+              <a:rPr lang="en-US" sz="2800" b="1" dirty="0">
                 <a:solidFill>
                   <a:srgbClr val="FFFFFF"/>
                 </a:solidFill>
@@ -4642,20 +4350,20 @@
               </a:rPr>
               <a:t>“When?”</a:t>
             </a:r>
-            <a:endParaRPr lang="en-US" sz="2700" dirty="0"/>
-          </a:p>
-        </p:txBody>
-      </p:sp>
-      <p:sp>
-        <p:nvSpPr>
-          <p:cNvPr id="12" name="Text 10"/>
-          <p:cNvSpPr/>
-          <p:nvPr/>
-        </p:nvSpPr>
-        <p:spPr>
-          <a:xfrm>
-            <a:off x="6629400" y="3913632"/>
-            <a:ext cx="4206240" cy="548640"/>
+            <a:endParaRPr lang="en-US" sz="2800" dirty="0"/>
+          </a:p>
+        </p:txBody>
+      </p:sp>
+      <p:sp>
+        <p:nvSpPr>
+          <p:cNvPr id="11" name="Text 9"/>
+          <p:cNvSpPr/>
+          <p:nvPr/>
+        </p:nvSpPr>
+        <p:spPr>
+          <a:xfrm>
+            <a:off x="6675120" y="3977640"/>
+            <a:ext cx="4206240" cy="640080"/>
           </a:xfrm>
           <a:prstGeom prst="rect">
             <a:avLst/>
@@ -4671,7 +4379,7 @@
               <a:buNone/>
             </a:pPr>
             <a:r>
-              <a:rPr lang="en-US" sz="3200" b="1" dirty="0">
+              <a:rPr lang="en-US" sz="4000" b="1" dirty="0">
                 <a:solidFill>
                   <a:srgbClr val="3FA672"/>
                 </a:solidFill>
@@ -4681,85 +4389,7 @@
               </a:rPr>
               <a:t>June 2029.</a:t>
             </a:r>
-            <a:endParaRPr lang="en-US" sz="3200" dirty="0"/>
-          </a:p>
-        </p:txBody>
-      </p:sp>
-      <p:sp>
-        <p:nvSpPr>
-          <p:cNvPr id="13" name="Text 11"/>
-          <p:cNvSpPr/>
-          <p:nvPr/>
-        </p:nvSpPr>
-        <p:spPr>
-          <a:xfrm>
-            <a:off x="6629400" y="4498848"/>
-            <a:ext cx="4297680" cy="320040"/>
-          </a:xfrm>
-          <a:prstGeom prst="rect">
-            <a:avLst/>
-          </a:prstGeom>
-          <a:noFill/>
-          <a:ln/>
-        </p:spPr>
-        <p:txBody>
-          <a:bodyPr wrap="square" lIns="0" tIns="0" rIns="0" bIns="0" rtlCol="0" anchor="ctr"/>
-          <a:lstStyle/>
-          <a:p>
-            <a:pPr indent="0" marL="0">
-              <a:buNone/>
-            </a:pPr>
-            <a:r>
-              <a:rPr lang="en-US" sz="1300" dirty="0">
-                <a:solidFill>
-                  <a:srgbClr val="E3F2E9"/>
-                </a:solidFill>
-                <a:latin typeface="Calibri" pitchFamily="34" charset="0"/>
-                <a:ea typeface="Calibri" pitchFamily="34" charset="-122"/>
-                <a:cs typeface="Calibri" pitchFamily="34" charset="-120"/>
-              </a:rPr>
-              <a:t>So they keep going — and the date moves closer.</a:t>
-            </a:r>
-            <a:endParaRPr lang="en-US" sz="1300" dirty="0"/>
-          </a:p>
-        </p:txBody>
-      </p:sp>
-      <p:sp>
-        <p:nvSpPr>
-          <p:cNvPr id="14" name="Text 12"/>
-          <p:cNvSpPr/>
-          <p:nvPr/>
-        </p:nvSpPr>
-        <p:spPr>
-          <a:xfrm>
-            <a:off x="685800" y="5349240"/>
-            <a:ext cx="10817352" cy="457200"/>
-          </a:xfrm>
-          <a:prstGeom prst="rect">
-            <a:avLst/>
-          </a:prstGeom>
-          <a:noFill/>
-          <a:ln/>
-        </p:spPr>
-        <p:txBody>
-          <a:bodyPr wrap="square" lIns="0" tIns="0" rIns="0" bIns="0" rtlCol="0" anchor="ctr"/>
-          <a:lstStyle/>
-          <a:p>
-            <a:pPr indent="0" marL="0">
-              <a:buNone/>
-            </a:pPr>
-            <a:r>
-              <a:rPr lang="en-US" sz="2000" i="1" dirty="0">
-                <a:solidFill>
-                  <a:srgbClr val="1E4D3B"/>
-                </a:solidFill>
-                <a:latin typeface="Cambria" pitchFamily="34" charset="0"/>
-                <a:ea typeface="Cambria" pitchFamily="34" charset="-122"/>
-                <a:cs typeface="Cambria" pitchFamily="34" charset="-120"/>
-              </a:rPr>
-              <a:t>I can’t make the house cheaper. I can give people the answer I never got.</a:t>
-            </a:r>
-            <a:endParaRPr lang="en-US" sz="2000" dirty="0"/>
+            <a:endParaRPr lang="en-US" sz="4000" dirty="0"/>
           </a:p>
         </p:txBody>
       </p:sp>
@@ -4803,8 +4433,8 @@
         </p:nvSpPr>
         <p:spPr>
           <a:xfrm>
-            <a:off x="685800" y="475488"/>
-            <a:ext cx="7315200" cy="274320"/>
+            <a:off x="685800" y="502920"/>
+            <a:ext cx="9144000" cy="274320"/>
           </a:xfrm>
           <a:prstGeom prst="rect">
             <a:avLst/>
@@ -4842,8 +4472,8 @@
         </p:nvSpPr>
         <p:spPr>
           <a:xfrm>
-            <a:off x="685800" y="804672"/>
-            <a:ext cx="10817352" cy="868680"/>
+            <a:off x="685800" y="914400"/>
+            <a:ext cx="10607040" cy="822960"/>
           </a:xfrm>
           <a:prstGeom prst="rect">
             <a:avLst/>
@@ -4875,60 +4505,18 @@
       </p:sp>
       <p:sp>
         <p:nvSpPr>
-          <p:cNvPr id="4" name="Text 2"/>
-          <p:cNvSpPr/>
-          <p:nvPr/>
-        </p:nvSpPr>
-        <p:spPr>
-          <a:xfrm>
-            <a:off x="685800" y="1920240"/>
-            <a:ext cx="10607040" cy="822960"/>
-          </a:xfrm>
-          <a:prstGeom prst="rect">
-            <a:avLst/>
-          </a:prstGeom>
-          <a:noFill/>
-          <a:ln/>
-        </p:spPr>
-        <p:txBody>
-          <a:bodyPr wrap="square" lIns="0" tIns="0" rIns="0" bIns="0" rtlCol="0" anchor="ctr"/>
-          <a:lstStyle/>
-          <a:p>
-            <a:pPr indent="0" marL="0">
-              <a:lnSpc>
-                <a:spcPts val="2400"/>
-              </a:lnSpc>
-              <a:buNone/>
-            </a:pPr>
-            <a:r>
-              <a:rPr lang="en-US" sz="1600" dirty="0">
-                <a:solidFill>
-                  <a:srgbClr val="17302A"/>
-                </a:solidFill>
-                <a:latin typeface="Calibri" pitchFamily="34" charset="0"/>
-                <a:ea typeface="Calibri" pitchFamily="34" charset="-122"/>
-                <a:cs typeface="Calibri" pitchFamily="34" charset="-120"/>
-              </a:rPr>
-              <a:t>When people can’t see a path, they stop building wealth entirely. That’s a household problem and a national one — renters instead of owners, wealth that never compounds.</a:t>
-            </a:r>
-            <a:endParaRPr lang="en-US" sz="1600" dirty="0"/>
-          </a:p>
-        </p:txBody>
-      </p:sp>
-      <p:sp>
-        <p:nvSpPr>
-          <p:cNvPr id="5" name="Shape 3"/>
-          <p:cNvSpPr/>
-          <p:nvPr/>
-        </p:nvSpPr>
-        <p:spPr>
-          <a:xfrm>
-            <a:off x="685800" y="2971800"/>
-            <a:ext cx="1975104" cy="914400"/>
+          <p:cNvPr id="4" name="Shape 2"/>
+          <p:cNvSpPr/>
+          <p:nvPr/>
+        </p:nvSpPr>
+        <p:spPr>
+          <a:xfrm>
+            <a:off x="685800" y="2423160"/>
+            <a:ext cx="1975104" cy="1051560"/>
           </a:xfrm>
           <a:prstGeom prst="roundRect">
             <a:avLst>
-              <a:gd name="adj" fmla="val 12000"/>
+              <a:gd name="adj" fmla="val 10435"/>
             </a:avLst>
           </a:prstGeom>
           <a:solidFill>
@@ -4944,14 +4532,14 @@
       </p:sp>
       <p:sp>
         <p:nvSpPr>
-          <p:cNvPr id="6" name="Text 4"/>
-          <p:cNvSpPr/>
-          <p:nvPr/>
-        </p:nvSpPr>
-        <p:spPr>
-          <a:xfrm>
-            <a:off x="685800" y="2971800"/>
-            <a:ext cx="1975104" cy="914400"/>
+          <p:cNvPr id="5" name="Text 3"/>
+          <p:cNvSpPr/>
+          <p:nvPr/>
+        </p:nvSpPr>
+        <p:spPr>
+          <a:xfrm>
+            <a:off x="685800" y="2423160"/>
+            <a:ext cx="1975104" cy="1051560"/>
           </a:xfrm>
           <a:prstGeom prst="rect">
             <a:avLst/>
@@ -4967,7 +4555,7 @@
               <a:buNone/>
             </a:pPr>
             <a:r>
-              <a:rPr lang="en-US" sz="1400" b="1" dirty="0">
+              <a:rPr lang="en-US" sz="1500" b="1" dirty="0">
                 <a:solidFill>
                   <a:srgbClr val="FFFFFF"/>
                 </a:solidFill>
@@ -4977,24 +4565,24 @@
               </a:rPr>
               <a:t>Canada</a:t>
             </a:r>
-            <a:endParaRPr lang="en-US" sz="1400" dirty="0"/>
-          </a:p>
-        </p:txBody>
-      </p:sp>
-      <p:sp>
-        <p:nvSpPr>
-          <p:cNvPr id="7" name="Shape 5"/>
-          <p:cNvSpPr/>
-          <p:nvPr/>
-        </p:nvSpPr>
-        <p:spPr>
-          <a:xfrm>
-            <a:off x="2807208" y="2971800"/>
-            <a:ext cx="1975104" cy="914400"/>
+            <a:endParaRPr lang="en-US" sz="1500" dirty="0"/>
+          </a:p>
+        </p:txBody>
+      </p:sp>
+      <p:sp>
+        <p:nvSpPr>
+          <p:cNvPr id="6" name="Shape 4"/>
+          <p:cNvSpPr/>
+          <p:nvPr/>
+        </p:nvSpPr>
+        <p:spPr>
+          <a:xfrm>
+            <a:off x="2807208" y="2423160"/>
+            <a:ext cx="1975104" cy="1051560"/>
           </a:xfrm>
           <a:prstGeom prst="roundRect">
             <a:avLst>
-              <a:gd name="adj" fmla="val 12000"/>
+              <a:gd name="adj" fmla="val 10435"/>
             </a:avLst>
           </a:prstGeom>
           <a:solidFill>
@@ -5010,14 +4598,14 @@
       </p:sp>
       <p:sp>
         <p:nvSpPr>
-          <p:cNvPr id="8" name="Text 6"/>
-          <p:cNvSpPr/>
-          <p:nvPr/>
-        </p:nvSpPr>
-        <p:spPr>
-          <a:xfrm>
-            <a:off x="2807208" y="2971800"/>
-            <a:ext cx="1975104" cy="914400"/>
+          <p:cNvPr id="7" name="Text 5"/>
+          <p:cNvSpPr/>
+          <p:nvPr/>
+        </p:nvSpPr>
+        <p:spPr>
+          <a:xfrm>
+            <a:off x="2807208" y="2423160"/>
+            <a:ext cx="1975104" cy="1051560"/>
           </a:xfrm>
           <a:prstGeom prst="rect">
             <a:avLst/>
@@ -5033,7 +4621,7 @@
               <a:buNone/>
             </a:pPr>
             <a:r>
-              <a:rPr lang="en-US" sz="1400" b="1" dirty="0">
+              <a:rPr lang="en-US" sz="1500" b="1" dirty="0">
                 <a:solidFill>
                   <a:srgbClr val="17302A"/>
                 </a:solidFill>
@@ -5043,24 +4631,24 @@
               </a:rPr>
               <a:t>Australia</a:t>
             </a:r>
-            <a:endParaRPr lang="en-US" sz="1400" dirty="0"/>
-          </a:p>
-        </p:txBody>
-      </p:sp>
-      <p:sp>
-        <p:nvSpPr>
-          <p:cNvPr id="9" name="Shape 7"/>
-          <p:cNvSpPr/>
-          <p:nvPr/>
-        </p:nvSpPr>
-        <p:spPr>
-          <a:xfrm>
-            <a:off x="4928616" y="2971800"/>
-            <a:ext cx="1975104" cy="914400"/>
+            <a:endParaRPr lang="en-US" sz="1500" dirty="0"/>
+          </a:p>
+        </p:txBody>
+      </p:sp>
+      <p:sp>
+        <p:nvSpPr>
+          <p:cNvPr id="8" name="Shape 6"/>
+          <p:cNvSpPr/>
+          <p:nvPr/>
+        </p:nvSpPr>
+        <p:spPr>
+          <a:xfrm>
+            <a:off x="4928616" y="2423160"/>
+            <a:ext cx="1975104" cy="1051560"/>
           </a:xfrm>
           <a:prstGeom prst="roundRect">
             <a:avLst>
-              <a:gd name="adj" fmla="val 12000"/>
+              <a:gd name="adj" fmla="val 10435"/>
             </a:avLst>
           </a:prstGeom>
           <a:solidFill>
@@ -5076,14 +4664,14 @@
       </p:sp>
       <p:sp>
         <p:nvSpPr>
-          <p:cNvPr id="10" name="Text 8"/>
-          <p:cNvSpPr/>
-          <p:nvPr/>
-        </p:nvSpPr>
-        <p:spPr>
-          <a:xfrm>
-            <a:off x="4928616" y="2971800"/>
-            <a:ext cx="1975104" cy="914400"/>
+          <p:cNvPr id="9" name="Text 7"/>
+          <p:cNvSpPr/>
+          <p:nvPr/>
+        </p:nvSpPr>
+        <p:spPr>
+          <a:xfrm>
+            <a:off x="4928616" y="2423160"/>
+            <a:ext cx="1975104" cy="1051560"/>
           </a:xfrm>
           <a:prstGeom prst="rect">
             <a:avLst/>
@@ -5099,7 +4687,7 @@
               <a:buNone/>
             </a:pPr>
             <a:r>
-              <a:rPr lang="en-US" sz="1400" b="1" dirty="0">
+              <a:rPr lang="en-US" sz="1500" b="1" dirty="0">
                 <a:solidFill>
                   <a:srgbClr val="17302A"/>
                 </a:solidFill>
@@ -5107,26 +4695,26 @@
                 <a:ea typeface="Calibri" pitchFamily="34" charset="-122"/>
                 <a:cs typeface="Calibri" pitchFamily="34" charset="-120"/>
               </a:rPr>
-              <a:t>United Kingdom</a:t>
-            </a:r>
-            <a:endParaRPr lang="en-US" sz="1400" dirty="0"/>
-          </a:p>
-        </p:txBody>
-      </p:sp>
-      <p:sp>
-        <p:nvSpPr>
-          <p:cNvPr id="11" name="Shape 9"/>
-          <p:cNvSpPr/>
-          <p:nvPr/>
-        </p:nvSpPr>
-        <p:spPr>
-          <a:xfrm>
-            <a:off x="7050024" y="2971800"/>
-            <a:ext cx="1975104" cy="914400"/>
+              <a:t>UK</a:t>
+            </a:r>
+            <a:endParaRPr lang="en-US" sz="1500" dirty="0"/>
+          </a:p>
+        </p:txBody>
+      </p:sp>
+      <p:sp>
+        <p:nvSpPr>
+          <p:cNvPr id="10" name="Shape 8"/>
+          <p:cNvSpPr/>
+          <p:nvPr/>
+        </p:nvSpPr>
+        <p:spPr>
+          <a:xfrm>
+            <a:off x="7050024" y="2423160"/>
+            <a:ext cx="1975104" cy="1051560"/>
           </a:xfrm>
           <a:prstGeom prst="roundRect">
             <a:avLst>
-              <a:gd name="adj" fmla="val 12000"/>
+              <a:gd name="adj" fmla="val 10435"/>
             </a:avLst>
           </a:prstGeom>
           <a:solidFill>
@@ -5142,14 +4730,14 @@
       </p:sp>
       <p:sp>
         <p:nvSpPr>
-          <p:cNvPr id="12" name="Text 10"/>
-          <p:cNvSpPr/>
-          <p:nvPr/>
-        </p:nvSpPr>
-        <p:spPr>
-          <a:xfrm>
-            <a:off x="7050024" y="2971800"/>
-            <a:ext cx="1975104" cy="914400"/>
+          <p:cNvPr id="11" name="Text 9"/>
+          <p:cNvSpPr/>
+          <p:nvPr/>
+        </p:nvSpPr>
+        <p:spPr>
+          <a:xfrm>
+            <a:off x="7050024" y="2423160"/>
+            <a:ext cx="1975104" cy="1051560"/>
           </a:xfrm>
           <a:prstGeom prst="rect">
             <a:avLst/>
@@ -5165,7 +4753,7 @@
               <a:buNone/>
             </a:pPr>
             <a:r>
-              <a:rPr lang="en-US" sz="1400" b="1" dirty="0">
+              <a:rPr lang="en-US" sz="1500" b="1" dirty="0">
                 <a:solidFill>
                   <a:srgbClr val="17302A"/>
                 </a:solidFill>
@@ -5175,24 +4763,24 @@
               </a:rPr>
               <a:t>Ireland</a:t>
             </a:r>
-            <a:endParaRPr lang="en-US" sz="1400" dirty="0"/>
-          </a:p>
-        </p:txBody>
-      </p:sp>
-      <p:sp>
-        <p:nvSpPr>
-          <p:cNvPr id="13" name="Shape 11"/>
-          <p:cNvSpPr/>
-          <p:nvPr/>
-        </p:nvSpPr>
-        <p:spPr>
-          <a:xfrm>
-            <a:off x="9171432" y="2971800"/>
-            <a:ext cx="1975104" cy="914400"/>
+            <a:endParaRPr lang="en-US" sz="1500" dirty="0"/>
+          </a:p>
+        </p:txBody>
+      </p:sp>
+      <p:sp>
+        <p:nvSpPr>
+          <p:cNvPr id="12" name="Shape 10"/>
+          <p:cNvSpPr/>
+          <p:nvPr/>
+        </p:nvSpPr>
+        <p:spPr>
+          <a:xfrm>
+            <a:off x="9171432" y="2423160"/>
+            <a:ext cx="1975104" cy="1051560"/>
           </a:xfrm>
           <a:prstGeom prst="roundRect">
             <a:avLst>
-              <a:gd name="adj" fmla="val 12000"/>
+              <a:gd name="adj" fmla="val 10435"/>
             </a:avLst>
           </a:prstGeom>
           <a:solidFill>
@@ -5208,14 +4796,14 @@
       </p:sp>
       <p:sp>
         <p:nvSpPr>
-          <p:cNvPr id="14" name="Text 12"/>
-          <p:cNvSpPr/>
-          <p:nvPr/>
-        </p:nvSpPr>
-        <p:spPr>
-          <a:xfrm>
-            <a:off x="9171432" y="2971800"/>
-            <a:ext cx="1975104" cy="914400"/>
+          <p:cNvPr id="13" name="Text 11"/>
+          <p:cNvSpPr/>
+          <p:nvPr/>
+        </p:nvSpPr>
+        <p:spPr>
+          <a:xfrm>
+            <a:off x="9171432" y="2423160"/>
+            <a:ext cx="1975104" cy="1051560"/>
           </a:xfrm>
           <a:prstGeom prst="rect">
             <a:avLst/>
@@ -5231,7 +4819,7 @@
               <a:buNone/>
             </a:pPr>
             <a:r>
-              <a:rPr lang="en-US" sz="1400" b="1" dirty="0">
+              <a:rPr lang="en-US" sz="1500" b="1" dirty="0">
                 <a:solidFill>
                   <a:srgbClr val="17302A"/>
                 </a:solidFill>
@@ -5241,63 +4829,24 @@
               </a:rPr>
               <a:t>New Zealand</a:t>
             </a:r>
-            <a:endParaRPr lang="en-US" sz="1400" dirty="0"/>
-          </a:p>
-        </p:txBody>
-      </p:sp>
-      <p:sp>
-        <p:nvSpPr>
-          <p:cNvPr id="15" name="Text 13"/>
-          <p:cNvSpPr/>
-          <p:nvPr/>
-        </p:nvSpPr>
-        <p:spPr>
-          <a:xfrm>
-            <a:off x="685800" y="4224528"/>
-            <a:ext cx="10607040" cy="457200"/>
-          </a:xfrm>
-          <a:prstGeom prst="rect">
-            <a:avLst/>
-          </a:prstGeom>
-          <a:noFill/>
-          <a:ln/>
-        </p:spPr>
-        <p:txBody>
-          <a:bodyPr wrap="square" lIns="0" tIns="0" rIns="0" bIns="0" rtlCol="0" anchor="ctr"/>
-          <a:lstStyle/>
-          <a:p>
-            <a:pPr indent="0" marL="0">
-              <a:buNone/>
-            </a:pPr>
-            <a:r>
-              <a:rPr lang="en-US" sz="1400" dirty="0">
-                <a:solidFill>
-                  <a:srgbClr val="5C6F66"/>
-                </a:solidFill>
-                <a:latin typeface="Calibri" pitchFamily="34" charset="0"/>
-                <a:ea typeface="Calibri" pitchFamily="34" charset="-122"/>
-                <a:cs typeface="Calibri" pitchFamily="34" charset="-120"/>
-              </a:rPr>
-              <a:t>Same two problems everywhere: a generation priced out, and a tangle of government programs almost nobody understands.</a:t>
-            </a:r>
-            <a:endParaRPr lang="en-US" sz="1400" dirty="0"/>
-          </a:p>
-        </p:txBody>
-      </p:sp>
-      <p:sp>
-        <p:nvSpPr>
-          <p:cNvPr id="16" name="Shape 14"/>
-          <p:cNvSpPr/>
-          <p:nvPr/>
-        </p:nvSpPr>
-        <p:spPr>
-          <a:xfrm>
-            <a:off x="685800" y="4754880"/>
-            <a:ext cx="10607040" cy="1051560"/>
+            <a:endParaRPr lang="en-US" sz="1500" dirty="0"/>
+          </a:p>
+        </p:txBody>
+      </p:sp>
+      <p:sp>
+        <p:nvSpPr>
+          <p:cNvPr id="14" name="Shape 12"/>
+          <p:cNvSpPr/>
+          <p:nvPr/>
+        </p:nvSpPr>
+        <p:spPr>
+          <a:xfrm>
+            <a:off x="685800" y="4114800"/>
+            <a:ext cx="10607040" cy="1371600"/>
           </a:xfrm>
           <a:prstGeom prst="roundRect">
             <a:avLst>
-              <a:gd name="adj" fmla="val 12174"/>
+              <a:gd name="adj" fmla="val 10667"/>
             </a:avLst>
           </a:prstGeom>
           <a:solidFill>
@@ -5313,14 +4862,14 @@
       </p:sp>
       <p:sp>
         <p:nvSpPr>
-          <p:cNvPr id="17" name="Text 15"/>
-          <p:cNvSpPr/>
-          <p:nvPr/>
-        </p:nvSpPr>
-        <p:spPr>
-          <a:xfrm>
-            <a:off x="1143000" y="4754880"/>
-            <a:ext cx="9692640" cy="1051560"/>
+          <p:cNvPr id="15" name="Text 13"/>
+          <p:cNvSpPr/>
+          <p:nvPr/>
+        </p:nvSpPr>
+        <p:spPr>
+          <a:xfrm>
+            <a:off x="1234440" y="4114800"/>
+            <a:ext cx="9509760" cy="1371600"/>
           </a:xfrm>
           <a:prstGeom prst="rect">
             <a:avLst/>
@@ -5336,7 +4885,7 @@
               <a:buNone/>
             </a:pPr>
             <a:r>
-              <a:rPr lang="en-US" sz="2100" dirty="0">
+              <a:rPr lang="en-US" sz="3000" dirty="0">
                 <a:solidFill>
                   <a:srgbClr val="E3F2E9"/>
                 </a:solidFill>
@@ -5344,13 +4893,13 @@
                 <a:ea typeface="Cambria" pitchFamily="34" charset="-122"/>
                 <a:cs typeface="Cambria" pitchFamily="34" charset="-120"/>
               </a:rPr>
-              <a:t>KeyDate is a rules engine with a Canadian rulebook loaded. </a:t>
+              <a:t>The engine stays. </a:t>
             </a:r>
             <a:pPr indent="0" marL="0">
               <a:buNone/>
             </a:pPr>
             <a:r>
-              <a:rPr lang="en-US" sz="2100" b="1" dirty="0">
+              <a:rPr lang="en-US" sz="3000" b="1" dirty="0">
                 <a:solidFill>
                   <a:srgbClr val="E8B84B"/>
                 </a:solidFill>
@@ -5358,9 +4907,9 @@
                 <a:ea typeface="Cambria" pitchFamily="34" charset="-122"/>
                 <a:cs typeface="Cambria" pitchFamily="34" charset="-120"/>
               </a:rPr>
-              <a:t>The engine stays. The rulebook swaps.</a:t>
-            </a:r>
-            <a:endParaRPr lang="en-US" sz="2100" dirty="0"/>
+              <a:t>The rulebook swaps.</a:t>
+            </a:r>
+            <a:endParaRPr lang="en-US" sz="3000" dirty="0"/>
           </a:p>
         </p:txBody>
       </p:sp>
@@ -5404,8 +4953,8 @@
         </p:nvSpPr>
         <p:spPr>
           <a:xfrm>
-            <a:off x="685800" y="475488"/>
-            <a:ext cx="7315200" cy="274320"/>
+            <a:off x="685800" y="502920"/>
+            <a:ext cx="9144000" cy="274320"/>
           </a:xfrm>
           <a:prstGeom prst="rect">
             <a:avLst/>
@@ -5443,8 +4992,8 @@
         </p:nvSpPr>
         <p:spPr>
           <a:xfrm>
-            <a:off x="685800" y="804672"/>
-            <a:ext cx="10817352" cy="868680"/>
+            <a:off x="685800" y="914400"/>
+            <a:ext cx="10607040" cy="822960"/>
           </a:xfrm>
           <a:prstGeom prst="rect">
             <a:avLst/>
@@ -5476,99 +5025,18 @@
       </p:sp>
       <p:sp>
         <p:nvSpPr>
-          <p:cNvPr id="4" name="Text 2"/>
-          <p:cNvSpPr/>
-          <p:nvPr/>
-        </p:nvSpPr>
-        <p:spPr>
-          <a:xfrm>
-            <a:off x="685800" y="1874520"/>
-            <a:ext cx="10607040" cy="822960"/>
-          </a:xfrm>
-          <a:prstGeom prst="rect">
-            <a:avLst/>
-          </a:prstGeom>
-          <a:noFill/>
-          <a:ln/>
-        </p:spPr>
-        <p:txBody>
-          <a:bodyPr wrap="square" lIns="0" tIns="0" rIns="0" bIns="0" rtlCol="0" anchor="ctr"/>
-          <a:lstStyle/>
-          <a:p>
-            <a:pPr indent="0" marL="0">
-              <a:lnSpc>
-                <a:spcPts val="2400"/>
-              </a:lnSpc>
-              <a:buNone/>
-            </a:pPr>
-            <a:r>
-              <a:rPr lang="en-US" sz="1600" dirty="0">
-                <a:solidFill>
-                  <a:srgbClr val="E3F2E9"/>
-                </a:solidFill>
-                <a:latin typeface="Calibri" pitchFamily="34" charset="0"/>
-                <a:ea typeface="Calibri" pitchFamily="34" charset="-122"/>
-                <a:cs typeface="Calibri" pitchFamily="34" charset="-120"/>
-              </a:rPr>
-              <a:t>The obvious way to monetise this is to sell these users to mortgage brokers. People who just told you their income, their savings, and exactly when they’ll need a mortgage.</a:t>
-            </a:r>
-            <a:endParaRPr lang="en-US" sz="1600" dirty="0"/>
-          </a:p>
-        </p:txBody>
-      </p:sp>
-      <p:sp>
-        <p:nvSpPr>
-          <p:cNvPr id="5" name="Text 3"/>
-          <p:cNvSpPr/>
-          <p:nvPr/>
-        </p:nvSpPr>
-        <p:spPr>
-          <a:xfrm>
-            <a:off x="685800" y="2697480"/>
-            <a:ext cx="10607040" cy="411480"/>
-          </a:xfrm>
-          <a:prstGeom prst="rect">
-            <a:avLst/>
-          </a:prstGeom>
-          <a:noFill/>
-          <a:ln/>
-        </p:spPr>
-        <p:txBody>
-          <a:bodyPr wrap="square" lIns="0" tIns="0" rIns="0" bIns="0" rtlCol="0" anchor="ctr"/>
-          <a:lstStyle/>
-          <a:p>
-            <a:pPr indent="0" marL="0">
-              <a:buNone/>
-            </a:pPr>
-            <a:r>
-              <a:rPr lang="en-US" sz="2000" i="1" dirty="0">
-                <a:solidFill>
-                  <a:srgbClr val="FFFFFF"/>
-                </a:solidFill>
-                <a:latin typeface="Cambria" pitchFamily="34" charset="0"/>
-                <a:ea typeface="Cambria" pitchFamily="34" charset="-122"/>
-                <a:cs typeface="Cambria" pitchFamily="34" charset="-120"/>
-              </a:rPr>
-              <a:t>It is the most valuable lead list in the country.</a:t>
-            </a:r>
-            <a:endParaRPr lang="en-US" sz="2000" dirty="0"/>
-          </a:p>
-        </p:txBody>
-      </p:sp>
-      <p:sp>
-        <p:nvSpPr>
-          <p:cNvPr id="6" name="Shape 4"/>
-          <p:cNvSpPr/>
-          <p:nvPr/>
-        </p:nvSpPr>
-        <p:spPr>
-          <a:xfrm>
-            <a:off x="685800" y="3337560"/>
-            <a:ext cx="5074920" cy="1965960"/>
+          <p:cNvPr id="4" name="Shape 2"/>
+          <p:cNvSpPr/>
+          <p:nvPr/>
+        </p:nvSpPr>
+        <p:spPr>
+          <a:xfrm>
+            <a:off x="685800" y="2331720"/>
+            <a:ext cx="5074920" cy="2194560"/>
           </a:xfrm>
           <a:prstGeom prst="roundRect">
             <a:avLst>
-              <a:gd name="adj" fmla="val 7442"/>
+              <a:gd name="adj" fmla="val 6667"/>
             </a:avLst>
           </a:prstGeom>
           <a:solidFill>
@@ -5584,14 +5052,14 @@
       </p:sp>
       <p:sp>
         <p:nvSpPr>
-          <p:cNvPr id="7" name="Text 5"/>
-          <p:cNvSpPr/>
-          <p:nvPr/>
-        </p:nvSpPr>
-        <p:spPr>
-          <a:xfrm>
-            <a:off x="1097280" y="3639312"/>
-            <a:ext cx="4297680" cy="777240"/>
+          <p:cNvPr id="5" name="Text 3"/>
+          <p:cNvSpPr/>
+          <p:nvPr/>
+        </p:nvSpPr>
+        <p:spPr>
+          <a:xfrm>
+            <a:off x="1143000" y="2331720"/>
+            <a:ext cx="4297680" cy="2194560"/>
           </a:xfrm>
           <a:prstGeom prst="rect">
             <a:avLst/>
@@ -5604,10 +5072,13 @@
           <a:lstStyle/>
           <a:p>
             <a:pPr indent="0" marL="0">
-              <a:buNone/>
-            </a:pPr>
-            <a:r>
-              <a:rPr lang="en-US" sz="2000" b="1" dirty="0">
+              <a:lnSpc>
+                <a:spcPts val="3400"/>
+              </a:lnSpc>
+              <a:buNone/>
+            </a:pPr>
+            <a:r>
+              <a:rPr lang="en-US" sz="2600" b="1" dirty="0">
                 <a:solidFill>
                   <a:srgbClr val="FFFFFF"/>
                 </a:solidFill>
@@ -5615,65 +5086,46 @@
                 <a:ea typeface="Cambria" pitchFamily="34" charset="-122"/>
                 <a:cs typeface="Cambria" pitchFamily="34" charset="-120"/>
               </a:rPr>
-              <a:t>Our privacy policy says we never will.</a:t>
-            </a:r>
-            <a:endParaRPr lang="en-US" sz="2000" dirty="0"/>
-          </a:p>
-        </p:txBody>
-      </p:sp>
-      <p:sp>
-        <p:nvSpPr>
-          <p:cNvPr id="8" name="Text 6"/>
-          <p:cNvSpPr/>
-          <p:nvPr/>
-        </p:nvSpPr>
-        <p:spPr>
-          <a:xfrm>
-            <a:off x="1097280" y="4498848"/>
-            <a:ext cx="4297680" cy="457200"/>
-          </a:xfrm>
-          <a:prstGeom prst="rect">
-            <a:avLst/>
-          </a:prstGeom>
-          <a:noFill/>
-          <a:ln/>
-        </p:spPr>
-        <p:txBody>
-          <a:bodyPr wrap="square" lIns="0" tIns="0" rIns="0" bIns="0" rtlCol="0" anchor="ctr"/>
-          <a:lstStyle/>
+              <a:t>We never sell you</a:t>
+            </a:r>
+            <a:endParaRPr lang="en-US" sz="2600" dirty="0"/>
+          </a:p>
           <a:p>
             <a:pPr indent="0" marL="0">
-              <a:buNone/>
-            </a:pPr>
-            <a:r>
-              <a:rPr lang="en-US" sz="1400" dirty="0">
-                <a:solidFill>
-                  <a:srgbClr val="E3F2E9"/>
-                </a:solidFill>
-                <a:latin typeface="Calibri" pitchFamily="34" charset="0"/>
-                <a:ea typeface="Calibri" pitchFamily="34" charset="-122"/>
-                <a:cs typeface="Calibri" pitchFamily="34" charset="-120"/>
-              </a:rPr>
-              <a:t>In writing. Live on the site today.</a:t>
-            </a:r>
-            <a:endParaRPr lang="en-US" sz="1400" dirty="0"/>
-          </a:p>
-        </p:txBody>
-      </p:sp>
-      <p:sp>
-        <p:nvSpPr>
-          <p:cNvPr id="9" name="Shape 7"/>
-          <p:cNvSpPr/>
-          <p:nvPr/>
-        </p:nvSpPr>
-        <p:spPr>
-          <a:xfrm>
-            <a:off x="6217920" y="3337560"/>
-            <a:ext cx="5074920" cy="1965960"/>
+              <a:lnSpc>
+                <a:spcPts val="3400"/>
+              </a:lnSpc>
+              <a:buNone/>
+            </a:pPr>
+            <a:r>
+              <a:rPr lang="en-US" sz="2600" b="1" dirty="0">
+                <a:solidFill>
+                  <a:srgbClr val="FFFFFF"/>
+                </a:solidFill>
+                <a:latin typeface="Cambria" pitchFamily="34" charset="0"/>
+                <a:ea typeface="Cambria" pitchFamily="34" charset="-122"/>
+                <a:cs typeface="Cambria" pitchFamily="34" charset="-120"/>
+              </a:rPr>
+              <a:t>to brokers.</a:t>
+            </a:r>
+            <a:endParaRPr lang="en-US" sz="2600" dirty="0"/>
+          </a:p>
+        </p:txBody>
+      </p:sp>
+      <p:sp>
+        <p:nvSpPr>
+          <p:cNvPr id="6" name="Shape 4"/>
+          <p:cNvSpPr/>
+          <p:nvPr/>
+        </p:nvSpPr>
+        <p:spPr>
+          <a:xfrm>
+            <a:off x="6217920" y="2331720"/>
+            <a:ext cx="5074920" cy="2194560"/>
           </a:xfrm>
           <a:prstGeom prst="roundRect">
             <a:avLst>
-              <a:gd name="adj" fmla="val 7442"/>
+              <a:gd name="adj" fmla="val 6667"/>
             </a:avLst>
           </a:prstGeom>
           <a:solidFill>
@@ -5689,14 +5141,14 @@
       </p:sp>
       <p:sp>
         <p:nvSpPr>
-          <p:cNvPr id="10" name="Text 8"/>
-          <p:cNvSpPr/>
-          <p:nvPr/>
-        </p:nvSpPr>
-        <p:spPr>
-          <a:xfrm>
-            <a:off x="6629400" y="3639312"/>
-            <a:ext cx="4297680" cy="777240"/>
+          <p:cNvPr id="7" name="Text 5"/>
+          <p:cNvSpPr/>
+          <p:nvPr/>
+        </p:nvSpPr>
+        <p:spPr>
+          <a:xfrm>
+            <a:off x="6675120" y="2331720"/>
+            <a:ext cx="4297680" cy="2194560"/>
           </a:xfrm>
           <a:prstGeom prst="rect">
             <a:avLst/>
@@ -5709,10 +5161,13 @@
           <a:lstStyle/>
           <a:p>
             <a:pPr indent="0" marL="0">
-              <a:buNone/>
-            </a:pPr>
-            <a:r>
-              <a:rPr lang="en-US" sz="2000" b="1" dirty="0">
+              <a:lnSpc>
+                <a:spcPts val="3400"/>
+              </a:lnSpc>
+              <a:buNone/>
+            </a:pPr>
+            <a:r>
+              <a:rPr lang="en-US" sz="2600" b="1" dirty="0">
                 <a:solidFill>
                   <a:srgbClr val="FFFFFF"/>
                 </a:solidFill>
@@ -5720,87 +5175,68 @@
                 <a:ea typeface="Cambria" pitchFamily="34" charset="-122"/>
                 <a:cs typeface="Cambria" pitchFamily="34" charset="-120"/>
               </a:rPr>
-              <a:t>We built the tool that tells you not to buy.</a:t>
-            </a:r>
-            <a:endParaRPr lang="en-US" sz="2000" dirty="0"/>
-          </a:p>
-        </p:txBody>
-      </p:sp>
-      <p:sp>
-        <p:nvSpPr>
-          <p:cNvPr id="11" name="Text 9"/>
-          <p:cNvSpPr/>
-          <p:nvPr/>
-        </p:nvSpPr>
-        <p:spPr>
-          <a:xfrm>
-            <a:off x="6629400" y="4498848"/>
-            <a:ext cx="4297680" cy="457200"/>
-          </a:xfrm>
-          <a:prstGeom prst="rect">
-            <a:avLst/>
-          </a:prstGeom>
-          <a:noFill/>
-          <a:ln/>
-        </p:spPr>
-        <p:txBody>
-          <a:bodyPr wrap="square" lIns="0" tIns="0" rIns="0" bIns="0" rtlCol="0" anchor="ctr"/>
-          <a:lstStyle/>
+              <a:t>We built the tool</a:t>
+            </a:r>
+            <a:endParaRPr lang="en-US" sz="2600" dirty="0"/>
+          </a:p>
           <a:p>
             <a:pPr indent="0" marL="0">
-              <a:buNone/>
-            </a:pPr>
-            <a:r>
-              <a:rPr lang="en-US" sz="1400" dirty="0">
-                <a:solidFill>
-                  <a:srgbClr val="E3F2E9"/>
-                </a:solidFill>
-                <a:latin typeface="Calibri" pitchFamily="34" charset="0"/>
-                <a:ea typeface="Calibri" pitchFamily="34" charset="-122"/>
-                <a:cs typeface="Calibri" pitchFamily="34" charset="-120"/>
-              </a:rPr>
-              <a:t>Rent-vs-buy says rent when the maths says rent.</a:t>
-            </a:r>
-            <a:endParaRPr lang="en-US" sz="1400" dirty="0"/>
-          </a:p>
-        </p:txBody>
-      </p:sp>
-      <p:sp>
-        <p:nvSpPr>
-          <p:cNvPr id="12" name="Text 10"/>
-          <p:cNvSpPr/>
-          <p:nvPr/>
-        </p:nvSpPr>
-        <p:spPr>
-          <a:xfrm>
-            <a:off x="685800" y="5577840"/>
-            <a:ext cx="10607040" cy="457200"/>
-          </a:xfrm>
-          <a:prstGeom prst="rect">
-            <a:avLst/>
-          </a:prstGeom>
-          <a:noFill/>
-          <a:ln/>
-        </p:spPr>
-        <p:txBody>
-          <a:bodyPr wrap="square" lIns="0" tIns="0" rIns="0" bIns="0" rtlCol="0" anchor="ctr"/>
-          <a:lstStyle/>
-          <a:p>
-            <a:pPr indent="0" marL="0">
-              <a:buNone/>
-            </a:pPr>
-            <a:r>
-              <a:rPr lang="en-US" sz="2100" i="1" dirty="0">
-                <a:solidFill>
-                  <a:srgbClr val="E8B84B"/>
+              <a:lnSpc>
+                <a:spcPts val="3400"/>
+              </a:lnSpc>
+              <a:buNone/>
+            </a:pPr>
+            <a:r>
+              <a:rPr lang="en-US" sz="2600" b="1" dirty="0">
+                <a:solidFill>
+                  <a:srgbClr val="FFFFFF"/>
                 </a:solidFill>
                 <a:latin typeface="Cambria" pitchFamily="34" charset="0"/>
                 <a:ea typeface="Cambria" pitchFamily="34" charset="-122"/>
                 <a:cs typeface="Cambria" pitchFamily="34" charset="-120"/>
               </a:rPr>
-              <a:t>A company built on referral fees can never say that sentence.</a:t>
-            </a:r>
-            <a:endParaRPr lang="en-US" sz="2100" dirty="0"/>
+              <a:t>that says don’t buy.</a:t>
+            </a:r>
+            <a:endParaRPr lang="en-US" sz="2600" dirty="0"/>
+          </a:p>
+        </p:txBody>
+      </p:sp>
+      <p:sp>
+        <p:nvSpPr>
+          <p:cNvPr id="8" name="Text 6"/>
+          <p:cNvSpPr/>
+          <p:nvPr/>
+        </p:nvSpPr>
+        <p:spPr>
+          <a:xfrm>
+            <a:off x="685800" y="5029200"/>
+            <a:ext cx="10607040" cy="640080"/>
+          </a:xfrm>
+          <a:prstGeom prst="rect">
+            <a:avLst/>
+          </a:prstGeom>
+          <a:noFill/>
+          <a:ln/>
+        </p:spPr>
+        <p:txBody>
+          <a:bodyPr wrap="square" lIns="0" tIns="0" rIns="0" bIns="0" rtlCol="0" anchor="ctr"/>
+          <a:lstStyle/>
+          <a:p>
+            <a:pPr indent="0" marL="0">
+              <a:buNone/>
+            </a:pPr>
+            <a:r>
+              <a:rPr lang="en-US" sz="2600" i="1" dirty="0">
+                <a:solidFill>
+                  <a:srgbClr val="E8B84B"/>
+                </a:solidFill>
+                <a:latin typeface="Cambria" pitchFamily="34" charset="0"/>
+                <a:ea typeface="Cambria" pitchFamily="34" charset="-122"/>
+                <a:cs typeface="Cambria" pitchFamily="34" charset="-120"/>
+              </a:rPr>
+              <a:t>A company on referral fees can never say that.</a:t>
+            </a:r>
+            <a:endParaRPr lang="en-US" sz="2600" dirty="0"/>
           </a:p>
         </p:txBody>
       </p:sp>
@@ -5844,8 +5280,8 @@
         </p:nvSpPr>
         <p:spPr>
           <a:xfrm>
-            <a:off x="685800" y="475488"/>
-            <a:ext cx="7315200" cy="274320"/>
+            <a:off x="685800" y="502920"/>
+            <a:ext cx="9144000" cy="274320"/>
           </a:xfrm>
           <a:prstGeom prst="rect">
             <a:avLst/>
@@ -5883,8 +5319,8 @@
         </p:nvSpPr>
         <p:spPr>
           <a:xfrm>
-            <a:off x="685800" y="804672"/>
-            <a:ext cx="10817352" cy="868680"/>
+            <a:off x="685800" y="914400"/>
+            <a:ext cx="10607040" cy="822960"/>
           </a:xfrm>
           <a:prstGeom prst="rect">
             <a:avLst/>
@@ -5908,7 +5344,7 @@
                 <a:ea typeface="Cambria" pitchFamily="34" charset="-122"/>
                 <a:cs typeface="Cambria" pitchFamily="34" charset="-120"/>
               </a:rPr>
-              <a:t>Built, shipped, and live</a:t>
+              <a:t>Built, shipped, live</a:t>
             </a:r>
             <a:endParaRPr lang="en-US" sz="4000" dirty="0"/>
           </a:p>
@@ -5922,12 +5358,12 @@
         </p:nvSpPr>
         <p:spPr>
           <a:xfrm>
-            <a:off x="685800" y="1965960"/>
-            <a:ext cx="3364992" cy="1920240"/>
+            <a:off x="685800" y="2286000"/>
+            <a:ext cx="3364992" cy="1874520"/>
           </a:xfrm>
           <a:prstGeom prst="roundRect">
             <a:avLst>
-              <a:gd name="adj" fmla="val 7619"/>
+              <a:gd name="adj" fmla="val 7805"/>
             </a:avLst>
           </a:prstGeom>
           <a:solidFill>
@@ -5949,8 +5385,8 @@
         </p:nvSpPr>
         <p:spPr>
           <a:xfrm>
-            <a:off x="1051560" y="2212848"/>
-            <a:ext cx="2651760" cy="777240"/>
+            <a:off x="1097280" y="2560320"/>
+            <a:ext cx="2651760" cy="822960"/>
           </a:xfrm>
           <a:prstGeom prst="rect">
             <a:avLst/>
@@ -5966,7 +5402,7 @@
               <a:buNone/>
             </a:pPr>
             <a:r>
-              <a:rPr lang="en-US" sz="4200" b="1" dirty="0">
+              <a:rPr lang="en-US" sz="4600" b="1" dirty="0">
                 <a:solidFill>
                   <a:srgbClr val="3FA672"/>
                 </a:solidFill>
@@ -5976,7 +5412,7 @@
               </a:rPr>
               <a:t>467</a:t>
             </a:r>
-            <a:endParaRPr lang="en-US" sz="4200" dirty="0"/>
+            <a:endParaRPr lang="en-US" sz="4600" dirty="0"/>
           </a:p>
         </p:txBody>
       </p:sp>
@@ -5988,8 +5424,8 @@
         </p:nvSpPr>
         <p:spPr>
           <a:xfrm>
-            <a:off x="1051560" y="3035808"/>
-            <a:ext cx="2697480" cy="685800"/>
+            <a:off x="1097280" y="3429000"/>
+            <a:ext cx="2697480" cy="365760"/>
           </a:xfrm>
           <a:prstGeom prst="rect">
             <a:avLst/>
@@ -6002,13 +5438,10 @@
           <a:lstStyle/>
           <a:p>
             <a:pPr indent="0" marL="0">
-              <a:lnSpc>
-                <a:spcPts val="1800"/>
-              </a:lnSpc>
-              <a:buNone/>
-            </a:pPr>
-            <a:r>
-              <a:rPr lang="en-US" sz="1350" dirty="0">
+              <a:buNone/>
+            </a:pPr>
+            <a:r>
+              <a:rPr lang="en-US" sz="1500" dirty="0">
                 <a:solidFill>
                   <a:srgbClr val="5C6F66"/>
                 </a:solidFill>
@@ -6016,29 +5449,9 @@
                 <a:ea typeface="Calibri" pitchFamily="34" charset="-122"/>
                 <a:cs typeface="Calibri" pitchFamily="34" charset="-120"/>
               </a:rPr>
-              <a:t>Canadian municipalities</a:t>
-            </a:r>
-            <a:endParaRPr lang="en-US" sz="1350" dirty="0"/>
-          </a:p>
-          <a:p>
-            <a:pPr indent="0" marL="0">
-              <a:lnSpc>
-                <a:spcPts val="1800"/>
-              </a:lnSpc>
-              <a:buNone/>
-            </a:pPr>
-            <a:r>
-              <a:rPr lang="en-US" sz="1350" dirty="0">
-                <a:solidFill>
-                  <a:srgbClr val="5C6F66"/>
-                </a:solidFill>
-                <a:latin typeface="Calibri" pitchFamily="34" charset="0"/>
-                <a:ea typeface="Calibri" pitchFamily="34" charset="-122"/>
-                <a:cs typeface="Calibri" pitchFamily="34" charset="-120"/>
-              </a:rPr>
-              <a:t>in the app today</a:t>
-            </a:r>
-            <a:endParaRPr lang="en-US" sz="1350" dirty="0"/>
+              <a:t>municipalities</a:t>
+            </a:r>
+            <a:endParaRPr lang="en-US" sz="1500" dirty="0"/>
           </a:p>
         </p:txBody>
       </p:sp>
@@ -6050,12 +5463,12 @@
         </p:nvSpPr>
         <p:spPr>
           <a:xfrm>
-            <a:off x="4306824" y="1965960"/>
-            <a:ext cx="3364992" cy="1920240"/>
+            <a:off x="4306824" y="2286000"/>
+            <a:ext cx="3364992" cy="1874520"/>
           </a:xfrm>
           <a:prstGeom prst="roundRect">
             <a:avLst>
-              <a:gd name="adj" fmla="val 7619"/>
+              <a:gd name="adj" fmla="val 7805"/>
             </a:avLst>
           </a:prstGeom>
           <a:solidFill>
@@ -6077,8 +5490,8 @@
         </p:nvSpPr>
         <p:spPr>
           <a:xfrm>
-            <a:off x="4672584" y="2212848"/>
-            <a:ext cx="2651760" cy="777240"/>
+            <a:off x="4718304" y="2560320"/>
+            <a:ext cx="2651760" cy="822960"/>
           </a:xfrm>
           <a:prstGeom prst="rect">
             <a:avLst/>
@@ -6094,7 +5507,7 @@
               <a:buNone/>
             </a:pPr>
             <a:r>
-              <a:rPr lang="en-US" sz="4200" b="1" dirty="0">
+              <a:rPr lang="en-US" sz="4600" b="1" dirty="0">
                 <a:solidFill>
                   <a:srgbClr val="3FA672"/>
                 </a:solidFill>
@@ -6104,7 +5517,7 @@
               </a:rPr>
               <a:t>~$0</a:t>
             </a:r>
-            <a:endParaRPr lang="en-US" sz="4200" dirty="0"/>
+            <a:endParaRPr lang="en-US" sz="4600" dirty="0"/>
           </a:p>
         </p:txBody>
       </p:sp>
@@ -6116,8 +5529,8 @@
         </p:nvSpPr>
         <p:spPr>
           <a:xfrm>
-            <a:off x="4672584" y="3035808"/>
-            <a:ext cx="2697480" cy="685800"/>
+            <a:off x="4718304" y="3429000"/>
+            <a:ext cx="2697480" cy="365760"/>
           </a:xfrm>
           <a:prstGeom prst="rect">
             <a:avLst/>
@@ -6130,13 +5543,10 @@
           <a:lstStyle/>
           <a:p>
             <a:pPr indent="0" marL="0">
-              <a:lnSpc>
-                <a:spcPts val="1800"/>
-              </a:lnSpc>
-              <a:buNone/>
-            </a:pPr>
-            <a:r>
-              <a:rPr lang="en-US" sz="1350" dirty="0">
+              <a:buNone/>
+            </a:pPr>
+            <a:r>
+              <a:rPr lang="en-US" sz="1500" dirty="0">
                 <a:solidFill>
                   <a:srgbClr val="5C6F66"/>
                 </a:solidFill>
@@ -6144,29 +5554,9 @@
                 <a:ea typeface="Calibri" pitchFamily="34" charset="-122"/>
                 <a:cs typeface="Calibri" pitchFamily="34" charset="-120"/>
               </a:rPr>
-              <a:t>marginal cost</a:t>
-            </a:r>
-            <a:endParaRPr lang="en-US" sz="1350" dirty="0"/>
-          </a:p>
-          <a:p>
-            <a:pPr indent="0" marL="0">
-              <a:lnSpc>
-                <a:spcPts val="1800"/>
-              </a:lnSpc>
-              <a:buNone/>
-            </a:pPr>
-            <a:r>
-              <a:rPr lang="en-US" sz="1350" dirty="0">
-                <a:solidFill>
-                  <a:srgbClr val="5C6F66"/>
-                </a:solidFill>
-                <a:latin typeface="Calibri" pitchFamily="34" charset="0"/>
-                <a:ea typeface="Calibri" pitchFamily="34" charset="-122"/>
-                <a:cs typeface="Calibri" pitchFamily="34" charset="-120"/>
-              </a:rPr>
-              <a:t>per new user</a:t>
-            </a:r>
-            <a:endParaRPr lang="en-US" sz="1350" dirty="0"/>
+              <a:t>cost per user</a:t>
+            </a:r>
+            <a:endParaRPr lang="en-US" sz="1500" dirty="0"/>
           </a:p>
         </p:txBody>
       </p:sp>
@@ -6178,12 +5568,12 @@
         </p:nvSpPr>
         <p:spPr>
           <a:xfrm>
-            <a:off x="7927848" y="1965960"/>
-            <a:ext cx="3364992" cy="1920240"/>
+            <a:off x="7927848" y="2286000"/>
+            <a:ext cx="3364992" cy="1874520"/>
           </a:xfrm>
           <a:prstGeom prst="roundRect">
             <a:avLst>
-              <a:gd name="adj" fmla="val 7619"/>
+              <a:gd name="adj" fmla="val 7805"/>
             </a:avLst>
           </a:prstGeom>
           <a:solidFill>
@@ -6205,8 +5595,8 @@
         </p:nvSpPr>
         <p:spPr>
           <a:xfrm>
-            <a:off x="8293608" y="2212848"/>
-            <a:ext cx="2651760" cy="777240"/>
+            <a:off x="8339328" y="2560320"/>
+            <a:ext cx="2651760" cy="822960"/>
           </a:xfrm>
           <a:prstGeom prst="rect">
             <a:avLst/>
@@ -6222,7 +5612,7 @@
               <a:buNone/>
             </a:pPr>
             <a:r>
-              <a:rPr lang="en-US" sz="4200" b="1" dirty="0">
+              <a:rPr lang="en-US" sz="4600" b="1" dirty="0">
                 <a:solidFill>
                   <a:srgbClr val="3FA672"/>
                 </a:solidFill>
@@ -6232,7 +5622,7 @@
               </a:rPr>
               <a:t>1</a:t>
             </a:r>
-            <a:endParaRPr lang="en-US" sz="4200" dirty="0"/>
+            <a:endParaRPr lang="en-US" sz="4600" dirty="0"/>
           </a:p>
         </p:txBody>
       </p:sp>
@@ -6244,8 +5634,8 @@
         </p:nvSpPr>
         <p:spPr>
           <a:xfrm>
-            <a:off x="8293608" y="3035808"/>
-            <a:ext cx="2697480" cy="685800"/>
+            <a:off x="8339328" y="3429000"/>
+            <a:ext cx="2697480" cy="365760"/>
           </a:xfrm>
           <a:prstGeom prst="rect">
             <a:avLst/>
@@ -6258,13 +5648,10 @@
           <a:lstStyle/>
           <a:p>
             <a:pPr indent="0" marL="0">
-              <a:lnSpc>
-                <a:spcPts val="1800"/>
-              </a:lnSpc>
-              <a:buNone/>
-            </a:pPr>
-            <a:r>
-              <a:rPr lang="en-US" sz="1350" dirty="0">
+              <a:buNone/>
+            </a:pPr>
+            <a:r>
+              <a:rPr lang="en-US" sz="1500" dirty="0">
                 <a:solidFill>
                   <a:srgbClr val="5C6F66"/>
                 </a:solidFill>
@@ -6272,29 +5659,9 @@
                 <a:ea typeface="Calibri" pitchFamily="34" charset="-122"/>
                 <a:cs typeface="Calibri" pitchFamily="34" charset="-120"/>
               </a:rPr>
-              <a:t>founder — built and</a:t>
-            </a:r>
-            <a:endParaRPr lang="en-US" sz="1350" dirty="0"/>
-          </a:p>
-          <a:p>
-            <a:pPr indent="0" marL="0">
-              <a:lnSpc>
-                <a:spcPts val="1800"/>
-              </a:lnSpc>
-              <a:buNone/>
-            </a:pPr>
-            <a:r>
-              <a:rPr lang="en-US" sz="1350" dirty="0">
-                <a:solidFill>
-                  <a:srgbClr val="5C6F66"/>
-                </a:solidFill>
-                <a:latin typeface="Calibri" pitchFamily="34" charset="0"/>
-                <a:ea typeface="Calibri" pitchFamily="34" charset="-122"/>
-                <a:cs typeface="Calibri" pitchFamily="34" charset="-120"/>
-              </a:rPr>
-              <a:t>shipped it end to end</a:t>
-            </a:r>
-            <a:endParaRPr lang="en-US" sz="1350" dirty="0"/>
+              <a:t>founder</a:t>
+            </a:r>
+            <a:endParaRPr lang="en-US" sz="1500" dirty="0"/>
           </a:p>
         </p:txBody>
       </p:sp>
@@ -6306,12 +5673,12 @@
         </p:nvSpPr>
         <p:spPr>
           <a:xfrm>
-            <a:off x="685800" y="4160520"/>
-            <a:ext cx="10607040" cy="1600200"/>
+            <a:off x="685800" y="4480560"/>
+            <a:ext cx="10607040" cy="1097280"/>
           </a:xfrm>
           <a:prstGeom prst="roundRect">
             <a:avLst>
-              <a:gd name="adj" fmla="val 9143"/>
+              <a:gd name="adj" fmla="val 13333"/>
             </a:avLst>
           </a:prstGeom>
           <a:solidFill>
@@ -6333,8 +5700,8 @@
         </p:nvSpPr>
         <p:spPr>
           <a:xfrm>
-            <a:off x="1143000" y="4407408"/>
-            <a:ext cx="9692640" cy="411480"/>
+            <a:off x="1234440" y="4480560"/>
+            <a:ext cx="9509760" cy="1097280"/>
           </a:xfrm>
           <a:prstGeom prst="rect">
             <a:avLst/>
@@ -6350,7 +5717,7 @@
               <a:buNone/>
             </a:pPr>
             <a:r>
-              <a:rPr lang="en-US" sz="2100" b="1" dirty="0">
+              <a:rPr lang="en-US" sz="2600" b="1" dirty="0">
                 <a:solidFill>
                   <a:srgbClr val="1E4D3B"/>
                 </a:solidFill>
@@ -6360,49 +5727,7 @@
               </a:rPr>
               <a:t>A new country is a rulebook, not a rebuild.</a:t>
             </a:r>
-            <a:endParaRPr lang="en-US" sz="2100" dirty="0"/>
-          </a:p>
-        </p:txBody>
-      </p:sp>
-      <p:sp>
-        <p:nvSpPr>
-          <p:cNvPr id="15" name="Text 13"/>
-          <p:cNvSpPr/>
-          <p:nvPr/>
-        </p:nvSpPr>
-        <p:spPr>
-          <a:xfrm>
-            <a:off x="1143000" y="4892040"/>
-            <a:ext cx="9692640" cy="731520"/>
-          </a:xfrm>
-          <a:prstGeom prst="rect">
-            <a:avLst/>
-          </a:prstGeom>
-          <a:noFill/>
-          <a:ln/>
-        </p:spPr>
-        <p:txBody>
-          <a:bodyPr wrap="square" lIns="0" tIns="0" rIns="0" bIns="0" rtlCol="0" anchor="ctr"/>
-          <a:lstStyle/>
-          <a:p>
-            <a:pPr indent="0" marL="0">
-              <a:lnSpc>
-                <a:spcPts val="2100"/>
-              </a:lnSpc>
-              <a:buNone/>
-            </a:pPr>
-            <a:r>
-              <a:rPr lang="en-US" sz="1450" dirty="0">
-                <a:solidFill>
-                  <a:srgbClr val="17302A"/>
-                </a:solidFill>
-                <a:latin typeface="Calibri" pitchFamily="34" charset="0"/>
-                <a:ea typeface="Calibri" pitchFamily="34" charset="-122"/>
-                <a:cs typeface="Calibri" pitchFamily="34" charset="-120"/>
-              </a:rPr>
-              <a:t>Live at keydate.ca  ·  incorporated  ·  privacy policy, terms and content moderation in place before the first user — because I’d rather be trusted than fast.</a:t>
-            </a:r>
-            <a:endParaRPr lang="en-US" sz="1450" dirty="0"/>
+            <a:endParaRPr lang="en-US" sz="2600" dirty="0"/>
           </a:p>
         </p:txBody>
       </p:sp>

--- a/apps/keydate/pitch/KeyDate-JCI-Edmonton.pptx
+++ b/apps/keydate/pitch/KeyDate-JCI-Edmonton.pptx
@@ -1798,13 +1798,13 @@
               <a:buNone/>
             </a:pPr>
             <a:r>
-              <a:rPr lang="en-US" sz="6600" b="1" dirty="0">
+              <a:rPr lang="en-US" sz="5800" b="1" dirty="0">
                 <a:solidFill>
                   <a:srgbClr val="FFFFFF"/>
                 </a:solidFill>
-                <a:latin typeface="Cambria" pitchFamily="34" charset="0"/>
-                <a:ea typeface="Cambria" pitchFamily="34" charset="-122"/>
-                <a:cs typeface="Cambria" pitchFamily="34" charset="-120"/>
+                <a:latin typeface="Montserrat" pitchFamily="34" charset="0"/>
+                <a:ea typeface="Montserrat" pitchFamily="34" charset="-122"/>
+                <a:cs typeface="Montserrat" pitchFamily="34" charset="-120"/>
               </a:rPr>
               <a:t>Key</a:t>
             </a:r>
@@ -1812,17 +1812,17 @@
               <a:buNone/>
             </a:pPr>
             <a:r>
-              <a:rPr lang="en-US" sz="6600" b="1" dirty="0">
+              <a:rPr lang="en-US" sz="5800" b="1" dirty="0">
                 <a:solidFill>
                   <a:srgbClr val="3FA672"/>
                 </a:solidFill>
-                <a:latin typeface="Cambria" pitchFamily="34" charset="0"/>
-                <a:ea typeface="Cambria" pitchFamily="34" charset="-122"/>
-                <a:cs typeface="Cambria" pitchFamily="34" charset="-120"/>
+                <a:latin typeface="Montserrat" pitchFamily="34" charset="0"/>
+                <a:ea typeface="Montserrat" pitchFamily="34" charset="-122"/>
+                <a:cs typeface="Montserrat" pitchFamily="34" charset="-120"/>
               </a:rPr>
               <a:t>Date</a:t>
             </a:r>
-            <a:endParaRPr lang="en-US" sz="6600" dirty="0"/>
+            <a:endParaRPr lang="en-US" sz="5800" dirty="0"/>
           </a:p>
         </p:txBody>
       </p:sp>
@@ -1854,17 +1854,17 @@
               <a:buNone/>
             </a:pPr>
             <a:r>
-              <a:rPr lang="en-US" sz="3200" dirty="0">
+              <a:rPr lang="en-US" sz="2800" dirty="0">
                 <a:solidFill>
                   <a:srgbClr val="E3F2E9"/>
                 </a:solidFill>
-                <a:latin typeface="Cambria" pitchFamily="34" charset="0"/>
-                <a:ea typeface="Cambria" pitchFamily="34" charset="-122"/>
-                <a:cs typeface="Cambria" pitchFamily="34" charset="-120"/>
+                <a:latin typeface="Montserrat" pitchFamily="34" charset="0"/>
+                <a:ea typeface="Montserrat" pitchFamily="34" charset="-122"/>
+                <a:cs typeface="Montserrat" pitchFamily="34" charset="-120"/>
               </a:rPr>
               <a:t>Owning a home isn’t impossible.</a:t>
             </a:r>
-            <a:endParaRPr lang="en-US" sz="3200" dirty="0"/>
+            <a:endParaRPr lang="en-US" sz="2800" dirty="0"/>
           </a:p>
           <a:p>
             <a:pPr indent="0" marL="0">
@@ -1874,17 +1874,17 @@
               <a:buNone/>
             </a:pPr>
             <a:r>
-              <a:rPr lang="en-US" sz="3200" dirty="0">
+              <a:rPr lang="en-US" sz="2800" dirty="0">
                 <a:solidFill>
                   <a:srgbClr val="E3F2E9"/>
                 </a:solidFill>
-                <a:latin typeface="Cambria" pitchFamily="34" charset="0"/>
-                <a:ea typeface="Cambria" pitchFamily="34" charset="-122"/>
-                <a:cs typeface="Cambria" pitchFamily="34" charset="-120"/>
+                <a:latin typeface="Montserrat" pitchFamily="34" charset="0"/>
+                <a:ea typeface="Montserrat" pitchFamily="34" charset="-122"/>
+                <a:cs typeface="Montserrat" pitchFamily="34" charset="-120"/>
               </a:rPr>
               <a:t>It has a date.</a:t>
             </a:r>
-            <a:endParaRPr lang="en-US" sz="3200" dirty="0"/>
+            <a:endParaRPr lang="en-US" sz="2800" dirty="0"/>
           </a:p>
         </p:txBody>
       </p:sp>
@@ -1917,9 +1917,9 @@
                 <a:solidFill>
                   <a:srgbClr val="E3F2E9"/>
                 </a:solidFill>
-                <a:latin typeface="Calibri" pitchFamily="34" charset="0"/>
-                <a:ea typeface="Calibri" pitchFamily="34" charset="-122"/>
-                <a:cs typeface="Calibri" pitchFamily="34" charset="-120"/>
+                <a:latin typeface="Montserrat" pitchFamily="34" charset="0"/>
+                <a:ea typeface="Montserrat" pitchFamily="34" charset="-122"/>
+                <a:cs typeface="Montserrat" pitchFamily="34" charset="-120"/>
               </a:rPr>
               <a:t>JCI Edmonton  ·  Creative Young Entrepreneur</a:t>
             </a:r>
@@ -1956,9 +1956,9 @@
                 <a:solidFill>
                   <a:srgbClr val="E8B84B"/>
                 </a:solidFill>
-                <a:latin typeface="Calibri" pitchFamily="34" charset="0"/>
-                <a:ea typeface="Calibri" pitchFamily="34" charset="-122"/>
-                <a:cs typeface="Calibri" pitchFamily="34" charset="-120"/>
+                <a:latin typeface="Montserrat" pitchFamily="34" charset="0"/>
+                <a:ea typeface="Montserrat" pitchFamily="34" charset="-122"/>
+                <a:cs typeface="Montserrat" pitchFamily="34" charset="-120"/>
               </a:rPr>
               <a:t>keydate.ca</a:t>
             </a:r>
@@ -2103,17 +2103,17 @@
               <a:buNone/>
             </a:pPr>
             <a:r>
-              <a:rPr lang="en-US" sz="4000" dirty="0">
+              <a:rPr lang="en-US" sz="3500" dirty="0">
                 <a:solidFill>
                   <a:srgbClr val="E3F2E9"/>
                 </a:solidFill>
-                <a:latin typeface="Cambria" pitchFamily="34" charset="0"/>
-                <a:ea typeface="Cambria" pitchFamily="34" charset="-122"/>
-                <a:cs typeface="Cambria" pitchFamily="34" charset="-120"/>
+                <a:latin typeface="Montserrat" pitchFamily="34" charset="0"/>
+                <a:ea typeface="Montserrat" pitchFamily="34" charset="-122"/>
+                <a:cs typeface="Montserrat" pitchFamily="34" charset="-120"/>
               </a:rPr>
               <a:t>It just doesn’t have</a:t>
             </a:r>
-            <a:endParaRPr lang="en-US" sz="4000" dirty="0"/>
+            <a:endParaRPr lang="en-US" sz="3500" dirty="0"/>
           </a:p>
           <a:p>
             <a:pPr indent="0" marL="0">
@@ -2123,17 +2123,17 @@
               <a:buNone/>
             </a:pPr>
             <a:r>
-              <a:rPr lang="en-US" sz="4000" dirty="0">
+              <a:rPr lang="en-US" sz="3500" dirty="0">
                 <a:solidFill>
                   <a:srgbClr val="E3F2E9"/>
                 </a:solidFill>
-                <a:latin typeface="Cambria" pitchFamily="34" charset="0"/>
-                <a:ea typeface="Cambria" pitchFamily="34" charset="-122"/>
-                <a:cs typeface="Cambria" pitchFamily="34" charset="-120"/>
+                <a:latin typeface="Montserrat" pitchFamily="34" charset="0"/>
+                <a:ea typeface="Montserrat" pitchFamily="34" charset="-122"/>
+                <a:cs typeface="Montserrat" pitchFamily="34" charset="-120"/>
               </a:rPr>
               <a:t>a date yet.</a:t>
             </a:r>
-            <a:endParaRPr lang="en-US" sz="4000" dirty="0"/>
+            <a:endParaRPr lang="en-US" sz="3500" dirty="0"/>
           </a:p>
         </p:txBody>
       </p:sp>
@@ -2162,17 +2162,17 @@
               <a:buNone/>
             </a:pPr>
             <a:r>
-              <a:rPr lang="en-US" sz="5400" b="1" dirty="0">
+              <a:rPr lang="en-US" sz="4800" b="1" dirty="0">
                 <a:solidFill>
                   <a:srgbClr val="E8B84B"/>
                 </a:solidFill>
-                <a:latin typeface="Cambria" pitchFamily="34" charset="0"/>
-                <a:ea typeface="Cambria" pitchFamily="34" charset="-122"/>
-                <a:cs typeface="Cambria" pitchFamily="34" charset="-120"/>
+                <a:latin typeface="Montserrat" pitchFamily="34" charset="0"/>
+                <a:ea typeface="Montserrat" pitchFamily="34" charset="-122"/>
+                <a:cs typeface="Montserrat" pitchFamily="34" charset="-120"/>
               </a:rPr>
               <a:t>We’re giving it one.</a:t>
             </a:r>
-            <a:endParaRPr lang="en-US" sz="5400" dirty="0"/>
+            <a:endParaRPr lang="en-US" sz="4800" dirty="0"/>
           </a:p>
         </p:txBody>
       </p:sp>
@@ -2205,9 +2205,9 @@
                 <a:solidFill>
                   <a:srgbClr val="E8B84B"/>
                 </a:solidFill>
-                <a:latin typeface="Calibri" pitchFamily="34" charset="0"/>
-                <a:ea typeface="Calibri" pitchFamily="34" charset="-122"/>
-                <a:cs typeface="Calibri" pitchFamily="34" charset="-120"/>
+                <a:latin typeface="Montserrat" pitchFamily="34" charset="0"/>
+                <a:ea typeface="Montserrat" pitchFamily="34" charset="-122"/>
+                <a:cs typeface="Montserrat" pitchFamily="34" charset="-120"/>
               </a:rPr>
               <a:t>keydate.ca</a:t>
             </a:r>
@@ -2244,9 +2244,9 @@
                 <a:solidFill>
                   <a:srgbClr val="E3F2E9"/>
                 </a:solidFill>
-                <a:latin typeface="Calibri" pitchFamily="34" charset="0"/>
-                <a:ea typeface="Calibri" pitchFamily="34" charset="-122"/>
-                <a:cs typeface="Calibri" pitchFamily="34" charset="-120"/>
+                <a:latin typeface="Montserrat" pitchFamily="34" charset="0"/>
+                <a:ea typeface="Montserrat" pitchFamily="34" charset="-122"/>
+                <a:cs typeface="Montserrat" pitchFamily="34" charset="-120"/>
               </a:rPr>
               <a:t>Edmonton beta opens this week</a:t>
             </a:r>
@@ -2315,9 +2315,9 @@
                 <a:solidFill>
                   <a:srgbClr val="3FA672"/>
                 </a:solidFill>
-                <a:latin typeface="Calibri" pitchFamily="34" charset="0"/>
-                <a:ea typeface="Calibri" pitchFamily="34" charset="-122"/>
-                <a:cs typeface="Calibri" pitchFamily="34" charset="-120"/>
+                <a:latin typeface="Montserrat" pitchFamily="34" charset="0"/>
+                <a:ea typeface="Montserrat" pitchFamily="34" charset="-122"/>
+                <a:cs typeface="Montserrat" pitchFamily="34" charset="-120"/>
               </a:rPr>
               <a:t>WHY I BUILT THIS</a:t>
             </a:r>
@@ -2350,17 +2350,17 @@
               <a:buNone/>
             </a:pPr>
             <a:r>
-              <a:rPr lang="en-US" sz="5000" b="1" dirty="0">
+              <a:rPr lang="en-US" sz="4400" b="1" dirty="0">
                 <a:solidFill>
                   <a:srgbClr val="17302A"/>
                 </a:solidFill>
-                <a:latin typeface="Cambria" pitchFamily="34" charset="0"/>
-                <a:ea typeface="Cambria" pitchFamily="34" charset="-122"/>
-                <a:cs typeface="Cambria" pitchFamily="34" charset="-120"/>
+                <a:latin typeface="Montserrat" pitchFamily="34" charset="0"/>
+                <a:ea typeface="Montserrat" pitchFamily="34" charset="-122"/>
+                <a:cs typeface="Montserrat" pitchFamily="34" charset="-120"/>
               </a:rPr>
               <a:t>I bought my first place.</a:t>
             </a:r>
-            <a:endParaRPr lang="en-US" sz="5000" dirty="0"/>
+            <a:endParaRPr lang="en-US" sz="4400" dirty="0"/>
           </a:p>
         </p:txBody>
       </p:sp>
@@ -2389,17 +2389,17 @@
               <a:buNone/>
             </a:pPr>
             <a:r>
-              <a:rPr lang="en-US" sz="4200" b="1" dirty="0">
+              <a:rPr lang="en-US" sz="3700" b="1" dirty="0">
                 <a:solidFill>
                   <a:srgbClr val="1E4D3B"/>
                 </a:solidFill>
-                <a:latin typeface="Cambria" pitchFamily="34" charset="0"/>
-                <a:ea typeface="Cambria" pitchFamily="34" charset="-122"/>
-                <a:cs typeface="Cambria" pitchFamily="34" charset="-120"/>
+                <a:latin typeface="Montserrat" pitchFamily="34" charset="0"/>
+                <a:ea typeface="Montserrat" pitchFamily="34" charset="-122"/>
+                <a:cs typeface="Montserrat" pitchFamily="34" charset="-120"/>
               </a:rPr>
               <a:t>I was guessing the whole way.</a:t>
             </a:r>
-            <a:endParaRPr lang="en-US" sz="4200" dirty="0"/>
+            <a:endParaRPr lang="en-US" sz="3700" dirty="0"/>
           </a:p>
         </p:txBody>
       </p:sp>
@@ -2459,9 +2459,9 @@
                 <a:solidFill>
                   <a:srgbClr val="1E4D3B"/>
                 </a:solidFill>
-                <a:latin typeface="Calibri" pitchFamily="34" charset="0"/>
-                <a:ea typeface="Calibri" pitchFamily="34" charset="-122"/>
-                <a:cs typeface="Calibri" pitchFamily="34" charset="-120"/>
+                <a:latin typeface="Montserrat" pitchFamily="34" charset="0"/>
+                <a:ea typeface="Montserrat" pitchFamily="34" charset="-122"/>
+                <a:cs typeface="Montserrat" pitchFamily="34" charset="-120"/>
               </a:rPr>
               <a:t>Spreadsheets</a:t>
             </a:r>
@@ -2525,9 +2525,9 @@
                 <a:solidFill>
                   <a:srgbClr val="1E4D3B"/>
                 </a:solidFill>
-                <a:latin typeface="Calibri" pitchFamily="34" charset="0"/>
-                <a:ea typeface="Calibri" pitchFamily="34" charset="-122"/>
-                <a:cs typeface="Calibri" pitchFamily="34" charset="-120"/>
+                <a:latin typeface="Montserrat" pitchFamily="34" charset="0"/>
+                <a:ea typeface="Montserrat" pitchFamily="34" charset="-122"/>
+                <a:cs typeface="Montserrat" pitchFamily="34" charset="-120"/>
               </a:rPr>
               <a:t>Contradictory advice</a:t>
             </a:r>
@@ -2591,9 +2591,9 @@
                 <a:solidFill>
                   <a:srgbClr val="1E4D3B"/>
                 </a:solidFill>
-                <a:latin typeface="Calibri" pitchFamily="34" charset="0"/>
-                <a:ea typeface="Calibri" pitchFamily="34" charset="-122"/>
-                <a:cs typeface="Calibri" pitchFamily="34" charset="-120"/>
+                <a:latin typeface="Montserrat" pitchFamily="34" charset="0"/>
+                <a:ea typeface="Montserrat" pitchFamily="34" charset="-122"/>
+                <a:cs typeface="Montserrat" pitchFamily="34" charset="-120"/>
               </a:rPr>
               <a:t>A goal that kept moving</a:t>
             </a:r>
@@ -2735,17 +2735,17 @@
               <a:buNone/>
             </a:pPr>
             <a:r>
-              <a:rPr lang="en-US" sz="5000" b="1" dirty="0">
+              <a:rPr lang="en-US" sz="4400" b="1" dirty="0">
                 <a:solidFill>
                   <a:srgbClr val="E8B84B"/>
                 </a:solidFill>
-                <a:latin typeface="Cambria" pitchFamily="34" charset="0"/>
-                <a:ea typeface="Cambria" pitchFamily="34" charset="-122"/>
-                <a:cs typeface="Cambria" pitchFamily="34" charset="-120"/>
+                <a:latin typeface="Montserrat" pitchFamily="34" charset="0"/>
+                <a:ea typeface="Montserrat" pitchFamily="34" charset="-122"/>
+                <a:cs typeface="Montserrat" pitchFamily="34" charset="-120"/>
               </a:rPr>
               <a:t>Nobody could tell me when.</a:t>
             </a:r>
-            <a:endParaRPr lang="en-US" sz="5000" dirty="0"/>
+            <a:endParaRPr lang="en-US" sz="4400" dirty="0"/>
           </a:p>
         </p:txBody>
       </p:sp>
@@ -2799,17 +2799,17 @@
               <a:buNone/>
             </a:pPr>
             <a:r>
-              <a:rPr lang="en-US" sz="2800" dirty="0">
+              <a:rPr lang="en-US" sz="2500" dirty="0">
                 <a:solidFill>
                   <a:srgbClr val="E3F2E9"/>
                 </a:solidFill>
-                <a:latin typeface="Cambria" pitchFamily="34" charset="0"/>
-                <a:ea typeface="Cambria" pitchFamily="34" charset="-122"/>
-                <a:cs typeface="Cambria" pitchFamily="34" charset="-120"/>
+                <a:latin typeface="Montserrat" pitchFamily="34" charset="0"/>
+                <a:ea typeface="Montserrat" pitchFamily="34" charset="-122"/>
+                <a:cs typeface="Montserrat" pitchFamily="34" charset="-120"/>
               </a:rPr>
               <a:t>How much do I actually need?</a:t>
             </a:r>
-            <a:endParaRPr lang="en-US" sz="2800" dirty="0"/>
+            <a:endParaRPr lang="en-US" sz="2500" dirty="0"/>
           </a:p>
         </p:txBody>
       </p:sp>
@@ -2863,17 +2863,17 @@
               <a:buNone/>
             </a:pPr>
             <a:r>
-              <a:rPr lang="en-US" sz="2800" dirty="0">
+              <a:rPr lang="en-US" sz="2500" dirty="0">
                 <a:solidFill>
                   <a:srgbClr val="E3F2E9"/>
                 </a:solidFill>
-                <a:latin typeface="Cambria" pitchFamily="34" charset="0"/>
-                <a:ea typeface="Cambria" pitchFamily="34" charset="-122"/>
-                <a:cs typeface="Cambria" pitchFamily="34" charset="-120"/>
+                <a:latin typeface="Montserrat" pitchFamily="34" charset="0"/>
+                <a:ea typeface="Montserrat" pitchFamily="34" charset="-122"/>
+                <a:cs typeface="Montserrat" pitchFamily="34" charset="-120"/>
               </a:rPr>
               <a:t>Am I even close?</a:t>
             </a:r>
-            <a:endParaRPr lang="en-US" sz="2800" dirty="0"/>
+            <a:endParaRPr lang="en-US" sz="2500" dirty="0"/>
           </a:p>
         </p:txBody>
       </p:sp>
@@ -2927,17 +2927,17 @@
               <a:buNone/>
             </a:pPr>
             <a:r>
-              <a:rPr lang="en-US" sz="2800" dirty="0">
+              <a:rPr lang="en-US" sz="2500" dirty="0">
                 <a:solidFill>
                   <a:srgbClr val="E3F2E9"/>
                 </a:solidFill>
-                <a:latin typeface="Cambria" pitchFamily="34" charset="0"/>
-                <a:ea typeface="Cambria" pitchFamily="34" charset="-122"/>
-                <a:cs typeface="Cambria" pitchFamily="34" charset="-120"/>
+                <a:latin typeface="Montserrat" pitchFamily="34" charset="0"/>
+                <a:ea typeface="Montserrat" pitchFamily="34" charset="-122"/>
+                <a:cs typeface="Montserrat" pitchFamily="34" charset="-120"/>
               </a:rPr>
               <a:t>Is this the year, or five years away?</a:t>
             </a:r>
-            <a:endParaRPr lang="en-US" sz="2800" dirty="0"/>
+            <a:endParaRPr lang="en-US" sz="2500" dirty="0"/>
           </a:p>
         </p:txBody>
       </p:sp>
@@ -3002,9 +3002,9 @@
                 <a:solidFill>
                   <a:srgbClr val="3FA672"/>
                 </a:solidFill>
-                <a:latin typeface="Calibri" pitchFamily="34" charset="0"/>
-                <a:ea typeface="Calibri" pitchFamily="34" charset="-122"/>
-                <a:cs typeface="Calibri" pitchFamily="34" charset="-120"/>
+                <a:latin typeface="Montserrat" pitchFamily="34" charset="0"/>
+                <a:ea typeface="Montserrat" pitchFamily="34" charset="-122"/>
+                <a:cs typeface="Montserrat" pitchFamily="34" charset="-120"/>
               </a:rPr>
               <a:t>AND I HAD IT EASIER THAN THE PEOPLE BEHIND ME</a:t>
             </a:r>
@@ -3037,17 +3037,17 @@
               <a:buNone/>
             </a:pPr>
             <a:r>
-              <a:rPr lang="en-US" sz="4000" b="1" dirty="0">
+              <a:rPr lang="en-US" sz="3500" b="1" dirty="0">
                 <a:solidFill>
                   <a:srgbClr val="17302A"/>
                 </a:solidFill>
-                <a:latin typeface="Cambria" pitchFamily="34" charset="0"/>
-                <a:ea typeface="Cambria" pitchFamily="34" charset="-122"/>
-                <a:cs typeface="Cambria" pitchFamily="34" charset="-120"/>
+                <a:latin typeface="Montserrat" pitchFamily="34" charset="0"/>
+                <a:ea typeface="Montserrat" pitchFamily="34" charset="-122"/>
+                <a:cs typeface="Montserrat" pitchFamily="34" charset="-120"/>
               </a:rPr>
               <a:t>One generation apart</a:t>
             </a:r>
-            <a:endParaRPr lang="en-US" sz="4000" dirty="0"/>
+            <a:endParaRPr lang="en-US" sz="3500" dirty="0"/>
           </a:p>
         </p:txBody>
       </p:sp>
@@ -3107,9 +3107,9 @@
                 <a:solidFill>
                   <a:srgbClr val="5C6F66"/>
                 </a:solidFill>
-                <a:latin typeface="Calibri" pitchFamily="34" charset="0"/>
-                <a:ea typeface="Calibri" pitchFamily="34" charset="-122"/>
-                <a:cs typeface="Calibri" pitchFamily="34" charset="-120"/>
+                <a:latin typeface="Montserrat" pitchFamily="34" charset="0"/>
+                <a:ea typeface="Montserrat" pitchFamily="34" charset="-122"/>
+                <a:cs typeface="Montserrat" pitchFamily="34" charset="-120"/>
               </a:rPr>
               <a:t>2006</a:t>
             </a:r>
@@ -3142,17 +3142,17 @@
               <a:buNone/>
             </a:pPr>
             <a:r>
-              <a:rPr lang="en-US" sz="4800" b="1" dirty="0">
+              <a:rPr lang="en-US" sz="4200" b="1" dirty="0">
                 <a:solidFill>
                   <a:srgbClr val="17302A"/>
                 </a:solidFill>
-                <a:latin typeface="Cambria" pitchFamily="34" charset="0"/>
-                <a:ea typeface="Cambria" pitchFamily="34" charset="-122"/>
-                <a:cs typeface="Cambria" pitchFamily="34" charset="-120"/>
+                <a:latin typeface="Montserrat" pitchFamily="34" charset="0"/>
+                <a:ea typeface="Montserrat" pitchFamily="34" charset="-122"/>
+                <a:cs typeface="Montserrat" pitchFamily="34" charset="-120"/>
               </a:rPr>
               <a:t>$276,974</a:t>
             </a:r>
-            <a:endParaRPr lang="en-US" sz="4800" dirty="0"/>
+            <a:endParaRPr lang="en-US" sz="4200" dirty="0"/>
           </a:p>
         </p:txBody>
       </p:sp>
@@ -3212,9 +3212,9 @@
                 <a:solidFill>
                   <a:srgbClr val="E8B84B"/>
                 </a:solidFill>
-                <a:latin typeface="Calibri" pitchFamily="34" charset="0"/>
-                <a:ea typeface="Calibri" pitchFamily="34" charset="-122"/>
-                <a:cs typeface="Calibri" pitchFamily="34" charset="-120"/>
+                <a:latin typeface="Montserrat" pitchFamily="34" charset="0"/>
+                <a:ea typeface="Montserrat" pitchFamily="34" charset="-122"/>
+                <a:cs typeface="Montserrat" pitchFamily="34" charset="-120"/>
               </a:rPr>
               <a:t>TODAY</a:t>
             </a:r>
@@ -3247,17 +3247,17 @@
               <a:buNone/>
             </a:pPr>
             <a:r>
-              <a:rPr lang="en-US" sz="4800" b="1" dirty="0">
+              <a:rPr lang="en-US" sz="4200" b="1" dirty="0">
                 <a:solidFill>
                   <a:srgbClr val="FFFFFF"/>
                 </a:solidFill>
-                <a:latin typeface="Cambria" pitchFamily="34" charset="0"/>
-                <a:ea typeface="Cambria" pitchFamily="34" charset="-122"/>
-                <a:cs typeface="Cambria" pitchFamily="34" charset="-120"/>
+                <a:latin typeface="Montserrat" pitchFamily="34" charset="0"/>
+                <a:ea typeface="Montserrat" pitchFamily="34" charset="-122"/>
+                <a:cs typeface="Montserrat" pitchFamily="34" charset="-120"/>
               </a:rPr>
               <a:t>$696,078</a:t>
             </a:r>
-            <a:endParaRPr lang="en-US" sz="4800" dirty="0"/>
+            <a:endParaRPr lang="en-US" sz="4200" dirty="0"/>
           </a:p>
         </p:txBody>
       </p:sp>
@@ -3286,17 +3286,17 @@
               <a:buNone/>
             </a:pPr>
             <a:r>
-              <a:rPr lang="en-US" sz="2600" b="1" dirty="0">
+              <a:rPr lang="en-US" sz="2300" b="1" dirty="0">
                 <a:solidFill>
                   <a:srgbClr val="3FA672"/>
                 </a:solidFill>
-                <a:latin typeface="Cambria" pitchFamily="34" charset="0"/>
-                <a:ea typeface="Cambria" pitchFamily="34" charset="-122"/>
-                <a:cs typeface="Cambria" pitchFamily="34" charset="-120"/>
+                <a:latin typeface="Montserrat" pitchFamily="34" charset="0"/>
+                <a:ea typeface="Montserrat" pitchFamily="34" charset="-122"/>
+                <a:cs typeface="Montserrat" pitchFamily="34" charset="-120"/>
               </a:rPr>
               <a:t>2.5×</a:t>
             </a:r>
-            <a:endParaRPr lang="en-US" sz="2600" dirty="0"/>
+            <a:endParaRPr lang="en-US" sz="2300" dirty="0"/>
           </a:p>
         </p:txBody>
       </p:sp>
@@ -3329,9 +3329,9 @@
                 <a:solidFill>
                   <a:srgbClr val="5C6F66"/>
                 </a:solidFill>
-                <a:latin typeface="Calibri" pitchFamily="34" charset="0"/>
-                <a:ea typeface="Calibri" pitchFamily="34" charset="-122"/>
-                <a:cs typeface="Calibri" pitchFamily="34" charset="-120"/>
+                <a:latin typeface="Montserrat" pitchFamily="34" charset="0"/>
+                <a:ea typeface="Montserrat" pitchFamily="34" charset="-122"/>
+                <a:cs typeface="Montserrat" pitchFamily="34" charset="-120"/>
               </a:rPr>
               <a:t>Average Canadian home</a:t>
             </a:r>
@@ -3368,9 +3368,9 @@
                 <a:solidFill>
                   <a:srgbClr val="5C6F66"/>
                 </a:solidFill>
-                <a:latin typeface="Calibri" pitchFamily="34" charset="0"/>
-                <a:ea typeface="Calibri" pitchFamily="34" charset="-122"/>
-                <a:cs typeface="Calibri" pitchFamily="34" charset="-120"/>
+                <a:latin typeface="Montserrat" pitchFamily="34" charset="0"/>
+                <a:ea typeface="Montserrat" pitchFamily="34" charset="-122"/>
+                <a:cs typeface="Montserrat" pitchFamily="34" charset="-120"/>
               </a:rPr>
               <a:t>Source: CREA (2006 average MLS price) · national average, June 2026</a:t>
             </a:r>
@@ -3439,9 +3439,9 @@
                 <a:solidFill>
                   <a:srgbClr val="3FA672"/>
                 </a:solidFill>
-                <a:latin typeface="Calibri" pitchFamily="34" charset="0"/>
-                <a:ea typeface="Calibri" pitchFamily="34" charset="-122"/>
-                <a:cs typeface="Calibri" pitchFamily="34" charset="-120"/>
+                <a:latin typeface="Montserrat" pitchFamily="34" charset="0"/>
+                <a:ea typeface="Montserrat" pitchFamily="34" charset="-122"/>
+                <a:cs typeface="Montserrat" pitchFamily="34" charset="-120"/>
               </a:rPr>
               <a:t>SO I BUILT THE THING I NEEDED</a:t>
             </a:r>
@@ -3474,17 +3474,17 @@
               <a:buNone/>
             </a:pPr>
             <a:r>
-              <a:rPr lang="en-US" sz="4000" b="1" dirty="0">
+              <a:rPr lang="en-US" sz="3500" b="1" dirty="0">
                 <a:solidFill>
                   <a:srgbClr val="17302A"/>
                 </a:solidFill>
-                <a:latin typeface="Cambria" pitchFamily="34" charset="0"/>
-                <a:ea typeface="Cambria" pitchFamily="34" charset="-122"/>
-                <a:cs typeface="Cambria" pitchFamily="34" charset="-120"/>
+                <a:latin typeface="Montserrat" pitchFamily="34" charset="0"/>
+                <a:ea typeface="Montserrat" pitchFamily="34" charset="-122"/>
+                <a:cs typeface="Montserrat" pitchFamily="34" charset="-120"/>
               </a:rPr>
               <a:t>Sixty seconds in. A real date out.</a:t>
             </a:r>
-            <a:endParaRPr lang="en-US" sz="4000" dirty="0"/>
+            <a:endParaRPr lang="en-US" sz="3500" dirty="0"/>
           </a:p>
         </p:txBody>
       </p:sp>
@@ -3538,17 +3538,17 @@
               <a:buNone/>
             </a:pPr>
             <a:r>
-              <a:rPr lang="en-US" sz="2400" b="1" dirty="0">
+              <a:rPr lang="en-US" sz="2100" b="1" dirty="0">
                 <a:solidFill>
                   <a:srgbClr val="E8B84B"/>
                 </a:solidFill>
-                <a:latin typeface="Cambria" pitchFamily="34" charset="0"/>
-                <a:ea typeface="Cambria" pitchFamily="34" charset="-122"/>
-                <a:cs typeface="Cambria" pitchFamily="34" charset="-120"/>
+                <a:latin typeface="Montserrat" pitchFamily="34" charset="0"/>
+                <a:ea typeface="Montserrat" pitchFamily="34" charset="-122"/>
+                <a:cs typeface="Montserrat" pitchFamily="34" charset="-120"/>
               </a:rPr>
               <a:t>1</a:t>
             </a:r>
-            <a:endParaRPr lang="en-US" sz="2400" dirty="0"/>
+            <a:endParaRPr lang="en-US" sz="2100" dirty="0"/>
           </a:p>
         </p:txBody>
       </p:sp>
@@ -3577,17 +3577,17 @@
               <a:buNone/>
             </a:pPr>
             <a:r>
-              <a:rPr lang="en-US" sz="2800" b="1" dirty="0">
+              <a:rPr lang="en-US" sz="2500" b="1" dirty="0">
                 <a:solidFill>
                   <a:srgbClr val="17302A"/>
                 </a:solidFill>
-                <a:latin typeface="Cambria" pitchFamily="34" charset="0"/>
-                <a:ea typeface="Cambria" pitchFamily="34" charset="-122"/>
-                <a:cs typeface="Cambria" pitchFamily="34" charset="-120"/>
+                <a:latin typeface="Montserrat" pitchFamily="34" charset="0"/>
+                <a:ea typeface="Montserrat" pitchFamily="34" charset="-122"/>
+                <a:cs typeface="Montserrat" pitchFamily="34" charset="-120"/>
               </a:rPr>
               <a:t>Three questions</a:t>
             </a:r>
-            <a:endParaRPr lang="en-US" sz="2800" dirty="0"/>
+            <a:endParaRPr lang="en-US" sz="2500" dirty="0"/>
           </a:p>
         </p:txBody>
       </p:sp>
@@ -3641,17 +3641,17 @@
               <a:buNone/>
             </a:pPr>
             <a:r>
-              <a:rPr lang="en-US" sz="2400" b="1" dirty="0">
+              <a:rPr lang="en-US" sz="2100" b="1" dirty="0">
                 <a:solidFill>
                   <a:srgbClr val="E8B84B"/>
                 </a:solidFill>
-                <a:latin typeface="Cambria" pitchFamily="34" charset="0"/>
-                <a:ea typeface="Cambria" pitchFamily="34" charset="-122"/>
-                <a:cs typeface="Cambria" pitchFamily="34" charset="-120"/>
+                <a:latin typeface="Montserrat" pitchFamily="34" charset="0"/>
+                <a:ea typeface="Montserrat" pitchFamily="34" charset="-122"/>
+                <a:cs typeface="Montserrat" pitchFamily="34" charset="-120"/>
               </a:rPr>
               <a:t>2</a:t>
             </a:r>
-            <a:endParaRPr lang="en-US" sz="2400" dirty="0"/>
+            <a:endParaRPr lang="en-US" sz="2100" dirty="0"/>
           </a:p>
         </p:txBody>
       </p:sp>
@@ -3680,17 +3680,17 @@
               <a:buNone/>
             </a:pPr>
             <a:r>
-              <a:rPr lang="en-US" sz="2800" b="1" dirty="0">
+              <a:rPr lang="en-US" sz="2500" b="1" dirty="0">
                 <a:solidFill>
                   <a:srgbClr val="17302A"/>
                 </a:solidFill>
-                <a:latin typeface="Cambria" pitchFamily="34" charset="0"/>
-                <a:ea typeface="Cambria" pitchFamily="34" charset="-122"/>
-                <a:cs typeface="Cambria" pitchFamily="34" charset="-120"/>
+                <a:latin typeface="Montserrat" pitchFamily="34" charset="0"/>
+                <a:ea typeface="Montserrat" pitchFamily="34" charset="-122"/>
+                <a:cs typeface="Montserrat" pitchFamily="34" charset="-120"/>
               </a:rPr>
               <a:t>A real month</a:t>
             </a:r>
-            <a:endParaRPr lang="en-US" sz="2800" dirty="0"/>
+            <a:endParaRPr lang="en-US" sz="2500" dirty="0"/>
           </a:p>
         </p:txBody>
       </p:sp>
@@ -3744,17 +3744,17 @@
               <a:buNone/>
             </a:pPr>
             <a:r>
-              <a:rPr lang="en-US" sz="2400" b="1" dirty="0">
+              <a:rPr lang="en-US" sz="2100" b="1" dirty="0">
                 <a:solidFill>
                   <a:srgbClr val="E8B84B"/>
                 </a:solidFill>
-                <a:latin typeface="Cambria" pitchFamily="34" charset="0"/>
-                <a:ea typeface="Cambria" pitchFamily="34" charset="-122"/>
-                <a:cs typeface="Cambria" pitchFamily="34" charset="-120"/>
+                <a:latin typeface="Montserrat" pitchFamily="34" charset="0"/>
+                <a:ea typeface="Montserrat" pitchFamily="34" charset="-122"/>
+                <a:cs typeface="Montserrat" pitchFamily="34" charset="-120"/>
               </a:rPr>
               <a:t>3</a:t>
             </a:r>
-            <a:endParaRPr lang="en-US" sz="2400" dirty="0"/>
+            <a:endParaRPr lang="en-US" sz="2100" dirty="0"/>
           </a:p>
         </p:txBody>
       </p:sp>
@@ -3783,17 +3783,17 @@
               <a:buNone/>
             </a:pPr>
             <a:r>
-              <a:rPr lang="en-US" sz="2800" b="1" dirty="0">
+              <a:rPr lang="en-US" sz="2500" b="1" dirty="0">
                 <a:solidFill>
                   <a:srgbClr val="17302A"/>
                 </a:solidFill>
-                <a:latin typeface="Cambria" pitchFamily="34" charset="0"/>
-                <a:ea typeface="Cambria" pitchFamily="34" charset="-122"/>
-                <a:cs typeface="Cambria" pitchFamily="34" charset="-120"/>
+                <a:latin typeface="Montserrat" pitchFamily="34" charset="0"/>
+                <a:ea typeface="Montserrat" pitchFamily="34" charset="-122"/>
+                <a:cs typeface="Montserrat" pitchFamily="34" charset="-120"/>
               </a:rPr>
               <a:t>Watch it get closer</a:t>
             </a:r>
-            <a:endParaRPr lang="en-US" sz="2800" dirty="0"/>
+            <a:endParaRPr lang="en-US" sz="2500" dirty="0"/>
           </a:p>
         </p:txBody>
       </p:sp>
@@ -3853,9 +3853,9 @@
                 <a:solidFill>
                   <a:srgbClr val="E8B84B"/>
                 </a:solidFill>
-                <a:latin typeface="Calibri" pitchFamily="34" charset="0"/>
-                <a:ea typeface="Calibri" pitchFamily="34" charset="-122"/>
-                <a:cs typeface="Calibri" pitchFamily="34" charset="-120"/>
+                <a:latin typeface="Montserrat" pitchFamily="34" charset="0"/>
+                <a:ea typeface="Montserrat" pitchFamily="34" charset="-122"/>
+                <a:cs typeface="Montserrat" pitchFamily="34" charset="-120"/>
               </a:rPr>
               <a:t>KEYS IN HAND</a:t>
             </a:r>
@@ -3888,17 +3888,17 @@
               <a:buNone/>
             </a:pPr>
             <a:r>
-              <a:rPr lang="en-US" sz="3800" b="1" dirty="0">
+              <a:rPr lang="en-US" sz="3300" b="1" dirty="0">
                 <a:solidFill>
                   <a:srgbClr val="FFFFFF"/>
                 </a:solidFill>
-                <a:latin typeface="Cambria" pitchFamily="34" charset="0"/>
-                <a:ea typeface="Cambria" pitchFamily="34" charset="-122"/>
-                <a:cs typeface="Cambria" pitchFamily="34" charset="-120"/>
+                <a:latin typeface="Montserrat" pitchFamily="34" charset="0"/>
+                <a:ea typeface="Montserrat" pitchFamily="34" charset="-122"/>
+                <a:cs typeface="Montserrat" pitchFamily="34" charset="-120"/>
               </a:rPr>
               <a:t>June 2029</a:t>
             </a:r>
-            <a:endParaRPr lang="en-US" sz="3800" dirty="0"/>
+            <a:endParaRPr lang="en-US" sz="3300" dirty="0"/>
           </a:p>
         </p:txBody>
       </p:sp>
@@ -3985,9 +3985,9 @@
                 <a:solidFill>
                   <a:srgbClr val="E3F2E9"/>
                 </a:solidFill>
-                <a:latin typeface="Calibri" pitchFamily="34" charset="0"/>
-                <a:ea typeface="Calibri" pitchFamily="34" charset="-122"/>
-                <a:cs typeface="Calibri" pitchFamily="34" charset="-120"/>
+                <a:latin typeface="Montserrat" pitchFamily="34" charset="0"/>
+                <a:ea typeface="Montserrat" pitchFamily="34" charset="-122"/>
+                <a:cs typeface="Montserrat" pitchFamily="34" charset="-120"/>
               </a:rPr>
               <a:t>58% of the way there</a:t>
             </a:r>
@@ -4056,9 +4056,9 @@
                 <a:solidFill>
                   <a:srgbClr val="3FA672"/>
                 </a:solidFill>
-                <a:latin typeface="Calibri" pitchFamily="34" charset="0"/>
-                <a:ea typeface="Calibri" pitchFamily="34" charset="-122"/>
-                <a:cs typeface="Calibri" pitchFamily="34" charset="-120"/>
+                <a:latin typeface="Montserrat" pitchFamily="34" charset="0"/>
+                <a:ea typeface="Montserrat" pitchFamily="34" charset="-122"/>
+                <a:cs typeface="Montserrat" pitchFamily="34" charset="-120"/>
               </a:rPr>
               <a:t>INNOVATION</a:t>
             </a:r>
@@ -4091,17 +4091,17 @@
               <a:buNone/>
             </a:pPr>
             <a:r>
-              <a:rPr lang="en-US" sz="4000" b="1" dirty="0">
+              <a:rPr lang="en-US" sz="3500" b="1" dirty="0">
                 <a:solidFill>
                   <a:srgbClr val="17302A"/>
                 </a:solidFill>
-                <a:latin typeface="Cambria" pitchFamily="34" charset="0"/>
-                <a:ea typeface="Cambria" pitchFamily="34" charset="-122"/>
-                <a:cs typeface="Cambria" pitchFamily="34" charset="-120"/>
+                <a:latin typeface="Montserrat" pitchFamily="34" charset="0"/>
+                <a:ea typeface="Montserrat" pitchFamily="34" charset="-122"/>
+                <a:cs typeface="Montserrat" pitchFamily="34" charset="-120"/>
               </a:rPr>
               <a:t>We changed the question</a:t>
             </a:r>
-            <a:endParaRPr lang="en-US" sz="4000" dirty="0"/>
+            <a:endParaRPr lang="en-US" sz="3500" dirty="0"/>
           </a:p>
         </p:txBody>
       </p:sp>
@@ -4161,9 +4161,9 @@
                 <a:solidFill>
                   <a:srgbClr val="5C6F66"/>
                 </a:solidFill>
-                <a:latin typeface="Calibri" pitchFamily="34" charset="0"/>
-                <a:ea typeface="Calibri" pitchFamily="34" charset="-122"/>
-                <a:cs typeface="Calibri" pitchFamily="34" charset="-120"/>
+                <a:latin typeface="Montserrat" pitchFamily="34" charset="0"/>
+                <a:ea typeface="Montserrat" pitchFamily="34" charset="-122"/>
+                <a:cs typeface="Montserrat" pitchFamily="34" charset="-120"/>
               </a:rPr>
               <a:t>EVERY OTHER TOOL</a:t>
             </a:r>
@@ -4196,17 +4196,17 @@
               <a:buNone/>
             </a:pPr>
             <a:r>
-              <a:rPr lang="en-US" sz="2800" b="1" dirty="0">
+              <a:rPr lang="en-US" sz="2500" b="1" dirty="0">
                 <a:solidFill>
                   <a:srgbClr val="5C6F66"/>
                 </a:solidFill>
-                <a:latin typeface="Cambria" pitchFamily="34" charset="0"/>
-                <a:ea typeface="Cambria" pitchFamily="34" charset="-122"/>
-                <a:cs typeface="Cambria" pitchFamily="34" charset="-120"/>
+                <a:latin typeface="Montserrat" pitchFamily="34" charset="0"/>
+                <a:ea typeface="Montserrat" pitchFamily="34" charset="-122"/>
+                <a:cs typeface="Montserrat" pitchFamily="34" charset="-120"/>
               </a:rPr>
               <a:t>“Afford it today?”</a:t>
             </a:r>
-            <a:endParaRPr lang="en-US" sz="2800" dirty="0"/>
+            <a:endParaRPr lang="en-US" sz="2500" dirty="0"/>
           </a:p>
         </p:txBody>
       </p:sp>
@@ -4235,17 +4235,17 @@
               <a:buNone/>
             </a:pPr>
             <a:r>
-              <a:rPr lang="en-US" sz="4000" b="1" dirty="0">
+              <a:rPr lang="en-US" sz="3500" b="1" dirty="0">
                 <a:solidFill>
                   <a:srgbClr val="B4452F"/>
                 </a:solidFill>
-                <a:latin typeface="Cambria" pitchFamily="34" charset="0"/>
-                <a:ea typeface="Cambria" pitchFamily="34" charset="-122"/>
-                <a:cs typeface="Cambria" pitchFamily="34" charset="-120"/>
+                <a:latin typeface="Montserrat" pitchFamily="34" charset="0"/>
+                <a:ea typeface="Montserrat" pitchFamily="34" charset="-122"/>
+                <a:cs typeface="Montserrat" pitchFamily="34" charset="-120"/>
               </a:rPr>
               <a:t>No.</a:t>
             </a:r>
-            <a:endParaRPr lang="en-US" sz="4000" dirty="0"/>
+            <a:endParaRPr lang="en-US" sz="3500" dirty="0"/>
           </a:p>
         </p:txBody>
       </p:sp>
@@ -4305,9 +4305,9 @@
                 <a:solidFill>
                   <a:srgbClr val="E8B84B"/>
                 </a:solidFill>
-                <a:latin typeface="Calibri" pitchFamily="34" charset="0"/>
-                <a:ea typeface="Calibri" pitchFamily="34" charset="-122"/>
-                <a:cs typeface="Calibri" pitchFamily="34" charset="-120"/>
+                <a:latin typeface="Montserrat" pitchFamily="34" charset="0"/>
+                <a:ea typeface="Montserrat" pitchFamily="34" charset="-122"/>
+                <a:cs typeface="Montserrat" pitchFamily="34" charset="-120"/>
               </a:rPr>
               <a:t>KEYDATE</a:t>
             </a:r>
@@ -4340,17 +4340,17 @@
               <a:buNone/>
             </a:pPr>
             <a:r>
-              <a:rPr lang="en-US" sz="2800" b="1" dirty="0">
+              <a:rPr lang="en-US" sz="2500" b="1" dirty="0">
                 <a:solidFill>
                   <a:srgbClr val="FFFFFF"/>
                 </a:solidFill>
-                <a:latin typeface="Cambria" pitchFamily="34" charset="0"/>
-                <a:ea typeface="Cambria" pitchFamily="34" charset="-122"/>
-                <a:cs typeface="Cambria" pitchFamily="34" charset="-120"/>
+                <a:latin typeface="Montserrat" pitchFamily="34" charset="0"/>
+                <a:ea typeface="Montserrat" pitchFamily="34" charset="-122"/>
+                <a:cs typeface="Montserrat" pitchFamily="34" charset="-120"/>
               </a:rPr>
               <a:t>“When?”</a:t>
             </a:r>
-            <a:endParaRPr lang="en-US" sz="2800" dirty="0"/>
+            <a:endParaRPr lang="en-US" sz="2500" dirty="0"/>
           </a:p>
         </p:txBody>
       </p:sp>
@@ -4379,17 +4379,17 @@
               <a:buNone/>
             </a:pPr>
             <a:r>
-              <a:rPr lang="en-US" sz="4000" b="1" dirty="0">
+              <a:rPr lang="en-US" sz="3500" b="1" dirty="0">
                 <a:solidFill>
                   <a:srgbClr val="3FA672"/>
                 </a:solidFill>
-                <a:latin typeface="Cambria" pitchFamily="34" charset="0"/>
-                <a:ea typeface="Cambria" pitchFamily="34" charset="-122"/>
-                <a:cs typeface="Cambria" pitchFamily="34" charset="-120"/>
+                <a:latin typeface="Montserrat" pitchFamily="34" charset="0"/>
+                <a:ea typeface="Montserrat" pitchFamily="34" charset="-122"/>
+                <a:cs typeface="Montserrat" pitchFamily="34" charset="-120"/>
               </a:rPr>
               <a:t>June 2029.</a:t>
             </a:r>
-            <a:endParaRPr lang="en-US" sz="4000" dirty="0"/>
+            <a:endParaRPr lang="en-US" sz="3500" dirty="0"/>
           </a:p>
         </p:txBody>
       </p:sp>
@@ -4454,9 +4454,9 @@
                 <a:solidFill>
                   <a:srgbClr val="3FA672"/>
                 </a:solidFill>
-                <a:latin typeface="Calibri" pitchFamily="34" charset="0"/>
-                <a:ea typeface="Calibri" pitchFamily="34" charset="-122"/>
-                <a:cs typeface="Calibri" pitchFamily="34" charset="-120"/>
+                <a:latin typeface="Montserrat" pitchFamily="34" charset="0"/>
+                <a:ea typeface="Montserrat" pitchFamily="34" charset="-122"/>
+                <a:cs typeface="Montserrat" pitchFamily="34" charset="-120"/>
               </a:rPr>
               <a:t>IT WAS NEVER JUST MY STORY</a:t>
             </a:r>
@@ -4489,17 +4489,17 @@
               <a:buNone/>
             </a:pPr>
             <a:r>
-              <a:rPr lang="en-US" sz="4000" b="1" dirty="0">
+              <a:rPr lang="en-US" sz="3500" b="1" dirty="0">
                 <a:solidFill>
                   <a:srgbClr val="17302A"/>
                 </a:solidFill>
-                <a:latin typeface="Cambria" pitchFamily="34" charset="0"/>
-                <a:ea typeface="Cambria" pitchFamily="34" charset="-122"/>
-                <a:cs typeface="Cambria" pitchFamily="34" charset="-120"/>
+                <a:latin typeface="Montserrat" pitchFamily="34" charset="0"/>
+                <a:ea typeface="Montserrat" pitchFamily="34" charset="-122"/>
+                <a:cs typeface="Montserrat" pitchFamily="34" charset="-120"/>
               </a:rPr>
               <a:t>The engine doesn’t change at the border</a:t>
             </a:r>
-            <a:endParaRPr lang="en-US" sz="4000" dirty="0"/>
+            <a:endParaRPr lang="en-US" sz="3500" dirty="0"/>
           </a:p>
         </p:txBody>
       </p:sp>
@@ -4559,9 +4559,9 @@
                 <a:solidFill>
                   <a:srgbClr val="FFFFFF"/>
                 </a:solidFill>
-                <a:latin typeface="Calibri" pitchFamily="34" charset="0"/>
-                <a:ea typeface="Calibri" pitchFamily="34" charset="-122"/>
-                <a:cs typeface="Calibri" pitchFamily="34" charset="-120"/>
+                <a:latin typeface="Montserrat" pitchFamily="34" charset="0"/>
+                <a:ea typeface="Montserrat" pitchFamily="34" charset="-122"/>
+                <a:cs typeface="Montserrat" pitchFamily="34" charset="-120"/>
               </a:rPr>
               <a:t>Canada</a:t>
             </a:r>
@@ -4625,9 +4625,9 @@
                 <a:solidFill>
                   <a:srgbClr val="17302A"/>
                 </a:solidFill>
-                <a:latin typeface="Calibri" pitchFamily="34" charset="0"/>
-                <a:ea typeface="Calibri" pitchFamily="34" charset="-122"/>
-                <a:cs typeface="Calibri" pitchFamily="34" charset="-120"/>
+                <a:latin typeface="Montserrat" pitchFamily="34" charset="0"/>
+                <a:ea typeface="Montserrat" pitchFamily="34" charset="-122"/>
+                <a:cs typeface="Montserrat" pitchFamily="34" charset="-120"/>
               </a:rPr>
               <a:t>Australia</a:t>
             </a:r>
@@ -4691,9 +4691,9 @@
                 <a:solidFill>
                   <a:srgbClr val="17302A"/>
                 </a:solidFill>
-                <a:latin typeface="Calibri" pitchFamily="34" charset="0"/>
-                <a:ea typeface="Calibri" pitchFamily="34" charset="-122"/>
-                <a:cs typeface="Calibri" pitchFamily="34" charset="-120"/>
+                <a:latin typeface="Montserrat" pitchFamily="34" charset="0"/>
+                <a:ea typeface="Montserrat" pitchFamily="34" charset="-122"/>
+                <a:cs typeface="Montserrat" pitchFamily="34" charset="-120"/>
               </a:rPr>
               <a:t>UK</a:t>
             </a:r>
@@ -4757,9 +4757,9 @@
                 <a:solidFill>
                   <a:srgbClr val="17302A"/>
                 </a:solidFill>
-                <a:latin typeface="Calibri" pitchFamily="34" charset="0"/>
-                <a:ea typeface="Calibri" pitchFamily="34" charset="-122"/>
-                <a:cs typeface="Calibri" pitchFamily="34" charset="-120"/>
+                <a:latin typeface="Montserrat" pitchFamily="34" charset="0"/>
+                <a:ea typeface="Montserrat" pitchFamily="34" charset="-122"/>
+                <a:cs typeface="Montserrat" pitchFamily="34" charset="-120"/>
               </a:rPr>
               <a:t>Ireland</a:t>
             </a:r>
@@ -4823,9 +4823,9 @@
                 <a:solidFill>
                   <a:srgbClr val="17302A"/>
                 </a:solidFill>
-                <a:latin typeface="Calibri" pitchFamily="34" charset="0"/>
-                <a:ea typeface="Calibri" pitchFamily="34" charset="-122"/>
-                <a:cs typeface="Calibri" pitchFamily="34" charset="-120"/>
+                <a:latin typeface="Montserrat" pitchFamily="34" charset="0"/>
+                <a:ea typeface="Montserrat" pitchFamily="34" charset="-122"/>
+                <a:cs typeface="Montserrat" pitchFamily="34" charset="-120"/>
               </a:rPr>
               <a:t>New Zealand</a:t>
             </a:r>
@@ -4885,13 +4885,13 @@
               <a:buNone/>
             </a:pPr>
             <a:r>
-              <a:rPr lang="en-US" sz="3000" dirty="0">
+              <a:rPr lang="en-US" sz="2600" dirty="0">
                 <a:solidFill>
                   <a:srgbClr val="E3F2E9"/>
                 </a:solidFill>
-                <a:latin typeface="Cambria" pitchFamily="34" charset="0"/>
-                <a:ea typeface="Cambria" pitchFamily="34" charset="-122"/>
-                <a:cs typeface="Cambria" pitchFamily="34" charset="-120"/>
+                <a:latin typeface="Montserrat" pitchFamily="34" charset="0"/>
+                <a:ea typeface="Montserrat" pitchFamily="34" charset="-122"/>
+                <a:cs typeface="Montserrat" pitchFamily="34" charset="-120"/>
               </a:rPr>
               <a:t>The engine stays. </a:t>
             </a:r>
@@ -4899,17 +4899,17 @@
               <a:buNone/>
             </a:pPr>
             <a:r>
-              <a:rPr lang="en-US" sz="3000" b="1" dirty="0">
+              <a:rPr lang="en-US" sz="2600" b="1" dirty="0">
                 <a:solidFill>
                   <a:srgbClr val="E8B84B"/>
                 </a:solidFill>
-                <a:latin typeface="Cambria" pitchFamily="34" charset="0"/>
-                <a:ea typeface="Cambria" pitchFamily="34" charset="-122"/>
-                <a:cs typeface="Cambria" pitchFamily="34" charset="-120"/>
+                <a:latin typeface="Montserrat" pitchFamily="34" charset="0"/>
+                <a:ea typeface="Montserrat" pitchFamily="34" charset="-122"/>
+                <a:cs typeface="Montserrat" pitchFamily="34" charset="-120"/>
               </a:rPr>
               <a:t>The rulebook swaps.</a:t>
             </a:r>
-            <a:endParaRPr lang="en-US" sz="3000" dirty="0"/>
+            <a:endParaRPr lang="en-US" sz="2600" dirty="0"/>
           </a:p>
         </p:txBody>
       </p:sp>
@@ -4974,9 +4974,9 @@
                 <a:solidFill>
                   <a:srgbClr val="E8B84B"/>
                 </a:solidFill>
-                <a:latin typeface="Calibri" pitchFamily="34" charset="0"/>
-                <a:ea typeface="Calibri" pitchFamily="34" charset="-122"/>
-                <a:cs typeface="Calibri" pitchFamily="34" charset="-120"/>
+                <a:latin typeface="Montserrat" pitchFamily="34" charset="0"/>
+                <a:ea typeface="Montserrat" pitchFamily="34" charset="-122"/>
+                <a:cs typeface="Montserrat" pitchFamily="34" charset="-120"/>
               </a:rPr>
               <a:t>COMMUNITY IMPACT &amp; SUSTAINABILITY</a:t>
             </a:r>
@@ -5009,17 +5009,17 @@
               <a:buNone/>
             </a:pPr>
             <a:r>
-              <a:rPr lang="en-US" sz="4000" b="1" dirty="0">
+              <a:rPr lang="en-US" sz="3500" b="1" dirty="0">
                 <a:solidFill>
                   <a:srgbClr val="FFFFFF"/>
                 </a:solidFill>
-                <a:latin typeface="Cambria" pitchFamily="34" charset="0"/>
-                <a:ea typeface="Cambria" pitchFamily="34" charset="-122"/>
-                <a:cs typeface="Cambria" pitchFamily="34" charset="-120"/>
+                <a:latin typeface="Montserrat" pitchFamily="34" charset="0"/>
+                <a:ea typeface="Montserrat" pitchFamily="34" charset="-122"/>
+                <a:cs typeface="Montserrat" pitchFamily="34" charset="-120"/>
               </a:rPr>
               <a:t>The money we refuse to take</a:t>
             </a:r>
-            <a:endParaRPr lang="en-US" sz="4000" dirty="0"/>
+            <a:endParaRPr lang="en-US" sz="3500" dirty="0"/>
           </a:p>
         </p:txBody>
       </p:sp>
@@ -5078,17 +5078,17 @@
               <a:buNone/>
             </a:pPr>
             <a:r>
-              <a:rPr lang="en-US" sz="2600" b="1" dirty="0">
+              <a:rPr lang="en-US" sz="2300" b="1" dirty="0">
                 <a:solidFill>
                   <a:srgbClr val="FFFFFF"/>
                 </a:solidFill>
-                <a:latin typeface="Cambria" pitchFamily="34" charset="0"/>
-                <a:ea typeface="Cambria" pitchFamily="34" charset="-122"/>
-                <a:cs typeface="Cambria" pitchFamily="34" charset="-120"/>
+                <a:latin typeface="Montserrat" pitchFamily="34" charset="0"/>
+                <a:ea typeface="Montserrat" pitchFamily="34" charset="-122"/>
+                <a:cs typeface="Montserrat" pitchFamily="34" charset="-120"/>
               </a:rPr>
               <a:t>We never sell you</a:t>
             </a:r>
-            <a:endParaRPr lang="en-US" sz="2600" dirty="0"/>
+            <a:endParaRPr lang="en-US" sz="2300" dirty="0"/>
           </a:p>
           <a:p>
             <a:pPr indent="0" marL="0">
@@ -5098,17 +5098,17 @@
               <a:buNone/>
             </a:pPr>
             <a:r>
-              <a:rPr lang="en-US" sz="2600" b="1" dirty="0">
+              <a:rPr lang="en-US" sz="2300" b="1" dirty="0">
                 <a:solidFill>
                   <a:srgbClr val="FFFFFF"/>
                 </a:solidFill>
-                <a:latin typeface="Cambria" pitchFamily="34" charset="0"/>
-                <a:ea typeface="Cambria" pitchFamily="34" charset="-122"/>
-                <a:cs typeface="Cambria" pitchFamily="34" charset="-120"/>
+                <a:latin typeface="Montserrat" pitchFamily="34" charset="0"/>
+                <a:ea typeface="Montserrat" pitchFamily="34" charset="-122"/>
+                <a:cs typeface="Montserrat" pitchFamily="34" charset="-120"/>
               </a:rPr>
               <a:t>to brokers.</a:t>
             </a:r>
-            <a:endParaRPr lang="en-US" sz="2600" dirty="0"/>
+            <a:endParaRPr lang="en-US" sz="2300" dirty="0"/>
           </a:p>
         </p:txBody>
       </p:sp>
@@ -5167,17 +5167,17 @@
               <a:buNone/>
             </a:pPr>
             <a:r>
-              <a:rPr lang="en-US" sz="2600" b="1" dirty="0">
+              <a:rPr lang="en-US" sz="2300" b="1" dirty="0">
                 <a:solidFill>
                   <a:srgbClr val="FFFFFF"/>
                 </a:solidFill>
-                <a:latin typeface="Cambria" pitchFamily="34" charset="0"/>
-                <a:ea typeface="Cambria" pitchFamily="34" charset="-122"/>
-                <a:cs typeface="Cambria" pitchFamily="34" charset="-120"/>
+                <a:latin typeface="Montserrat" pitchFamily="34" charset="0"/>
+                <a:ea typeface="Montserrat" pitchFamily="34" charset="-122"/>
+                <a:cs typeface="Montserrat" pitchFamily="34" charset="-120"/>
               </a:rPr>
               <a:t>We built the tool</a:t>
             </a:r>
-            <a:endParaRPr lang="en-US" sz="2600" dirty="0"/>
+            <a:endParaRPr lang="en-US" sz="2300" dirty="0"/>
           </a:p>
           <a:p>
             <a:pPr indent="0" marL="0">
@@ -5187,17 +5187,17 @@
               <a:buNone/>
             </a:pPr>
             <a:r>
-              <a:rPr lang="en-US" sz="2600" b="1" dirty="0">
+              <a:rPr lang="en-US" sz="2300" b="1" dirty="0">
                 <a:solidFill>
                   <a:srgbClr val="FFFFFF"/>
                 </a:solidFill>
-                <a:latin typeface="Cambria" pitchFamily="34" charset="0"/>
-                <a:ea typeface="Cambria" pitchFamily="34" charset="-122"/>
-                <a:cs typeface="Cambria" pitchFamily="34" charset="-120"/>
+                <a:latin typeface="Montserrat" pitchFamily="34" charset="0"/>
+                <a:ea typeface="Montserrat" pitchFamily="34" charset="-122"/>
+                <a:cs typeface="Montserrat" pitchFamily="34" charset="-120"/>
               </a:rPr>
               <a:t>that says don’t buy.</a:t>
             </a:r>
-            <a:endParaRPr lang="en-US" sz="2600" dirty="0"/>
+            <a:endParaRPr lang="en-US" sz="2300" dirty="0"/>
           </a:p>
         </p:txBody>
       </p:sp>
@@ -5226,17 +5226,17 @@
               <a:buNone/>
             </a:pPr>
             <a:r>
-              <a:rPr lang="en-US" sz="2600" i="1" dirty="0">
+              <a:rPr lang="en-US" sz="2300" i="1" dirty="0">
                 <a:solidFill>
                   <a:srgbClr val="E8B84B"/>
                 </a:solidFill>
-                <a:latin typeface="Cambria" pitchFamily="34" charset="0"/>
-                <a:ea typeface="Cambria" pitchFamily="34" charset="-122"/>
-                <a:cs typeface="Cambria" pitchFamily="34" charset="-120"/>
+                <a:latin typeface="Montserrat" pitchFamily="34" charset="0"/>
+                <a:ea typeface="Montserrat" pitchFamily="34" charset="-122"/>
+                <a:cs typeface="Montserrat" pitchFamily="34" charset="-120"/>
               </a:rPr>
               <a:t>A company on referral fees can never say that.</a:t>
             </a:r>
-            <a:endParaRPr lang="en-US" sz="2600" dirty="0"/>
+            <a:endParaRPr lang="en-US" sz="2300" dirty="0"/>
           </a:p>
         </p:txBody>
       </p:sp>
@@ -5301,9 +5301,9 @@
                 <a:solidFill>
                   <a:srgbClr val="3FA672"/>
                 </a:solidFill>
-                <a:latin typeface="Calibri" pitchFamily="34" charset="0"/>
-                <a:ea typeface="Calibri" pitchFamily="34" charset="-122"/>
-                <a:cs typeface="Calibri" pitchFamily="34" charset="-120"/>
+                <a:latin typeface="Montserrat" pitchFamily="34" charset="0"/>
+                <a:ea typeface="Montserrat" pitchFamily="34" charset="-122"/>
+                <a:cs typeface="Montserrat" pitchFamily="34" charset="-120"/>
               </a:rPr>
               <a:t>SCALABILITY &amp; LEADERSHIP</a:t>
             </a:r>
@@ -5336,17 +5336,17 @@
               <a:buNone/>
             </a:pPr>
             <a:r>
-              <a:rPr lang="en-US" sz="4000" b="1" dirty="0">
+              <a:rPr lang="en-US" sz="3500" b="1" dirty="0">
                 <a:solidFill>
                   <a:srgbClr val="17302A"/>
                 </a:solidFill>
-                <a:latin typeface="Cambria" pitchFamily="34" charset="0"/>
-                <a:ea typeface="Cambria" pitchFamily="34" charset="-122"/>
-                <a:cs typeface="Cambria" pitchFamily="34" charset="-120"/>
+                <a:latin typeface="Montserrat" pitchFamily="34" charset="0"/>
+                <a:ea typeface="Montserrat" pitchFamily="34" charset="-122"/>
+                <a:cs typeface="Montserrat" pitchFamily="34" charset="-120"/>
               </a:rPr>
               <a:t>Built, shipped, live</a:t>
             </a:r>
-            <a:endParaRPr lang="en-US" sz="4000" dirty="0"/>
+            <a:endParaRPr lang="en-US" sz="3500" dirty="0"/>
           </a:p>
         </p:txBody>
       </p:sp>
@@ -5402,17 +5402,17 @@
               <a:buNone/>
             </a:pPr>
             <a:r>
-              <a:rPr lang="en-US" sz="4600" b="1" dirty="0">
+              <a:rPr lang="en-US" sz="4000" b="1" dirty="0">
                 <a:solidFill>
                   <a:srgbClr val="3FA672"/>
                 </a:solidFill>
-                <a:latin typeface="Cambria" pitchFamily="34" charset="0"/>
-                <a:ea typeface="Cambria" pitchFamily="34" charset="-122"/>
-                <a:cs typeface="Cambria" pitchFamily="34" charset="-120"/>
+                <a:latin typeface="Montserrat" pitchFamily="34" charset="0"/>
+                <a:ea typeface="Montserrat" pitchFamily="34" charset="-122"/>
+                <a:cs typeface="Montserrat" pitchFamily="34" charset="-120"/>
               </a:rPr>
               <a:t>467</a:t>
             </a:r>
-            <a:endParaRPr lang="en-US" sz="4600" dirty="0"/>
+            <a:endParaRPr lang="en-US" sz="4000" dirty="0"/>
           </a:p>
         </p:txBody>
       </p:sp>
@@ -5445,9 +5445,9 @@
                 <a:solidFill>
                   <a:srgbClr val="5C6F66"/>
                 </a:solidFill>
-                <a:latin typeface="Calibri" pitchFamily="34" charset="0"/>
-                <a:ea typeface="Calibri" pitchFamily="34" charset="-122"/>
-                <a:cs typeface="Calibri" pitchFamily="34" charset="-120"/>
+                <a:latin typeface="Montserrat" pitchFamily="34" charset="0"/>
+                <a:ea typeface="Montserrat" pitchFamily="34" charset="-122"/>
+                <a:cs typeface="Montserrat" pitchFamily="34" charset="-120"/>
               </a:rPr>
               <a:t>municipalities</a:t>
             </a:r>
@@ -5507,17 +5507,17 @@
               <a:buNone/>
             </a:pPr>
             <a:r>
-              <a:rPr lang="en-US" sz="4600" b="1" dirty="0">
+              <a:rPr lang="en-US" sz="4000" b="1" dirty="0">
                 <a:solidFill>
                   <a:srgbClr val="3FA672"/>
                 </a:solidFill>
-                <a:latin typeface="Cambria" pitchFamily="34" charset="0"/>
-                <a:ea typeface="Cambria" pitchFamily="34" charset="-122"/>
-                <a:cs typeface="Cambria" pitchFamily="34" charset="-120"/>
+                <a:latin typeface="Montserrat" pitchFamily="34" charset="0"/>
+                <a:ea typeface="Montserrat" pitchFamily="34" charset="-122"/>
+                <a:cs typeface="Montserrat" pitchFamily="34" charset="-120"/>
               </a:rPr>
               <a:t>~$0</a:t>
             </a:r>
-            <a:endParaRPr lang="en-US" sz="4600" dirty="0"/>
+            <a:endParaRPr lang="en-US" sz="4000" dirty="0"/>
           </a:p>
         </p:txBody>
       </p:sp>
@@ -5550,9 +5550,9 @@
                 <a:solidFill>
                   <a:srgbClr val="5C6F66"/>
                 </a:solidFill>
-                <a:latin typeface="Calibri" pitchFamily="34" charset="0"/>
-                <a:ea typeface="Calibri" pitchFamily="34" charset="-122"/>
-                <a:cs typeface="Calibri" pitchFamily="34" charset="-120"/>
+                <a:latin typeface="Montserrat" pitchFamily="34" charset="0"/>
+                <a:ea typeface="Montserrat" pitchFamily="34" charset="-122"/>
+                <a:cs typeface="Montserrat" pitchFamily="34" charset="-120"/>
               </a:rPr>
               <a:t>cost per user</a:t>
             </a:r>
@@ -5612,17 +5612,17 @@
               <a:buNone/>
             </a:pPr>
             <a:r>
-              <a:rPr lang="en-US" sz="4600" b="1" dirty="0">
+              <a:rPr lang="en-US" sz="4000" b="1" dirty="0">
                 <a:solidFill>
                   <a:srgbClr val="3FA672"/>
                 </a:solidFill>
-                <a:latin typeface="Cambria" pitchFamily="34" charset="0"/>
-                <a:ea typeface="Cambria" pitchFamily="34" charset="-122"/>
-                <a:cs typeface="Cambria" pitchFamily="34" charset="-120"/>
+                <a:latin typeface="Montserrat" pitchFamily="34" charset="0"/>
+                <a:ea typeface="Montserrat" pitchFamily="34" charset="-122"/>
+                <a:cs typeface="Montserrat" pitchFamily="34" charset="-120"/>
               </a:rPr>
               <a:t>1</a:t>
             </a:r>
-            <a:endParaRPr lang="en-US" sz="4600" dirty="0"/>
+            <a:endParaRPr lang="en-US" sz="4000" dirty="0"/>
           </a:p>
         </p:txBody>
       </p:sp>
@@ -5655,9 +5655,9 @@
                 <a:solidFill>
                   <a:srgbClr val="5C6F66"/>
                 </a:solidFill>
-                <a:latin typeface="Calibri" pitchFamily="34" charset="0"/>
-                <a:ea typeface="Calibri" pitchFamily="34" charset="-122"/>
-                <a:cs typeface="Calibri" pitchFamily="34" charset="-120"/>
+                <a:latin typeface="Montserrat" pitchFamily="34" charset="0"/>
+                <a:ea typeface="Montserrat" pitchFamily="34" charset="-122"/>
+                <a:cs typeface="Montserrat" pitchFamily="34" charset="-120"/>
               </a:rPr>
               <a:t>founder</a:t>
             </a:r>
@@ -5717,17 +5717,17 @@
               <a:buNone/>
             </a:pPr>
             <a:r>
-              <a:rPr lang="en-US" sz="2600" b="1" dirty="0">
+              <a:rPr lang="en-US" sz="2300" b="1" dirty="0">
                 <a:solidFill>
                   <a:srgbClr val="1E4D3B"/>
                 </a:solidFill>
-                <a:latin typeface="Cambria" pitchFamily="34" charset="0"/>
-                <a:ea typeface="Cambria" pitchFamily="34" charset="-122"/>
-                <a:cs typeface="Cambria" pitchFamily="34" charset="-120"/>
+                <a:latin typeface="Montserrat" pitchFamily="34" charset="0"/>
+                <a:ea typeface="Montserrat" pitchFamily="34" charset="-122"/>
+                <a:cs typeface="Montserrat" pitchFamily="34" charset="-120"/>
               </a:rPr>
               <a:t>A new country is a rulebook, not a rebuild.</a:t>
             </a:r>
-            <a:endParaRPr lang="en-US" sz="2600" dirty="0"/>
+            <a:endParaRPr lang="en-US" sz="2300" dirty="0"/>
           </a:p>
         </p:txBody>
       </p:sp>

--- a/apps/keydate/pitch/KeyDate-JCI-Edmonton.pptx
+++ b/apps/keydate/pitch/KeyDate-JCI-Edmonton.pptx
@@ -1802,9 +1802,9 @@
                 <a:solidFill>
                   <a:srgbClr val="FFFFFF"/>
                 </a:solidFill>
-                <a:latin typeface="Montserrat" pitchFamily="34" charset="0"/>
-                <a:ea typeface="Montserrat" pitchFamily="34" charset="-122"/>
-                <a:cs typeface="Montserrat" pitchFamily="34" charset="-120"/>
+                <a:latin typeface="Century Gothic" pitchFamily="34" charset="0"/>
+                <a:ea typeface="Century Gothic" pitchFamily="34" charset="-122"/>
+                <a:cs typeface="Century Gothic" pitchFamily="34" charset="-120"/>
               </a:rPr>
               <a:t>Key</a:t>
             </a:r>
@@ -1816,9 +1816,9 @@
                 <a:solidFill>
                   <a:srgbClr val="3FA672"/>
                 </a:solidFill>
-                <a:latin typeface="Montserrat" pitchFamily="34" charset="0"/>
-                <a:ea typeface="Montserrat" pitchFamily="34" charset="-122"/>
-                <a:cs typeface="Montserrat" pitchFamily="34" charset="-120"/>
+                <a:latin typeface="Century Gothic" pitchFamily="34" charset="0"/>
+                <a:ea typeface="Century Gothic" pitchFamily="34" charset="-122"/>
+                <a:cs typeface="Century Gothic" pitchFamily="34" charset="-120"/>
               </a:rPr>
               <a:t>Date</a:t>
             </a:r>
@@ -1858,9 +1858,9 @@
                 <a:solidFill>
                   <a:srgbClr val="E3F2E9"/>
                 </a:solidFill>
-                <a:latin typeface="Montserrat" pitchFamily="34" charset="0"/>
-                <a:ea typeface="Montserrat" pitchFamily="34" charset="-122"/>
-                <a:cs typeface="Montserrat" pitchFamily="34" charset="-120"/>
+                <a:latin typeface="Century Gothic" pitchFamily="34" charset="0"/>
+                <a:ea typeface="Century Gothic" pitchFamily="34" charset="-122"/>
+                <a:cs typeface="Century Gothic" pitchFamily="34" charset="-120"/>
               </a:rPr>
               <a:t>Owning a home isn’t impossible.</a:t>
             </a:r>
@@ -1878,9 +1878,9 @@
                 <a:solidFill>
                   <a:srgbClr val="E3F2E9"/>
                 </a:solidFill>
-                <a:latin typeface="Montserrat" pitchFamily="34" charset="0"/>
-                <a:ea typeface="Montserrat" pitchFamily="34" charset="-122"/>
-                <a:cs typeface="Montserrat" pitchFamily="34" charset="-120"/>
+                <a:latin typeface="Century Gothic" pitchFamily="34" charset="0"/>
+                <a:ea typeface="Century Gothic" pitchFamily="34" charset="-122"/>
+                <a:cs typeface="Century Gothic" pitchFamily="34" charset="-120"/>
               </a:rPr>
               <a:t>It has a date.</a:t>
             </a:r>
@@ -1917,9 +1917,9 @@
                 <a:solidFill>
                   <a:srgbClr val="E3F2E9"/>
                 </a:solidFill>
-                <a:latin typeface="Montserrat" pitchFamily="34" charset="0"/>
-                <a:ea typeface="Montserrat" pitchFamily="34" charset="-122"/>
-                <a:cs typeface="Montserrat" pitchFamily="34" charset="-120"/>
+                <a:latin typeface="Century Gothic" pitchFamily="34" charset="0"/>
+                <a:ea typeface="Century Gothic" pitchFamily="34" charset="-122"/>
+                <a:cs typeface="Century Gothic" pitchFamily="34" charset="-120"/>
               </a:rPr>
               <a:t>JCI Edmonton  ·  Creative Young Entrepreneur</a:t>
             </a:r>
@@ -1956,9 +1956,9 @@
                 <a:solidFill>
                   <a:srgbClr val="E8B84B"/>
                 </a:solidFill>
-                <a:latin typeface="Montserrat" pitchFamily="34" charset="0"/>
-                <a:ea typeface="Montserrat" pitchFamily="34" charset="-122"/>
-                <a:cs typeface="Montserrat" pitchFamily="34" charset="-120"/>
+                <a:latin typeface="Century Gothic" pitchFamily="34" charset="0"/>
+                <a:ea typeface="Century Gothic" pitchFamily="34" charset="-122"/>
+                <a:cs typeface="Century Gothic" pitchFamily="34" charset="-120"/>
               </a:rPr>
               <a:t>keydate.ca</a:t>
             </a:r>
@@ -2107,9 +2107,9 @@
                 <a:solidFill>
                   <a:srgbClr val="E3F2E9"/>
                 </a:solidFill>
-                <a:latin typeface="Montserrat" pitchFamily="34" charset="0"/>
-                <a:ea typeface="Montserrat" pitchFamily="34" charset="-122"/>
-                <a:cs typeface="Montserrat" pitchFamily="34" charset="-120"/>
+                <a:latin typeface="Century Gothic" pitchFamily="34" charset="0"/>
+                <a:ea typeface="Century Gothic" pitchFamily="34" charset="-122"/>
+                <a:cs typeface="Century Gothic" pitchFamily="34" charset="-120"/>
               </a:rPr>
               <a:t>It just doesn’t have</a:t>
             </a:r>
@@ -2127,9 +2127,9 @@
                 <a:solidFill>
                   <a:srgbClr val="E3F2E9"/>
                 </a:solidFill>
-                <a:latin typeface="Montserrat" pitchFamily="34" charset="0"/>
-                <a:ea typeface="Montserrat" pitchFamily="34" charset="-122"/>
-                <a:cs typeface="Montserrat" pitchFamily="34" charset="-120"/>
+                <a:latin typeface="Century Gothic" pitchFamily="34" charset="0"/>
+                <a:ea typeface="Century Gothic" pitchFamily="34" charset="-122"/>
+                <a:cs typeface="Century Gothic" pitchFamily="34" charset="-120"/>
               </a:rPr>
               <a:t>a date yet.</a:t>
             </a:r>
@@ -2166,9 +2166,9 @@
                 <a:solidFill>
                   <a:srgbClr val="E8B84B"/>
                 </a:solidFill>
-                <a:latin typeface="Montserrat" pitchFamily="34" charset="0"/>
-                <a:ea typeface="Montserrat" pitchFamily="34" charset="-122"/>
-                <a:cs typeface="Montserrat" pitchFamily="34" charset="-120"/>
+                <a:latin typeface="Century Gothic" pitchFamily="34" charset="0"/>
+                <a:ea typeface="Century Gothic" pitchFamily="34" charset="-122"/>
+                <a:cs typeface="Century Gothic" pitchFamily="34" charset="-120"/>
               </a:rPr>
               <a:t>We’re giving it one.</a:t>
             </a:r>
@@ -2205,9 +2205,9 @@
                 <a:solidFill>
                   <a:srgbClr val="E8B84B"/>
                 </a:solidFill>
-                <a:latin typeface="Montserrat" pitchFamily="34" charset="0"/>
-                <a:ea typeface="Montserrat" pitchFamily="34" charset="-122"/>
-                <a:cs typeface="Montserrat" pitchFamily="34" charset="-120"/>
+                <a:latin typeface="Century Gothic" pitchFamily="34" charset="0"/>
+                <a:ea typeface="Century Gothic" pitchFamily="34" charset="-122"/>
+                <a:cs typeface="Century Gothic" pitchFamily="34" charset="-120"/>
               </a:rPr>
               <a:t>keydate.ca</a:t>
             </a:r>
@@ -2244,9 +2244,9 @@
                 <a:solidFill>
                   <a:srgbClr val="E3F2E9"/>
                 </a:solidFill>
-                <a:latin typeface="Montserrat" pitchFamily="34" charset="0"/>
-                <a:ea typeface="Montserrat" pitchFamily="34" charset="-122"/>
-                <a:cs typeface="Montserrat" pitchFamily="34" charset="-120"/>
+                <a:latin typeface="Century Gothic" pitchFamily="34" charset="0"/>
+                <a:ea typeface="Century Gothic" pitchFamily="34" charset="-122"/>
+                <a:cs typeface="Century Gothic" pitchFamily="34" charset="-120"/>
               </a:rPr>
               <a:t>Edmonton beta opens this week</a:t>
             </a:r>
@@ -2315,9 +2315,9 @@
                 <a:solidFill>
                   <a:srgbClr val="3FA672"/>
                 </a:solidFill>
-                <a:latin typeface="Montserrat" pitchFamily="34" charset="0"/>
-                <a:ea typeface="Montserrat" pitchFamily="34" charset="-122"/>
-                <a:cs typeface="Montserrat" pitchFamily="34" charset="-120"/>
+                <a:latin typeface="Century Gothic" pitchFamily="34" charset="0"/>
+                <a:ea typeface="Century Gothic" pitchFamily="34" charset="-122"/>
+                <a:cs typeface="Century Gothic" pitchFamily="34" charset="-120"/>
               </a:rPr>
               <a:t>WHY I BUILT THIS</a:t>
             </a:r>
@@ -2354,9 +2354,9 @@
                 <a:solidFill>
                   <a:srgbClr val="17302A"/>
                 </a:solidFill>
-                <a:latin typeface="Montserrat" pitchFamily="34" charset="0"/>
-                <a:ea typeface="Montserrat" pitchFamily="34" charset="-122"/>
-                <a:cs typeface="Montserrat" pitchFamily="34" charset="-120"/>
+                <a:latin typeface="Century Gothic" pitchFamily="34" charset="0"/>
+                <a:ea typeface="Century Gothic" pitchFamily="34" charset="-122"/>
+                <a:cs typeface="Century Gothic" pitchFamily="34" charset="-120"/>
               </a:rPr>
               <a:t>I bought my first place.</a:t>
             </a:r>
@@ -2393,9 +2393,9 @@
                 <a:solidFill>
                   <a:srgbClr val="1E4D3B"/>
                 </a:solidFill>
-                <a:latin typeface="Montserrat" pitchFamily="34" charset="0"/>
-                <a:ea typeface="Montserrat" pitchFamily="34" charset="-122"/>
-                <a:cs typeface="Montserrat" pitchFamily="34" charset="-120"/>
+                <a:latin typeface="Century Gothic" pitchFamily="34" charset="0"/>
+                <a:ea typeface="Century Gothic" pitchFamily="34" charset="-122"/>
+                <a:cs typeface="Century Gothic" pitchFamily="34" charset="-120"/>
               </a:rPr>
               <a:t>I was guessing the whole way.</a:t>
             </a:r>
@@ -2459,9 +2459,9 @@
                 <a:solidFill>
                   <a:srgbClr val="1E4D3B"/>
                 </a:solidFill>
-                <a:latin typeface="Montserrat" pitchFamily="34" charset="0"/>
-                <a:ea typeface="Montserrat" pitchFamily="34" charset="-122"/>
-                <a:cs typeface="Montserrat" pitchFamily="34" charset="-120"/>
+                <a:latin typeface="Century Gothic" pitchFamily="34" charset="0"/>
+                <a:ea typeface="Century Gothic" pitchFamily="34" charset="-122"/>
+                <a:cs typeface="Century Gothic" pitchFamily="34" charset="-120"/>
               </a:rPr>
               <a:t>Spreadsheets</a:t>
             </a:r>
@@ -2525,9 +2525,9 @@
                 <a:solidFill>
                   <a:srgbClr val="1E4D3B"/>
                 </a:solidFill>
-                <a:latin typeface="Montserrat" pitchFamily="34" charset="0"/>
-                <a:ea typeface="Montserrat" pitchFamily="34" charset="-122"/>
-                <a:cs typeface="Montserrat" pitchFamily="34" charset="-120"/>
+                <a:latin typeface="Century Gothic" pitchFamily="34" charset="0"/>
+                <a:ea typeface="Century Gothic" pitchFamily="34" charset="-122"/>
+                <a:cs typeface="Century Gothic" pitchFamily="34" charset="-120"/>
               </a:rPr>
               <a:t>Contradictory advice</a:t>
             </a:r>
@@ -2591,9 +2591,9 @@
                 <a:solidFill>
                   <a:srgbClr val="1E4D3B"/>
                 </a:solidFill>
-                <a:latin typeface="Montserrat" pitchFamily="34" charset="0"/>
-                <a:ea typeface="Montserrat" pitchFamily="34" charset="-122"/>
-                <a:cs typeface="Montserrat" pitchFamily="34" charset="-120"/>
+                <a:latin typeface="Century Gothic" pitchFamily="34" charset="0"/>
+                <a:ea typeface="Century Gothic" pitchFamily="34" charset="-122"/>
+                <a:cs typeface="Century Gothic" pitchFamily="34" charset="-120"/>
               </a:rPr>
               <a:t>A goal that kept moving</a:t>
             </a:r>
@@ -2739,9 +2739,9 @@
                 <a:solidFill>
                   <a:srgbClr val="E8B84B"/>
                 </a:solidFill>
-                <a:latin typeface="Montserrat" pitchFamily="34" charset="0"/>
-                <a:ea typeface="Montserrat" pitchFamily="34" charset="-122"/>
-                <a:cs typeface="Montserrat" pitchFamily="34" charset="-120"/>
+                <a:latin typeface="Century Gothic" pitchFamily="34" charset="0"/>
+                <a:ea typeface="Century Gothic" pitchFamily="34" charset="-122"/>
+                <a:cs typeface="Century Gothic" pitchFamily="34" charset="-120"/>
               </a:rPr>
               <a:t>Nobody could tell me when.</a:t>
             </a:r>
@@ -2803,9 +2803,9 @@
                 <a:solidFill>
                   <a:srgbClr val="E3F2E9"/>
                 </a:solidFill>
-                <a:latin typeface="Montserrat" pitchFamily="34" charset="0"/>
-                <a:ea typeface="Montserrat" pitchFamily="34" charset="-122"/>
-                <a:cs typeface="Montserrat" pitchFamily="34" charset="-120"/>
+                <a:latin typeface="Century Gothic" pitchFamily="34" charset="0"/>
+                <a:ea typeface="Century Gothic" pitchFamily="34" charset="-122"/>
+                <a:cs typeface="Century Gothic" pitchFamily="34" charset="-120"/>
               </a:rPr>
               <a:t>How much do I actually need?</a:t>
             </a:r>
@@ -2867,9 +2867,9 @@
                 <a:solidFill>
                   <a:srgbClr val="E3F2E9"/>
                 </a:solidFill>
-                <a:latin typeface="Montserrat" pitchFamily="34" charset="0"/>
-                <a:ea typeface="Montserrat" pitchFamily="34" charset="-122"/>
-                <a:cs typeface="Montserrat" pitchFamily="34" charset="-120"/>
+                <a:latin typeface="Century Gothic" pitchFamily="34" charset="0"/>
+                <a:ea typeface="Century Gothic" pitchFamily="34" charset="-122"/>
+                <a:cs typeface="Century Gothic" pitchFamily="34" charset="-120"/>
               </a:rPr>
               <a:t>Am I even close?</a:t>
             </a:r>
@@ -2931,9 +2931,9 @@
                 <a:solidFill>
                   <a:srgbClr val="E3F2E9"/>
                 </a:solidFill>
-                <a:latin typeface="Montserrat" pitchFamily="34" charset="0"/>
-                <a:ea typeface="Montserrat" pitchFamily="34" charset="-122"/>
-                <a:cs typeface="Montserrat" pitchFamily="34" charset="-120"/>
+                <a:latin typeface="Century Gothic" pitchFamily="34" charset="0"/>
+                <a:ea typeface="Century Gothic" pitchFamily="34" charset="-122"/>
+                <a:cs typeface="Century Gothic" pitchFamily="34" charset="-120"/>
               </a:rPr>
               <a:t>Is this the year, or five years away?</a:t>
             </a:r>
@@ -3002,9 +3002,9 @@
                 <a:solidFill>
                   <a:srgbClr val="3FA672"/>
                 </a:solidFill>
-                <a:latin typeface="Montserrat" pitchFamily="34" charset="0"/>
-                <a:ea typeface="Montserrat" pitchFamily="34" charset="-122"/>
-                <a:cs typeface="Montserrat" pitchFamily="34" charset="-120"/>
+                <a:latin typeface="Century Gothic" pitchFamily="34" charset="0"/>
+                <a:ea typeface="Century Gothic" pitchFamily="34" charset="-122"/>
+                <a:cs typeface="Century Gothic" pitchFamily="34" charset="-120"/>
               </a:rPr>
               <a:t>AND I HAD IT EASIER THAN THE PEOPLE BEHIND ME</a:t>
             </a:r>
@@ -3041,9 +3041,9 @@
                 <a:solidFill>
                   <a:srgbClr val="17302A"/>
                 </a:solidFill>
-                <a:latin typeface="Montserrat" pitchFamily="34" charset="0"/>
-                <a:ea typeface="Montserrat" pitchFamily="34" charset="-122"/>
-                <a:cs typeface="Montserrat" pitchFamily="34" charset="-120"/>
+                <a:latin typeface="Century Gothic" pitchFamily="34" charset="0"/>
+                <a:ea typeface="Century Gothic" pitchFamily="34" charset="-122"/>
+                <a:cs typeface="Century Gothic" pitchFamily="34" charset="-120"/>
               </a:rPr>
               <a:t>One generation apart</a:t>
             </a:r>
@@ -3107,9 +3107,9 @@
                 <a:solidFill>
                   <a:srgbClr val="5C6F66"/>
                 </a:solidFill>
-                <a:latin typeface="Montserrat" pitchFamily="34" charset="0"/>
-                <a:ea typeface="Montserrat" pitchFamily="34" charset="-122"/>
-                <a:cs typeface="Montserrat" pitchFamily="34" charset="-120"/>
+                <a:latin typeface="Century Gothic" pitchFamily="34" charset="0"/>
+                <a:ea typeface="Century Gothic" pitchFamily="34" charset="-122"/>
+                <a:cs typeface="Century Gothic" pitchFamily="34" charset="-120"/>
               </a:rPr>
               <a:t>2006</a:t>
             </a:r>
@@ -3146,9 +3146,9 @@
                 <a:solidFill>
                   <a:srgbClr val="17302A"/>
                 </a:solidFill>
-                <a:latin typeface="Montserrat" pitchFamily="34" charset="0"/>
-                <a:ea typeface="Montserrat" pitchFamily="34" charset="-122"/>
-                <a:cs typeface="Montserrat" pitchFamily="34" charset="-120"/>
+                <a:latin typeface="Century Gothic" pitchFamily="34" charset="0"/>
+                <a:ea typeface="Century Gothic" pitchFamily="34" charset="-122"/>
+                <a:cs typeface="Century Gothic" pitchFamily="34" charset="-120"/>
               </a:rPr>
               <a:t>$276,974</a:t>
             </a:r>
@@ -3212,9 +3212,9 @@
                 <a:solidFill>
                   <a:srgbClr val="E8B84B"/>
                 </a:solidFill>
-                <a:latin typeface="Montserrat" pitchFamily="34" charset="0"/>
-                <a:ea typeface="Montserrat" pitchFamily="34" charset="-122"/>
-                <a:cs typeface="Montserrat" pitchFamily="34" charset="-120"/>
+                <a:latin typeface="Century Gothic" pitchFamily="34" charset="0"/>
+                <a:ea typeface="Century Gothic" pitchFamily="34" charset="-122"/>
+                <a:cs typeface="Century Gothic" pitchFamily="34" charset="-120"/>
               </a:rPr>
               <a:t>TODAY</a:t>
             </a:r>
@@ -3251,9 +3251,9 @@
                 <a:solidFill>
                   <a:srgbClr val="FFFFFF"/>
                 </a:solidFill>
-                <a:latin typeface="Montserrat" pitchFamily="34" charset="0"/>
-                <a:ea typeface="Montserrat" pitchFamily="34" charset="-122"/>
-                <a:cs typeface="Montserrat" pitchFamily="34" charset="-120"/>
+                <a:latin typeface="Century Gothic" pitchFamily="34" charset="0"/>
+                <a:ea typeface="Century Gothic" pitchFamily="34" charset="-122"/>
+                <a:cs typeface="Century Gothic" pitchFamily="34" charset="-120"/>
               </a:rPr>
               <a:t>$696,078</a:t>
             </a:r>
@@ -3290,9 +3290,9 @@
                 <a:solidFill>
                   <a:srgbClr val="3FA672"/>
                 </a:solidFill>
-                <a:latin typeface="Montserrat" pitchFamily="34" charset="0"/>
-                <a:ea typeface="Montserrat" pitchFamily="34" charset="-122"/>
-                <a:cs typeface="Montserrat" pitchFamily="34" charset="-120"/>
+                <a:latin typeface="Century Gothic" pitchFamily="34" charset="0"/>
+                <a:ea typeface="Century Gothic" pitchFamily="34" charset="-122"/>
+                <a:cs typeface="Century Gothic" pitchFamily="34" charset="-120"/>
               </a:rPr>
               <a:t>2.5×</a:t>
             </a:r>
@@ -3329,9 +3329,9 @@
                 <a:solidFill>
                   <a:srgbClr val="5C6F66"/>
                 </a:solidFill>
-                <a:latin typeface="Montserrat" pitchFamily="34" charset="0"/>
-                <a:ea typeface="Montserrat" pitchFamily="34" charset="-122"/>
-                <a:cs typeface="Montserrat" pitchFamily="34" charset="-120"/>
+                <a:latin typeface="Century Gothic" pitchFamily="34" charset="0"/>
+                <a:ea typeface="Century Gothic" pitchFamily="34" charset="-122"/>
+                <a:cs typeface="Century Gothic" pitchFamily="34" charset="-120"/>
               </a:rPr>
               <a:t>Average Canadian home</a:t>
             </a:r>
@@ -3368,9 +3368,9 @@
                 <a:solidFill>
                   <a:srgbClr val="5C6F66"/>
                 </a:solidFill>
-                <a:latin typeface="Montserrat" pitchFamily="34" charset="0"/>
-                <a:ea typeface="Montserrat" pitchFamily="34" charset="-122"/>
-                <a:cs typeface="Montserrat" pitchFamily="34" charset="-120"/>
+                <a:latin typeface="Century Gothic" pitchFamily="34" charset="0"/>
+                <a:ea typeface="Century Gothic" pitchFamily="34" charset="-122"/>
+                <a:cs typeface="Century Gothic" pitchFamily="34" charset="-120"/>
               </a:rPr>
               <a:t>Source: CREA (2006 average MLS price) · national average, June 2026</a:t>
             </a:r>
@@ -3439,9 +3439,9 @@
                 <a:solidFill>
                   <a:srgbClr val="3FA672"/>
                 </a:solidFill>
-                <a:latin typeface="Montserrat" pitchFamily="34" charset="0"/>
-                <a:ea typeface="Montserrat" pitchFamily="34" charset="-122"/>
-                <a:cs typeface="Montserrat" pitchFamily="34" charset="-120"/>
+                <a:latin typeface="Century Gothic" pitchFamily="34" charset="0"/>
+                <a:ea typeface="Century Gothic" pitchFamily="34" charset="-122"/>
+                <a:cs typeface="Century Gothic" pitchFamily="34" charset="-120"/>
               </a:rPr>
               <a:t>SO I BUILT THE THING I NEEDED</a:t>
             </a:r>
@@ -3478,9 +3478,9 @@
                 <a:solidFill>
                   <a:srgbClr val="17302A"/>
                 </a:solidFill>
-                <a:latin typeface="Montserrat" pitchFamily="34" charset="0"/>
-                <a:ea typeface="Montserrat" pitchFamily="34" charset="-122"/>
-                <a:cs typeface="Montserrat" pitchFamily="34" charset="-120"/>
+                <a:latin typeface="Century Gothic" pitchFamily="34" charset="0"/>
+                <a:ea typeface="Century Gothic" pitchFamily="34" charset="-122"/>
+                <a:cs typeface="Century Gothic" pitchFamily="34" charset="-120"/>
               </a:rPr>
               <a:t>Sixty seconds in. A real date out.</a:t>
             </a:r>
@@ -3542,9 +3542,9 @@
                 <a:solidFill>
                   <a:srgbClr val="E8B84B"/>
                 </a:solidFill>
-                <a:latin typeface="Montserrat" pitchFamily="34" charset="0"/>
-                <a:ea typeface="Montserrat" pitchFamily="34" charset="-122"/>
-                <a:cs typeface="Montserrat" pitchFamily="34" charset="-120"/>
+                <a:latin typeface="Century Gothic" pitchFamily="34" charset="0"/>
+                <a:ea typeface="Century Gothic" pitchFamily="34" charset="-122"/>
+                <a:cs typeface="Century Gothic" pitchFamily="34" charset="-120"/>
               </a:rPr>
               <a:t>1</a:t>
             </a:r>
@@ -3581,9 +3581,9 @@
                 <a:solidFill>
                   <a:srgbClr val="17302A"/>
                 </a:solidFill>
-                <a:latin typeface="Montserrat" pitchFamily="34" charset="0"/>
-                <a:ea typeface="Montserrat" pitchFamily="34" charset="-122"/>
-                <a:cs typeface="Montserrat" pitchFamily="34" charset="-120"/>
+                <a:latin typeface="Century Gothic" pitchFamily="34" charset="0"/>
+                <a:ea typeface="Century Gothic" pitchFamily="34" charset="-122"/>
+                <a:cs typeface="Century Gothic" pitchFamily="34" charset="-120"/>
               </a:rPr>
               <a:t>Three questions</a:t>
             </a:r>
@@ -3645,9 +3645,9 @@
                 <a:solidFill>
                   <a:srgbClr val="E8B84B"/>
                 </a:solidFill>
-                <a:latin typeface="Montserrat" pitchFamily="34" charset="0"/>
-                <a:ea typeface="Montserrat" pitchFamily="34" charset="-122"/>
-                <a:cs typeface="Montserrat" pitchFamily="34" charset="-120"/>
+                <a:latin typeface="Century Gothic" pitchFamily="34" charset="0"/>
+                <a:ea typeface="Century Gothic" pitchFamily="34" charset="-122"/>
+                <a:cs typeface="Century Gothic" pitchFamily="34" charset="-120"/>
               </a:rPr>
               <a:t>2</a:t>
             </a:r>
@@ -3684,9 +3684,9 @@
                 <a:solidFill>
                   <a:srgbClr val="17302A"/>
                 </a:solidFill>
-                <a:latin typeface="Montserrat" pitchFamily="34" charset="0"/>
-                <a:ea typeface="Montserrat" pitchFamily="34" charset="-122"/>
-                <a:cs typeface="Montserrat" pitchFamily="34" charset="-120"/>
+                <a:latin typeface="Century Gothic" pitchFamily="34" charset="0"/>
+                <a:ea typeface="Century Gothic" pitchFamily="34" charset="-122"/>
+                <a:cs typeface="Century Gothic" pitchFamily="34" charset="-120"/>
               </a:rPr>
               <a:t>A real month</a:t>
             </a:r>
@@ -3748,9 +3748,9 @@
                 <a:solidFill>
                   <a:srgbClr val="E8B84B"/>
                 </a:solidFill>
-                <a:latin typeface="Montserrat" pitchFamily="34" charset="0"/>
-                <a:ea typeface="Montserrat" pitchFamily="34" charset="-122"/>
-                <a:cs typeface="Montserrat" pitchFamily="34" charset="-120"/>
+                <a:latin typeface="Century Gothic" pitchFamily="34" charset="0"/>
+                <a:ea typeface="Century Gothic" pitchFamily="34" charset="-122"/>
+                <a:cs typeface="Century Gothic" pitchFamily="34" charset="-120"/>
               </a:rPr>
               <a:t>3</a:t>
             </a:r>
@@ -3787,9 +3787,9 @@
                 <a:solidFill>
                   <a:srgbClr val="17302A"/>
                 </a:solidFill>
-                <a:latin typeface="Montserrat" pitchFamily="34" charset="0"/>
-                <a:ea typeface="Montserrat" pitchFamily="34" charset="-122"/>
-                <a:cs typeface="Montserrat" pitchFamily="34" charset="-120"/>
+                <a:latin typeface="Century Gothic" pitchFamily="34" charset="0"/>
+                <a:ea typeface="Century Gothic" pitchFamily="34" charset="-122"/>
+                <a:cs typeface="Century Gothic" pitchFamily="34" charset="-120"/>
               </a:rPr>
               <a:t>Watch it get closer</a:t>
             </a:r>
@@ -3853,9 +3853,9 @@
                 <a:solidFill>
                   <a:srgbClr val="E8B84B"/>
                 </a:solidFill>
-                <a:latin typeface="Montserrat" pitchFamily="34" charset="0"/>
-                <a:ea typeface="Montserrat" pitchFamily="34" charset="-122"/>
-                <a:cs typeface="Montserrat" pitchFamily="34" charset="-120"/>
+                <a:latin typeface="Century Gothic" pitchFamily="34" charset="0"/>
+                <a:ea typeface="Century Gothic" pitchFamily="34" charset="-122"/>
+                <a:cs typeface="Century Gothic" pitchFamily="34" charset="-120"/>
               </a:rPr>
               <a:t>KEYS IN HAND</a:t>
             </a:r>
@@ -3892,9 +3892,9 @@
                 <a:solidFill>
                   <a:srgbClr val="FFFFFF"/>
                 </a:solidFill>
-                <a:latin typeface="Montserrat" pitchFamily="34" charset="0"/>
-                <a:ea typeface="Montserrat" pitchFamily="34" charset="-122"/>
-                <a:cs typeface="Montserrat" pitchFamily="34" charset="-120"/>
+                <a:latin typeface="Century Gothic" pitchFamily="34" charset="0"/>
+                <a:ea typeface="Century Gothic" pitchFamily="34" charset="-122"/>
+                <a:cs typeface="Century Gothic" pitchFamily="34" charset="-120"/>
               </a:rPr>
               <a:t>June 2029</a:t>
             </a:r>
@@ -3985,9 +3985,9 @@
                 <a:solidFill>
                   <a:srgbClr val="E3F2E9"/>
                 </a:solidFill>
-                <a:latin typeface="Montserrat" pitchFamily="34" charset="0"/>
-                <a:ea typeface="Montserrat" pitchFamily="34" charset="-122"/>
-                <a:cs typeface="Montserrat" pitchFamily="34" charset="-120"/>
+                <a:latin typeface="Century Gothic" pitchFamily="34" charset="0"/>
+                <a:ea typeface="Century Gothic" pitchFamily="34" charset="-122"/>
+                <a:cs typeface="Century Gothic" pitchFamily="34" charset="-120"/>
               </a:rPr>
               <a:t>58% of the way there</a:t>
             </a:r>
@@ -4056,9 +4056,9 @@
                 <a:solidFill>
                   <a:srgbClr val="3FA672"/>
                 </a:solidFill>
-                <a:latin typeface="Montserrat" pitchFamily="34" charset="0"/>
-                <a:ea typeface="Montserrat" pitchFamily="34" charset="-122"/>
-                <a:cs typeface="Montserrat" pitchFamily="34" charset="-120"/>
+                <a:latin typeface="Century Gothic" pitchFamily="34" charset="0"/>
+                <a:ea typeface="Century Gothic" pitchFamily="34" charset="-122"/>
+                <a:cs typeface="Century Gothic" pitchFamily="34" charset="-120"/>
               </a:rPr>
               <a:t>INNOVATION</a:t>
             </a:r>
@@ -4095,9 +4095,9 @@
                 <a:solidFill>
                   <a:srgbClr val="17302A"/>
                 </a:solidFill>
-                <a:latin typeface="Montserrat" pitchFamily="34" charset="0"/>
-                <a:ea typeface="Montserrat" pitchFamily="34" charset="-122"/>
-                <a:cs typeface="Montserrat" pitchFamily="34" charset="-120"/>
+                <a:latin typeface="Century Gothic" pitchFamily="34" charset="0"/>
+                <a:ea typeface="Century Gothic" pitchFamily="34" charset="-122"/>
+                <a:cs typeface="Century Gothic" pitchFamily="34" charset="-120"/>
               </a:rPr>
               <a:t>We changed the question</a:t>
             </a:r>
@@ -4161,9 +4161,9 @@
                 <a:solidFill>
                   <a:srgbClr val="5C6F66"/>
                 </a:solidFill>
-                <a:latin typeface="Montserrat" pitchFamily="34" charset="0"/>
-                <a:ea typeface="Montserrat" pitchFamily="34" charset="-122"/>
-                <a:cs typeface="Montserrat" pitchFamily="34" charset="-120"/>
+                <a:latin typeface="Century Gothic" pitchFamily="34" charset="0"/>
+                <a:ea typeface="Century Gothic" pitchFamily="34" charset="-122"/>
+                <a:cs typeface="Century Gothic" pitchFamily="34" charset="-120"/>
               </a:rPr>
               <a:t>EVERY OTHER TOOL</a:t>
             </a:r>
@@ -4200,9 +4200,9 @@
                 <a:solidFill>
                   <a:srgbClr val="5C6F66"/>
                 </a:solidFill>
-                <a:latin typeface="Montserrat" pitchFamily="34" charset="0"/>
-                <a:ea typeface="Montserrat" pitchFamily="34" charset="-122"/>
-                <a:cs typeface="Montserrat" pitchFamily="34" charset="-120"/>
+                <a:latin typeface="Century Gothic" pitchFamily="34" charset="0"/>
+                <a:ea typeface="Century Gothic" pitchFamily="34" charset="-122"/>
+                <a:cs typeface="Century Gothic" pitchFamily="34" charset="-120"/>
               </a:rPr>
               <a:t>“Afford it today?”</a:t>
             </a:r>
@@ -4239,9 +4239,9 @@
                 <a:solidFill>
                   <a:srgbClr val="B4452F"/>
                 </a:solidFill>
-                <a:latin typeface="Montserrat" pitchFamily="34" charset="0"/>
-                <a:ea typeface="Montserrat" pitchFamily="34" charset="-122"/>
-                <a:cs typeface="Montserrat" pitchFamily="34" charset="-120"/>
+                <a:latin typeface="Century Gothic" pitchFamily="34" charset="0"/>
+                <a:ea typeface="Century Gothic" pitchFamily="34" charset="-122"/>
+                <a:cs typeface="Century Gothic" pitchFamily="34" charset="-120"/>
               </a:rPr>
               <a:t>No.</a:t>
             </a:r>
@@ -4305,9 +4305,9 @@
                 <a:solidFill>
                   <a:srgbClr val="E8B84B"/>
                 </a:solidFill>
-                <a:latin typeface="Montserrat" pitchFamily="34" charset="0"/>
-                <a:ea typeface="Montserrat" pitchFamily="34" charset="-122"/>
-                <a:cs typeface="Montserrat" pitchFamily="34" charset="-120"/>
+                <a:latin typeface="Century Gothic" pitchFamily="34" charset="0"/>
+                <a:ea typeface="Century Gothic" pitchFamily="34" charset="-122"/>
+                <a:cs typeface="Century Gothic" pitchFamily="34" charset="-120"/>
               </a:rPr>
               <a:t>KEYDATE</a:t>
             </a:r>
@@ -4344,9 +4344,9 @@
                 <a:solidFill>
                   <a:srgbClr val="FFFFFF"/>
                 </a:solidFill>
-                <a:latin typeface="Montserrat" pitchFamily="34" charset="0"/>
-                <a:ea typeface="Montserrat" pitchFamily="34" charset="-122"/>
-                <a:cs typeface="Montserrat" pitchFamily="34" charset="-120"/>
+                <a:latin typeface="Century Gothic" pitchFamily="34" charset="0"/>
+                <a:ea typeface="Century Gothic" pitchFamily="34" charset="-122"/>
+                <a:cs typeface="Century Gothic" pitchFamily="34" charset="-120"/>
               </a:rPr>
               <a:t>“When?”</a:t>
             </a:r>
@@ -4383,9 +4383,9 @@
                 <a:solidFill>
                   <a:srgbClr val="3FA672"/>
                 </a:solidFill>
-                <a:latin typeface="Montserrat" pitchFamily="34" charset="0"/>
-                <a:ea typeface="Montserrat" pitchFamily="34" charset="-122"/>
-                <a:cs typeface="Montserrat" pitchFamily="34" charset="-120"/>
+                <a:latin typeface="Century Gothic" pitchFamily="34" charset="0"/>
+                <a:ea typeface="Century Gothic" pitchFamily="34" charset="-122"/>
+                <a:cs typeface="Century Gothic" pitchFamily="34" charset="-120"/>
               </a:rPr>
               <a:t>June 2029.</a:t>
             </a:r>
@@ -4454,9 +4454,9 @@
                 <a:solidFill>
                   <a:srgbClr val="3FA672"/>
                 </a:solidFill>
-                <a:latin typeface="Montserrat" pitchFamily="34" charset="0"/>
-                <a:ea typeface="Montserrat" pitchFamily="34" charset="-122"/>
-                <a:cs typeface="Montserrat" pitchFamily="34" charset="-120"/>
+                <a:latin typeface="Century Gothic" pitchFamily="34" charset="0"/>
+                <a:ea typeface="Century Gothic" pitchFamily="34" charset="-122"/>
+                <a:cs typeface="Century Gothic" pitchFamily="34" charset="-120"/>
               </a:rPr>
               <a:t>IT WAS NEVER JUST MY STORY</a:t>
             </a:r>
@@ -4489,17 +4489,17 @@
               <a:buNone/>
             </a:pPr>
             <a:r>
-              <a:rPr lang="en-US" sz="3500" b="1" dirty="0">
+              <a:rPr lang="en-US" sz="3200" b="1" dirty="0">
                 <a:solidFill>
                   <a:srgbClr val="17302A"/>
                 </a:solidFill>
-                <a:latin typeface="Montserrat" pitchFamily="34" charset="0"/>
-                <a:ea typeface="Montserrat" pitchFamily="34" charset="-122"/>
-                <a:cs typeface="Montserrat" pitchFamily="34" charset="-120"/>
+                <a:latin typeface="Century Gothic" pitchFamily="34" charset="0"/>
+                <a:ea typeface="Century Gothic" pitchFamily="34" charset="-122"/>
+                <a:cs typeface="Century Gothic" pitchFamily="34" charset="-120"/>
               </a:rPr>
               <a:t>The engine doesn’t change at the border</a:t>
             </a:r>
-            <a:endParaRPr lang="en-US" sz="3500" dirty="0"/>
+            <a:endParaRPr lang="en-US" sz="3200" dirty="0"/>
           </a:p>
         </p:txBody>
       </p:sp>
@@ -4559,9 +4559,9 @@
                 <a:solidFill>
                   <a:srgbClr val="FFFFFF"/>
                 </a:solidFill>
-                <a:latin typeface="Montserrat" pitchFamily="34" charset="0"/>
-                <a:ea typeface="Montserrat" pitchFamily="34" charset="-122"/>
-                <a:cs typeface="Montserrat" pitchFamily="34" charset="-120"/>
+                <a:latin typeface="Century Gothic" pitchFamily="34" charset="0"/>
+                <a:ea typeface="Century Gothic" pitchFamily="34" charset="-122"/>
+                <a:cs typeface="Century Gothic" pitchFamily="34" charset="-120"/>
               </a:rPr>
               <a:t>Canada</a:t>
             </a:r>
@@ -4625,9 +4625,9 @@
                 <a:solidFill>
                   <a:srgbClr val="17302A"/>
                 </a:solidFill>
-                <a:latin typeface="Montserrat" pitchFamily="34" charset="0"/>
-                <a:ea typeface="Montserrat" pitchFamily="34" charset="-122"/>
-                <a:cs typeface="Montserrat" pitchFamily="34" charset="-120"/>
+                <a:latin typeface="Century Gothic" pitchFamily="34" charset="0"/>
+                <a:ea typeface="Century Gothic" pitchFamily="34" charset="-122"/>
+                <a:cs typeface="Century Gothic" pitchFamily="34" charset="-120"/>
               </a:rPr>
               <a:t>Australia</a:t>
             </a:r>
@@ -4691,9 +4691,9 @@
                 <a:solidFill>
                   <a:srgbClr val="17302A"/>
                 </a:solidFill>
-                <a:latin typeface="Montserrat" pitchFamily="34" charset="0"/>
-                <a:ea typeface="Montserrat" pitchFamily="34" charset="-122"/>
-                <a:cs typeface="Montserrat" pitchFamily="34" charset="-120"/>
+                <a:latin typeface="Century Gothic" pitchFamily="34" charset="0"/>
+                <a:ea typeface="Century Gothic" pitchFamily="34" charset="-122"/>
+                <a:cs typeface="Century Gothic" pitchFamily="34" charset="-120"/>
               </a:rPr>
               <a:t>UK</a:t>
             </a:r>
@@ -4757,9 +4757,9 @@
                 <a:solidFill>
                   <a:srgbClr val="17302A"/>
                 </a:solidFill>
-                <a:latin typeface="Montserrat" pitchFamily="34" charset="0"/>
-                <a:ea typeface="Montserrat" pitchFamily="34" charset="-122"/>
-                <a:cs typeface="Montserrat" pitchFamily="34" charset="-120"/>
+                <a:latin typeface="Century Gothic" pitchFamily="34" charset="0"/>
+                <a:ea typeface="Century Gothic" pitchFamily="34" charset="-122"/>
+                <a:cs typeface="Century Gothic" pitchFamily="34" charset="-120"/>
               </a:rPr>
               <a:t>Ireland</a:t>
             </a:r>
@@ -4823,9 +4823,9 @@
                 <a:solidFill>
                   <a:srgbClr val="17302A"/>
                 </a:solidFill>
-                <a:latin typeface="Montserrat" pitchFamily="34" charset="0"/>
-                <a:ea typeface="Montserrat" pitchFamily="34" charset="-122"/>
-                <a:cs typeface="Montserrat" pitchFamily="34" charset="-120"/>
+                <a:latin typeface="Century Gothic" pitchFamily="34" charset="0"/>
+                <a:ea typeface="Century Gothic" pitchFamily="34" charset="-122"/>
+                <a:cs typeface="Century Gothic" pitchFamily="34" charset="-120"/>
               </a:rPr>
               <a:t>New Zealand</a:t>
             </a:r>
@@ -4889,9 +4889,9 @@
                 <a:solidFill>
                   <a:srgbClr val="E3F2E9"/>
                 </a:solidFill>
-                <a:latin typeface="Montserrat" pitchFamily="34" charset="0"/>
-                <a:ea typeface="Montserrat" pitchFamily="34" charset="-122"/>
-                <a:cs typeface="Montserrat" pitchFamily="34" charset="-120"/>
+                <a:latin typeface="Century Gothic" pitchFamily="34" charset="0"/>
+                <a:ea typeface="Century Gothic" pitchFamily="34" charset="-122"/>
+                <a:cs typeface="Century Gothic" pitchFamily="34" charset="-120"/>
               </a:rPr>
               <a:t>The engine stays. </a:t>
             </a:r>
@@ -4903,9 +4903,9 @@
                 <a:solidFill>
                   <a:srgbClr val="E8B84B"/>
                 </a:solidFill>
-                <a:latin typeface="Montserrat" pitchFamily="34" charset="0"/>
-                <a:ea typeface="Montserrat" pitchFamily="34" charset="-122"/>
-                <a:cs typeface="Montserrat" pitchFamily="34" charset="-120"/>
+                <a:latin typeface="Century Gothic" pitchFamily="34" charset="0"/>
+                <a:ea typeface="Century Gothic" pitchFamily="34" charset="-122"/>
+                <a:cs typeface="Century Gothic" pitchFamily="34" charset="-120"/>
               </a:rPr>
               <a:t>The rulebook swaps.</a:t>
             </a:r>
@@ -4974,9 +4974,9 @@
                 <a:solidFill>
                   <a:srgbClr val="E8B84B"/>
                 </a:solidFill>
-                <a:latin typeface="Montserrat" pitchFamily="34" charset="0"/>
-                <a:ea typeface="Montserrat" pitchFamily="34" charset="-122"/>
-                <a:cs typeface="Montserrat" pitchFamily="34" charset="-120"/>
+                <a:latin typeface="Century Gothic" pitchFamily="34" charset="0"/>
+                <a:ea typeface="Century Gothic" pitchFamily="34" charset="-122"/>
+                <a:cs typeface="Century Gothic" pitchFamily="34" charset="-120"/>
               </a:rPr>
               <a:t>COMMUNITY IMPACT &amp; SUSTAINABILITY</a:t>
             </a:r>
@@ -5013,9 +5013,9 @@
                 <a:solidFill>
                   <a:srgbClr val="FFFFFF"/>
                 </a:solidFill>
-                <a:latin typeface="Montserrat" pitchFamily="34" charset="0"/>
-                <a:ea typeface="Montserrat" pitchFamily="34" charset="-122"/>
-                <a:cs typeface="Montserrat" pitchFamily="34" charset="-120"/>
+                <a:latin typeface="Century Gothic" pitchFamily="34" charset="0"/>
+                <a:ea typeface="Century Gothic" pitchFamily="34" charset="-122"/>
+                <a:cs typeface="Century Gothic" pitchFamily="34" charset="-120"/>
               </a:rPr>
               <a:t>The money we refuse to take</a:t>
             </a:r>
@@ -5082,9 +5082,9 @@
                 <a:solidFill>
                   <a:srgbClr val="FFFFFF"/>
                 </a:solidFill>
-                <a:latin typeface="Montserrat" pitchFamily="34" charset="0"/>
-                <a:ea typeface="Montserrat" pitchFamily="34" charset="-122"/>
-                <a:cs typeface="Montserrat" pitchFamily="34" charset="-120"/>
+                <a:latin typeface="Century Gothic" pitchFamily="34" charset="0"/>
+                <a:ea typeface="Century Gothic" pitchFamily="34" charset="-122"/>
+                <a:cs typeface="Century Gothic" pitchFamily="34" charset="-120"/>
               </a:rPr>
               <a:t>We never sell you</a:t>
             </a:r>
@@ -5102,9 +5102,9 @@
                 <a:solidFill>
                   <a:srgbClr val="FFFFFF"/>
                 </a:solidFill>
-                <a:latin typeface="Montserrat" pitchFamily="34" charset="0"/>
-                <a:ea typeface="Montserrat" pitchFamily="34" charset="-122"/>
-                <a:cs typeface="Montserrat" pitchFamily="34" charset="-120"/>
+                <a:latin typeface="Century Gothic" pitchFamily="34" charset="0"/>
+                <a:ea typeface="Century Gothic" pitchFamily="34" charset="-122"/>
+                <a:cs typeface="Century Gothic" pitchFamily="34" charset="-120"/>
               </a:rPr>
               <a:t>to brokers.</a:t>
             </a:r>
@@ -5171,9 +5171,9 @@
                 <a:solidFill>
                   <a:srgbClr val="FFFFFF"/>
                 </a:solidFill>
-                <a:latin typeface="Montserrat" pitchFamily="34" charset="0"/>
-                <a:ea typeface="Montserrat" pitchFamily="34" charset="-122"/>
-                <a:cs typeface="Montserrat" pitchFamily="34" charset="-120"/>
+                <a:latin typeface="Century Gothic" pitchFamily="34" charset="0"/>
+                <a:ea typeface="Century Gothic" pitchFamily="34" charset="-122"/>
+                <a:cs typeface="Century Gothic" pitchFamily="34" charset="-120"/>
               </a:rPr>
               <a:t>We built the tool</a:t>
             </a:r>
@@ -5191,9 +5191,9 @@
                 <a:solidFill>
                   <a:srgbClr val="FFFFFF"/>
                 </a:solidFill>
-                <a:latin typeface="Montserrat" pitchFamily="34" charset="0"/>
-                <a:ea typeface="Montserrat" pitchFamily="34" charset="-122"/>
-                <a:cs typeface="Montserrat" pitchFamily="34" charset="-120"/>
+                <a:latin typeface="Century Gothic" pitchFamily="34" charset="0"/>
+                <a:ea typeface="Century Gothic" pitchFamily="34" charset="-122"/>
+                <a:cs typeface="Century Gothic" pitchFamily="34" charset="-120"/>
               </a:rPr>
               <a:t>that says don’t buy.</a:t>
             </a:r>
@@ -5230,9 +5230,9 @@
                 <a:solidFill>
                   <a:srgbClr val="E8B84B"/>
                 </a:solidFill>
-                <a:latin typeface="Montserrat" pitchFamily="34" charset="0"/>
-                <a:ea typeface="Montserrat" pitchFamily="34" charset="-122"/>
-                <a:cs typeface="Montserrat" pitchFamily="34" charset="-120"/>
+                <a:latin typeface="Century Gothic" pitchFamily="34" charset="0"/>
+                <a:ea typeface="Century Gothic" pitchFamily="34" charset="-122"/>
+                <a:cs typeface="Century Gothic" pitchFamily="34" charset="-120"/>
               </a:rPr>
               <a:t>A company on referral fees can never say that.</a:t>
             </a:r>
@@ -5301,9 +5301,9 @@
                 <a:solidFill>
                   <a:srgbClr val="3FA672"/>
                 </a:solidFill>
-                <a:latin typeface="Montserrat" pitchFamily="34" charset="0"/>
-                <a:ea typeface="Montserrat" pitchFamily="34" charset="-122"/>
-                <a:cs typeface="Montserrat" pitchFamily="34" charset="-120"/>
+                <a:latin typeface="Century Gothic" pitchFamily="34" charset="0"/>
+                <a:ea typeface="Century Gothic" pitchFamily="34" charset="-122"/>
+                <a:cs typeface="Century Gothic" pitchFamily="34" charset="-120"/>
               </a:rPr>
               <a:t>SCALABILITY &amp; LEADERSHIP</a:t>
             </a:r>
@@ -5340,9 +5340,9 @@
                 <a:solidFill>
                   <a:srgbClr val="17302A"/>
                 </a:solidFill>
-                <a:latin typeface="Montserrat" pitchFamily="34" charset="0"/>
-                <a:ea typeface="Montserrat" pitchFamily="34" charset="-122"/>
-                <a:cs typeface="Montserrat" pitchFamily="34" charset="-120"/>
+                <a:latin typeface="Century Gothic" pitchFamily="34" charset="0"/>
+                <a:ea typeface="Century Gothic" pitchFamily="34" charset="-122"/>
+                <a:cs typeface="Century Gothic" pitchFamily="34" charset="-120"/>
               </a:rPr>
               <a:t>Built, shipped, live</a:t>
             </a:r>
@@ -5406,9 +5406,9 @@
                 <a:solidFill>
                   <a:srgbClr val="3FA672"/>
                 </a:solidFill>
-                <a:latin typeface="Montserrat" pitchFamily="34" charset="0"/>
-                <a:ea typeface="Montserrat" pitchFamily="34" charset="-122"/>
-                <a:cs typeface="Montserrat" pitchFamily="34" charset="-120"/>
+                <a:latin typeface="Century Gothic" pitchFamily="34" charset="0"/>
+                <a:ea typeface="Century Gothic" pitchFamily="34" charset="-122"/>
+                <a:cs typeface="Century Gothic" pitchFamily="34" charset="-120"/>
               </a:rPr>
               <a:t>467</a:t>
             </a:r>
@@ -5445,9 +5445,9 @@
                 <a:solidFill>
                   <a:srgbClr val="5C6F66"/>
                 </a:solidFill>
-                <a:latin typeface="Montserrat" pitchFamily="34" charset="0"/>
-                <a:ea typeface="Montserrat" pitchFamily="34" charset="-122"/>
-                <a:cs typeface="Montserrat" pitchFamily="34" charset="-120"/>
+                <a:latin typeface="Century Gothic" pitchFamily="34" charset="0"/>
+                <a:ea typeface="Century Gothic" pitchFamily="34" charset="-122"/>
+                <a:cs typeface="Century Gothic" pitchFamily="34" charset="-120"/>
               </a:rPr>
               <a:t>municipalities</a:t>
             </a:r>
@@ -5511,9 +5511,9 @@
                 <a:solidFill>
                   <a:srgbClr val="3FA672"/>
                 </a:solidFill>
-                <a:latin typeface="Montserrat" pitchFamily="34" charset="0"/>
-                <a:ea typeface="Montserrat" pitchFamily="34" charset="-122"/>
-                <a:cs typeface="Montserrat" pitchFamily="34" charset="-120"/>
+                <a:latin typeface="Century Gothic" pitchFamily="34" charset="0"/>
+                <a:ea typeface="Century Gothic" pitchFamily="34" charset="-122"/>
+                <a:cs typeface="Century Gothic" pitchFamily="34" charset="-120"/>
               </a:rPr>
               <a:t>~$0</a:t>
             </a:r>
@@ -5550,9 +5550,9 @@
                 <a:solidFill>
                   <a:srgbClr val="5C6F66"/>
                 </a:solidFill>
-                <a:latin typeface="Montserrat" pitchFamily="34" charset="0"/>
-                <a:ea typeface="Montserrat" pitchFamily="34" charset="-122"/>
-                <a:cs typeface="Montserrat" pitchFamily="34" charset="-120"/>
+                <a:latin typeface="Century Gothic" pitchFamily="34" charset="0"/>
+                <a:ea typeface="Century Gothic" pitchFamily="34" charset="-122"/>
+                <a:cs typeface="Century Gothic" pitchFamily="34" charset="-120"/>
               </a:rPr>
               <a:t>cost per user</a:t>
             </a:r>
@@ -5616,9 +5616,9 @@
                 <a:solidFill>
                   <a:srgbClr val="3FA672"/>
                 </a:solidFill>
-                <a:latin typeface="Montserrat" pitchFamily="34" charset="0"/>
-                <a:ea typeface="Montserrat" pitchFamily="34" charset="-122"/>
-                <a:cs typeface="Montserrat" pitchFamily="34" charset="-120"/>
+                <a:latin typeface="Century Gothic" pitchFamily="34" charset="0"/>
+                <a:ea typeface="Century Gothic" pitchFamily="34" charset="-122"/>
+                <a:cs typeface="Century Gothic" pitchFamily="34" charset="-120"/>
               </a:rPr>
               <a:t>1</a:t>
             </a:r>
@@ -5655,9 +5655,9 @@
                 <a:solidFill>
                   <a:srgbClr val="5C6F66"/>
                 </a:solidFill>
-                <a:latin typeface="Montserrat" pitchFamily="34" charset="0"/>
-                <a:ea typeface="Montserrat" pitchFamily="34" charset="-122"/>
-                <a:cs typeface="Montserrat" pitchFamily="34" charset="-120"/>
+                <a:latin typeface="Century Gothic" pitchFamily="34" charset="0"/>
+                <a:ea typeface="Century Gothic" pitchFamily="34" charset="-122"/>
+                <a:cs typeface="Century Gothic" pitchFamily="34" charset="-120"/>
               </a:rPr>
               <a:t>founder</a:t>
             </a:r>
@@ -5721,9 +5721,9 @@
                 <a:solidFill>
                   <a:srgbClr val="1E4D3B"/>
                 </a:solidFill>
-                <a:latin typeface="Montserrat" pitchFamily="34" charset="0"/>
-                <a:ea typeface="Montserrat" pitchFamily="34" charset="-122"/>
-                <a:cs typeface="Montserrat" pitchFamily="34" charset="-120"/>
+                <a:latin typeface="Century Gothic" pitchFamily="34" charset="0"/>
+                <a:ea typeface="Century Gothic" pitchFamily="34" charset="-122"/>
+                <a:cs typeface="Century Gothic" pitchFamily="34" charset="-120"/>
               </a:rPr>
               <a:t>A new country is a rulebook, not a rebuild.</a:t>
             </a:r>

--- a/apps/keydate/pitch/KeyDate-JCI-Edmonton.pptx
+++ b/apps/keydate/pitch/KeyDate-JCI-Edmonton.pptx
@@ -3797,201 +3797,73 @@
           </a:p>
         </p:txBody>
       </p:sp>
-      <p:sp>
-        <p:nvSpPr>
-          <p:cNvPr id="13" name="Shape 11"/>
-          <p:cNvSpPr/>
-          <p:nvPr/>
-        </p:nvSpPr>
-        <p:spPr>
-          <a:xfrm>
-            <a:off x="8138160" y="2148840"/>
-            <a:ext cx="3364992" cy="3246120"/>
-          </a:xfrm>
-          <a:prstGeom prst="roundRect">
-            <a:avLst>
-              <a:gd name="adj" fmla="val 5070"/>
-            </a:avLst>
-          </a:prstGeom>
-          <a:solidFill>
-            <a:srgbClr val="1E4D3B"/>
-          </a:solidFill>
-          <a:ln w="12700">
-            <a:solidFill>
-              <a:srgbClr val="1E4D3B"/>
-            </a:solidFill>
-            <a:prstDash val="solid"/>
-          </a:ln>
-        </p:spPr>
-      </p:sp>
-      <p:sp>
-        <p:nvSpPr>
-          <p:cNvPr id="14" name="Text 12"/>
-          <p:cNvSpPr/>
-          <p:nvPr/>
-        </p:nvSpPr>
-        <p:spPr>
-          <a:xfrm>
-            <a:off x="8458200" y="2560320"/>
-            <a:ext cx="2743200" cy="274320"/>
-          </a:xfrm>
-          <a:prstGeom prst="rect">
-            <a:avLst/>
-          </a:prstGeom>
-          <a:noFill/>
-          <a:ln/>
-        </p:spPr>
-        <p:txBody>
-          <a:bodyPr wrap="square" lIns="0" tIns="0" rIns="0" bIns="0" rtlCol="0" anchor="ctr"/>
-          <a:lstStyle/>
-          <a:p>
-            <a:pPr indent="0" marL="0">
-              <a:buNone/>
-            </a:pPr>
-            <a:r>
-              <a:rPr lang="en-US" sz="1100" b="1" spc="200" kern="0" dirty="0">
-                <a:solidFill>
-                  <a:srgbClr val="E8B84B"/>
-                </a:solidFill>
-                <a:latin typeface="Century Gothic" pitchFamily="34" charset="0"/>
-                <a:ea typeface="Century Gothic" pitchFamily="34" charset="-122"/>
-                <a:cs typeface="Century Gothic" pitchFamily="34" charset="-120"/>
-              </a:rPr>
-              <a:t>KEYS IN HAND</a:t>
-            </a:r>
-            <a:endParaRPr lang="en-US" sz="1100" dirty="0"/>
-          </a:p>
-        </p:txBody>
-      </p:sp>
-      <p:sp>
-        <p:nvSpPr>
-          <p:cNvPr id="15" name="Text 13"/>
-          <p:cNvSpPr/>
-          <p:nvPr/>
-        </p:nvSpPr>
-        <p:spPr>
-          <a:xfrm>
-            <a:off x="8458200" y="2926080"/>
-            <a:ext cx="2834640" cy="822960"/>
-          </a:xfrm>
-          <a:prstGeom prst="rect">
-            <a:avLst/>
-          </a:prstGeom>
-          <a:noFill/>
-          <a:ln/>
-        </p:spPr>
-        <p:txBody>
-          <a:bodyPr wrap="square" lIns="0" tIns="0" rIns="0" bIns="0" rtlCol="0" anchor="ctr"/>
-          <a:lstStyle/>
-          <a:p>
-            <a:pPr indent="0" marL="0">
-              <a:buNone/>
-            </a:pPr>
-            <a:r>
-              <a:rPr lang="en-US" sz="3300" b="1" dirty="0">
-                <a:solidFill>
-                  <a:srgbClr val="FFFFFF"/>
-                </a:solidFill>
-                <a:latin typeface="Century Gothic" pitchFamily="34" charset="0"/>
-                <a:ea typeface="Century Gothic" pitchFamily="34" charset="-122"/>
-                <a:cs typeface="Century Gothic" pitchFamily="34" charset="-120"/>
-              </a:rPr>
-              <a:t>June 2029</a:t>
-            </a:r>
-            <a:endParaRPr lang="en-US" sz="3300" dirty="0"/>
-          </a:p>
-        </p:txBody>
-      </p:sp>
-      <p:sp>
-        <p:nvSpPr>
-          <p:cNvPr id="16" name="Shape 14"/>
-          <p:cNvSpPr/>
-          <p:nvPr/>
-        </p:nvSpPr>
-        <p:spPr>
-          <a:xfrm>
-            <a:off x="8458200" y="3977640"/>
-            <a:ext cx="2743200" cy="256032"/>
-          </a:xfrm>
-          <a:prstGeom prst="roundRect">
-            <a:avLst>
-              <a:gd name="adj" fmla="val 50000"/>
-            </a:avLst>
-          </a:prstGeom>
-          <a:solidFill>
-            <a:srgbClr val="2C6349"/>
-          </a:solidFill>
-          <a:ln w="12700">
-            <a:solidFill>
-              <a:srgbClr val="2C6349"/>
-            </a:solidFill>
-            <a:prstDash val="solid"/>
-          </a:ln>
-        </p:spPr>
-      </p:sp>
-      <p:sp>
-        <p:nvSpPr>
-          <p:cNvPr id="17" name="Shape 15"/>
-          <p:cNvSpPr/>
-          <p:nvPr/>
-        </p:nvSpPr>
-        <p:spPr>
-          <a:xfrm>
-            <a:off x="8458200" y="3977640"/>
-            <a:ext cx="1591056" cy="256032"/>
-          </a:xfrm>
-          <a:prstGeom prst="roundRect">
-            <a:avLst>
-              <a:gd name="adj" fmla="val 50000"/>
-            </a:avLst>
-          </a:prstGeom>
-          <a:solidFill>
-            <a:srgbClr val="3FA672"/>
-          </a:solidFill>
-          <a:ln w="12700">
-            <a:solidFill>
-              <a:srgbClr val="3FA672"/>
-            </a:solidFill>
-            <a:prstDash val="solid"/>
-          </a:ln>
-        </p:spPr>
-      </p:sp>
-      <p:sp>
-        <p:nvSpPr>
-          <p:cNvPr id="18" name="Text 16"/>
-          <p:cNvSpPr/>
-          <p:nvPr/>
-        </p:nvSpPr>
-        <p:spPr>
-          <a:xfrm>
-            <a:off x="8458200" y="4370832"/>
-            <a:ext cx="2834640" cy="320040"/>
-          </a:xfrm>
-          <a:prstGeom prst="rect">
-            <a:avLst/>
-          </a:prstGeom>
-          <a:noFill/>
-          <a:ln/>
-        </p:spPr>
-        <p:txBody>
-          <a:bodyPr wrap="square" lIns="0" tIns="0" rIns="0" bIns="0" rtlCol="0" anchor="ctr"/>
-          <a:lstStyle/>
-          <a:p>
-            <a:pPr indent="0" marL="0">
-              <a:buNone/>
-            </a:pPr>
-            <a:r>
-              <a:rPr lang="en-US" sz="1300" dirty="0">
-                <a:solidFill>
-                  <a:srgbClr val="E3F2E9"/>
-                </a:solidFill>
-                <a:latin typeface="Century Gothic" pitchFamily="34" charset="0"/>
-                <a:ea typeface="Century Gothic" pitchFamily="34" charset="-122"/>
-                <a:cs typeface="Century Gothic" pitchFamily="34" charset="-120"/>
-              </a:rPr>
-              <a:t>58% of the way there</a:t>
-            </a:r>
-            <a:endParaRPr lang="en-US" sz="1300" dirty="0"/>
+      <p:pic>
+        <p:nvPicPr>
+          <p:cNvPr id="13" name="Image 0" descr="preencoded.png">    </p:cNvPr>
+          <p:cNvPicPr>
+            <a:picLocks noChangeAspect="1"/>
+          </p:cNvPicPr>
+          <p:nvPr/>
+        </p:nvPicPr>
+        <p:blipFill>
+          <a:blip r:embed="rId1"/>
+          <a:stretch>
+            <a:fillRect/>
+          </a:stretch>
+        </p:blipFill>
+        <p:spPr>
+          <a:xfrm>
+            <a:off x="8028432" y="1783080"/>
+            <a:ext cx="3291840" cy="3657600"/>
+          </a:xfrm>
+          <a:prstGeom prst="rect">
+            <a:avLst/>
+          </a:prstGeom>
+          <a:effectLst>
+            <a:outerShdw sx="100000" sy="100000" kx="0" ky="0" algn="bl" rotWithShape="0" blurRad="177800" dist="50800" dir="5400000">
+              <a:srgbClr val="17302A">
+                <a:alpha val="28000"/>
+              </a:srgbClr>
+            </a:outerShdw>
+          </a:effectLst>
+        </p:spPr>
+      </p:pic>
+      <p:sp>
+        <p:nvSpPr>
+          <p:cNvPr id="14" name="Text 11"/>
+          <p:cNvSpPr/>
+          <p:nvPr/>
+        </p:nvSpPr>
+        <p:spPr>
+          <a:xfrm>
+            <a:off x="8028432" y="5532120"/>
+            <a:ext cx="3291840" cy="320040"/>
+          </a:xfrm>
+          <a:prstGeom prst="rect">
+            <a:avLst/>
+          </a:prstGeom>
+          <a:noFill/>
+          <a:ln/>
+        </p:spPr>
+        <p:txBody>
+          <a:bodyPr wrap="square" lIns="0" tIns="0" rIns="0" bIns="0" rtlCol="0" anchor="ctr"/>
+          <a:lstStyle/>
+          <a:p>
+            <a:pPr algn="ctr" indent="0" marL="0">
+              <a:buNone/>
+            </a:pPr>
+            <a:r>
+              <a:rPr lang="en-US" sz="1200" dirty="0">
+                <a:solidFill>
+                  <a:srgbClr val="5C6F66"/>
+                </a:solidFill>
+                <a:latin typeface="Century Gothic" pitchFamily="34" charset="0"/>
+                <a:ea typeface="Century Gothic" pitchFamily="34" charset="-122"/>
+                <a:cs typeface="Century Gothic" pitchFamily="34" charset="-120"/>
+              </a:rPr>
+              <a:t>Real screen, real plan</a:t>
+            </a:r>
+            <a:endParaRPr lang="en-US" sz="1200" dirty="0"/>
           </a:p>
         </p:txBody>
       </p:sp>
@@ -5031,12 +4903,12 @@
         </p:nvSpPr>
         <p:spPr>
           <a:xfrm>
-            <a:off x="685800" y="2331720"/>
-            <a:ext cx="5074920" cy="2194560"/>
+            <a:off x="685800" y="2103120"/>
+            <a:ext cx="5760720" cy="1417320"/>
           </a:xfrm>
           <a:prstGeom prst="roundRect">
             <a:avLst>
-              <a:gd name="adj" fmla="val 6667"/>
+              <a:gd name="adj" fmla="val 10323"/>
             </a:avLst>
           </a:prstGeom>
           <a:solidFill>
@@ -5058,8 +4930,8 @@
         </p:nvSpPr>
         <p:spPr>
           <a:xfrm>
-            <a:off x="1143000" y="2331720"/>
-            <a:ext cx="4297680" cy="2194560"/>
+            <a:off x="1143000" y="2103120"/>
+            <a:ext cx="4937760" cy="1417320"/>
           </a:xfrm>
           <a:prstGeom prst="rect">
             <a:avLst/>
@@ -5072,9 +4944,6 @@
           <a:lstStyle/>
           <a:p>
             <a:pPr indent="0" marL="0">
-              <a:lnSpc>
-                <a:spcPts val="3400"/>
-              </a:lnSpc>
               <a:buNone/>
             </a:pPr>
             <a:r>
@@ -5086,30 +4955,10 @@
                 <a:ea typeface="Century Gothic" pitchFamily="34" charset="-122"/>
                 <a:cs typeface="Century Gothic" pitchFamily="34" charset="-120"/>
               </a:rPr>
-              <a:t>We never sell you</a:t>
+              <a:t>We never sell you to brokers.</a:t>
             </a:r>
             <a:endParaRPr lang="en-US" sz="2300" dirty="0"/>
           </a:p>
-          <a:p>
-            <a:pPr indent="0" marL="0">
-              <a:lnSpc>
-                <a:spcPts val="3400"/>
-              </a:lnSpc>
-              <a:buNone/>
-            </a:pPr>
-            <a:r>
-              <a:rPr lang="en-US" sz="2300" b="1" dirty="0">
-                <a:solidFill>
-                  <a:srgbClr val="FFFFFF"/>
-                </a:solidFill>
-                <a:latin typeface="Century Gothic" pitchFamily="34" charset="0"/>
-                <a:ea typeface="Century Gothic" pitchFamily="34" charset="-122"/>
-                <a:cs typeface="Century Gothic" pitchFamily="34" charset="-120"/>
-              </a:rPr>
-              <a:t>to brokers.</a:t>
-            </a:r>
-            <a:endParaRPr lang="en-US" sz="2300" dirty="0"/>
-          </a:p>
         </p:txBody>
       </p:sp>
       <p:sp>
@@ -5120,12 +4969,12 @@
         </p:nvSpPr>
         <p:spPr>
           <a:xfrm>
-            <a:off x="6217920" y="2331720"/>
-            <a:ext cx="5074920" cy="2194560"/>
+            <a:off x="685800" y="3703320"/>
+            <a:ext cx="5760720" cy="1417320"/>
           </a:xfrm>
           <a:prstGeom prst="roundRect">
             <a:avLst>
-              <a:gd name="adj" fmla="val 6667"/>
+              <a:gd name="adj" fmla="val 10323"/>
             </a:avLst>
           </a:prstGeom>
           <a:solidFill>
@@ -5147,8 +4996,8 @@
         </p:nvSpPr>
         <p:spPr>
           <a:xfrm>
-            <a:off x="6675120" y="2331720"/>
-            <a:ext cx="4297680" cy="2194560"/>
+            <a:off x="1143000" y="3703320"/>
+            <a:ext cx="4937760" cy="1417320"/>
           </a:xfrm>
           <a:prstGeom prst="rect">
             <a:avLst/>
@@ -5161,9 +5010,6 @@
           <a:lstStyle/>
           <a:p>
             <a:pPr indent="0" marL="0">
-              <a:lnSpc>
-                <a:spcPts val="3400"/>
-              </a:lnSpc>
               <a:buNone/>
             </a:pPr>
             <a:r>
@@ -5175,58 +5021,69 @@
                 <a:ea typeface="Century Gothic" pitchFamily="34" charset="-122"/>
                 <a:cs typeface="Century Gothic" pitchFamily="34" charset="-120"/>
               </a:rPr>
-              <a:t>We built the tool</a:t>
+              <a:t>We built the tool that says don’t buy.</a:t>
             </a:r>
             <a:endParaRPr lang="en-US" sz="2300" dirty="0"/>
           </a:p>
+        </p:txBody>
+      </p:sp>
+      <p:pic>
+        <p:nvPicPr>
+          <p:cNvPr id="8" name="Image 0" descr="preencoded.png">    </p:cNvPr>
+          <p:cNvPicPr>
+            <a:picLocks noChangeAspect="1"/>
+          </p:cNvPicPr>
+          <p:nvPr/>
+        </p:nvPicPr>
+        <p:blipFill>
+          <a:blip r:embed="rId1"/>
+          <a:stretch>
+            <a:fillRect/>
+          </a:stretch>
+        </p:blipFill>
+        <p:spPr>
+          <a:xfrm>
+            <a:off x="6967728" y="2103120"/>
+            <a:ext cx="4535424" cy="3913632"/>
+          </a:xfrm>
+          <a:prstGeom prst="rect">
+            <a:avLst/>
+          </a:prstGeom>
+          <a:effectLst>
+            <a:outerShdw sx="100000" sy="100000" kx="0" ky="0" algn="bl" rotWithShape="0" blurRad="203200" dist="50800" dir="5400000">
+              <a:srgbClr val="000000">
+                <a:alpha val="35000"/>
+              </a:srgbClr>
+            </a:outerShdw>
+          </a:effectLst>
+        </p:spPr>
+      </p:pic>
+      <p:sp>
+        <p:nvSpPr>
+          <p:cNvPr id="9" name="Text 6"/>
+          <p:cNvSpPr/>
+          <p:nvPr/>
+        </p:nvSpPr>
+        <p:spPr>
+          <a:xfrm>
+            <a:off x="685800" y="5440680"/>
+            <a:ext cx="5760720" cy="822960"/>
+          </a:xfrm>
+          <a:prstGeom prst="rect">
+            <a:avLst/>
+          </a:prstGeom>
+          <a:noFill/>
+          <a:ln/>
+        </p:spPr>
+        <p:txBody>
+          <a:bodyPr wrap="square" lIns="0" tIns="0" rIns="0" bIns="0" rtlCol="0" anchor="ctr"/>
+          <a:lstStyle/>
           <a:p>
             <a:pPr indent="0" marL="0">
-              <a:lnSpc>
-                <a:spcPts val="3400"/>
-              </a:lnSpc>
-              <a:buNone/>
-            </a:pPr>
-            <a:r>
-              <a:rPr lang="en-US" sz="2300" b="1" dirty="0">
-                <a:solidFill>
-                  <a:srgbClr val="FFFFFF"/>
-                </a:solidFill>
-                <a:latin typeface="Century Gothic" pitchFamily="34" charset="0"/>
-                <a:ea typeface="Century Gothic" pitchFamily="34" charset="-122"/>
-                <a:cs typeface="Century Gothic" pitchFamily="34" charset="-120"/>
-              </a:rPr>
-              <a:t>that says don’t buy.</a:t>
-            </a:r>
-            <a:endParaRPr lang="en-US" sz="2300" dirty="0"/>
-          </a:p>
-        </p:txBody>
-      </p:sp>
-      <p:sp>
-        <p:nvSpPr>
-          <p:cNvPr id="8" name="Text 6"/>
-          <p:cNvSpPr/>
-          <p:nvPr/>
-        </p:nvSpPr>
-        <p:spPr>
-          <a:xfrm>
-            <a:off x="685800" y="5029200"/>
-            <a:ext cx="10607040" cy="640080"/>
-          </a:xfrm>
-          <a:prstGeom prst="rect">
-            <a:avLst/>
-          </a:prstGeom>
-          <a:noFill/>
-          <a:ln/>
-        </p:spPr>
-        <p:txBody>
-          <a:bodyPr wrap="square" lIns="0" tIns="0" rIns="0" bIns="0" rtlCol="0" anchor="ctr"/>
-          <a:lstStyle/>
-          <a:p>
-            <a:pPr indent="0" marL="0">
-              <a:buNone/>
-            </a:pPr>
-            <a:r>
-              <a:rPr lang="en-US" sz="2300" i="1" dirty="0">
+              <a:buNone/>
+            </a:pPr>
+            <a:r>
+              <a:rPr lang="en-US" sz="2100" i="1" dirty="0">
                 <a:solidFill>
                   <a:srgbClr val="E8B84B"/>
                 </a:solidFill>
@@ -5236,7 +5093,7 @@
               </a:rPr>
               <a:t>A company on referral fees can never say that.</a:t>
             </a:r>
-            <a:endParaRPr lang="en-US" sz="2300" dirty="0"/>
+            <a:endParaRPr lang="en-US" sz="2100" dirty="0"/>
           </a:p>
         </p:txBody>
       </p:sp>

--- a/apps/keydate/pitch/KeyDate-JCI-Edmonton.pptx
+++ b/apps/keydate/pitch/KeyDate-JCI-Edmonton.pptx
@@ -1802,9 +1802,9 @@
                 <a:solidFill>
                   <a:srgbClr val="FFFFFF"/>
                 </a:solidFill>
-                <a:latin typeface="Century Gothic" pitchFamily="34" charset="0"/>
-                <a:ea typeface="Century Gothic" pitchFamily="34" charset="-122"/>
-                <a:cs typeface="Century Gothic" pitchFamily="34" charset="-120"/>
+                <a:latin typeface="Arial" pitchFamily="34" charset="0"/>
+                <a:ea typeface="Arial" pitchFamily="34" charset="-122"/>
+                <a:cs typeface="Arial" pitchFamily="34" charset="-120"/>
               </a:rPr>
               <a:t>Key</a:t>
             </a:r>
@@ -1816,9 +1816,9 @@
                 <a:solidFill>
                   <a:srgbClr val="3FA672"/>
                 </a:solidFill>
-                <a:latin typeface="Century Gothic" pitchFamily="34" charset="0"/>
-                <a:ea typeface="Century Gothic" pitchFamily="34" charset="-122"/>
-                <a:cs typeface="Century Gothic" pitchFamily="34" charset="-120"/>
+                <a:latin typeface="Arial" pitchFamily="34" charset="0"/>
+                <a:ea typeface="Arial" pitchFamily="34" charset="-122"/>
+                <a:cs typeface="Arial" pitchFamily="34" charset="-120"/>
               </a:rPr>
               <a:t>Date</a:t>
             </a:r>
@@ -1858,9 +1858,9 @@
                 <a:solidFill>
                   <a:srgbClr val="E3F2E9"/>
                 </a:solidFill>
-                <a:latin typeface="Century Gothic" pitchFamily="34" charset="0"/>
-                <a:ea typeface="Century Gothic" pitchFamily="34" charset="-122"/>
-                <a:cs typeface="Century Gothic" pitchFamily="34" charset="-120"/>
+                <a:latin typeface="Arial" pitchFamily="34" charset="0"/>
+                <a:ea typeface="Arial" pitchFamily="34" charset="-122"/>
+                <a:cs typeface="Arial" pitchFamily="34" charset="-120"/>
               </a:rPr>
               <a:t>Owning a home isn’t impossible.</a:t>
             </a:r>
@@ -1878,9 +1878,9 @@
                 <a:solidFill>
                   <a:srgbClr val="E3F2E9"/>
                 </a:solidFill>
-                <a:latin typeface="Century Gothic" pitchFamily="34" charset="0"/>
-                <a:ea typeface="Century Gothic" pitchFamily="34" charset="-122"/>
-                <a:cs typeface="Century Gothic" pitchFamily="34" charset="-120"/>
+                <a:latin typeface="Arial" pitchFamily="34" charset="0"/>
+                <a:ea typeface="Arial" pitchFamily="34" charset="-122"/>
+                <a:cs typeface="Arial" pitchFamily="34" charset="-120"/>
               </a:rPr>
               <a:t>It has a date.</a:t>
             </a:r>
@@ -1917,9 +1917,9 @@
                 <a:solidFill>
                   <a:srgbClr val="E3F2E9"/>
                 </a:solidFill>
-                <a:latin typeface="Century Gothic" pitchFamily="34" charset="0"/>
-                <a:ea typeface="Century Gothic" pitchFamily="34" charset="-122"/>
-                <a:cs typeface="Century Gothic" pitchFamily="34" charset="-120"/>
+                <a:latin typeface="Arial" pitchFamily="34" charset="0"/>
+                <a:ea typeface="Arial" pitchFamily="34" charset="-122"/>
+                <a:cs typeface="Arial" pitchFamily="34" charset="-120"/>
               </a:rPr>
               <a:t>JCI Edmonton  ·  Creative Young Entrepreneur</a:t>
             </a:r>
@@ -1956,9 +1956,9 @@
                 <a:solidFill>
                   <a:srgbClr val="E8B84B"/>
                 </a:solidFill>
-                <a:latin typeface="Century Gothic" pitchFamily="34" charset="0"/>
-                <a:ea typeface="Century Gothic" pitchFamily="34" charset="-122"/>
-                <a:cs typeface="Century Gothic" pitchFamily="34" charset="-120"/>
+                <a:latin typeface="Arial" pitchFamily="34" charset="0"/>
+                <a:ea typeface="Arial" pitchFamily="34" charset="-122"/>
+                <a:cs typeface="Arial" pitchFamily="34" charset="-120"/>
               </a:rPr>
               <a:t>keydate.ca</a:t>
             </a:r>
@@ -2107,9 +2107,9 @@
                 <a:solidFill>
                   <a:srgbClr val="E3F2E9"/>
                 </a:solidFill>
-                <a:latin typeface="Century Gothic" pitchFamily="34" charset="0"/>
-                <a:ea typeface="Century Gothic" pitchFamily="34" charset="-122"/>
-                <a:cs typeface="Century Gothic" pitchFamily="34" charset="-120"/>
+                <a:latin typeface="Arial" pitchFamily="34" charset="0"/>
+                <a:ea typeface="Arial" pitchFamily="34" charset="-122"/>
+                <a:cs typeface="Arial" pitchFamily="34" charset="-120"/>
               </a:rPr>
               <a:t>It just doesn’t have</a:t>
             </a:r>
@@ -2127,9 +2127,9 @@
                 <a:solidFill>
                   <a:srgbClr val="E3F2E9"/>
                 </a:solidFill>
-                <a:latin typeface="Century Gothic" pitchFamily="34" charset="0"/>
-                <a:ea typeface="Century Gothic" pitchFamily="34" charset="-122"/>
-                <a:cs typeface="Century Gothic" pitchFamily="34" charset="-120"/>
+                <a:latin typeface="Arial" pitchFamily="34" charset="0"/>
+                <a:ea typeface="Arial" pitchFamily="34" charset="-122"/>
+                <a:cs typeface="Arial" pitchFamily="34" charset="-120"/>
               </a:rPr>
               <a:t>a date yet.</a:t>
             </a:r>
@@ -2166,9 +2166,9 @@
                 <a:solidFill>
                   <a:srgbClr val="E8B84B"/>
                 </a:solidFill>
-                <a:latin typeface="Century Gothic" pitchFamily="34" charset="0"/>
-                <a:ea typeface="Century Gothic" pitchFamily="34" charset="-122"/>
-                <a:cs typeface="Century Gothic" pitchFamily="34" charset="-120"/>
+                <a:latin typeface="Arial" pitchFamily="34" charset="0"/>
+                <a:ea typeface="Arial" pitchFamily="34" charset="-122"/>
+                <a:cs typeface="Arial" pitchFamily="34" charset="-120"/>
               </a:rPr>
               <a:t>We’re giving it one.</a:t>
             </a:r>
@@ -2205,9 +2205,9 @@
                 <a:solidFill>
                   <a:srgbClr val="E8B84B"/>
                 </a:solidFill>
-                <a:latin typeface="Century Gothic" pitchFamily="34" charset="0"/>
-                <a:ea typeface="Century Gothic" pitchFamily="34" charset="-122"/>
-                <a:cs typeface="Century Gothic" pitchFamily="34" charset="-120"/>
+                <a:latin typeface="Arial" pitchFamily="34" charset="0"/>
+                <a:ea typeface="Arial" pitchFamily="34" charset="-122"/>
+                <a:cs typeface="Arial" pitchFamily="34" charset="-120"/>
               </a:rPr>
               <a:t>keydate.ca</a:t>
             </a:r>
@@ -2244,9 +2244,9 @@
                 <a:solidFill>
                   <a:srgbClr val="E3F2E9"/>
                 </a:solidFill>
-                <a:latin typeface="Century Gothic" pitchFamily="34" charset="0"/>
-                <a:ea typeface="Century Gothic" pitchFamily="34" charset="-122"/>
-                <a:cs typeface="Century Gothic" pitchFamily="34" charset="-120"/>
+                <a:latin typeface="Arial" pitchFamily="34" charset="0"/>
+                <a:ea typeface="Arial" pitchFamily="34" charset="-122"/>
+                <a:cs typeface="Arial" pitchFamily="34" charset="-120"/>
               </a:rPr>
               <a:t>Edmonton beta opens this week</a:t>
             </a:r>
@@ -2315,9 +2315,9 @@
                 <a:solidFill>
                   <a:srgbClr val="3FA672"/>
                 </a:solidFill>
-                <a:latin typeface="Century Gothic" pitchFamily="34" charset="0"/>
-                <a:ea typeface="Century Gothic" pitchFamily="34" charset="-122"/>
-                <a:cs typeface="Century Gothic" pitchFamily="34" charset="-120"/>
+                <a:latin typeface="Arial" pitchFamily="34" charset="0"/>
+                <a:ea typeface="Arial" pitchFamily="34" charset="-122"/>
+                <a:cs typeface="Arial" pitchFamily="34" charset="-120"/>
               </a:rPr>
               <a:t>WHY I BUILT THIS</a:t>
             </a:r>
@@ -2354,9 +2354,9 @@
                 <a:solidFill>
                   <a:srgbClr val="17302A"/>
                 </a:solidFill>
-                <a:latin typeface="Century Gothic" pitchFamily="34" charset="0"/>
-                <a:ea typeface="Century Gothic" pitchFamily="34" charset="-122"/>
-                <a:cs typeface="Century Gothic" pitchFamily="34" charset="-120"/>
+                <a:latin typeface="Arial" pitchFamily="34" charset="0"/>
+                <a:ea typeface="Arial" pitchFamily="34" charset="-122"/>
+                <a:cs typeface="Arial" pitchFamily="34" charset="-120"/>
               </a:rPr>
               <a:t>I bought my first place.</a:t>
             </a:r>
@@ -2393,9 +2393,9 @@
                 <a:solidFill>
                   <a:srgbClr val="1E4D3B"/>
                 </a:solidFill>
-                <a:latin typeface="Century Gothic" pitchFamily="34" charset="0"/>
-                <a:ea typeface="Century Gothic" pitchFamily="34" charset="-122"/>
-                <a:cs typeface="Century Gothic" pitchFamily="34" charset="-120"/>
+                <a:latin typeface="Arial" pitchFamily="34" charset="0"/>
+                <a:ea typeface="Arial" pitchFamily="34" charset="-122"/>
+                <a:cs typeface="Arial" pitchFamily="34" charset="-120"/>
               </a:rPr>
               <a:t>I was guessing the whole way.</a:t>
             </a:r>
@@ -2459,9 +2459,9 @@
                 <a:solidFill>
                   <a:srgbClr val="1E4D3B"/>
                 </a:solidFill>
-                <a:latin typeface="Century Gothic" pitchFamily="34" charset="0"/>
-                <a:ea typeface="Century Gothic" pitchFamily="34" charset="-122"/>
-                <a:cs typeface="Century Gothic" pitchFamily="34" charset="-120"/>
+                <a:latin typeface="Arial" pitchFamily="34" charset="0"/>
+                <a:ea typeface="Arial" pitchFamily="34" charset="-122"/>
+                <a:cs typeface="Arial" pitchFamily="34" charset="-120"/>
               </a:rPr>
               <a:t>Spreadsheets</a:t>
             </a:r>
@@ -2525,9 +2525,9 @@
                 <a:solidFill>
                   <a:srgbClr val="1E4D3B"/>
                 </a:solidFill>
-                <a:latin typeface="Century Gothic" pitchFamily="34" charset="0"/>
-                <a:ea typeface="Century Gothic" pitchFamily="34" charset="-122"/>
-                <a:cs typeface="Century Gothic" pitchFamily="34" charset="-120"/>
+                <a:latin typeface="Arial" pitchFamily="34" charset="0"/>
+                <a:ea typeface="Arial" pitchFamily="34" charset="-122"/>
+                <a:cs typeface="Arial" pitchFamily="34" charset="-120"/>
               </a:rPr>
               <a:t>Contradictory advice</a:t>
             </a:r>
@@ -2591,9 +2591,9 @@
                 <a:solidFill>
                   <a:srgbClr val="1E4D3B"/>
                 </a:solidFill>
-                <a:latin typeface="Century Gothic" pitchFamily="34" charset="0"/>
-                <a:ea typeface="Century Gothic" pitchFamily="34" charset="-122"/>
-                <a:cs typeface="Century Gothic" pitchFamily="34" charset="-120"/>
+                <a:latin typeface="Arial" pitchFamily="34" charset="0"/>
+                <a:ea typeface="Arial" pitchFamily="34" charset="-122"/>
+                <a:cs typeface="Arial" pitchFamily="34" charset="-120"/>
               </a:rPr>
               <a:t>A goal that kept moving</a:t>
             </a:r>
@@ -2739,9 +2739,9 @@
                 <a:solidFill>
                   <a:srgbClr val="E8B84B"/>
                 </a:solidFill>
-                <a:latin typeface="Century Gothic" pitchFamily="34" charset="0"/>
-                <a:ea typeface="Century Gothic" pitchFamily="34" charset="-122"/>
-                <a:cs typeface="Century Gothic" pitchFamily="34" charset="-120"/>
+                <a:latin typeface="Arial" pitchFamily="34" charset="0"/>
+                <a:ea typeface="Arial" pitchFamily="34" charset="-122"/>
+                <a:cs typeface="Arial" pitchFamily="34" charset="-120"/>
               </a:rPr>
               <a:t>Nobody could tell me when.</a:t>
             </a:r>
@@ -2803,9 +2803,9 @@
                 <a:solidFill>
                   <a:srgbClr val="E3F2E9"/>
                 </a:solidFill>
-                <a:latin typeface="Century Gothic" pitchFamily="34" charset="0"/>
-                <a:ea typeface="Century Gothic" pitchFamily="34" charset="-122"/>
-                <a:cs typeface="Century Gothic" pitchFamily="34" charset="-120"/>
+                <a:latin typeface="Arial" pitchFamily="34" charset="0"/>
+                <a:ea typeface="Arial" pitchFamily="34" charset="-122"/>
+                <a:cs typeface="Arial" pitchFamily="34" charset="-120"/>
               </a:rPr>
               <a:t>How much do I actually need?</a:t>
             </a:r>
@@ -2867,9 +2867,9 @@
                 <a:solidFill>
                   <a:srgbClr val="E3F2E9"/>
                 </a:solidFill>
-                <a:latin typeface="Century Gothic" pitchFamily="34" charset="0"/>
-                <a:ea typeface="Century Gothic" pitchFamily="34" charset="-122"/>
-                <a:cs typeface="Century Gothic" pitchFamily="34" charset="-120"/>
+                <a:latin typeface="Arial" pitchFamily="34" charset="0"/>
+                <a:ea typeface="Arial" pitchFamily="34" charset="-122"/>
+                <a:cs typeface="Arial" pitchFamily="34" charset="-120"/>
               </a:rPr>
               <a:t>Am I even close?</a:t>
             </a:r>
@@ -2931,9 +2931,9 @@
                 <a:solidFill>
                   <a:srgbClr val="E3F2E9"/>
                 </a:solidFill>
-                <a:latin typeface="Century Gothic" pitchFamily="34" charset="0"/>
-                <a:ea typeface="Century Gothic" pitchFamily="34" charset="-122"/>
-                <a:cs typeface="Century Gothic" pitchFamily="34" charset="-120"/>
+                <a:latin typeface="Arial" pitchFamily="34" charset="0"/>
+                <a:ea typeface="Arial" pitchFamily="34" charset="-122"/>
+                <a:cs typeface="Arial" pitchFamily="34" charset="-120"/>
               </a:rPr>
               <a:t>Is this the year, or five years away?</a:t>
             </a:r>
@@ -3002,9 +3002,9 @@
                 <a:solidFill>
                   <a:srgbClr val="3FA672"/>
                 </a:solidFill>
-                <a:latin typeface="Century Gothic" pitchFamily="34" charset="0"/>
-                <a:ea typeface="Century Gothic" pitchFamily="34" charset="-122"/>
-                <a:cs typeface="Century Gothic" pitchFamily="34" charset="-120"/>
+                <a:latin typeface="Arial" pitchFamily="34" charset="0"/>
+                <a:ea typeface="Arial" pitchFamily="34" charset="-122"/>
+                <a:cs typeface="Arial" pitchFamily="34" charset="-120"/>
               </a:rPr>
               <a:t>AND I HAD IT EASIER THAN THE PEOPLE BEHIND ME</a:t>
             </a:r>
@@ -3041,9 +3041,9 @@
                 <a:solidFill>
                   <a:srgbClr val="17302A"/>
                 </a:solidFill>
-                <a:latin typeface="Century Gothic" pitchFamily="34" charset="0"/>
-                <a:ea typeface="Century Gothic" pitchFamily="34" charset="-122"/>
-                <a:cs typeface="Century Gothic" pitchFamily="34" charset="-120"/>
+                <a:latin typeface="Arial" pitchFamily="34" charset="0"/>
+                <a:ea typeface="Arial" pitchFamily="34" charset="-122"/>
+                <a:cs typeface="Arial" pitchFamily="34" charset="-120"/>
               </a:rPr>
               <a:t>One generation apart</a:t>
             </a:r>
@@ -3107,9 +3107,9 @@
                 <a:solidFill>
                   <a:srgbClr val="5C6F66"/>
                 </a:solidFill>
-                <a:latin typeface="Century Gothic" pitchFamily="34" charset="0"/>
-                <a:ea typeface="Century Gothic" pitchFamily="34" charset="-122"/>
-                <a:cs typeface="Century Gothic" pitchFamily="34" charset="-120"/>
+                <a:latin typeface="Arial" pitchFamily="34" charset="0"/>
+                <a:ea typeface="Arial" pitchFamily="34" charset="-122"/>
+                <a:cs typeface="Arial" pitchFamily="34" charset="-120"/>
               </a:rPr>
               <a:t>2006</a:t>
             </a:r>
@@ -3146,9 +3146,9 @@
                 <a:solidFill>
                   <a:srgbClr val="17302A"/>
                 </a:solidFill>
-                <a:latin typeface="Century Gothic" pitchFamily="34" charset="0"/>
-                <a:ea typeface="Century Gothic" pitchFamily="34" charset="-122"/>
-                <a:cs typeface="Century Gothic" pitchFamily="34" charset="-120"/>
+                <a:latin typeface="Arial" pitchFamily="34" charset="0"/>
+                <a:ea typeface="Arial" pitchFamily="34" charset="-122"/>
+                <a:cs typeface="Arial" pitchFamily="34" charset="-120"/>
               </a:rPr>
               <a:t>$276,974</a:t>
             </a:r>
@@ -3212,9 +3212,9 @@
                 <a:solidFill>
                   <a:srgbClr val="E8B84B"/>
                 </a:solidFill>
-                <a:latin typeface="Century Gothic" pitchFamily="34" charset="0"/>
-                <a:ea typeface="Century Gothic" pitchFamily="34" charset="-122"/>
-                <a:cs typeface="Century Gothic" pitchFamily="34" charset="-120"/>
+                <a:latin typeface="Arial" pitchFamily="34" charset="0"/>
+                <a:ea typeface="Arial" pitchFamily="34" charset="-122"/>
+                <a:cs typeface="Arial" pitchFamily="34" charset="-120"/>
               </a:rPr>
               <a:t>TODAY</a:t>
             </a:r>
@@ -3251,9 +3251,9 @@
                 <a:solidFill>
                   <a:srgbClr val="FFFFFF"/>
                 </a:solidFill>
-                <a:latin typeface="Century Gothic" pitchFamily="34" charset="0"/>
-                <a:ea typeface="Century Gothic" pitchFamily="34" charset="-122"/>
-                <a:cs typeface="Century Gothic" pitchFamily="34" charset="-120"/>
+                <a:latin typeface="Arial" pitchFamily="34" charset="0"/>
+                <a:ea typeface="Arial" pitchFamily="34" charset="-122"/>
+                <a:cs typeface="Arial" pitchFamily="34" charset="-120"/>
               </a:rPr>
               <a:t>$696,078</a:t>
             </a:r>
@@ -3290,9 +3290,9 @@
                 <a:solidFill>
                   <a:srgbClr val="3FA672"/>
                 </a:solidFill>
-                <a:latin typeface="Century Gothic" pitchFamily="34" charset="0"/>
-                <a:ea typeface="Century Gothic" pitchFamily="34" charset="-122"/>
-                <a:cs typeface="Century Gothic" pitchFamily="34" charset="-120"/>
+                <a:latin typeface="Arial" pitchFamily="34" charset="0"/>
+                <a:ea typeface="Arial" pitchFamily="34" charset="-122"/>
+                <a:cs typeface="Arial" pitchFamily="34" charset="-120"/>
               </a:rPr>
               <a:t>2.5×</a:t>
             </a:r>
@@ -3329,9 +3329,9 @@
                 <a:solidFill>
                   <a:srgbClr val="5C6F66"/>
                 </a:solidFill>
-                <a:latin typeface="Century Gothic" pitchFamily="34" charset="0"/>
-                <a:ea typeface="Century Gothic" pitchFamily="34" charset="-122"/>
-                <a:cs typeface="Century Gothic" pitchFamily="34" charset="-120"/>
+                <a:latin typeface="Arial" pitchFamily="34" charset="0"/>
+                <a:ea typeface="Arial" pitchFamily="34" charset="-122"/>
+                <a:cs typeface="Arial" pitchFamily="34" charset="-120"/>
               </a:rPr>
               <a:t>Average Canadian home</a:t>
             </a:r>
@@ -3368,9 +3368,9 @@
                 <a:solidFill>
                   <a:srgbClr val="5C6F66"/>
                 </a:solidFill>
-                <a:latin typeface="Century Gothic" pitchFamily="34" charset="0"/>
-                <a:ea typeface="Century Gothic" pitchFamily="34" charset="-122"/>
-                <a:cs typeface="Century Gothic" pitchFamily="34" charset="-120"/>
+                <a:latin typeface="Arial" pitchFamily="34" charset="0"/>
+                <a:ea typeface="Arial" pitchFamily="34" charset="-122"/>
+                <a:cs typeface="Arial" pitchFamily="34" charset="-120"/>
               </a:rPr>
               <a:t>Source: CREA (2006 average MLS price) · national average, June 2026</a:t>
             </a:r>
@@ -3439,9 +3439,9 @@
                 <a:solidFill>
                   <a:srgbClr val="3FA672"/>
                 </a:solidFill>
-                <a:latin typeface="Century Gothic" pitchFamily="34" charset="0"/>
-                <a:ea typeface="Century Gothic" pitchFamily="34" charset="-122"/>
-                <a:cs typeface="Century Gothic" pitchFamily="34" charset="-120"/>
+                <a:latin typeface="Arial" pitchFamily="34" charset="0"/>
+                <a:ea typeface="Arial" pitchFamily="34" charset="-122"/>
+                <a:cs typeface="Arial" pitchFamily="34" charset="-120"/>
               </a:rPr>
               <a:t>SO I BUILT THE THING I NEEDED</a:t>
             </a:r>
@@ -3478,9 +3478,9 @@
                 <a:solidFill>
                   <a:srgbClr val="17302A"/>
                 </a:solidFill>
-                <a:latin typeface="Century Gothic" pitchFamily="34" charset="0"/>
-                <a:ea typeface="Century Gothic" pitchFamily="34" charset="-122"/>
-                <a:cs typeface="Century Gothic" pitchFamily="34" charset="-120"/>
+                <a:latin typeface="Arial" pitchFamily="34" charset="0"/>
+                <a:ea typeface="Arial" pitchFamily="34" charset="-122"/>
+                <a:cs typeface="Arial" pitchFamily="34" charset="-120"/>
               </a:rPr>
               <a:t>Sixty seconds in. A real date out.</a:t>
             </a:r>
@@ -3542,9 +3542,9 @@
                 <a:solidFill>
                   <a:srgbClr val="E8B84B"/>
                 </a:solidFill>
-                <a:latin typeface="Century Gothic" pitchFamily="34" charset="0"/>
-                <a:ea typeface="Century Gothic" pitchFamily="34" charset="-122"/>
-                <a:cs typeface="Century Gothic" pitchFamily="34" charset="-120"/>
+                <a:latin typeface="Arial" pitchFamily="34" charset="0"/>
+                <a:ea typeface="Arial" pitchFamily="34" charset="-122"/>
+                <a:cs typeface="Arial" pitchFamily="34" charset="-120"/>
               </a:rPr>
               <a:t>1</a:t>
             </a:r>
@@ -3581,9 +3581,9 @@
                 <a:solidFill>
                   <a:srgbClr val="17302A"/>
                 </a:solidFill>
-                <a:latin typeface="Century Gothic" pitchFamily="34" charset="0"/>
-                <a:ea typeface="Century Gothic" pitchFamily="34" charset="-122"/>
-                <a:cs typeface="Century Gothic" pitchFamily="34" charset="-120"/>
+                <a:latin typeface="Arial" pitchFamily="34" charset="0"/>
+                <a:ea typeface="Arial" pitchFamily="34" charset="-122"/>
+                <a:cs typeface="Arial" pitchFamily="34" charset="-120"/>
               </a:rPr>
               <a:t>Three questions</a:t>
             </a:r>
@@ -3645,9 +3645,9 @@
                 <a:solidFill>
                   <a:srgbClr val="E8B84B"/>
                 </a:solidFill>
-                <a:latin typeface="Century Gothic" pitchFamily="34" charset="0"/>
-                <a:ea typeface="Century Gothic" pitchFamily="34" charset="-122"/>
-                <a:cs typeface="Century Gothic" pitchFamily="34" charset="-120"/>
+                <a:latin typeface="Arial" pitchFamily="34" charset="0"/>
+                <a:ea typeface="Arial" pitchFamily="34" charset="-122"/>
+                <a:cs typeface="Arial" pitchFamily="34" charset="-120"/>
               </a:rPr>
               <a:t>2</a:t>
             </a:r>
@@ -3684,9 +3684,9 @@
                 <a:solidFill>
                   <a:srgbClr val="17302A"/>
                 </a:solidFill>
-                <a:latin typeface="Century Gothic" pitchFamily="34" charset="0"/>
-                <a:ea typeface="Century Gothic" pitchFamily="34" charset="-122"/>
-                <a:cs typeface="Century Gothic" pitchFamily="34" charset="-120"/>
+                <a:latin typeface="Arial" pitchFamily="34" charset="0"/>
+                <a:ea typeface="Arial" pitchFamily="34" charset="-122"/>
+                <a:cs typeface="Arial" pitchFamily="34" charset="-120"/>
               </a:rPr>
               <a:t>A real month</a:t>
             </a:r>
@@ -3748,9 +3748,9 @@
                 <a:solidFill>
                   <a:srgbClr val="E8B84B"/>
                 </a:solidFill>
-                <a:latin typeface="Century Gothic" pitchFamily="34" charset="0"/>
-                <a:ea typeface="Century Gothic" pitchFamily="34" charset="-122"/>
-                <a:cs typeface="Century Gothic" pitchFamily="34" charset="-120"/>
+                <a:latin typeface="Arial" pitchFamily="34" charset="0"/>
+                <a:ea typeface="Arial" pitchFamily="34" charset="-122"/>
+                <a:cs typeface="Arial" pitchFamily="34" charset="-120"/>
               </a:rPr>
               <a:t>3</a:t>
             </a:r>
@@ -3787,9 +3787,9 @@
                 <a:solidFill>
                   <a:srgbClr val="17302A"/>
                 </a:solidFill>
-                <a:latin typeface="Century Gothic" pitchFamily="34" charset="0"/>
-                <a:ea typeface="Century Gothic" pitchFamily="34" charset="-122"/>
-                <a:cs typeface="Century Gothic" pitchFamily="34" charset="-120"/>
+                <a:latin typeface="Arial" pitchFamily="34" charset="0"/>
+                <a:ea typeface="Arial" pitchFamily="34" charset="-122"/>
+                <a:cs typeface="Arial" pitchFamily="34" charset="-120"/>
               </a:rPr>
               <a:t>Watch it get closer</a:t>
             </a:r>
@@ -3857,9 +3857,9 @@
                 <a:solidFill>
                   <a:srgbClr val="5C6F66"/>
                 </a:solidFill>
-                <a:latin typeface="Century Gothic" pitchFamily="34" charset="0"/>
-                <a:ea typeface="Century Gothic" pitchFamily="34" charset="-122"/>
-                <a:cs typeface="Century Gothic" pitchFamily="34" charset="-120"/>
+                <a:latin typeface="Arial" pitchFamily="34" charset="0"/>
+                <a:ea typeface="Arial" pitchFamily="34" charset="-122"/>
+                <a:cs typeface="Arial" pitchFamily="34" charset="-120"/>
               </a:rPr>
               <a:t>Real screen, real plan</a:t>
             </a:r>
@@ -3928,9 +3928,9 @@
                 <a:solidFill>
                   <a:srgbClr val="3FA672"/>
                 </a:solidFill>
-                <a:latin typeface="Century Gothic" pitchFamily="34" charset="0"/>
-                <a:ea typeface="Century Gothic" pitchFamily="34" charset="-122"/>
-                <a:cs typeface="Century Gothic" pitchFamily="34" charset="-120"/>
+                <a:latin typeface="Arial" pitchFamily="34" charset="0"/>
+                <a:ea typeface="Arial" pitchFamily="34" charset="-122"/>
+                <a:cs typeface="Arial" pitchFamily="34" charset="-120"/>
               </a:rPr>
               <a:t>INNOVATION</a:t>
             </a:r>
@@ -3967,9 +3967,9 @@
                 <a:solidFill>
                   <a:srgbClr val="17302A"/>
                 </a:solidFill>
-                <a:latin typeface="Century Gothic" pitchFamily="34" charset="0"/>
-                <a:ea typeface="Century Gothic" pitchFamily="34" charset="-122"/>
-                <a:cs typeface="Century Gothic" pitchFamily="34" charset="-120"/>
+                <a:latin typeface="Arial" pitchFamily="34" charset="0"/>
+                <a:ea typeface="Arial" pitchFamily="34" charset="-122"/>
+                <a:cs typeface="Arial" pitchFamily="34" charset="-120"/>
               </a:rPr>
               <a:t>We changed the question</a:t>
             </a:r>
@@ -4033,9 +4033,9 @@
                 <a:solidFill>
                   <a:srgbClr val="5C6F66"/>
                 </a:solidFill>
-                <a:latin typeface="Century Gothic" pitchFamily="34" charset="0"/>
-                <a:ea typeface="Century Gothic" pitchFamily="34" charset="-122"/>
-                <a:cs typeface="Century Gothic" pitchFamily="34" charset="-120"/>
+                <a:latin typeface="Arial" pitchFamily="34" charset="0"/>
+                <a:ea typeface="Arial" pitchFamily="34" charset="-122"/>
+                <a:cs typeface="Arial" pitchFamily="34" charset="-120"/>
               </a:rPr>
               <a:t>EVERY OTHER TOOL</a:t>
             </a:r>
@@ -4072,9 +4072,9 @@
                 <a:solidFill>
                   <a:srgbClr val="5C6F66"/>
                 </a:solidFill>
-                <a:latin typeface="Century Gothic" pitchFamily="34" charset="0"/>
-                <a:ea typeface="Century Gothic" pitchFamily="34" charset="-122"/>
-                <a:cs typeface="Century Gothic" pitchFamily="34" charset="-120"/>
+                <a:latin typeface="Arial" pitchFamily="34" charset="0"/>
+                <a:ea typeface="Arial" pitchFamily="34" charset="-122"/>
+                <a:cs typeface="Arial" pitchFamily="34" charset="-120"/>
               </a:rPr>
               <a:t>“Afford it today?”</a:t>
             </a:r>
@@ -4111,9 +4111,9 @@
                 <a:solidFill>
                   <a:srgbClr val="B4452F"/>
                 </a:solidFill>
-                <a:latin typeface="Century Gothic" pitchFamily="34" charset="0"/>
-                <a:ea typeface="Century Gothic" pitchFamily="34" charset="-122"/>
-                <a:cs typeface="Century Gothic" pitchFamily="34" charset="-120"/>
+                <a:latin typeface="Arial" pitchFamily="34" charset="0"/>
+                <a:ea typeface="Arial" pitchFamily="34" charset="-122"/>
+                <a:cs typeface="Arial" pitchFamily="34" charset="-120"/>
               </a:rPr>
               <a:t>No.</a:t>
             </a:r>
@@ -4177,9 +4177,9 @@
                 <a:solidFill>
                   <a:srgbClr val="E8B84B"/>
                 </a:solidFill>
-                <a:latin typeface="Century Gothic" pitchFamily="34" charset="0"/>
-                <a:ea typeface="Century Gothic" pitchFamily="34" charset="-122"/>
-                <a:cs typeface="Century Gothic" pitchFamily="34" charset="-120"/>
+                <a:latin typeface="Arial" pitchFamily="34" charset="0"/>
+                <a:ea typeface="Arial" pitchFamily="34" charset="-122"/>
+                <a:cs typeface="Arial" pitchFamily="34" charset="-120"/>
               </a:rPr>
               <a:t>KEYDATE</a:t>
             </a:r>
@@ -4216,9 +4216,9 @@
                 <a:solidFill>
                   <a:srgbClr val="FFFFFF"/>
                 </a:solidFill>
-                <a:latin typeface="Century Gothic" pitchFamily="34" charset="0"/>
-                <a:ea typeface="Century Gothic" pitchFamily="34" charset="-122"/>
-                <a:cs typeface="Century Gothic" pitchFamily="34" charset="-120"/>
+                <a:latin typeface="Arial" pitchFamily="34" charset="0"/>
+                <a:ea typeface="Arial" pitchFamily="34" charset="-122"/>
+                <a:cs typeface="Arial" pitchFamily="34" charset="-120"/>
               </a:rPr>
               <a:t>“When?”</a:t>
             </a:r>
@@ -4255,9 +4255,9 @@
                 <a:solidFill>
                   <a:srgbClr val="3FA672"/>
                 </a:solidFill>
-                <a:latin typeface="Century Gothic" pitchFamily="34" charset="0"/>
-                <a:ea typeface="Century Gothic" pitchFamily="34" charset="-122"/>
-                <a:cs typeface="Century Gothic" pitchFamily="34" charset="-120"/>
+                <a:latin typeface="Arial" pitchFamily="34" charset="0"/>
+                <a:ea typeface="Arial" pitchFamily="34" charset="-122"/>
+                <a:cs typeface="Arial" pitchFamily="34" charset="-120"/>
               </a:rPr>
               <a:t>June 2029.</a:t>
             </a:r>
@@ -4326,9 +4326,9 @@
                 <a:solidFill>
                   <a:srgbClr val="3FA672"/>
                 </a:solidFill>
-                <a:latin typeface="Century Gothic" pitchFamily="34" charset="0"/>
-                <a:ea typeface="Century Gothic" pitchFamily="34" charset="-122"/>
-                <a:cs typeface="Century Gothic" pitchFamily="34" charset="-120"/>
+                <a:latin typeface="Arial" pitchFamily="34" charset="0"/>
+                <a:ea typeface="Arial" pitchFamily="34" charset="-122"/>
+                <a:cs typeface="Arial" pitchFamily="34" charset="-120"/>
               </a:rPr>
               <a:t>IT WAS NEVER JUST MY STORY</a:t>
             </a:r>
@@ -4361,17 +4361,17 @@
               <a:buNone/>
             </a:pPr>
             <a:r>
-              <a:rPr lang="en-US" sz="3200" b="1" dirty="0">
+              <a:rPr lang="en-US" sz="3500" b="1" dirty="0">
                 <a:solidFill>
                   <a:srgbClr val="17302A"/>
                 </a:solidFill>
-                <a:latin typeface="Century Gothic" pitchFamily="34" charset="0"/>
-                <a:ea typeface="Century Gothic" pitchFamily="34" charset="-122"/>
-                <a:cs typeface="Century Gothic" pitchFamily="34" charset="-120"/>
+                <a:latin typeface="Arial" pitchFamily="34" charset="0"/>
+                <a:ea typeface="Arial" pitchFamily="34" charset="-122"/>
+                <a:cs typeface="Arial" pitchFamily="34" charset="-120"/>
               </a:rPr>
               <a:t>The engine doesn’t change at the border</a:t>
             </a:r>
-            <a:endParaRPr lang="en-US" sz="3200" dirty="0"/>
+            <a:endParaRPr lang="en-US" sz="3500" dirty="0"/>
           </a:p>
         </p:txBody>
       </p:sp>
@@ -4431,9 +4431,9 @@
                 <a:solidFill>
                   <a:srgbClr val="FFFFFF"/>
                 </a:solidFill>
-                <a:latin typeface="Century Gothic" pitchFamily="34" charset="0"/>
-                <a:ea typeface="Century Gothic" pitchFamily="34" charset="-122"/>
-                <a:cs typeface="Century Gothic" pitchFamily="34" charset="-120"/>
+                <a:latin typeface="Arial" pitchFamily="34" charset="0"/>
+                <a:ea typeface="Arial" pitchFamily="34" charset="-122"/>
+                <a:cs typeface="Arial" pitchFamily="34" charset="-120"/>
               </a:rPr>
               <a:t>Canada</a:t>
             </a:r>
@@ -4497,9 +4497,9 @@
                 <a:solidFill>
                   <a:srgbClr val="17302A"/>
                 </a:solidFill>
-                <a:latin typeface="Century Gothic" pitchFamily="34" charset="0"/>
-                <a:ea typeface="Century Gothic" pitchFamily="34" charset="-122"/>
-                <a:cs typeface="Century Gothic" pitchFamily="34" charset="-120"/>
+                <a:latin typeface="Arial" pitchFamily="34" charset="0"/>
+                <a:ea typeface="Arial" pitchFamily="34" charset="-122"/>
+                <a:cs typeface="Arial" pitchFamily="34" charset="-120"/>
               </a:rPr>
               <a:t>Australia</a:t>
             </a:r>
@@ -4563,9 +4563,9 @@
                 <a:solidFill>
                   <a:srgbClr val="17302A"/>
                 </a:solidFill>
-                <a:latin typeface="Century Gothic" pitchFamily="34" charset="0"/>
-                <a:ea typeface="Century Gothic" pitchFamily="34" charset="-122"/>
-                <a:cs typeface="Century Gothic" pitchFamily="34" charset="-120"/>
+                <a:latin typeface="Arial" pitchFamily="34" charset="0"/>
+                <a:ea typeface="Arial" pitchFamily="34" charset="-122"/>
+                <a:cs typeface="Arial" pitchFamily="34" charset="-120"/>
               </a:rPr>
               <a:t>UK</a:t>
             </a:r>
@@ -4629,9 +4629,9 @@
                 <a:solidFill>
                   <a:srgbClr val="17302A"/>
                 </a:solidFill>
-                <a:latin typeface="Century Gothic" pitchFamily="34" charset="0"/>
-                <a:ea typeface="Century Gothic" pitchFamily="34" charset="-122"/>
-                <a:cs typeface="Century Gothic" pitchFamily="34" charset="-120"/>
+                <a:latin typeface="Arial" pitchFamily="34" charset="0"/>
+                <a:ea typeface="Arial" pitchFamily="34" charset="-122"/>
+                <a:cs typeface="Arial" pitchFamily="34" charset="-120"/>
               </a:rPr>
               <a:t>Ireland</a:t>
             </a:r>
@@ -4695,9 +4695,9 @@
                 <a:solidFill>
                   <a:srgbClr val="17302A"/>
                 </a:solidFill>
-                <a:latin typeface="Century Gothic" pitchFamily="34" charset="0"/>
-                <a:ea typeface="Century Gothic" pitchFamily="34" charset="-122"/>
-                <a:cs typeface="Century Gothic" pitchFamily="34" charset="-120"/>
+                <a:latin typeface="Arial" pitchFamily="34" charset="0"/>
+                <a:ea typeface="Arial" pitchFamily="34" charset="-122"/>
+                <a:cs typeface="Arial" pitchFamily="34" charset="-120"/>
               </a:rPr>
               <a:t>New Zealand</a:t>
             </a:r>
@@ -4761,9 +4761,9 @@
                 <a:solidFill>
                   <a:srgbClr val="E3F2E9"/>
                 </a:solidFill>
-                <a:latin typeface="Century Gothic" pitchFamily="34" charset="0"/>
-                <a:ea typeface="Century Gothic" pitchFamily="34" charset="-122"/>
-                <a:cs typeface="Century Gothic" pitchFamily="34" charset="-120"/>
+                <a:latin typeface="Arial" pitchFamily="34" charset="0"/>
+                <a:ea typeface="Arial" pitchFamily="34" charset="-122"/>
+                <a:cs typeface="Arial" pitchFamily="34" charset="-120"/>
               </a:rPr>
               <a:t>The engine stays. </a:t>
             </a:r>
@@ -4775,9 +4775,9 @@
                 <a:solidFill>
                   <a:srgbClr val="E8B84B"/>
                 </a:solidFill>
-                <a:latin typeface="Century Gothic" pitchFamily="34" charset="0"/>
-                <a:ea typeface="Century Gothic" pitchFamily="34" charset="-122"/>
-                <a:cs typeface="Century Gothic" pitchFamily="34" charset="-120"/>
+                <a:latin typeface="Arial" pitchFamily="34" charset="0"/>
+                <a:ea typeface="Arial" pitchFamily="34" charset="-122"/>
+                <a:cs typeface="Arial" pitchFamily="34" charset="-120"/>
               </a:rPr>
               <a:t>The rulebook swaps.</a:t>
             </a:r>
@@ -4846,9 +4846,9 @@
                 <a:solidFill>
                   <a:srgbClr val="E8B84B"/>
                 </a:solidFill>
-                <a:latin typeface="Century Gothic" pitchFamily="34" charset="0"/>
-                <a:ea typeface="Century Gothic" pitchFamily="34" charset="-122"/>
-                <a:cs typeface="Century Gothic" pitchFamily="34" charset="-120"/>
+                <a:latin typeface="Arial" pitchFamily="34" charset="0"/>
+                <a:ea typeface="Arial" pitchFamily="34" charset="-122"/>
+                <a:cs typeface="Arial" pitchFamily="34" charset="-120"/>
               </a:rPr>
               <a:t>COMMUNITY IMPACT &amp; SUSTAINABILITY</a:t>
             </a:r>
@@ -4885,9 +4885,9 @@
                 <a:solidFill>
                   <a:srgbClr val="FFFFFF"/>
                 </a:solidFill>
-                <a:latin typeface="Century Gothic" pitchFamily="34" charset="0"/>
-                <a:ea typeface="Century Gothic" pitchFamily="34" charset="-122"/>
-                <a:cs typeface="Century Gothic" pitchFamily="34" charset="-120"/>
+                <a:latin typeface="Arial" pitchFamily="34" charset="0"/>
+                <a:ea typeface="Arial" pitchFamily="34" charset="-122"/>
+                <a:cs typeface="Arial" pitchFamily="34" charset="-120"/>
               </a:rPr>
               <a:t>The money we refuse to take</a:t>
             </a:r>
@@ -4951,9 +4951,9 @@
                 <a:solidFill>
                   <a:srgbClr val="FFFFFF"/>
                 </a:solidFill>
-                <a:latin typeface="Century Gothic" pitchFamily="34" charset="0"/>
-                <a:ea typeface="Century Gothic" pitchFamily="34" charset="-122"/>
-                <a:cs typeface="Century Gothic" pitchFamily="34" charset="-120"/>
+                <a:latin typeface="Arial" pitchFamily="34" charset="0"/>
+                <a:ea typeface="Arial" pitchFamily="34" charset="-122"/>
+                <a:cs typeface="Arial" pitchFamily="34" charset="-120"/>
               </a:rPr>
               <a:t>We never sell you to brokers.</a:t>
             </a:r>
@@ -5017,9 +5017,9 @@
                 <a:solidFill>
                   <a:srgbClr val="FFFFFF"/>
                 </a:solidFill>
-                <a:latin typeface="Century Gothic" pitchFamily="34" charset="0"/>
-                <a:ea typeface="Century Gothic" pitchFamily="34" charset="-122"/>
-                <a:cs typeface="Century Gothic" pitchFamily="34" charset="-120"/>
+                <a:latin typeface="Arial" pitchFamily="34" charset="0"/>
+                <a:ea typeface="Arial" pitchFamily="34" charset="-122"/>
+                <a:cs typeface="Arial" pitchFamily="34" charset="-120"/>
               </a:rPr>
               <a:t>We built the tool that says don’t buy.</a:t>
             </a:r>
@@ -5043,8 +5043,8 @@
         </p:blipFill>
         <p:spPr>
           <a:xfrm>
-            <a:off x="6967728" y="2103120"/>
-            <a:ext cx="4535424" cy="3913632"/>
+            <a:off x="7635240" y="1828800"/>
+            <a:ext cx="3867912" cy="4160520"/>
           </a:xfrm>
           <a:prstGeom prst="rect">
             <a:avLst/>
@@ -5067,7 +5067,7 @@
         <p:spPr>
           <a:xfrm>
             <a:off x="685800" y="5440680"/>
-            <a:ext cx="5760720" cy="822960"/>
+            <a:ext cx="6675120" cy="822960"/>
           </a:xfrm>
           <a:prstGeom prst="rect">
             <a:avLst/>
@@ -5087,9 +5087,9 @@
                 <a:solidFill>
                   <a:srgbClr val="E8B84B"/>
                 </a:solidFill>
-                <a:latin typeface="Century Gothic" pitchFamily="34" charset="0"/>
-                <a:ea typeface="Century Gothic" pitchFamily="34" charset="-122"/>
-                <a:cs typeface="Century Gothic" pitchFamily="34" charset="-120"/>
+                <a:latin typeface="Arial" pitchFamily="34" charset="0"/>
+                <a:ea typeface="Arial" pitchFamily="34" charset="-122"/>
+                <a:cs typeface="Arial" pitchFamily="34" charset="-120"/>
               </a:rPr>
               <a:t>A company on referral fees can never say that.</a:t>
             </a:r>
@@ -5158,9 +5158,9 @@
                 <a:solidFill>
                   <a:srgbClr val="3FA672"/>
                 </a:solidFill>
-                <a:latin typeface="Century Gothic" pitchFamily="34" charset="0"/>
-                <a:ea typeface="Century Gothic" pitchFamily="34" charset="-122"/>
-                <a:cs typeface="Century Gothic" pitchFamily="34" charset="-120"/>
+                <a:latin typeface="Arial" pitchFamily="34" charset="0"/>
+                <a:ea typeface="Arial" pitchFamily="34" charset="-122"/>
+                <a:cs typeface="Arial" pitchFamily="34" charset="-120"/>
               </a:rPr>
               <a:t>SCALABILITY &amp; LEADERSHIP</a:t>
             </a:r>
@@ -5197,9 +5197,9 @@
                 <a:solidFill>
                   <a:srgbClr val="17302A"/>
                 </a:solidFill>
-                <a:latin typeface="Century Gothic" pitchFamily="34" charset="0"/>
-                <a:ea typeface="Century Gothic" pitchFamily="34" charset="-122"/>
-                <a:cs typeface="Century Gothic" pitchFamily="34" charset="-120"/>
+                <a:latin typeface="Arial" pitchFamily="34" charset="0"/>
+                <a:ea typeface="Arial" pitchFamily="34" charset="-122"/>
+                <a:cs typeface="Arial" pitchFamily="34" charset="-120"/>
               </a:rPr>
               <a:t>Built, shipped, live</a:t>
             </a:r>
@@ -5263,9 +5263,9 @@
                 <a:solidFill>
                   <a:srgbClr val="3FA672"/>
                 </a:solidFill>
-                <a:latin typeface="Century Gothic" pitchFamily="34" charset="0"/>
-                <a:ea typeface="Century Gothic" pitchFamily="34" charset="-122"/>
-                <a:cs typeface="Century Gothic" pitchFamily="34" charset="-120"/>
+                <a:latin typeface="Arial" pitchFamily="34" charset="0"/>
+                <a:ea typeface="Arial" pitchFamily="34" charset="-122"/>
+                <a:cs typeface="Arial" pitchFamily="34" charset="-120"/>
               </a:rPr>
               <a:t>467</a:t>
             </a:r>
@@ -5302,9 +5302,9 @@
                 <a:solidFill>
                   <a:srgbClr val="5C6F66"/>
                 </a:solidFill>
-                <a:latin typeface="Century Gothic" pitchFamily="34" charset="0"/>
-                <a:ea typeface="Century Gothic" pitchFamily="34" charset="-122"/>
-                <a:cs typeface="Century Gothic" pitchFamily="34" charset="-120"/>
+                <a:latin typeface="Arial" pitchFamily="34" charset="0"/>
+                <a:ea typeface="Arial" pitchFamily="34" charset="-122"/>
+                <a:cs typeface="Arial" pitchFamily="34" charset="-120"/>
               </a:rPr>
               <a:t>municipalities</a:t>
             </a:r>
@@ -5368,9 +5368,9 @@
                 <a:solidFill>
                   <a:srgbClr val="3FA672"/>
                 </a:solidFill>
-                <a:latin typeface="Century Gothic" pitchFamily="34" charset="0"/>
-                <a:ea typeface="Century Gothic" pitchFamily="34" charset="-122"/>
-                <a:cs typeface="Century Gothic" pitchFamily="34" charset="-120"/>
+                <a:latin typeface="Arial" pitchFamily="34" charset="0"/>
+                <a:ea typeface="Arial" pitchFamily="34" charset="-122"/>
+                <a:cs typeface="Arial" pitchFamily="34" charset="-120"/>
               </a:rPr>
               <a:t>~$0</a:t>
             </a:r>
@@ -5407,9 +5407,9 @@
                 <a:solidFill>
                   <a:srgbClr val="5C6F66"/>
                 </a:solidFill>
-                <a:latin typeface="Century Gothic" pitchFamily="34" charset="0"/>
-                <a:ea typeface="Century Gothic" pitchFamily="34" charset="-122"/>
-                <a:cs typeface="Century Gothic" pitchFamily="34" charset="-120"/>
+                <a:latin typeface="Arial" pitchFamily="34" charset="0"/>
+                <a:ea typeface="Arial" pitchFamily="34" charset="-122"/>
+                <a:cs typeface="Arial" pitchFamily="34" charset="-120"/>
               </a:rPr>
               <a:t>cost per user</a:t>
             </a:r>
@@ -5473,9 +5473,9 @@
                 <a:solidFill>
                   <a:srgbClr val="3FA672"/>
                 </a:solidFill>
-                <a:latin typeface="Century Gothic" pitchFamily="34" charset="0"/>
-                <a:ea typeface="Century Gothic" pitchFamily="34" charset="-122"/>
-                <a:cs typeface="Century Gothic" pitchFamily="34" charset="-120"/>
+                <a:latin typeface="Arial" pitchFamily="34" charset="0"/>
+                <a:ea typeface="Arial" pitchFamily="34" charset="-122"/>
+                <a:cs typeface="Arial" pitchFamily="34" charset="-120"/>
               </a:rPr>
               <a:t>1</a:t>
             </a:r>
@@ -5512,9 +5512,9 @@
                 <a:solidFill>
                   <a:srgbClr val="5C6F66"/>
                 </a:solidFill>
-                <a:latin typeface="Century Gothic" pitchFamily="34" charset="0"/>
-                <a:ea typeface="Century Gothic" pitchFamily="34" charset="-122"/>
-                <a:cs typeface="Century Gothic" pitchFamily="34" charset="-120"/>
+                <a:latin typeface="Arial" pitchFamily="34" charset="0"/>
+                <a:ea typeface="Arial" pitchFamily="34" charset="-122"/>
+                <a:cs typeface="Arial" pitchFamily="34" charset="-120"/>
               </a:rPr>
               <a:t>founder</a:t>
             </a:r>
@@ -5578,9 +5578,9 @@
                 <a:solidFill>
                   <a:srgbClr val="1E4D3B"/>
                 </a:solidFill>
-                <a:latin typeface="Century Gothic" pitchFamily="34" charset="0"/>
-                <a:ea typeface="Century Gothic" pitchFamily="34" charset="-122"/>
-                <a:cs typeface="Century Gothic" pitchFamily="34" charset="-120"/>
+                <a:latin typeface="Arial" pitchFamily="34" charset="0"/>
+                <a:ea typeface="Arial" pitchFamily="34" charset="-122"/>
+                <a:cs typeface="Arial" pitchFamily="34" charset="-120"/>
               </a:rPr>
               <a:t>A new country is a rulebook, not a rebuild.</a:t>
             </a:r>

--- a/apps/keydate/pitch/KeyDate-JCI-Edmonton.pptx
+++ b/apps/keydate/pitch/KeyDate-JCI-Edmonton.pptx
@@ -1696,86 +1696,33 @@
           <a:chExt cx="0" cy="0"/>
         </a:xfrm>
       </p:grpSpPr>
-      <p:sp>
-        <p:nvSpPr>
-          <p:cNvPr id="2" name="Shape 0"/>
-          <p:cNvSpPr/>
-          <p:nvPr/>
-        </p:nvSpPr>
-        <p:spPr>
-          <a:xfrm>
-            <a:off x="685800" y="1554480"/>
-            <a:ext cx="576072" cy="576072"/>
-          </a:xfrm>
-          <a:prstGeom prst="ellipse">
-            <a:avLst/>
-          </a:prstGeom>
-          <a:solidFill>
-            <a:srgbClr val="FFFFFF">
-              <a:alpha val="0"/>
-            </a:srgbClr>
-          </a:solidFill>
-          <a:ln w="49530">
-            <a:solidFill>
-              <a:srgbClr val="E8B84B"/>
-            </a:solidFill>
-            <a:prstDash val="solid"/>
-          </a:ln>
-        </p:spPr>
-      </p:sp>
-      <p:sp>
-        <p:nvSpPr>
-          <p:cNvPr id="3" name="Shape 1"/>
-          <p:cNvSpPr/>
-          <p:nvPr/>
-        </p:nvSpPr>
-        <p:spPr>
-          <a:xfrm>
-            <a:off x="1207008" y="1787652"/>
-            <a:ext cx="630936" cy="102870"/>
-          </a:xfrm>
-          <a:prstGeom prst="rect">
-            <a:avLst/>
-          </a:prstGeom>
-          <a:solidFill>
-            <a:srgbClr val="E8B84B"/>
-          </a:solidFill>
-          <a:ln w="12700">
-            <a:solidFill>
-              <a:srgbClr val="E8B84B"/>
-            </a:solidFill>
-            <a:prstDash val="solid"/>
-          </a:ln>
-        </p:spPr>
-      </p:sp>
-      <p:sp>
-        <p:nvSpPr>
-          <p:cNvPr id="4" name="Shape 2"/>
-          <p:cNvSpPr/>
-          <p:nvPr/>
-        </p:nvSpPr>
-        <p:spPr>
-          <a:xfrm>
-            <a:off x="1591056" y="1787652"/>
-            <a:ext cx="102870" cy="274320"/>
-          </a:xfrm>
-          <a:prstGeom prst="rect">
-            <a:avLst/>
-          </a:prstGeom>
-          <a:solidFill>
-            <a:srgbClr val="E8B84B"/>
-          </a:solidFill>
-          <a:ln w="12700">
-            <a:solidFill>
-              <a:srgbClr val="E8B84B"/>
-            </a:solidFill>
-            <a:prstDash val="solid"/>
-          </a:ln>
-        </p:spPr>
-      </p:sp>
-      <p:sp>
-        <p:nvSpPr>
-          <p:cNvPr id="5" name="Text 3"/>
+      <p:pic>
+        <p:nvPicPr>
+          <p:cNvPr id="2" name="Image 0" descr="preencoded.png">    </p:cNvPr>
+          <p:cNvPicPr>
+            <a:picLocks noChangeAspect="1"/>
+          </p:cNvPicPr>
+          <p:nvPr/>
+        </p:nvPicPr>
+        <p:blipFill>
+          <a:blip r:embed="rId1"/>
+          <a:stretch>
+            <a:fillRect/>
+          </a:stretch>
+        </p:blipFill>
+        <p:spPr>
+          <a:xfrm>
+            <a:off x="685800" y="1051560"/>
+            <a:ext cx="463162" cy="987552"/>
+          </a:xfrm>
+          <a:prstGeom prst="rect">
+            <a:avLst/>
+          </a:prstGeom>
+        </p:spPr>
+      </p:pic>
+      <p:sp>
+        <p:nvSpPr>
+          <p:cNvPr id="3" name="Text 0"/>
           <p:cNvSpPr/>
           <p:nvPr/>
         </p:nvSpPr>
@@ -1828,7 +1775,7 @@
       </p:sp>
       <p:sp>
         <p:nvSpPr>
-          <p:cNvPr id="6" name="Text 4"/>
+          <p:cNvPr id="4" name="Text 1"/>
           <p:cNvSpPr/>
           <p:nvPr/>
         </p:nvSpPr>
@@ -1890,7 +1837,7 @@
       </p:sp>
       <p:sp>
         <p:nvSpPr>
-          <p:cNvPr id="7" name="Text 5"/>
+          <p:cNvPr id="5" name="Text 2"/>
           <p:cNvSpPr/>
           <p:nvPr/>
         </p:nvSpPr>
@@ -1929,7 +1876,7 @@
       </p:sp>
       <p:sp>
         <p:nvSpPr>
-          <p:cNvPr id="8" name="Text 6"/>
+          <p:cNvPr id="6" name="Text 3"/>
           <p:cNvSpPr/>
           <p:nvPr/>
         </p:nvSpPr>
@@ -1998,86 +1945,33 @@
           <a:chExt cx="0" cy="0"/>
         </a:xfrm>
       </p:grpSpPr>
-      <p:sp>
-        <p:nvSpPr>
-          <p:cNvPr id="2" name="Shape 0"/>
-          <p:cNvSpPr/>
-          <p:nvPr/>
-        </p:nvSpPr>
-        <p:spPr>
-          <a:xfrm>
-            <a:off x="685800" y="1463040"/>
-            <a:ext cx="576072" cy="576072"/>
-          </a:xfrm>
-          <a:prstGeom prst="ellipse">
-            <a:avLst/>
-          </a:prstGeom>
-          <a:solidFill>
-            <a:srgbClr val="FFFFFF">
-              <a:alpha val="0"/>
-            </a:srgbClr>
-          </a:solidFill>
-          <a:ln w="49530">
-            <a:solidFill>
-              <a:srgbClr val="E8B84B"/>
-            </a:solidFill>
-            <a:prstDash val="solid"/>
-          </a:ln>
-        </p:spPr>
-      </p:sp>
-      <p:sp>
-        <p:nvSpPr>
-          <p:cNvPr id="3" name="Shape 1"/>
-          <p:cNvSpPr/>
-          <p:nvPr/>
-        </p:nvSpPr>
-        <p:spPr>
-          <a:xfrm>
-            <a:off x="1207008" y="1696212"/>
-            <a:ext cx="630936" cy="102870"/>
-          </a:xfrm>
-          <a:prstGeom prst="rect">
-            <a:avLst/>
-          </a:prstGeom>
-          <a:solidFill>
-            <a:srgbClr val="E8B84B"/>
-          </a:solidFill>
-          <a:ln w="12700">
-            <a:solidFill>
-              <a:srgbClr val="E8B84B"/>
-            </a:solidFill>
-            <a:prstDash val="solid"/>
-          </a:ln>
-        </p:spPr>
-      </p:sp>
-      <p:sp>
-        <p:nvSpPr>
-          <p:cNvPr id="4" name="Shape 2"/>
-          <p:cNvSpPr/>
-          <p:nvPr/>
-        </p:nvSpPr>
-        <p:spPr>
-          <a:xfrm>
-            <a:off x="1591056" y="1696212"/>
-            <a:ext cx="102870" cy="274320"/>
-          </a:xfrm>
-          <a:prstGeom prst="rect">
-            <a:avLst/>
-          </a:prstGeom>
-          <a:solidFill>
-            <a:srgbClr val="E8B84B"/>
-          </a:solidFill>
-          <a:ln w="12700">
-            <a:solidFill>
-              <a:srgbClr val="E8B84B"/>
-            </a:solidFill>
-            <a:prstDash val="solid"/>
-          </a:ln>
-        </p:spPr>
-      </p:sp>
-      <p:sp>
-        <p:nvSpPr>
-          <p:cNvPr id="5" name="Text 3"/>
+      <p:pic>
+        <p:nvPicPr>
+          <p:cNvPr id="2" name="Image 0" descr="preencoded.png">    </p:cNvPr>
+          <p:cNvPicPr>
+            <a:picLocks noChangeAspect="1"/>
+          </p:cNvPicPr>
+          <p:nvPr/>
+        </p:nvPicPr>
+        <p:blipFill>
+          <a:blip r:embed="rId1"/>
+          <a:stretch>
+            <a:fillRect/>
+          </a:stretch>
+        </p:blipFill>
+        <p:spPr>
+          <a:xfrm>
+            <a:off x="685800" y="1143000"/>
+            <a:ext cx="463162" cy="987552"/>
+          </a:xfrm>
+          <a:prstGeom prst="rect">
+            <a:avLst/>
+          </a:prstGeom>
+        </p:spPr>
+      </p:pic>
+      <p:sp>
+        <p:nvSpPr>
+          <p:cNvPr id="3" name="Text 0"/>
           <p:cNvSpPr/>
           <p:nvPr/>
         </p:nvSpPr>
@@ -2139,7 +2033,7 @@
       </p:sp>
       <p:sp>
         <p:nvSpPr>
-          <p:cNvPr id="6" name="Text 4"/>
+          <p:cNvPr id="4" name="Text 1"/>
           <p:cNvSpPr/>
           <p:nvPr/>
         </p:nvSpPr>
@@ -2178,7 +2072,7 @@
       </p:sp>
       <p:sp>
         <p:nvSpPr>
-          <p:cNvPr id="7" name="Text 5"/>
+          <p:cNvPr id="5" name="Text 2"/>
           <p:cNvSpPr/>
           <p:nvPr/>
         </p:nvSpPr>
@@ -2217,7 +2111,7 @@
       </p:sp>
       <p:sp>
         <p:nvSpPr>
-          <p:cNvPr id="8" name="Text 6"/>
+          <p:cNvPr id="6" name="Text 3"/>
           <p:cNvSpPr/>
           <p:nvPr/>
         </p:nvSpPr>
@@ -2633,86 +2527,33 @@
           <a:chExt cx="0" cy="0"/>
         </a:xfrm>
       </p:grpSpPr>
-      <p:sp>
-        <p:nvSpPr>
-          <p:cNvPr id="2" name="Shape 0"/>
-          <p:cNvSpPr/>
-          <p:nvPr/>
-        </p:nvSpPr>
-        <p:spPr>
-          <a:xfrm>
-            <a:off x="685800" y="1188720"/>
-            <a:ext cx="384048" cy="384048"/>
-          </a:xfrm>
-          <a:prstGeom prst="ellipse">
-            <a:avLst/>
-          </a:prstGeom>
-          <a:solidFill>
-            <a:srgbClr val="FFFFFF">
-              <a:alpha val="0"/>
-            </a:srgbClr>
-          </a:solidFill>
-          <a:ln w="33020">
-            <a:solidFill>
-              <a:srgbClr val="E8B84B"/>
-            </a:solidFill>
-            <a:prstDash val="solid"/>
-          </a:ln>
-        </p:spPr>
-      </p:sp>
-      <p:sp>
-        <p:nvSpPr>
-          <p:cNvPr id="3" name="Shape 1"/>
-          <p:cNvSpPr/>
-          <p:nvPr/>
-        </p:nvSpPr>
-        <p:spPr>
-          <a:xfrm>
-            <a:off x="1033272" y="1344168"/>
-            <a:ext cx="420624" cy="68580"/>
-          </a:xfrm>
-          <a:prstGeom prst="rect">
-            <a:avLst/>
-          </a:prstGeom>
-          <a:solidFill>
-            <a:srgbClr val="E8B84B"/>
-          </a:solidFill>
-          <a:ln w="12700">
-            <a:solidFill>
-              <a:srgbClr val="E8B84B"/>
-            </a:solidFill>
-            <a:prstDash val="solid"/>
-          </a:ln>
-        </p:spPr>
-      </p:sp>
-      <p:sp>
-        <p:nvSpPr>
-          <p:cNvPr id="4" name="Shape 2"/>
-          <p:cNvSpPr/>
-          <p:nvPr/>
-        </p:nvSpPr>
-        <p:spPr>
-          <a:xfrm>
-            <a:off x="1289304" y="1344168"/>
-            <a:ext cx="68580" cy="182880"/>
-          </a:xfrm>
-          <a:prstGeom prst="rect">
-            <a:avLst/>
-          </a:prstGeom>
-          <a:solidFill>
-            <a:srgbClr val="E8B84B"/>
-          </a:solidFill>
-          <a:ln w="12700">
-            <a:solidFill>
-              <a:srgbClr val="E8B84B"/>
-            </a:solidFill>
-            <a:prstDash val="solid"/>
-          </a:ln>
-        </p:spPr>
-      </p:sp>
-      <p:sp>
-        <p:nvSpPr>
-          <p:cNvPr id="5" name="Text 3"/>
+      <p:pic>
+        <p:nvPicPr>
+          <p:cNvPr id="2" name="Image 0" descr="preencoded.png">    </p:cNvPr>
+          <p:cNvPicPr>
+            <a:picLocks noChangeAspect="1"/>
+          </p:cNvPicPr>
+          <p:nvPr/>
+        </p:nvPicPr>
+        <p:blipFill>
+          <a:blip r:embed="rId1"/>
+          <a:stretch>
+            <a:fillRect/>
+          </a:stretch>
+        </p:blipFill>
+        <p:spPr>
+          <a:xfrm>
+            <a:off x="685800" y="1097280"/>
+            <a:ext cx="308775" cy="658368"/>
+          </a:xfrm>
+          <a:prstGeom prst="rect">
+            <a:avLst/>
+          </a:prstGeom>
+        </p:spPr>
+      </p:pic>
+      <p:sp>
+        <p:nvSpPr>
+          <p:cNvPr id="3" name="Text 0"/>
           <p:cNvSpPr/>
           <p:nvPr/>
         </p:nvSpPr>
@@ -2751,7 +2592,7 @@
       </p:sp>
       <p:sp>
         <p:nvSpPr>
-          <p:cNvPr id="6" name="Shape 4"/>
+          <p:cNvPr id="4" name="Shape 1"/>
           <p:cNvSpPr/>
           <p:nvPr/>
         </p:nvSpPr>
@@ -2776,7 +2617,7 @@
       </p:sp>
       <p:sp>
         <p:nvSpPr>
-          <p:cNvPr id="7" name="Text 5"/>
+          <p:cNvPr id="5" name="Text 2"/>
           <p:cNvSpPr/>
           <p:nvPr/>
         </p:nvSpPr>
@@ -2815,7 +2656,7 @@
       </p:sp>
       <p:sp>
         <p:nvSpPr>
-          <p:cNvPr id="8" name="Shape 6"/>
+          <p:cNvPr id="6" name="Shape 3"/>
           <p:cNvSpPr/>
           <p:nvPr/>
         </p:nvSpPr>
@@ -2840,7 +2681,7 @@
       </p:sp>
       <p:sp>
         <p:nvSpPr>
-          <p:cNvPr id="9" name="Text 7"/>
+          <p:cNvPr id="7" name="Text 4"/>
           <p:cNvSpPr/>
           <p:nvPr/>
         </p:nvSpPr>
@@ -2879,7 +2720,7 @@
       </p:sp>
       <p:sp>
         <p:nvSpPr>
-          <p:cNvPr id="10" name="Shape 8"/>
+          <p:cNvPr id="8" name="Shape 5"/>
           <p:cNvSpPr/>
           <p:nvPr/>
         </p:nvSpPr>
@@ -2904,7 +2745,7 @@
       </p:sp>
       <p:sp>
         <p:nvSpPr>
-          <p:cNvPr id="11" name="Text 9"/>
+          <p:cNvPr id="9" name="Text 6"/>
           <p:cNvSpPr/>
           <p:nvPr/>
         </p:nvSpPr>

--- a/apps/keydate/pitch/KeyDate-JCI-Edmonton.pptx
+++ b/apps/keydate/pitch/KeyDate-JCI-Edmonton.pptx
@@ -1712,7 +1712,7 @@
         </p:blipFill>
         <p:spPr>
           <a:xfrm>
-            <a:off x="685800" y="1051560"/>
+            <a:off x="685800" y="960120"/>
             <a:ext cx="463162" cy="987552"/>
           </a:xfrm>
           <a:prstGeom prst="rect">
@@ -1728,7 +1728,7 @@
         </p:nvSpPr>
         <p:spPr>
           <a:xfrm>
-            <a:off x="685800" y="2240280"/>
+            <a:off x="685800" y="2148840"/>
             <a:ext cx="8229600" cy="1005840"/>
           </a:xfrm>
           <a:prstGeom prst="rect">
@@ -1781,7 +1781,7 @@
         </p:nvSpPr>
         <p:spPr>
           <a:xfrm>
-            <a:off x="685800" y="3337560"/>
+            <a:off x="685800" y="3246120"/>
             <a:ext cx="9144000" cy="1463040"/>
           </a:xfrm>
           <a:prstGeom prst="rect">
@@ -1843,7 +1843,7 @@
         </p:nvSpPr>
         <p:spPr>
           <a:xfrm>
-            <a:off x="685800" y="5760720"/>
+            <a:off x="685800" y="5989320"/>
             <a:ext cx="7315200" cy="320040"/>
           </a:xfrm>
           <a:prstGeom prst="rect">
@@ -1882,7 +1882,7 @@
         </p:nvSpPr>
         <p:spPr>
           <a:xfrm>
-            <a:off x="8759952" y="5760720"/>
+            <a:off x="8759952" y="5989320"/>
             <a:ext cx="2743200" cy="320040"/>
           </a:xfrm>
           <a:prstGeom prst="rect">
@@ -1961,7 +1961,7 @@
         </p:blipFill>
         <p:spPr>
           <a:xfrm>
-            <a:off x="685800" y="1143000"/>
+            <a:off x="685800" y="960120"/>
             <a:ext cx="463162" cy="987552"/>
           </a:xfrm>
           <a:prstGeom prst="rect">
@@ -1977,7 +1977,7 @@
         </p:nvSpPr>
         <p:spPr>
           <a:xfrm>
-            <a:off x="685800" y="2377440"/>
+            <a:off x="685800" y="1965960"/>
             <a:ext cx="10607040" cy="1645920"/>
           </a:xfrm>
           <a:prstGeom prst="rect">
@@ -2039,7 +2039,7 @@
         </p:nvSpPr>
         <p:spPr>
           <a:xfrm>
-            <a:off x="685800" y="4206240"/>
+            <a:off x="685800" y="3977640"/>
             <a:ext cx="10607040" cy="1005840"/>
           </a:xfrm>
           <a:prstGeom prst="rect">
@@ -2078,7 +2078,7 @@
         </p:nvSpPr>
         <p:spPr>
           <a:xfrm>
-            <a:off x="685800" y="5760720"/>
+            <a:off x="685800" y="5989320"/>
             <a:ext cx="5486400" cy="365760"/>
           </a:xfrm>
           <a:prstGeom prst="rect">
@@ -2117,7 +2117,7 @@
         </p:nvSpPr>
         <p:spPr>
           <a:xfrm>
-            <a:off x="6931152" y="5760720"/>
+            <a:off x="6931152" y="5989320"/>
             <a:ext cx="4572000" cy="365760"/>
           </a:xfrm>
           <a:prstGeom prst="rect">
@@ -2227,7 +2227,7 @@
         </p:nvSpPr>
         <p:spPr>
           <a:xfrm>
-            <a:off x="685800" y="1691640"/>
+            <a:off x="685800" y="1965960"/>
             <a:ext cx="10607040" cy="1005840"/>
           </a:xfrm>
           <a:prstGeom prst="rect">
@@ -2266,7 +2266,7 @@
         </p:nvSpPr>
         <p:spPr>
           <a:xfrm>
-            <a:off x="685800" y="2788920"/>
+            <a:off x="685800" y="3063240"/>
             <a:ext cx="10607040" cy="914400"/>
           </a:xfrm>
           <a:prstGeom prst="rect">
@@ -2305,12 +2305,12 @@
         </p:nvSpPr>
         <p:spPr>
           <a:xfrm>
-            <a:off x="685800" y="4297680"/>
-            <a:ext cx="3364992" cy="777240"/>
+            <a:off x="685800" y="4480560"/>
+            <a:ext cx="3364992" cy="822960"/>
           </a:xfrm>
           <a:prstGeom prst="roundRect">
             <a:avLst>
-              <a:gd name="adj" fmla="val 16471"/>
+              <a:gd name="adj" fmla="val 15556"/>
             </a:avLst>
           </a:prstGeom>
           <a:solidFill>
@@ -2332,8 +2332,8 @@
         </p:nvSpPr>
         <p:spPr>
           <a:xfrm>
-            <a:off x="685800" y="4297680"/>
-            <a:ext cx="3364992" cy="777240"/>
+            <a:off x="685800" y="4480560"/>
+            <a:ext cx="3364992" cy="822960"/>
           </a:xfrm>
           <a:prstGeom prst="rect">
             <a:avLst/>
@@ -2371,12 +2371,12 @@
         </p:nvSpPr>
         <p:spPr>
           <a:xfrm>
-            <a:off x="4306824" y="4297680"/>
-            <a:ext cx="3364992" cy="777240"/>
+            <a:off x="4306824" y="4480560"/>
+            <a:ext cx="3364992" cy="822960"/>
           </a:xfrm>
           <a:prstGeom prst="roundRect">
             <a:avLst>
-              <a:gd name="adj" fmla="val 16471"/>
+              <a:gd name="adj" fmla="val 15556"/>
             </a:avLst>
           </a:prstGeom>
           <a:solidFill>
@@ -2398,8 +2398,8 @@
         </p:nvSpPr>
         <p:spPr>
           <a:xfrm>
-            <a:off x="4306824" y="4297680"/>
-            <a:ext cx="3364992" cy="777240"/>
+            <a:off x="4306824" y="4480560"/>
+            <a:ext cx="3364992" cy="822960"/>
           </a:xfrm>
           <a:prstGeom prst="rect">
             <a:avLst/>
@@ -2437,12 +2437,12 @@
         </p:nvSpPr>
         <p:spPr>
           <a:xfrm>
-            <a:off x="7927848" y="4297680"/>
-            <a:ext cx="3364992" cy="777240"/>
+            <a:off x="7927848" y="4480560"/>
+            <a:ext cx="3364992" cy="822960"/>
           </a:xfrm>
           <a:prstGeom prst="roundRect">
             <a:avLst>
-              <a:gd name="adj" fmla="val 16471"/>
+              <a:gd name="adj" fmla="val 15556"/>
             </a:avLst>
           </a:prstGeom>
           <a:solidFill>
@@ -2464,8 +2464,8 @@
         </p:nvSpPr>
         <p:spPr>
           <a:xfrm>
-            <a:off x="7927848" y="4297680"/>
-            <a:ext cx="3364992" cy="777240"/>
+            <a:off x="7927848" y="4480560"/>
+            <a:ext cx="3364992" cy="822960"/>
           </a:xfrm>
           <a:prstGeom prst="rect">
             <a:avLst/>
@@ -2543,7 +2543,7 @@
         </p:blipFill>
         <p:spPr>
           <a:xfrm>
-            <a:off x="685800" y="1097280"/>
+            <a:off x="685800" y="960120"/>
             <a:ext cx="308775" cy="658368"/>
           </a:xfrm>
           <a:prstGeom prst="rect">
@@ -2598,7 +2598,7 @@
         </p:nvSpPr>
         <p:spPr>
           <a:xfrm>
-            <a:off x="731520" y="3557016"/>
+            <a:off x="731520" y="3648456"/>
             <a:ext cx="164592" cy="164592"/>
           </a:xfrm>
           <a:prstGeom prst="ellipse">
@@ -2623,7 +2623,7 @@
         </p:nvSpPr>
         <p:spPr>
           <a:xfrm>
-            <a:off x="1188720" y="3429000"/>
+            <a:off x="1188720" y="3520440"/>
             <a:ext cx="9875520" cy="502920"/>
           </a:xfrm>
           <a:prstGeom prst="rect">
@@ -2662,7 +2662,7 @@
         </p:nvSpPr>
         <p:spPr>
           <a:xfrm>
-            <a:off x="731520" y="4306824"/>
+            <a:off x="731520" y="4398264"/>
             <a:ext cx="164592" cy="164592"/>
           </a:xfrm>
           <a:prstGeom prst="ellipse">
@@ -2687,7 +2687,7 @@
         </p:nvSpPr>
         <p:spPr>
           <a:xfrm>
-            <a:off x="1188720" y="4178808"/>
+            <a:off x="1188720" y="4270248"/>
             <a:ext cx="9875520" cy="502920"/>
           </a:xfrm>
           <a:prstGeom prst="rect">
@@ -2726,7 +2726,7 @@
         </p:nvSpPr>
         <p:spPr>
           <a:xfrm>
-            <a:off x="731520" y="5056632"/>
+            <a:off x="731520" y="5148072"/>
             <a:ext cx="164592" cy="164592"/>
           </a:xfrm>
           <a:prstGeom prst="ellipse">
@@ -2751,7 +2751,7 @@
         </p:nvSpPr>
         <p:spPr>
           <a:xfrm>
-            <a:off x="1188720" y="4928616"/>
+            <a:off x="1188720" y="5020056"/>
             <a:ext cx="9875520" cy="502920"/>
           </a:xfrm>
           <a:prstGeom prst="rect">
@@ -2861,7 +2861,7 @@
         </p:nvSpPr>
         <p:spPr>
           <a:xfrm>
-            <a:off x="685800" y="914400"/>
+            <a:off x="685800" y="960120"/>
             <a:ext cx="10607040" cy="822960"/>
           </a:xfrm>
           <a:prstGeom prst="rect">
@@ -2901,11 +2901,11 @@
         <p:spPr>
           <a:xfrm>
             <a:off x="685800" y="2240280"/>
-            <a:ext cx="4951476" cy="2148840"/>
+            <a:ext cx="4951476" cy="2834640"/>
           </a:xfrm>
           <a:prstGeom prst="roundRect">
             <a:avLst>
-              <a:gd name="adj" fmla="val 5957"/>
+              <a:gd name="adj" fmla="val 4516"/>
             </a:avLst>
           </a:prstGeom>
           <a:solidFill>
@@ -2927,7 +2927,7 @@
         </p:nvSpPr>
         <p:spPr>
           <a:xfrm>
-            <a:off x="1097280" y="2532888"/>
+            <a:off x="1097280" y="2624328"/>
             <a:ext cx="2743200" cy="347472"/>
           </a:xfrm>
           <a:prstGeom prst="rect">
@@ -2966,7 +2966,7 @@
         </p:nvSpPr>
         <p:spPr>
           <a:xfrm>
-            <a:off x="1097280" y="3017520"/>
+            <a:off x="1097280" y="3200400"/>
             <a:ext cx="4114800" cy="914400"/>
           </a:xfrm>
           <a:prstGeom prst="rect">
@@ -3006,11 +3006,11 @@
         <p:spPr>
           <a:xfrm>
             <a:off x="6551676" y="2240280"/>
-            <a:ext cx="4951476" cy="2148840"/>
+            <a:ext cx="4951476" cy="2834640"/>
           </a:xfrm>
           <a:prstGeom prst="roundRect">
             <a:avLst>
-              <a:gd name="adj" fmla="val 5957"/>
+              <a:gd name="adj" fmla="val 4516"/>
             </a:avLst>
           </a:prstGeom>
           <a:solidFill>
@@ -3032,7 +3032,7 @@
         </p:nvSpPr>
         <p:spPr>
           <a:xfrm>
-            <a:off x="6963156" y="2532888"/>
+            <a:off x="6963156" y="2624328"/>
             <a:ext cx="2743200" cy="347472"/>
           </a:xfrm>
           <a:prstGeom prst="rect">
@@ -3071,7 +3071,7 @@
         </p:nvSpPr>
         <p:spPr>
           <a:xfrm>
-            <a:off x="6963156" y="3017520"/>
+            <a:off x="6963156" y="3200400"/>
             <a:ext cx="4114800" cy="914400"/>
           </a:xfrm>
           <a:prstGeom prst="rect">
@@ -3110,7 +3110,7 @@
         </p:nvSpPr>
         <p:spPr>
           <a:xfrm>
-            <a:off x="5637276" y="3108960"/>
+            <a:off x="5637276" y="3383280"/>
             <a:ext cx="914400" cy="548640"/>
           </a:xfrm>
           <a:prstGeom prst="rect">
@@ -3149,8 +3149,8 @@
         </p:nvSpPr>
         <p:spPr>
           <a:xfrm>
-            <a:off x="685800" y="4709160"/>
-            <a:ext cx="10607040" cy="365760"/>
+            <a:off x="1097280" y="4361688"/>
+            <a:ext cx="4114800" cy="320040"/>
           </a:xfrm>
           <a:prstGeom prst="rect">
             <a:avLst/>
@@ -3166,7 +3166,7 @@
               <a:buNone/>
             </a:pPr>
             <a:r>
-              <a:rPr lang="en-US" sz="1500" dirty="0">
+              <a:rPr lang="en-US" sz="1300" dirty="0">
                 <a:solidFill>
                   <a:srgbClr val="5C6F66"/>
                 </a:solidFill>
@@ -3174,9 +3174,9 @@
                 <a:ea typeface="Arial" pitchFamily="34" charset="-122"/>
                 <a:cs typeface="Arial" pitchFamily="34" charset="-120"/>
               </a:rPr>
-              <a:t>Average Canadian home</a:t>
-            </a:r>
-            <a:endParaRPr lang="en-US" sz="1500" dirty="0"/>
+              <a:t>average Canadian home</a:t>
+            </a:r>
+            <a:endParaRPr lang="en-US" sz="1300" dirty="0"/>
           </a:p>
         </p:txBody>
       </p:sp>
@@ -3188,7 +3188,46 @@
         </p:nvSpPr>
         <p:spPr>
           <a:xfrm>
-            <a:off x="685800" y="6035040"/>
+            <a:off x="6963156" y="4361688"/>
+            <a:ext cx="4114800" cy="320040"/>
+          </a:xfrm>
+          <a:prstGeom prst="rect">
+            <a:avLst/>
+          </a:prstGeom>
+          <a:noFill/>
+          <a:ln/>
+        </p:spPr>
+        <p:txBody>
+          <a:bodyPr wrap="square" lIns="0" tIns="0" rIns="0" bIns="0" rtlCol="0" anchor="ctr"/>
+          <a:lstStyle/>
+          <a:p>
+            <a:pPr indent="0" marL="0">
+              <a:buNone/>
+            </a:pPr>
+            <a:r>
+              <a:rPr lang="en-US" sz="1300" dirty="0">
+                <a:solidFill>
+                  <a:srgbClr val="E3F2E9"/>
+                </a:solidFill>
+                <a:latin typeface="Arial" pitchFamily="34" charset="0"/>
+                <a:ea typeface="Arial" pitchFamily="34" charset="-122"/>
+                <a:cs typeface="Arial" pitchFamily="34" charset="-120"/>
+              </a:rPr>
+              <a:t>average Canadian home</a:t>
+            </a:r>
+            <a:endParaRPr lang="en-US" sz="1300" dirty="0"/>
+          </a:p>
+        </p:txBody>
+      </p:sp>
+      <p:sp>
+        <p:nvSpPr>
+          <p:cNvPr id="13" name="Text 11"/>
+          <p:cNvSpPr/>
+          <p:nvPr/>
+        </p:nvSpPr>
+        <p:spPr>
+          <a:xfrm>
+            <a:off x="685800" y="6172200"/>
             <a:ext cx="10607040" cy="274320"/>
           </a:xfrm>
           <a:prstGeom prst="rect">
@@ -3298,7 +3337,7 @@
         </p:nvSpPr>
         <p:spPr>
           <a:xfrm>
-            <a:off x="685800" y="914400"/>
+            <a:off x="685800" y="960120"/>
             <a:ext cx="10607040" cy="822960"/>
           </a:xfrm>
           <a:prstGeom prst="rect">
@@ -3337,7 +3376,7 @@
         </p:nvSpPr>
         <p:spPr>
           <a:xfrm>
-            <a:off x="685800" y="2331720"/>
+            <a:off x="685800" y="2240280"/>
             <a:ext cx="640080" cy="640080"/>
           </a:xfrm>
           <a:prstGeom prst="ellipse">
@@ -3362,7 +3401,7 @@
         </p:nvSpPr>
         <p:spPr>
           <a:xfrm>
-            <a:off x="685800" y="2331720"/>
+            <a:off x="685800" y="2240280"/>
             <a:ext cx="640080" cy="640080"/>
           </a:xfrm>
           <a:prstGeom prst="rect">
@@ -3401,7 +3440,7 @@
         </p:nvSpPr>
         <p:spPr>
           <a:xfrm>
-            <a:off x="1645920" y="2377440"/>
+            <a:off x="1645920" y="2286000"/>
             <a:ext cx="5852160" cy="548640"/>
           </a:xfrm>
           <a:prstGeom prst="rect">
@@ -3440,7 +3479,7 @@
         </p:nvSpPr>
         <p:spPr>
           <a:xfrm>
-            <a:off x="685800" y="3429000"/>
+            <a:off x="685800" y="3337560"/>
             <a:ext cx="640080" cy="640080"/>
           </a:xfrm>
           <a:prstGeom prst="ellipse">
@@ -3465,7 +3504,7 @@
         </p:nvSpPr>
         <p:spPr>
           <a:xfrm>
-            <a:off x="685800" y="3429000"/>
+            <a:off x="685800" y="3337560"/>
             <a:ext cx="640080" cy="640080"/>
           </a:xfrm>
           <a:prstGeom prst="rect">
@@ -3504,7 +3543,7 @@
         </p:nvSpPr>
         <p:spPr>
           <a:xfrm>
-            <a:off x="1645920" y="3474720"/>
+            <a:off x="1645920" y="3383280"/>
             <a:ext cx="5852160" cy="548640"/>
           </a:xfrm>
           <a:prstGeom prst="rect">
@@ -3543,7 +3582,7 @@
         </p:nvSpPr>
         <p:spPr>
           <a:xfrm>
-            <a:off x="685800" y="4526280"/>
+            <a:off x="685800" y="4434840"/>
             <a:ext cx="640080" cy="640080"/>
           </a:xfrm>
           <a:prstGeom prst="ellipse">
@@ -3568,7 +3607,7 @@
         </p:nvSpPr>
         <p:spPr>
           <a:xfrm>
-            <a:off x="685800" y="4526280"/>
+            <a:off x="685800" y="4434840"/>
             <a:ext cx="640080" cy="640080"/>
           </a:xfrm>
           <a:prstGeom prst="rect">
@@ -3607,7 +3646,7 @@
         </p:nvSpPr>
         <p:spPr>
           <a:xfrm>
-            <a:off x="1645920" y="4572000"/>
+            <a:off x="1645920" y="4480560"/>
             <a:ext cx="5852160" cy="548640"/>
           </a:xfrm>
           <a:prstGeom prst="rect">
@@ -3654,7 +3693,7 @@
         </p:blipFill>
         <p:spPr>
           <a:xfrm>
-            <a:off x="8028432" y="1783080"/>
+            <a:off x="8211312" y="2240280"/>
             <a:ext cx="3291840" cy="3657600"/>
           </a:xfrm>
           <a:prstGeom prst="rect">
@@ -3677,7 +3716,7 @@
         </p:nvSpPr>
         <p:spPr>
           <a:xfrm>
-            <a:off x="8028432" y="5532120"/>
+            <a:off x="8211312" y="5989320"/>
             <a:ext cx="3291840" cy="320040"/>
           </a:xfrm>
           <a:prstGeom prst="rect">
@@ -3787,7 +3826,7 @@
         </p:nvSpPr>
         <p:spPr>
           <a:xfrm>
-            <a:off x="685800" y="914400"/>
+            <a:off x="685800" y="960120"/>
             <a:ext cx="10607040" cy="822960"/>
           </a:xfrm>
           <a:prstGeom prst="rect">
@@ -3826,12 +3865,12 @@
         </p:nvSpPr>
         <p:spPr>
           <a:xfrm>
-            <a:off x="685800" y="2286000"/>
-            <a:ext cx="5074920" cy="2743200"/>
+            <a:off x="685800" y="2240280"/>
+            <a:ext cx="5074920" cy="3154680"/>
           </a:xfrm>
           <a:prstGeom prst="roundRect">
             <a:avLst>
-              <a:gd name="adj" fmla="val 5333"/>
+              <a:gd name="adj" fmla="val 4638"/>
             </a:avLst>
           </a:prstGeom>
           <a:solidFill>
@@ -3853,7 +3892,7 @@
         </p:nvSpPr>
         <p:spPr>
           <a:xfrm>
-            <a:off x="1143000" y="2651760"/>
+            <a:off x="1143000" y="2697480"/>
             <a:ext cx="4206240" cy="274320"/>
           </a:xfrm>
           <a:prstGeom prst="rect">
@@ -3892,7 +3931,7 @@
         </p:nvSpPr>
         <p:spPr>
           <a:xfrm>
-            <a:off x="1143000" y="3063240"/>
+            <a:off x="1143000" y="3200400"/>
             <a:ext cx="4297680" cy="640080"/>
           </a:xfrm>
           <a:prstGeom prst="rect">
@@ -3931,7 +3970,7 @@
         </p:nvSpPr>
         <p:spPr>
           <a:xfrm>
-            <a:off x="1143000" y="3977640"/>
+            <a:off x="1143000" y="4297680"/>
             <a:ext cx="4206240" cy="640080"/>
           </a:xfrm>
           <a:prstGeom prst="rect">
@@ -3970,12 +4009,12 @@
         </p:nvSpPr>
         <p:spPr>
           <a:xfrm>
-            <a:off x="6217920" y="2286000"/>
-            <a:ext cx="5074920" cy="2743200"/>
+            <a:off x="6217920" y="2240280"/>
+            <a:ext cx="5074920" cy="3154680"/>
           </a:xfrm>
           <a:prstGeom prst="roundRect">
             <a:avLst>
-              <a:gd name="adj" fmla="val 5333"/>
+              <a:gd name="adj" fmla="val 4638"/>
             </a:avLst>
           </a:prstGeom>
           <a:solidFill>
@@ -3997,7 +4036,7 @@
         </p:nvSpPr>
         <p:spPr>
           <a:xfrm>
-            <a:off x="6675120" y="2651760"/>
+            <a:off x="6675120" y="2697480"/>
             <a:ext cx="4206240" cy="274320"/>
           </a:xfrm>
           <a:prstGeom prst="rect">
@@ -4036,7 +4075,7 @@
         </p:nvSpPr>
         <p:spPr>
           <a:xfrm>
-            <a:off x="6675120" y="3063240"/>
+            <a:off x="6675120" y="3200400"/>
             <a:ext cx="4297680" cy="640080"/>
           </a:xfrm>
           <a:prstGeom prst="rect">
@@ -4075,7 +4114,7 @@
         </p:nvSpPr>
         <p:spPr>
           <a:xfrm>
-            <a:off x="6675120" y="3977640"/>
+            <a:off x="6675120" y="4297680"/>
             <a:ext cx="4206240" cy="640080"/>
           </a:xfrm>
           <a:prstGeom prst="rect">
@@ -4185,7 +4224,7 @@
         </p:nvSpPr>
         <p:spPr>
           <a:xfrm>
-            <a:off x="685800" y="914400"/>
+            <a:off x="685800" y="960120"/>
             <a:ext cx="10607040" cy="822960"/>
           </a:xfrm>
           <a:prstGeom prst="rect">
@@ -4224,7 +4263,7 @@
         </p:nvSpPr>
         <p:spPr>
           <a:xfrm>
-            <a:off x="685800" y="2423160"/>
+            <a:off x="685800" y="2240280"/>
             <a:ext cx="1975104" cy="1051560"/>
           </a:xfrm>
           <a:prstGeom prst="roundRect">
@@ -4251,7 +4290,7 @@
         </p:nvSpPr>
         <p:spPr>
           <a:xfrm>
-            <a:off x="685800" y="2423160"/>
+            <a:off x="685800" y="2240280"/>
             <a:ext cx="1975104" cy="1051560"/>
           </a:xfrm>
           <a:prstGeom prst="rect">
@@ -4290,7 +4329,7 @@
         </p:nvSpPr>
         <p:spPr>
           <a:xfrm>
-            <a:off x="2807208" y="2423160"/>
+            <a:off x="2807208" y="2240280"/>
             <a:ext cx="1975104" cy="1051560"/>
           </a:xfrm>
           <a:prstGeom prst="roundRect">
@@ -4317,7 +4356,7 @@
         </p:nvSpPr>
         <p:spPr>
           <a:xfrm>
-            <a:off x="2807208" y="2423160"/>
+            <a:off x="2807208" y="2240280"/>
             <a:ext cx="1975104" cy="1051560"/>
           </a:xfrm>
           <a:prstGeom prst="rect">
@@ -4356,7 +4395,7 @@
         </p:nvSpPr>
         <p:spPr>
           <a:xfrm>
-            <a:off x="4928616" y="2423160"/>
+            <a:off x="4928616" y="2240280"/>
             <a:ext cx="1975104" cy="1051560"/>
           </a:xfrm>
           <a:prstGeom prst="roundRect">
@@ -4383,7 +4422,7 @@
         </p:nvSpPr>
         <p:spPr>
           <a:xfrm>
-            <a:off x="4928616" y="2423160"/>
+            <a:off x="4928616" y="2240280"/>
             <a:ext cx="1975104" cy="1051560"/>
           </a:xfrm>
           <a:prstGeom prst="rect">
@@ -4422,7 +4461,7 @@
         </p:nvSpPr>
         <p:spPr>
           <a:xfrm>
-            <a:off x="7050024" y="2423160"/>
+            <a:off x="7050024" y="2240280"/>
             <a:ext cx="1975104" cy="1051560"/>
           </a:xfrm>
           <a:prstGeom prst="roundRect">
@@ -4449,7 +4488,7 @@
         </p:nvSpPr>
         <p:spPr>
           <a:xfrm>
-            <a:off x="7050024" y="2423160"/>
+            <a:off x="7050024" y="2240280"/>
             <a:ext cx="1975104" cy="1051560"/>
           </a:xfrm>
           <a:prstGeom prst="rect">
@@ -4488,7 +4527,7 @@
         </p:nvSpPr>
         <p:spPr>
           <a:xfrm>
-            <a:off x="9171432" y="2423160"/>
+            <a:off x="9171432" y="2240280"/>
             <a:ext cx="1975104" cy="1051560"/>
           </a:xfrm>
           <a:prstGeom prst="roundRect">
@@ -4515,7 +4554,7 @@
         </p:nvSpPr>
         <p:spPr>
           <a:xfrm>
-            <a:off x="9171432" y="2423160"/>
+            <a:off x="9171432" y="2240280"/>
             <a:ext cx="1975104" cy="1051560"/>
           </a:xfrm>
           <a:prstGeom prst="rect">
@@ -4554,7 +4593,7 @@
         </p:nvSpPr>
         <p:spPr>
           <a:xfrm>
-            <a:off x="685800" y="4114800"/>
+            <a:off x="685800" y="3840480"/>
             <a:ext cx="10607040" cy="1371600"/>
           </a:xfrm>
           <a:prstGeom prst="roundRect">
@@ -4581,7 +4620,7 @@
         </p:nvSpPr>
         <p:spPr>
           <a:xfrm>
-            <a:off x="1234440" y="4114800"/>
+            <a:off x="1234440" y="3840480"/>
             <a:ext cx="9509760" cy="1371600"/>
           </a:xfrm>
           <a:prstGeom prst="rect">
@@ -4705,7 +4744,7 @@
         </p:nvSpPr>
         <p:spPr>
           <a:xfrm>
-            <a:off x="685800" y="914400"/>
+            <a:off x="685800" y="960120"/>
             <a:ext cx="10607040" cy="822960"/>
           </a:xfrm>
           <a:prstGeom prst="rect">
@@ -4744,7 +4783,7 @@
         </p:nvSpPr>
         <p:spPr>
           <a:xfrm>
-            <a:off x="685800" y="2103120"/>
+            <a:off x="685800" y="2240280"/>
             <a:ext cx="5760720" cy="1417320"/>
           </a:xfrm>
           <a:prstGeom prst="roundRect">
@@ -4771,7 +4810,7 @@
         </p:nvSpPr>
         <p:spPr>
           <a:xfrm>
-            <a:off x="1143000" y="2103120"/>
+            <a:off x="1143000" y="2240280"/>
             <a:ext cx="4937760" cy="1417320"/>
           </a:xfrm>
           <a:prstGeom prst="rect">
@@ -4796,10 +4835,27 @@
                 <a:ea typeface="Arial" pitchFamily="34" charset="-122"/>
                 <a:cs typeface="Arial" pitchFamily="34" charset="-120"/>
               </a:rPr>
-              <a:t>We never sell you to brokers.</a:t>
+              <a:t>We never sell you</a:t>
             </a:r>
             <a:endParaRPr lang="en-US" sz="2300" dirty="0"/>
           </a:p>
+          <a:p>
+            <a:pPr indent="0" marL="0">
+              <a:buNone/>
+            </a:pPr>
+            <a:r>
+              <a:rPr lang="en-US" sz="2300" b="1" dirty="0">
+                <a:solidFill>
+                  <a:srgbClr val="FFFFFF"/>
+                </a:solidFill>
+                <a:latin typeface="Arial" pitchFamily="34" charset="0"/>
+                <a:ea typeface="Arial" pitchFamily="34" charset="-122"/>
+                <a:cs typeface="Arial" pitchFamily="34" charset="-120"/>
+              </a:rPr>
+              <a:t>to brokers.</a:t>
+            </a:r>
+            <a:endParaRPr lang="en-US" sz="2300" dirty="0"/>
+          </a:p>
         </p:txBody>
       </p:sp>
       <p:sp>
@@ -4810,7 +4866,7 @@
         </p:nvSpPr>
         <p:spPr>
           <a:xfrm>
-            <a:off x="685800" y="3703320"/>
+            <a:off x="685800" y="3840480"/>
             <a:ext cx="5760720" cy="1417320"/>
           </a:xfrm>
           <a:prstGeom prst="roundRect">
@@ -4837,7 +4893,7 @@
         </p:nvSpPr>
         <p:spPr>
           <a:xfrm>
-            <a:off x="1143000" y="3703320"/>
+            <a:off x="1143000" y="3840480"/>
             <a:ext cx="4937760" cy="1417320"/>
           </a:xfrm>
           <a:prstGeom prst="rect">
@@ -4862,7 +4918,24 @@
                 <a:ea typeface="Arial" pitchFamily="34" charset="-122"/>
                 <a:cs typeface="Arial" pitchFamily="34" charset="-120"/>
               </a:rPr>
-              <a:t>We built the tool that says don’t buy.</a:t>
+              <a:t>We built the tool</a:t>
+            </a:r>
+            <a:endParaRPr lang="en-US" sz="2300" dirty="0"/>
+          </a:p>
+          <a:p>
+            <a:pPr indent="0" marL="0">
+              <a:buNone/>
+            </a:pPr>
+            <a:r>
+              <a:rPr lang="en-US" sz="2300" b="1" dirty="0">
+                <a:solidFill>
+                  <a:srgbClr val="FFFFFF"/>
+                </a:solidFill>
+                <a:latin typeface="Arial" pitchFamily="34" charset="0"/>
+                <a:ea typeface="Arial" pitchFamily="34" charset="-122"/>
+                <a:cs typeface="Arial" pitchFamily="34" charset="-120"/>
+              </a:rPr>
+              <a:t>that says don’t buy.</a:t>
             </a:r>
             <a:endParaRPr lang="en-US" sz="2300" dirty="0"/>
           </a:p>
@@ -4884,8 +4957,8 @@
         </p:blipFill>
         <p:spPr>
           <a:xfrm>
-            <a:off x="7635240" y="1828800"/>
-            <a:ext cx="3867912" cy="4160520"/>
+            <a:off x="7936992" y="2240280"/>
+            <a:ext cx="3566160" cy="3831336"/>
           </a:xfrm>
           <a:prstGeom prst="rect">
             <a:avLst/>
@@ -4907,7 +4980,7 @@
         </p:nvSpPr>
         <p:spPr>
           <a:xfrm>
-            <a:off x="685800" y="5440680"/>
+            <a:off x="685800" y="5669280"/>
             <a:ext cx="6675120" cy="822960"/>
           </a:xfrm>
           <a:prstGeom prst="rect">
@@ -5017,7 +5090,7 @@
         </p:nvSpPr>
         <p:spPr>
           <a:xfrm>
-            <a:off x="685800" y="914400"/>
+            <a:off x="685800" y="960120"/>
             <a:ext cx="10607040" cy="822960"/>
           </a:xfrm>
           <a:prstGeom prst="rect">
@@ -5056,7 +5129,7 @@
         </p:nvSpPr>
         <p:spPr>
           <a:xfrm>
-            <a:off x="685800" y="2286000"/>
+            <a:off x="685800" y="2240280"/>
             <a:ext cx="3364992" cy="1874520"/>
           </a:xfrm>
           <a:prstGeom prst="roundRect">
@@ -5083,7 +5156,7 @@
         </p:nvSpPr>
         <p:spPr>
           <a:xfrm>
-            <a:off x="1097280" y="2560320"/>
+            <a:off x="1097280" y="2514600"/>
             <a:ext cx="2651760" cy="822960"/>
           </a:xfrm>
           <a:prstGeom prst="rect">
@@ -5122,7 +5195,7 @@
         </p:nvSpPr>
         <p:spPr>
           <a:xfrm>
-            <a:off x="1097280" y="3429000"/>
+            <a:off x="1097280" y="3383280"/>
             <a:ext cx="2697480" cy="365760"/>
           </a:xfrm>
           <a:prstGeom prst="rect">
@@ -5161,7 +5234,7 @@
         </p:nvSpPr>
         <p:spPr>
           <a:xfrm>
-            <a:off x="4306824" y="2286000"/>
+            <a:off x="4306824" y="2240280"/>
             <a:ext cx="3364992" cy="1874520"/>
           </a:xfrm>
           <a:prstGeom prst="roundRect">
@@ -5188,7 +5261,7 @@
         </p:nvSpPr>
         <p:spPr>
           <a:xfrm>
-            <a:off x="4718304" y="2560320"/>
+            <a:off x="4718304" y="2514600"/>
             <a:ext cx="2651760" cy="822960"/>
           </a:xfrm>
           <a:prstGeom prst="rect">
@@ -5227,7 +5300,7 @@
         </p:nvSpPr>
         <p:spPr>
           <a:xfrm>
-            <a:off x="4718304" y="3429000"/>
+            <a:off x="4718304" y="3383280"/>
             <a:ext cx="2697480" cy="365760"/>
           </a:xfrm>
           <a:prstGeom prst="rect">
@@ -5266,7 +5339,7 @@
         </p:nvSpPr>
         <p:spPr>
           <a:xfrm>
-            <a:off x="7927848" y="2286000"/>
+            <a:off x="7927848" y="2240280"/>
             <a:ext cx="3364992" cy="1874520"/>
           </a:xfrm>
           <a:prstGeom prst="roundRect">
@@ -5293,7 +5366,7 @@
         </p:nvSpPr>
         <p:spPr>
           <a:xfrm>
-            <a:off x="8339328" y="2560320"/>
+            <a:off x="8339328" y="2514600"/>
             <a:ext cx="2651760" cy="822960"/>
           </a:xfrm>
           <a:prstGeom prst="rect">
@@ -5332,7 +5405,7 @@
         </p:nvSpPr>
         <p:spPr>
           <a:xfrm>
-            <a:off x="8339328" y="3429000"/>
+            <a:off x="8339328" y="3383280"/>
             <a:ext cx="2697480" cy="365760"/>
           </a:xfrm>
           <a:prstGeom prst="rect">
